--- a/Boek 2 - Kosten, opbrengsten, elasticiteit en surplus/edities/chat-2026/bronnen/H2/paragrafen/2.2.2 Elasticiteit en omzet/2.2.2 Elasticiteit en omzet – presentatie.pptx
+++ b/Boek 2 - Kosten, opbrengsten, elasticiteit en surplus/edities/chat-2026/bronnen/H2/paragrafen/2.2.2 Elasticiteit en omzet/2.2.2 Elasticiteit en omzet – presentatie.pptx
@@ -2,38 +2,38 @@
 <file path=ppt/presentation.xml><?xml version="1.0" encoding="utf-8"?>
 <p:presentation xmlns:p="http://schemas.openxmlformats.org/presentationml/2006/main">
   <p:sldMasterIdLst>
-    <p:sldMasterId xmlns:r="http://schemas.openxmlformats.org/officeDocument/2006/relationships" id="2147483648" r:id="Re0859947ddfa49c0"/>
+    <p:sldMasterId xmlns:r="http://schemas.openxmlformats.org/officeDocument/2006/relationships" id="2147483648" r:id="Rfa79b33a43144914"/>
   </p:sldMasterIdLst>
   <p:notesMasterIdLst>
-    <p:notesMasterId xmlns:r="http://schemas.openxmlformats.org/officeDocument/2006/relationships" r:id="R81401de0acae4196"/>
+    <p:notesMasterId xmlns:r="http://schemas.openxmlformats.org/officeDocument/2006/relationships" r:id="R8d5e4c2bb626420e"/>
   </p:notesMasterIdLst>
   <p:sldIdLst>
-    <p:sldId xmlns:r="http://schemas.openxmlformats.org/officeDocument/2006/relationships" id="256" r:id="R8f710d7a83484b3e"/>
-    <p:sldId xmlns:r="http://schemas.openxmlformats.org/officeDocument/2006/relationships" id="257" r:id="Rec5820d1bfe34e40"/>
-    <p:sldId xmlns:r="http://schemas.openxmlformats.org/officeDocument/2006/relationships" id="258" r:id="Rdfc2c759a3404940"/>
-    <p:sldId xmlns:r="http://schemas.openxmlformats.org/officeDocument/2006/relationships" id="259" r:id="R2784440cff474c0e"/>
-    <p:sldId xmlns:r="http://schemas.openxmlformats.org/officeDocument/2006/relationships" id="260" r:id="R87ccf6b7cae749ca"/>
-    <p:sldId xmlns:r="http://schemas.openxmlformats.org/officeDocument/2006/relationships" id="261" r:id="Rdb277e09cea64819"/>
-    <p:sldId xmlns:r="http://schemas.openxmlformats.org/officeDocument/2006/relationships" id="262" r:id="R1e79751183de4615"/>
-    <p:sldId xmlns:r="http://schemas.openxmlformats.org/officeDocument/2006/relationships" id="263" r:id="R5f28ebf34297403e"/>
-    <p:sldId xmlns:r="http://schemas.openxmlformats.org/officeDocument/2006/relationships" id="264" r:id="Rcbfe1839956a414b"/>
-    <p:sldId xmlns:r="http://schemas.openxmlformats.org/officeDocument/2006/relationships" id="265" r:id="Rcc5f34024916407c"/>
-    <p:sldId xmlns:r="http://schemas.openxmlformats.org/officeDocument/2006/relationships" id="266" r:id="R89af16d183294679"/>
-    <p:sldId xmlns:r="http://schemas.openxmlformats.org/officeDocument/2006/relationships" id="267" r:id="R3fdb5d8ea4fb4ea6"/>
-    <p:sldId xmlns:r="http://schemas.openxmlformats.org/officeDocument/2006/relationships" id="268" r:id="R6d30d6d8d6854b3e"/>
-    <p:sldId xmlns:r="http://schemas.openxmlformats.org/officeDocument/2006/relationships" id="269" r:id="R357d6e9675bb4602"/>
-    <p:sldId xmlns:r="http://schemas.openxmlformats.org/officeDocument/2006/relationships" id="270" r:id="Rfbd085a866594172"/>
-    <p:sldId xmlns:r="http://schemas.openxmlformats.org/officeDocument/2006/relationships" id="271" r:id="R665fd34ad7ff47b5"/>
-    <p:sldId xmlns:r="http://schemas.openxmlformats.org/officeDocument/2006/relationships" id="272" r:id="R22bbab7291ea48d1"/>
-    <p:sldId xmlns:r="http://schemas.openxmlformats.org/officeDocument/2006/relationships" id="273" r:id="R2e88686b80fb4d74"/>
-    <p:sldId xmlns:r="http://schemas.openxmlformats.org/officeDocument/2006/relationships" id="274" r:id="R0961f0b26cdb41f2"/>
-    <p:sldId xmlns:r="http://schemas.openxmlformats.org/officeDocument/2006/relationships" id="275" r:id="R7ad1c23c45fa4cf0"/>
-    <p:sldId xmlns:r="http://schemas.openxmlformats.org/officeDocument/2006/relationships" id="276" r:id="R722fc37774a74273"/>
-    <p:sldId xmlns:r="http://schemas.openxmlformats.org/officeDocument/2006/relationships" id="277" r:id="Rb1393ce96a9747a9"/>
-    <p:sldId xmlns:r="http://schemas.openxmlformats.org/officeDocument/2006/relationships" id="278" r:id="R1522281ea2d54c86"/>
-    <p:sldId xmlns:r="http://schemas.openxmlformats.org/officeDocument/2006/relationships" id="279" r:id="Ra045ef40f0284c82"/>
-    <p:sldId xmlns:r="http://schemas.openxmlformats.org/officeDocument/2006/relationships" id="280" r:id="Rff41b118e7b64f65"/>
-    <p:sldId xmlns:r="http://schemas.openxmlformats.org/officeDocument/2006/relationships" id="281" r:id="R2b37bd6dd586430f"/>
+    <p:sldId xmlns:r="http://schemas.openxmlformats.org/officeDocument/2006/relationships" id="256" r:id="R0e7f0717272f4e2d"/>
+    <p:sldId xmlns:r="http://schemas.openxmlformats.org/officeDocument/2006/relationships" id="257" r:id="R49c925c74ddb46ff"/>
+    <p:sldId xmlns:r="http://schemas.openxmlformats.org/officeDocument/2006/relationships" id="258" r:id="R8ceddafd2e8e4a33"/>
+    <p:sldId xmlns:r="http://schemas.openxmlformats.org/officeDocument/2006/relationships" id="259" r:id="R3dc0df7df1ca4a8a"/>
+    <p:sldId xmlns:r="http://schemas.openxmlformats.org/officeDocument/2006/relationships" id="260" r:id="Rf451c2ae103c4c5a"/>
+    <p:sldId xmlns:r="http://schemas.openxmlformats.org/officeDocument/2006/relationships" id="261" r:id="R6948d12318b74eac"/>
+    <p:sldId xmlns:r="http://schemas.openxmlformats.org/officeDocument/2006/relationships" id="262" r:id="Rba1dadd96798419e"/>
+    <p:sldId xmlns:r="http://schemas.openxmlformats.org/officeDocument/2006/relationships" id="263" r:id="R56bddbcc26094ac5"/>
+    <p:sldId xmlns:r="http://schemas.openxmlformats.org/officeDocument/2006/relationships" id="264" r:id="Rdef2d14f80164430"/>
+    <p:sldId xmlns:r="http://schemas.openxmlformats.org/officeDocument/2006/relationships" id="265" r:id="R6f34161a50ee4961"/>
+    <p:sldId xmlns:r="http://schemas.openxmlformats.org/officeDocument/2006/relationships" id="266" r:id="R131a65016af142be"/>
+    <p:sldId xmlns:r="http://schemas.openxmlformats.org/officeDocument/2006/relationships" id="267" r:id="R03d855eb3e9d4f59"/>
+    <p:sldId xmlns:r="http://schemas.openxmlformats.org/officeDocument/2006/relationships" id="268" r:id="Ra4ae7cfe8d1047a8"/>
+    <p:sldId xmlns:r="http://schemas.openxmlformats.org/officeDocument/2006/relationships" id="269" r:id="R23d90f46b2a847ef"/>
+    <p:sldId xmlns:r="http://schemas.openxmlformats.org/officeDocument/2006/relationships" id="270" r:id="R3e597dacf5044c3e"/>
+    <p:sldId xmlns:r="http://schemas.openxmlformats.org/officeDocument/2006/relationships" id="271" r:id="R69d716e5f81b4c89"/>
+    <p:sldId xmlns:r="http://schemas.openxmlformats.org/officeDocument/2006/relationships" id="272" r:id="Rb5d61c3e42484ec7"/>
+    <p:sldId xmlns:r="http://schemas.openxmlformats.org/officeDocument/2006/relationships" id="273" r:id="R2e1592c732cc409e"/>
+    <p:sldId xmlns:r="http://schemas.openxmlformats.org/officeDocument/2006/relationships" id="274" r:id="R4f80921ee01f4b5c"/>
+    <p:sldId xmlns:r="http://schemas.openxmlformats.org/officeDocument/2006/relationships" id="275" r:id="R2baf9fb176ab4659"/>
+    <p:sldId xmlns:r="http://schemas.openxmlformats.org/officeDocument/2006/relationships" id="276" r:id="Rd45fda880c404a1e"/>
+    <p:sldId xmlns:r="http://schemas.openxmlformats.org/officeDocument/2006/relationships" id="277" r:id="Rdf8ab002e34e41e7"/>
+    <p:sldId xmlns:r="http://schemas.openxmlformats.org/officeDocument/2006/relationships" id="278" r:id="Rb7c9e097537c4f69"/>
+    <p:sldId xmlns:r="http://schemas.openxmlformats.org/officeDocument/2006/relationships" id="279" r:id="R971581be185d4dc7"/>
+    <p:sldId xmlns:r="http://schemas.openxmlformats.org/officeDocument/2006/relationships" id="280" r:id="R8daad41866c84970"/>
+    <p:sldId xmlns:r="http://schemas.openxmlformats.org/officeDocument/2006/relationships" id="281" r:id="R5e47d6026b6c4285"/>
   </p:sldIdLst>
   <p:sldSz cx="15240000" cy="8572500"/>
   <p:notesSz cx="6858000" cy="9144000"/>
@@ -492,6 +492,18 @@
           <a:p xmlns:a="http://schemas.openxmlformats.org/drawingml/2006/main">
             <a:r>
               <a:rPr sz="1400"/>
+              <a:t>Start en terugblik: Opgave 1 gebruikt TO uit §2.1.2, dia 3, en Ev uit §2.2.1. Opgave 2b gebruikt het onderscheid omzet/winst uit §2.1.2, dia 4. De lokale omzetregel in opgave 2a is nieuw. Zoek de uitleg en voorwaarden op p. 45 op. Opgave 2b kan het eerdere onderscheid tussen omzet en winst ophalen. Laat leerlingen bij deze verkenning aanwijzen welke uitleg zij gebruiken en hun twijfel noteren. Verwacht de nieuwe bewerking nog niet zonder steun. Bij terugkeer naar dit overzicht vóór het basiswerk: laat leerlingen opgave 2a opnieuw proberen na de uitleg, bespreek hun redenering en geef zo nodig extra steun. Dit is een verkennende start, geen toets van al beheerste nieuwe leerstof.</a:t>
+            </a:r>
+          </a:p>
+          <a:p xmlns:a="http://schemas.openxmlformats.org/drawingml/2006/main">
+            <a:r>
+              <a:rPr sz="1400"/>
+              <a:t/>
+            </a:r>
+          </a:p>
+          <a:p xmlns:a="http://schemas.openxmlformats.org/drawingml/2006/main">
+            <a:r>
+              <a:rPr sz="1400"/>
               <a:t>Misvatting: Omzet en winst zijn verschillende grootheden. Begeleide inoefening hoort bij de normale route.</a:t>
             </a:r>
           </a:p>
@@ -504,7 +516,7 @@
           <a:p xmlns:a="http://schemas.openxmlformats.org/drawingml/2006/main">
             <a:r>
               <a:rPr sz="1400"/>
-              <a:t>Overgang: Haal de voorkennis op en licht daarna de doelen toe.</a:t>
+              <a:t>Overgang: Haal de eerdere kennis op, begeleid de verkenning van 2a met p. 45 en licht daarna de doelen toe.</a:t>
             </a:r>
           </a:p>
           <a:p xmlns:a="http://schemas.openxmlformats.org/drawingml/2006/main">
@@ -1242,6 +1254,18 @@
           <a:p xmlns:a="http://schemas.openxmlformats.org/drawingml/2006/main">
             <a:r>
               <a:rPr sz="1400"/>
+              <a:t>Start en terugblik: Opgave 1 gebruikt TO uit §2.1.2, dia 3, en Ev uit §2.2.1. Opgave 2b gebruikt het onderscheid omzet/winst uit §2.1.2, dia 4. De lokale omzetregel in opgave 2a is nieuw. Zoek de uitleg en voorwaarden op p. 45 op. Opgave 2b kan het eerdere onderscheid tussen omzet en winst ophalen. Laat leerlingen bij deze verkenning aanwijzen welke uitleg zij gebruiken en hun twijfel noteren. Verwacht de nieuwe bewerking nog niet zonder steun. Bij terugkeer naar dit overzicht vóór het basiswerk: laat leerlingen opgave 2a opnieuw proberen na de uitleg, bespreek hun redenering en geef zo nodig extra steun. Dit is een verkennende start, geen toets van al beheerste nieuwe leerstof.</a:t>
+            </a:r>
+          </a:p>
+          <a:p xmlns:a="http://schemas.openxmlformats.org/drawingml/2006/main">
+            <a:r>
+              <a:rPr sz="1400"/>
+              <a:t/>
+            </a:r>
+          </a:p>
+          <a:p xmlns:a="http://schemas.openxmlformats.org/drawingml/2006/main">
+            <a:r>
+              <a:rPr sz="1400"/>
               <a:t>Misvatting: Omzet en winst zijn verschillende grootheden. Begeleide inoefening hoort bij de normale route.</a:t>
             </a:r>
           </a:p>
@@ -2731,6 +2755,18 @@
             <a:r>
               <a:rPr sz="1400"/>
               <a:t>Uitleg: Start met opgaven 1 en 2 op pagina 48. De basis bestaat uit allebei de begeleide opgaven 3 en 4, op pagina 48–49. Daarna volgen 5 en 6 op pagina 49 en doelopgave 7 op pagina 50. Huiswerk is 3 tot en met 7 maken en nakijken. Bonus 8 en herhaling 9–10 zijn extra. Laat deze dia staan tijdens het werken. De volledige route heeft geen gemeten lesduur; laat het huiswerk de route zo nodig afmaken.</a:t>
+            </a:r>
+          </a:p>
+          <a:p xmlns:a="http://schemas.openxmlformats.org/drawingml/2006/main">
+            <a:r>
+              <a:rPr sz="1400"/>
+              <a:t/>
+            </a:r>
+          </a:p>
+          <a:p xmlns:a="http://schemas.openxmlformats.org/drawingml/2006/main">
+            <a:r>
+              <a:rPr sz="1400"/>
+              <a:t>Start en terugblik: Opgave 1 gebruikt TO uit §2.1.2, dia 3, en Ev uit §2.2.1. Opgave 2b gebruikt het onderscheid omzet/winst uit §2.1.2, dia 4. De lokale omzetregel in opgave 2a is nieuw. Zoek de uitleg en voorwaarden op p. 45 op. Opgave 2b kan het eerdere onderscheid tussen omzet en winst ophalen. Laat leerlingen bij deze verkenning aanwijzen welke uitleg zij gebruiken en hun twijfel noteren. Verwacht de nieuwe bewerking nog niet zonder steun. Bij terugkeer naar dit overzicht vóór het basiswerk: laat leerlingen opgave 2a opnieuw proberen na de uitleg, bespreek hun redenering en geef zo nodig extra steun. Dit is een verkennende start, geen toets van al beheerste nieuwe leerstof.</a:t>
             </a:r>
           </a:p>
           <a:p xmlns:a="http://schemas.openxmlformats.org/drawingml/2006/main">
@@ -3715,7 +3751,7 @@
   </p:cSld>
   <p:clrMap bg1="lt1" tx1="dk1" bg2="lt2" tx2="dk2" accent1="accent1" accent2="accent2" accent3="accent3" accent4="accent4" accent5="accent5" accent6="accent6" hlink="hlink" folHlink="folHlink"/>
   <p:sldLayoutIdLst>
-    <p:sldLayoutId xmlns:r="http://schemas.openxmlformats.org/officeDocument/2006/relationships" id="2147483649" r:id="Ra553ec1d05414caa"/>
+    <p:sldLayoutId xmlns:r="http://schemas.openxmlformats.org/officeDocument/2006/relationships" id="2147483649" r:id="R64d0d45189b0492f"/>
   </p:sldLayoutIdLst>
   <p:txStyles>
     <p:titleStyle>
@@ -4890,7 +4926,7 @@
           <p:cNvPr id="29" name="Deze les: §2.2.2 Elasticiteit en omzet">
             <a:extLst xmlns:a="http://schemas.openxmlformats.org/drawingml/2006/main">
               <a:ext uri="{FF2B5EF4-FFF2-40B4-BE49-F238E27FC236}">
-                <a16:creationId xmlns:a16="http://schemas.microsoft.com/office/drawing/2014/main" id="{EC66F729-47D7-4F71-9721-68AFB13C274D}"/>
+                <a16:creationId xmlns:a16="http://schemas.microsoft.com/office/drawing/2014/main" id="{F0071A19-F2F6-49D3-8780-AD1F40D58387}"/>
               </a:ext>
             </a:extLst>
           </p:cNvPr>
@@ -4947,7 +4983,7 @@
           <p:cNvPr id="2" name="">
             <a:extLst xmlns:a="http://schemas.openxmlformats.org/drawingml/2006/main">
               <a:ext uri="{FF2B5EF4-FFF2-40B4-BE49-F238E27FC236}">
-                <a16:creationId xmlns:a16="http://schemas.microsoft.com/office/drawing/2014/main" id="{B04E94B8-92DE-42B5-A696-527A00FBFF7D}"/>
+                <a16:creationId xmlns:a16="http://schemas.microsoft.com/office/drawing/2014/main" id="{E3A17116-5A01-4042-9A1A-FA10C9C6B273}"/>
               </a:ext>
             </a:extLst>
           </p:cNvPr>
@@ -4976,7 +5012,7 @@
           <p:cNvPr id="3" name="§2.2.2 Elasticiteit en omzet">
             <a:extLst xmlns:a="http://schemas.openxmlformats.org/drawingml/2006/main">
               <a:ext uri="{FF2B5EF4-FFF2-40B4-BE49-F238E27FC236}">
-                <a16:creationId xmlns:a16="http://schemas.microsoft.com/office/drawing/2014/main" id="{0A6FD48C-321B-4CDF-BDFE-D038FF9A8906}"/>
+                <a16:creationId xmlns:a16="http://schemas.microsoft.com/office/drawing/2014/main" id="{5E5CFB3D-A554-4470-BC07-15606850253C}"/>
               </a:ext>
             </a:extLst>
           </p:cNvPr>
@@ -5033,7 +5069,7 @@
           <p:cNvPr id="4" name="1">
             <a:extLst xmlns:a="http://schemas.openxmlformats.org/drawingml/2006/main">
               <a:ext uri="{FF2B5EF4-FFF2-40B4-BE49-F238E27FC236}">
-                <a16:creationId xmlns:a16="http://schemas.microsoft.com/office/drawing/2014/main" id="{00EA6287-0D14-4916-8EF0-C83A0C2A5CD3}"/>
+                <a16:creationId xmlns:a16="http://schemas.microsoft.com/office/drawing/2014/main" id="{37B9DB3C-9C5E-4C0C-8E06-B0B7EB7E647C}"/>
               </a:ext>
             </a:extLst>
           </p:cNvPr>
@@ -5090,7 +5126,7 @@
           <p:cNvPr id="5" name="phase">
             <a:extLst xmlns:a="http://schemas.openxmlformats.org/drawingml/2006/main">
               <a:ext uri="{FF2B5EF4-FFF2-40B4-BE49-F238E27FC236}">
-                <a16:creationId xmlns:a16="http://schemas.microsoft.com/office/drawing/2014/main" id="{825ACAFA-AAC9-4646-961D-C09608362E4E}"/>
+                <a16:creationId xmlns:a16="http://schemas.microsoft.com/office/drawing/2014/main" id="{9FEE102C-BBA8-4FDB-AE1E-199C25A7D3DE}"/>
               </a:ext>
             </a:extLst>
           </p:cNvPr>
@@ -5147,7 +5183,7 @@
           <p:cNvPr id="6" name="Lesroute">
             <a:extLst xmlns:a="http://schemas.openxmlformats.org/drawingml/2006/main">
               <a:ext uri="{FF2B5EF4-FFF2-40B4-BE49-F238E27FC236}">
-                <a16:creationId xmlns:a16="http://schemas.microsoft.com/office/drawing/2014/main" id="{815520CF-1852-4D29-848E-CCAFBA97AEF1}"/>
+                <a16:creationId xmlns:a16="http://schemas.microsoft.com/office/drawing/2014/main" id="{6CAC0D22-AE8E-41AD-BB01-BCB6A9C09337}"/>
               </a:ext>
             </a:extLst>
           </p:cNvPr>
@@ -5204,7 +5240,7 @@
           <p:cNvPr id="7" name="route-number-1">
             <a:extLst xmlns:a="http://schemas.openxmlformats.org/drawingml/2006/main">
               <a:ext uri="{FF2B5EF4-FFF2-40B4-BE49-F238E27FC236}">
-                <a16:creationId xmlns:a16="http://schemas.microsoft.com/office/drawing/2014/main" id="{E878DB2A-27CC-4EA8-AE66-14148ACAF4BA}"/>
+                <a16:creationId xmlns:a16="http://schemas.microsoft.com/office/drawing/2014/main" id="{5A979EE3-872F-4AA6-9B94-F2834CFC2E8B}"/>
               </a:ext>
             </a:extLst>
           </p:cNvPr>
@@ -5261,7 +5297,7 @@
           <p:cNvPr id="8" name="route-1">
             <a:extLst xmlns:a="http://schemas.openxmlformats.org/drawingml/2006/main">
               <a:ext uri="{FF2B5EF4-FFF2-40B4-BE49-F238E27FC236}">
-                <a16:creationId xmlns:a16="http://schemas.microsoft.com/office/drawing/2014/main" id="{87DDF13C-59D2-48C0-8423-5FE604015633}"/>
+                <a16:creationId xmlns:a16="http://schemas.microsoft.com/office/drawing/2014/main" id="{26D78FBC-7477-4F3B-A140-F562AF25F716}"/>
               </a:ext>
             </a:extLst>
           </p:cNvPr>
@@ -5318,7 +5354,7 @@
           <p:cNvPr id="9" name="route-number-2">
             <a:extLst xmlns:a="http://schemas.openxmlformats.org/drawingml/2006/main">
               <a:ext uri="{FF2B5EF4-FFF2-40B4-BE49-F238E27FC236}">
-                <a16:creationId xmlns:a16="http://schemas.microsoft.com/office/drawing/2014/main" id="{49D81F77-5657-4C67-B056-11D0BD361844}"/>
+                <a16:creationId xmlns:a16="http://schemas.microsoft.com/office/drawing/2014/main" id="{5C61D5F2-92B9-451B-A8F5-CAA025631D6A}"/>
               </a:ext>
             </a:extLst>
           </p:cNvPr>
@@ -5375,7 +5411,7 @@
           <p:cNvPr id="10" name="route-2">
             <a:extLst xmlns:a="http://schemas.openxmlformats.org/drawingml/2006/main">
               <a:ext uri="{FF2B5EF4-FFF2-40B4-BE49-F238E27FC236}">
-                <a16:creationId xmlns:a16="http://schemas.microsoft.com/office/drawing/2014/main" id="{CBFDDFD2-6043-462A-8F2D-2CDCD6AAAE3B}"/>
+                <a16:creationId xmlns:a16="http://schemas.microsoft.com/office/drawing/2014/main" id="{1B7C2433-1888-4C2E-B471-2719E5AD308A}"/>
               </a:ext>
             </a:extLst>
           </p:cNvPr>
@@ -5432,7 +5468,7 @@
           <p:cNvPr id="11" name="route-number-3">
             <a:extLst xmlns:a="http://schemas.openxmlformats.org/drawingml/2006/main">
               <a:ext uri="{FF2B5EF4-FFF2-40B4-BE49-F238E27FC236}">
-                <a16:creationId xmlns:a16="http://schemas.microsoft.com/office/drawing/2014/main" id="{A5C7858D-E6B8-4BA3-87A2-8B61A1A41FA2}"/>
+                <a16:creationId xmlns:a16="http://schemas.microsoft.com/office/drawing/2014/main" id="{53302EBD-E4D4-4967-8336-90C174142A87}"/>
               </a:ext>
             </a:extLst>
           </p:cNvPr>
@@ -5489,7 +5525,7 @@
           <p:cNvPr id="12" name="route-3">
             <a:extLst xmlns:a="http://schemas.openxmlformats.org/drawingml/2006/main">
               <a:ext uri="{FF2B5EF4-FFF2-40B4-BE49-F238E27FC236}">
-                <a16:creationId xmlns:a16="http://schemas.microsoft.com/office/drawing/2014/main" id="{91B69711-801B-4189-B6B0-01678ABEF008}"/>
+                <a16:creationId xmlns:a16="http://schemas.microsoft.com/office/drawing/2014/main" id="{BA7CFC4F-B79E-436B-B2EB-3C0DC4CFD6B4}"/>
               </a:ext>
             </a:extLst>
           </p:cNvPr>
@@ -5546,7 +5582,7 @@
           <p:cNvPr id="13" name="route-number-4">
             <a:extLst xmlns:a="http://schemas.openxmlformats.org/drawingml/2006/main">
               <a:ext uri="{FF2B5EF4-FFF2-40B4-BE49-F238E27FC236}">
-                <a16:creationId xmlns:a16="http://schemas.microsoft.com/office/drawing/2014/main" id="{E81042FD-AA9D-4A7C-8DE3-4A759DA7774C}"/>
+                <a16:creationId xmlns:a16="http://schemas.microsoft.com/office/drawing/2014/main" id="{CA785BBD-3A25-441F-A6D9-5B5F9FE94C72}"/>
               </a:ext>
             </a:extLst>
           </p:cNvPr>
@@ -5603,7 +5639,7 @@
           <p:cNvPr id="14" name="route-4">
             <a:extLst xmlns:a="http://schemas.openxmlformats.org/drawingml/2006/main">
               <a:ext uri="{FF2B5EF4-FFF2-40B4-BE49-F238E27FC236}">
-                <a16:creationId xmlns:a16="http://schemas.microsoft.com/office/drawing/2014/main" id="{0714D288-B2B2-4EC4-B987-967A516D37CB}"/>
+                <a16:creationId xmlns:a16="http://schemas.microsoft.com/office/drawing/2014/main" id="{B3EE3340-EE6E-4CFD-9AB1-D8161200607B}"/>
               </a:ext>
             </a:extLst>
           </p:cNvPr>
@@ -5660,7 +5696,7 @@
           <p:cNvPr id="15" name="route-number-5">
             <a:extLst xmlns:a="http://schemas.openxmlformats.org/drawingml/2006/main">
               <a:ext uri="{FF2B5EF4-FFF2-40B4-BE49-F238E27FC236}">
-                <a16:creationId xmlns:a16="http://schemas.microsoft.com/office/drawing/2014/main" id="{A7AB816B-9131-4EC2-9D63-6C860F073C61}"/>
+                <a16:creationId xmlns:a16="http://schemas.microsoft.com/office/drawing/2014/main" id="{B3702B7E-F330-40CC-9EC8-A91205E55D62}"/>
               </a:ext>
             </a:extLst>
           </p:cNvPr>
@@ -5717,7 +5753,7 @@
           <p:cNvPr id="16" name="route-5">
             <a:extLst xmlns:a="http://schemas.openxmlformats.org/drawingml/2006/main">
               <a:ext uri="{FF2B5EF4-FFF2-40B4-BE49-F238E27FC236}">
-                <a16:creationId xmlns:a16="http://schemas.microsoft.com/office/drawing/2014/main" id="{B4B04D9A-F3ED-492C-9DD3-B752DE99DCFE}"/>
+                <a16:creationId xmlns:a16="http://schemas.microsoft.com/office/drawing/2014/main" id="{1720059D-1C2A-4145-90A2-A2EFE1057250}"/>
               </a:ext>
             </a:extLst>
           </p:cNvPr>
@@ -5774,7 +5810,7 @@
           <p:cNvPr id="17" name="route-number-6">
             <a:extLst xmlns:a="http://schemas.openxmlformats.org/drawingml/2006/main">
               <a:ext uri="{FF2B5EF4-FFF2-40B4-BE49-F238E27FC236}">
-                <a16:creationId xmlns:a16="http://schemas.microsoft.com/office/drawing/2014/main" id="{386EBFF4-0388-449F-8652-FEF15719CD88}"/>
+                <a16:creationId xmlns:a16="http://schemas.microsoft.com/office/drawing/2014/main" id="{D3085FFA-D427-4035-B609-BEBB5E8DEAA9}"/>
               </a:ext>
             </a:extLst>
           </p:cNvPr>
@@ -5831,7 +5867,7 @@
           <p:cNvPr id="18" name="route-6">
             <a:extLst xmlns:a="http://schemas.openxmlformats.org/drawingml/2006/main">
               <a:ext uri="{FF2B5EF4-FFF2-40B4-BE49-F238E27FC236}">
-                <a16:creationId xmlns:a16="http://schemas.microsoft.com/office/drawing/2014/main" id="{3762F33A-1037-4B3C-9A03-52602AE82A46}"/>
+                <a16:creationId xmlns:a16="http://schemas.microsoft.com/office/drawing/2014/main" id="{9A82502F-C3FF-4FF0-9BA8-AB5895EF6424}"/>
               </a:ext>
             </a:extLst>
           </p:cNvPr>
@@ -5888,7 +5924,7 @@
           <p:cNvPr id="19" name="route-number-7">
             <a:extLst xmlns:a="http://schemas.openxmlformats.org/drawingml/2006/main">
               <a:ext uri="{FF2B5EF4-FFF2-40B4-BE49-F238E27FC236}">
-                <a16:creationId xmlns:a16="http://schemas.microsoft.com/office/drawing/2014/main" id="{1F981E85-C131-4596-87DD-CC39633A0C0D}"/>
+                <a16:creationId xmlns:a16="http://schemas.microsoft.com/office/drawing/2014/main" id="{F26BA015-31CD-4AFE-B85F-D018813D44FC}"/>
               </a:ext>
             </a:extLst>
           </p:cNvPr>
@@ -5945,7 +5981,7 @@
           <p:cNvPr id="20" name="route-7">
             <a:extLst xmlns:a="http://schemas.openxmlformats.org/drawingml/2006/main">
               <a:ext uri="{FF2B5EF4-FFF2-40B4-BE49-F238E27FC236}">
-                <a16:creationId xmlns:a16="http://schemas.microsoft.com/office/drawing/2014/main" id="{3637610A-3EEB-46B2-BB57-933F18D16E57}"/>
+                <a16:creationId xmlns:a16="http://schemas.microsoft.com/office/drawing/2014/main" id="{EF896C06-9086-4529-B35F-AC83F59607E2}"/>
               </a:ext>
             </a:extLst>
           </p:cNvPr>
@@ -6002,7 +6038,7 @@
           <p:cNvPr id="21" name="Lesdoelen">
             <a:extLst xmlns:a="http://schemas.openxmlformats.org/drawingml/2006/main">
               <a:ext uri="{FF2B5EF4-FFF2-40B4-BE49-F238E27FC236}">
-                <a16:creationId xmlns:a16="http://schemas.microsoft.com/office/drawing/2014/main" id="{53DB6D3B-D191-40B5-BF55-80E2DCE22ADE}"/>
+                <a16:creationId xmlns:a16="http://schemas.microsoft.com/office/drawing/2014/main" id="{66B83EC7-B1A6-42DF-9BB6-7A9EE8F0F111}"/>
               </a:ext>
             </a:extLst>
           </p:cNvPr>
@@ -6059,7 +6095,7 @@
           <p:cNvPr id="22" name="overview-goals">
             <a:extLst xmlns:a="http://schemas.openxmlformats.org/drawingml/2006/main">
               <a:ext uri="{FF2B5EF4-FFF2-40B4-BE49-F238E27FC236}">
-                <a16:creationId xmlns:a16="http://schemas.microsoft.com/office/drawing/2014/main" id="{253EF9C0-A533-4951-B38C-BB3692802FDB}"/>
+                <a16:creationId xmlns:a16="http://schemas.microsoft.com/office/drawing/2014/main" id="{9D814DB7-86AC-4B9F-A52D-031162859902}"/>
               </a:ext>
             </a:extLst>
           </p:cNvPr>
@@ -6162,7 +6198,7 @@
           <p:cNvPr id="23" name="">
             <a:extLst xmlns:a="http://schemas.openxmlformats.org/drawingml/2006/main">
               <a:ext uri="{FF2B5EF4-FFF2-40B4-BE49-F238E27FC236}">
-                <a16:creationId xmlns:a16="http://schemas.microsoft.com/office/drawing/2014/main" id="{88559CA9-4BF7-4BCC-8F0A-87142186FB16}"/>
+                <a16:creationId xmlns:a16="http://schemas.microsoft.com/office/drawing/2014/main" id="{3106C64C-923F-4FB4-B138-8F23C2F4A310}"/>
               </a:ext>
             </a:extLst>
           </p:cNvPr>
@@ -6191,7 +6227,7 @@
           <p:cNvPr id="24" name="Startopdracht">
             <a:extLst xmlns:a="http://schemas.openxmlformats.org/drawingml/2006/main">
               <a:ext uri="{FF2B5EF4-FFF2-40B4-BE49-F238E27FC236}">
-                <a16:creationId xmlns:a16="http://schemas.microsoft.com/office/drawing/2014/main" id="{E6251A73-BFB6-4CDB-B05B-95629614851F}"/>
+                <a16:creationId xmlns:a16="http://schemas.microsoft.com/office/drawing/2014/main" id="{5BA9D824-741B-47C8-98F4-09961930E4B3}"/>
               </a:ext>
             </a:extLst>
           </p:cNvPr>
@@ -6248,7 +6284,7 @@
           <p:cNvPr id="25" name="overview-start">
             <a:extLst xmlns:a="http://schemas.openxmlformats.org/drawingml/2006/main">
               <a:ext uri="{FF2B5EF4-FFF2-40B4-BE49-F238E27FC236}">
-                <a16:creationId xmlns:a16="http://schemas.microsoft.com/office/drawing/2014/main" id="{D38DDC35-8F8C-4E41-ADB2-5B38F437C3B0}"/>
+                <a16:creationId xmlns:a16="http://schemas.microsoft.com/office/drawing/2014/main" id="{A10193B2-39B2-41F4-A186-D0CF917F2E0C}"/>
               </a:ext>
             </a:extLst>
           </p:cNvPr>
@@ -6277,48 +6313,48 @@
           <a:lstStyle xmlns:a="http://schemas.openxmlformats.org/drawingml/2006/main"/>
           <a:p xmlns:a="http://schemas.openxmlformats.org/drawingml/2006/main">
             <a:pPr algn="l">
-              <a:defRPr sz="2475" b="1">
-                <a:solidFill>
-                  <a:srgbClr val="183247"/>
-                </a:solidFill>
-                <a:latin typeface="Arial"/>
-                <a:ea typeface="Arial"/>
-                <a:cs typeface="Arial"/>
-              </a:defRPr>
-            </a:pPr>
-            <a:r>
-              <a:rPr sz="2475" b="1">
-                <a:solidFill>
-                  <a:srgbClr val="183247"/>
-                </a:solidFill>
-                <a:latin typeface="Arial"/>
-                <a:ea typeface="Arial"/>
-                <a:cs typeface="Arial"/>
-              </a:rPr>
-              <a:t>Pagina 48</a:t>
+              <a:defRPr sz="2250" b="1">
+                <a:solidFill>
+                  <a:srgbClr val="183247"/>
+                </a:solidFill>
+                <a:latin typeface="Arial"/>
+                <a:ea typeface="Arial"/>
+                <a:cs typeface="Arial"/>
+              </a:defRPr>
+            </a:pPr>
+            <a:r>
+              <a:rPr sz="2250" b="1">
+                <a:solidFill>
+                  <a:srgbClr val="183247"/>
+                </a:solidFill>
+                <a:latin typeface="Arial"/>
+                <a:ea typeface="Arial"/>
+                <a:cs typeface="Arial"/>
+              </a:rPr>
+              <a:t>Pagina 48 · Opgaven 1 en 2</a:t>
             </a:r>
           </a:p>
           <a:p xmlns:a="http://schemas.openxmlformats.org/drawingml/2006/main">
             <a:pPr algn="l">
-              <a:defRPr sz="2475" b="1">
-                <a:solidFill>
-                  <a:srgbClr val="183247"/>
-                </a:solidFill>
-                <a:latin typeface="Arial"/>
-                <a:ea typeface="Arial"/>
-                <a:cs typeface="Arial"/>
-              </a:defRPr>
-            </a:pPr>
-            <a:r>
-              <a:rPr sz="2475" b="1">
-                <a:solidFill>
-                  <a:srgbClr val="183247"/>
-                </a:solidFill>
-                <a:latin typeface="Arial"/>
-                <a:ea typeface="Arial"/>
-                <a:cs typeface="Arial"/>
-              </a:rPr>
-              <a:t>Opgaven 1 en 2</a:t>
+              <a:defRPr sz="2250" b="1">
+                <a:solidFill>
+                  <a:srgbClr val="183247"/>
+                </a:solidFill>
+                <a:latin typeface="Arial"/>
+                <a:ea typeface="Arial"/>
+                <a:cs typeface="Arial"/>
+              </a:defRPr>
+            </a:pPr>
+            <a:r>
+              <a:rPr sz="2250" b="1">
+                <a:solidFill>
+                  <a:srgbClr val="183247"/>
+                </a:solidFill>
+                <a:latin typeface="Arial"/>
+                <a:ea typeface="Arial"/>
+                <a:cs typeface="Arial"/>
+              </a:rPr>
+              <a:t>2a: verkennen, theorie p. 45</a:t>
             </a:r>
           </a:p>
         </p:txBody>
@@ -6328,7 +6364,7 @@
           <p:cNvPr id="26" name="">
             <a:extLst xmlns:a="http://schemas.openxmlformats.org/drawingml/2006/main">
               <a:ext uri="{FF2B5EF4-FFF2-40B4-BE49-F238E27FC236}">
-                <a16:creationId xmlns:a16="http://schemas.microsoft.com/office/drawing/2014/main" id="{79293C61-6B21-47AF-BD47-DB61613FD395}"/>
+                <a16:creationId xmlns:a16="http://schemas.microsoft.com/office/drawing/2014/main" id="{60B50E0A-DDB9-4290-AB5C-D154401E4B34}"/>
               </a:ext>
             </a:extLst>
           </p:cNvPr>
@@ -6357,7 +6393,7 @@
           <p:cNvPr id="27" name="Huiswerk">
             <a:extLst xmlns:a="http://schemas.openxmlformats.org/drawingml/2006/main">
               <a:ext uri="{FF2B5EF4-FFF2-40B4-BE49-F238E27FC236}">
-                <a16:creationId xmlns:a16="http://schemas.microsoft.com/office/drawing/2014/main" id="{F730A5C4-9A0F-4CC1-B936-B23555DB2A7A}"/>
+                <a16:creationId xmlns:a16="http://schemas.microsoft.com/office/drawing/2014/main" id="{D656B6FE-1B14-4FE3-85FD-CEE36A2F1DC8}"/>
               </a:ext>
             </a:extLst>
           </p:cNvPr>
@@ -6414,7 +6450,7 @@
           <p:cNvPr id="28" name="overview-homework">
             <a:extLst xmlns:a="http://schemas.openxmlformats.org/drawingml/2006/main">
               <a:ext uri="{FF2B5EF4-FFF2-40B4-BE49-F238E27FC236}">
-                <a16:creationId xmlns:a16="http://schemas.microsoft.com/office/drawing/2014/main" id="{1174BA7E-6C9F-4D94-9C5F-5DE63C62C30B}"/>
+                <a16:creationId xmlns:a16="http://schemas.microsoft.com/office/drawing/2014/main" id="{F3CBC081-42FA-49C7-8B48-BF868ABCAEEB}"/>
               </a:ext>
             </a:extLst>
           </p:cNvPr>
@@ -6561,7 +6597,7 @@
     </p:spTree>
     <p:extLst>
       <p:ext uri="{BB962C8B-B14F-4D97-AF65-F5344CB8AC3E}">
-        <p14:creationId xmlns:p14="http://schemas.microsoft.com/office/powerpoint/2010/main" val="973246305"/>
+        <p14:creationId xmlns:p14="http://schemas.microsoft.com/office/powerpoint/2010/main" val="1885401424"/>
       </p:ext>
     </p:extLst>
   </p:cSld>
@@ -6592,7 +6628,7 @@
           <p:cNvPr id="8" name="De lokale omzetregel">
             <a:extLst xmlns:a="http://schemas.openxmlformats.org/drawingml/2006/main">
               <a:ext uri="{FF2B5EF4-FFF2-40B4-BE49-F238E27FC236}">
-                <a16:creationId xmlns:a16="http://schemas.microsoft.com/office/drawing/2014/main" id="{9C8DDC81-89E2-4340-8BF5-C462CA80678B}"/>
+                <a16:creationId xmlns:a16="http://schemas.microsoft.com/office/drawing/2014/main" id="{3AFB2DA6-BE47-4871-BA36-1A2BE66502B0}"/>
               </a:ext>
             </a:extLst>
           </p:cNvPr>
@@ -6649,7 +6685,7 @@
           <p:cNvPr id="2" name="">
             <a:extLst xmlns:a="http://schemas.openxmlformats.org/drawingml/2006/main">
               <a:ext uri="{FF2B5EF4-FFF2-40B4-BE49-F238E27FC236}">
-                <a16:creationId xmlns:a16="http://schemas.microsoft.com/office/drawing/2014/main" id="{4860296B-5880-4053-BF8C-E4F967A8F7A7}"/>
+                <a16:creationId xmlns:a16="http://schemas.microsoft.com/office/drawing/2014/main" id="{DF6C72B6-1450-4303-9D25-467AB757C0FD}"/>
               </a:ext>
             </a:extLst>
           </p:cNvPr>
@@ -6678,7 +6714,7 @@
           <p:cNvPr id="3" name="§2.2.2 Elasticiteit en omzet">
             <a:extLst xmlns:a="http://schemas.openxmlformats.org/drawingml/2006/main">
               <a:ext uri="{FF2B5EF4-FFF2-40B4-BE49-F238E27FC236}">
-                <a16:creationId xmlns:a16="http://schemas.microsoft.com/office/drawing/2014/main" id="{C22DD429-1FF9-4D2F-89B8-5EB6A442D475}"/>
+                <a16:creationId xmlns:a16="http://schemas.microsoft.com/office/drawing/2014/main" id="{371FFE5D-AC92-4F86-B456-FD306595EF75}"/>
               </a:ext>
             </a:extLst>
           </p:cNvPr>
@@ -6735,7 +6771,7 @@
           <p:cNvPr id="4" name="10">
             <a:extLst xmlns:a="http://schemas.openxmlformats.org/drawingml/2006/main">
               <a:ext uri="{FF2B5EF4-FFF2-40B4-BE49-F238E27FC236}">
-                <a16:creationId xmlns:a16="http://schemas.microsoft.com/office/drawing/2014/main" id="{3E23BBB9-A2C9-4AD3-8713-AEE8AFE92CF4}"/>
+                <a16:creationId xmlns:a16="http://schemas.microsoft.com/office/drawing/2014/main" id="{E4A652C5-FEC7-4546-A5A6-AE0965324DFC}"/>
               </a:ext>
             </a:extLst>
           </p:cNvPr>
@@ -6792,7 +6828,7 @@
           <p:cNvPr id="5" name="Bij een kleine prijsverandering rond de huidige si">
             <a:extLst xmlns:a="http://schemas.openxmlformats.org/drawingml/2006/main">
               <a:ext uri="{FF2B5EF4-FFF2-40B4-BE49-F238E27FC236}">
-                <a16:creationId xmlns:a16="http://schemas.microsoft.com/office/drawing/2014/main" id="{4A18F14D-25B1-412C-9858-F439AD23258B}"/>
+                <a16:creationId xmlns:a16="http://schemas.microsoft.com/office/drawing/2014/main" id="{6553FA6D-FBBF-4BC4-A793-691EDFA57132}"/>
               </a:ext>
             </a:extLst>
           </p:cNvPr>
@@ -7233,7 +7269,7 @@
           <p:cNvPr id="7" name="Bij gegeven oude en nieuwe waarden: TO altijd nare">
             <a:extLst xmlns:a="http://schemas.openxmlformats.org/drawingml/2006/main">
               <a:ext uri="{FF2B5EF4-FFF2-40B4-BE49-F238E27FC236}">
-                <a16:creationId xmlns:a16="http://schemas.microsoft.com/office/drawing/2014/main" id="{D0B9FA1F-4F15-482B-B2F8-00C7E6915E0F}"/>
+                <a16:creationId xmlns:a16="http://schemas.microsoft.com/office/drawing/2014/main" id="{C8D95E11-9B10-460A-A48D-2F05EC9C9E3C}"/>
               </a:ext>
             </a:extLst>
           </p:cNvPr>
@@ -7288,7 +7324,7 @@
     </p:spTree>
     <p:extLst>
       <p:ext uri="{BB962C8B-B14F-4D97-AF65-F5344CB8AC3E}">
-        <p14:creationId xmlns:p14="http://schemas.microsoft.com/office/powerpoint/2010/main" val="83863744"/>
+        <p14:creationId xmlns:p14="http://schemas.microsoft.com/office/powerpoint/2010/main" val="833151734"/>
       </p:ext>
     </p:extLst>
   </p:cSld>
@@ -7319,7 +7355,7 @@
           <p:cNvPr id="10" name="Prijs en afzet zijn twee factoren">
             <a:extLst xmlns:a="http://schemas.openxmlformats.org/drawingml/2006/main">
               <a:ext uri="{FF2B5EF4-FFF2-40B4-BE49-F238E27FC236}">
-                <a16:creationId xmlns:a16="http://schemas.microsoft.com/office/drawing/2014/main" id="{A420DAAC-74E1-4103-9D94-1B032C0179AB}"/>
+                <a16:creationId xmlns:a16="http://schemas.microsoft.com/office/drawing/2014/main" id="{DBC39277-2B65-4B4A-B7A2-4BBDFB284827}"/>
               </a:ext>
             </a:extLst>
           </p:cNvPr>
@@ -7376,7 +7412,7 @@
           <p:cNvPr id="2" name="">
             <a:extLst xmlns:a="http://schemas.openxmlformats.org/drawingml/2006/main">
               <a:ext uri="{FF2B5EF4-FFF2-40B4-BE49-F238E27FC236}">
-                <a16:creationId xmlns:a16="http://schemas.microsoft.com/office/drawing/2014/main" id="{D401AEB9-8ED6-471F-9F82-0C01CE94D1AA}"/>
+                <a16:creationId xmlns:a16="http://schemas.microsoft.com/office/drawing/2014/main" id="{A6BA3492-F7C6-429D-8FEA-0EE34B6EDCC4}"/>
               </a:ext>
             </a:extLst>
           </p:cNvPr>
@@ -7405,7 +7441,7 @@
           <p:cNvPr id="3" name="Uitlegvoorbeeld — niet uit het boek">
             <a:extLst xmlns:a="http://schemas.openxmlformats.org/drawingml/2006/main">
               <a:ext uri="{FF2B5EF4-FFF2-40B4-BE49-F238E27FC236}">
-                <a16:creationId xmlns:a16="http://schemas.microsoft.com/office/drawing/2014/main" id="{CC6047E5-7EA4-4DCF-87B4-62AC36E4F4F0}"/>
+                <a16:creationId xmlns:a16="http://schemas.microsoft.com/office/drawing/2014/main" id="{FF20D397-C5B7-4F0B-82CB-CD3DC259C22B}"/>
               </a:ext>
             </a:extLst>
           </p:cNvPr>
@@ -7462,7 +7498,7 @@
           <p:cNvPr id="4" name="11">
             <a:extLst xmlns:a="http://schemas.openxmlformats.org/drawingml/2006/main">
               <a:ext uri="{FF2B5EF4-FFF2-40B4-BE49-F238E27FC236}">
-                <a16:creationId xmlns:a16="http://schemas.microsoft.com/office/drawing/2014/main" id="{D6F5D989-B0DF-48DB-962C-AEE9A3F0412B}"/>
+                <a16:creationId xmlns:a16="http://schemas.microsoft.com/office/drawing/2014/main" id="{C1794922-E4AD-4A8B-A8ED-EF574F8722E3}"/>
               </a:ext>
             </a:extLst>
           </p:cNvPr>
@@ -7519,7 +7555,7 @@
           <p:cNvPr id="5" name="KajakStek: P +20%, Q −30%">
             <a:extLst xmlns:a="http://schemas.openxmlformats.org/drawingml/2006/main">
               <a:ext uri="{FF2B5EF4-FFF2-40B4-BE49-F238E27FC236}">
-                <a16:creationId xmlns:a16="http://schemas.microsoft.com/office/drawing/2014/main" id="{F93A44D0-0CBE-471E-868D-0B90F7A0C968}"/>
+                <a16:creationId xmlns:a16="http://schemas.microsoft.com/office/drawing/2014/main" id="{4883DAE8-3A73-46CF-9C2A-F8C3EFAD6214}"/>
               </a:ext>
             </a:extLst>
           </p:cNvPr>
@@ -7576,7 +7612,7 @@
           <p:cNvPr id="6" name="TO nieuw / TO oud = (P nieuw / P oud) × (Q nieuw /">
             <a:extLst xmlns:a="http://schemas.openxmlformats.org/drawingml/2006/main">
               <a:ext uri="{FF2B5EF4-FFF2-40B4-BE49-F238E27FC236}">
-                <a16:creationId xmlns:a16="http://schemas.microsoft.com/office/drawing/2014/main" id="{72FE234F-DE11-492B-AF8A-FCEDD1CF20A4}"/>
+                <a16:creationId xmlns:a16="http://schemas.microsoft.com/office/drawing/2014/main" id="{C59F4A9B-F289-4635-9753-3359E1D32AA8}"/>
               </a:ext>
             </a:extLst>
           </p:cNvPr>
@@ -7633,7 +7669,7 @@
           <p:cNvPr id="7" name="= 1,20 × 0,70 = 0,84">
             <a:extLst xmlns:a="http://schemas.openxmlformats.org/drawingml/2006/main">
               <a:ext uri="{FF2B5EF4-FFF2-40B4-BE49-F238E27FC236}">
-                <a16:creationId xmlns:a16="http://schemas.microsoft.com/office/drawing/2014/main" id="{4EF946A2-0B6F-4964-A8B4-0F59482B65F7}"/>
+                <a16:creationId xmlns:a16="http://schemas.microsoft.com/office/drawing/2014/main" id="{F96DFF06-FA24-41A4-A7D7-4BFA895A0577}"/>
               </a:ext>
             </a:extLst>
           </p:cNvPr>
@@ -7690,7 +7726,7 @@
           <p:cNvPr id="8" name="84% van de oude omzet: een daling van 16%.">
             <a:extLst xmlns:a="http://schemas.openxmlformats.org/drawingml/2006/main">
               <a:ext uri="{FF2B5EF4-FFF2-40B4-BE49-F238E27FC236}">
-                <a16:creationId xmlns:a16="http://schemas.microsoft.com/office/drawing/2014/main" id="{7F6FBFA9-0EBB-4B7C-9C75-A52664154846}"/>
+                <a16:creationId xmlns:a16="http://schemas.microsoft.com/office/drawing/2014/main" id="{579E2E6F-FF90-41B9-8085-54A609A03215}"/>
               </a:ext>
             </a:extLst>
           </p:cNvPr>
@@ -7747,7 +7783,7 @@
           <p:cNvPr id="9" name="Optellen van +20% en −30% zou −10% geven.">
             <a:extLst xmlns:a="http://schemas.openxmlformats.org/drawingml/2006/main">
               <a:ext uri="{FF2B5EF4-FFF2-40B4-BE49-F238E27FC236}">
-                <a16:creationId xmlns:a16="http://schemas.microsoft.com/office/drawing/2014/main" id="{A18C8563-6547-4CEA-8DD2-9CAAD4FA0EFB}"/>
+                <a16:creationId xmlns:a16="http://schemas.microsoft.com/office/drawing/2014/main" id="{068E6C73-4801-4BBD-A4E6-5F6E2DB77351}"/>
               </a:ext>
             </a:extLst>
           </p:cNvPr>
@@ -7802,7 +7838,7 @@
     </p:spTree>
     <p:extLst>
       <p:ext uri="{BB962C8B-B14F-4D97-AF65-F5344CB8AC3E}">
-        <p14:creationId xmlns:p14="http://schemas.microsoft.com/office/powerpoint/2010/main" val="1646423709"/>
+        <p14:creationId xmlns:p14="http://schemas.microsoft.com/office/powerpoint/2010/main" val="1902227510"/>
       </p:ext>
     </p:extLst>
   </p:cSld>
@@ -7833,7 +7869,7 @@
           <p:cNvPr id="8" name="Omzet en winst">
             <a:extLst xmlns:a="http://schemas.openxmlformats.org/drawingml/2006/main">
               <a:ext uri="{FF2B5EF4-FFF2-40B4-BE49-F238E27FC236}">
-                <a16:creationId xmlns:a16="http://schemas.microsoft.com/office/drawing/2014/main" id="{9318A479-9999-44D5-8B0C-BBE15F113A87}"/>
+                <a16:creationId xmlns:a16="http://schemas.microsoft.com/office/drawing/2014/main" id="{E49D9F7F-1FE3-4044-92BF-DB4EC7438CEB}"/>
               </a:ext>
             </a:extLst>
           </p:cNvPr>
@@ -7890,7 +7926,7 @@
           <p:cNvPr id="2" name="">
             <a:extLst xmlns:a="http://schemas.openxmlformats.org/drawingml/2006/main">
               <a:ext uri="{FF2B5EF4-FFF2-40B4-BE49-F238E27FC236}">
-                <a16:creationId xmlns:a16="http://schemas.microsoft.com/office/drawing/2014/main" id="{75DC5B1D-7D2E-4019-B0CD-91C14BB5703A}"/>
+                <a16:creationId xmlns:a16="http://schemas.microsoft.com/office/drawing/2014/main" id="{A9FD4BA5-00B0-4CEA-8B8D-9B7C04C200FD}"/>
               </a:ext>
             </a:extLst>
           </p:cNvPr>
@@ -7919,7 +7955,7 @@
           <p:cNvPr id="3" name="§2.2.2 Elasticiteit en omzet">
             <a:extLst xmlns:a="http://schemas.openxmlformats.org/drawingml/2006/main">
               <a:ext uri="{FF2B5EF4-FFF2-40B4-BE49-F238E27FC236}">
-                <a16:creationId xmlns:a16="http://schemas.microsoft.com/office/drawing/2014/main" id="{8B66E809-EE2F-458D-9202-0F91FEEC135B}"/>
+                <a16:creationId xmlns:a16="http://schemas.microsoft.com/office/drawing/2014/main" id="{B8E424B5-9D0D-4C82-A28C-A7A6418DF909}"/>
               </a:ext>
             </a:extLst>
           </p:cNvPr>
@@ -7976,7 +8012,7 @@
           <p:cNvPr id="4" name="12">
             <a:extLst xmlns:a="http://schemas.openxmlformats.org/drawingml/2006/main">
               <a:ext uri="{FF2B5EF4-FFF2-40B4-BE49-F238E27FC236}">
-                <a16:creationId xmlns:a16="http://schemas.microsoft.com/office/drawing/2014/main" id="{671AB734-53A4-4081-AD11-6736AD7AAC3C}"/>
+                <a16:creationId xmlns:a16="http://schemas.microsoft.com/office/drawing/2014/main" id="{BA8E20B0-A1B8-4C48-8D4D-F651E9546431}"/>
               </a:ext>
             </a:extLst>
           </p:cNvPr>
@@ -8033,7 +8069,7 @@
           <p:cNvPr id="5" name="Winst = TO − TK">
             <a:extLst xmlns:a="http://schemas.openxmlformats.org/drawingml/2006/main">
               <a:ext uri="{FF2B5EF4-FFF2-40B4-BE49-F238E27FC236}">
-                <a16:creationId xmlns:a16="http://schemas.microsoft.com/office/drawing/2014/main" id="{FADDBBFD-F768-40C9-A5C0-6CF1CCF36102}"/>
+                <a16:creationId xmlns:a16="http://schemas.microsoft.com/office/drawing/2014/main" id="{B99ED7A6-4CF1-4913-B2BB-5336E57D608D}"/>
               </a:ext>
             </a:extLst>
           </p:cNvPr>
@@ -8335,7 +8371,7 @@
           <p:cNvPr id="7" name="Een omzetverandering geeft nog geen zekere winstri">
             <a:extLst xmlns:a="http://schemas.openxmlformats.org/drawingml/2006/main">
               <a:ext uri="{FF2B5EF4-FFF2-40B4-BE49-F238E27FC236}">
-                <a16:creationId xmlns:a16="http://schemas.microsoft.com/office/drawing/2014/main" id="{4D82A27F-E4CF-40C1-96AD-4B3AAE0437D1}"/>
+                <a16:creationId xmlns:a16="http://schemas.microsoft.com/office/drawing/2014/main" id="{A8D640D0-8DEB-4684-B513-1F9CAA3E859D}"/>
               </a:ext>
             </a:extLst>
           </p:cNvPr>
@@ -8390,7 +8426,7 @@
     </p:spTree>
     <p:extLst>
       <p:ext uri="{BB962C8B-B14F-4D97-AF65-F5344CB8AC3E}">
-        <p14:creationId xmlns:p14="http://schemas.microsoft.com/office/powerpoint/2010/main" val="1114947144"/>
+        <p14:creationId xmlns:p14="http://schemas.microsoft.com/office/powerpoint/2010/main" val="659783118"/>
       </p:ext>
     </p:extLst>
   </p:cSld>
@@ -8421,7 +8457,7 @@
           <p:cNvPr id="9" name="Korte controle">
             <a:extLst xmlns:a="http://schemas.openxmlformats.org/drawingml/2006/main">
               <a:ext uri="{FF2B5EF4-FFF2-40B4-BE49-F238E27FC236}">
-                <a16:creationId xmlns:a16="http://schemas.microsoft.com/office/drawing/2014/main" id="{0E2CEFA9-8245-463C-B4B7-B41C9DC75E16}"/>
+                <a16:creationId xmlns:a16="http://schemas.microsoft.com/office/drawing/2014/main" id="{86C90071-7393-4FF8-85F3-1A79F69FD669}"/>
               </a:ext>
             </a:extLst>
           </p:cNvPr>
@@ -8478,7 +8514,7 @@
           <p:cNvPr id="2" name="">
             <a:extLst xmlns:a="http://schemas.openxmlformats.org/drawingml/2006/main">
               <a:ext uri="{FF2B5EF4-FFF2-40B4-BE49-F238E27FC236}">
-                <a16:creationId xmlns:a16="http://schemas.microsoft.com/office/drawing/2014/main" id="{E94F6F19-4F1F-4EF5-840D-6ED1E3727F5B}"/>
+                <a16:creationId xmlns:a16="http://schemas.microsoft.com/office/drawing/2014/main" id="{D61E1C02-47A3-4577-ADF7-60EE0143A0CC}"/>
               </a:ext>
             </a:extLst>
           </p:cNvPr>
@@ -8507,7 +8543,7 @@
           <p:cNvPr id="3" name="§2.2.2 Elasticiteit en omzet">
             <a:extLst xmlns:a="http://schemas.openxmlformats.org/drawingml/2006/main">
               <a:ext uri="{FF2B5EF4-FFF2-40B4-BE49-F238E27FC236}">
-                <a16:creationId xmlns:a16="http://schemas.microsoft.com/office/drawing/2014/main" id="{A57DECEA-FAAD-41A5-917B-28BF3170F6D4}"/>
+                <a16:creationId xmlns:a16="http://schemas.microsoft.com/office/drawing/2014/main" id="{E8F07D8D-4716-47DD-AB48-DC220434F977}"/>
               </a:ext>
             </a:extLst>
           </p:cNvPr>
@@ -8564,7 +8600,7 @@
           <p:cNvPr id="4" name="13">
             <a:extLst xmlns:a="http://schemas.openxmlformats.org/drawingml/2006/main">
               <a:ext uri="{FF2B5EF4-FFF2-40B4-BE49-F238E27FC236}">
-                <a16:creationId xmlns:a16="http://schemas.microsoft.com/office/drawing/2014/main" id="{40CD966B-7EA9-4810-B719-6CC6A17B7DAD}"/>
+                <a16:creationId xmlns:a16="http://schemas.microsoft.com/office/drawing/2014/main" id="{FE32AB8A-A129-4946-896C-0ABAFE92136E}"/>
               </a:ext>
             </a:extLst>
           </p:cNvPr>
@@ -8621,7 +8657,7 @@
           <p:cNvPr id="5" name="Een aanbieder verlaagt de prijs een klein beetje.">
             <a:extLst xmlns:a="http://schemas.openxmlformats.org/drawingml/2006/main">
               <a:ext uri="{FF2B5EF4-FFF2-40B4-BE49-F238E27FC236}">
-                <a16:creationId xmlns:a16="http://schemas.microsoft.com/office/drawing/2014/main" id="{7678548F-ABAD-403F-8483-6EA9A14DD227}"/>
+                <a16:creationId xmlns:a16="http://schemas.microsoft.com/office/drawing/2014/main" id="{4BB05D2D-66D0-448D-AAED-D266D2F84242}"/>
               </a:ext>
             </a:extLst>
           </p:cNvPr>
@@ -8678,7 +8714,7 @@
           <p:cNvPr id="6" name="De lokale Ev is −0,5.">
             <a:extLst xmlns:a="http://schemas.openxmlformats.org/drawingml/2006/main">
               <a:ext uri="{FF2B5EF4-FFF2-40B4-BE49-F238E27FC236}">
-                <a16:creationId xmlns:a16="http://schemas.microsoft.com/office/drawing/2014/main" id="{424A0D8B-E95B-4554-B8FD-405433F2A32A}"/>
+                <a16:creationId xmlns:a16="http://schemas.microsoft.com/office/drawing/2014/main" id="{B10C93E4-F7A3-4E6F-AA4D-7565C931BAD9}"/>
               </a:ext>
             </a:extLst>
           </p:cNvPr>
@@ -8735,7 +8771,7 @@
           <p:cNvPr id="7" name="Wat verwacht je voor TO? Leg uit.">
             <a:extLst xmlns:a="http://schemas.openxmlformats.org/drawingml/2006/main">
               <a:ext uri="{FF2B5EF4-FFF2-40B4-BE49-F238E27FC236}">
-                <a16:creationId xmlns:a16="http://schemas.microsoft.com/office/drawing/2014/main" id="{00E2FAE0-49F2-4F15-8C1C-7AFC6B43387B}"/>
+                <a16:creationId xmlns:a16="http://schemas.microsoft.com/office/drawing/2014/main" id="{7CA52634-FA96-4474-B146-330CC284A48E}"/>
               </a:ext>
             </a:extLst>
           </p:cNvPr>
@@ -8792,7 +8828,7 @@
           <p:cNvPr id="8" name="Kun je ook de richting van de winst voorspellen?">
             <a:extLst xmlns:a="http://schemas.openxmlformats.org/drawingml/2006/main">
               <a:ext uri="{FF2B5EF4-FFF2-40B4-BE49-F238E27FC236}">
-                <a16:creationId xmlns:a16="http://schemas.microsoft.com/office/drawing/2014/main" id="{57D60EBC-51D9-47B8-879C-1BA5E703DFC3}"/>
+                <a16:creationId xmlns:a16="http://schemas.microsoft.com/office/drawing/2014/main" id="{729F3943-713A-4DA6-9A9C-97840A49D631}"/>
               </a:ext>
             </a:extLst>
           </p:cNvPr>
@@ -8847,7 +8883,7 @@
     </p:spTree>
     <p:extLst>
       <p:ext uri="{BB962C8B-B14F-4D97-AF65-F5344CB8AC3E}">
-        <p14:creationId xmlns:p14="http://schemas.microsoft.com/office/powerpoint/2010/main" val="1836685465"/>
+        <p14:creationId xmlns:p14="http://schemas.microsoft.com/office/powerpoint/2010/main" val="1090165805"/>
       </p:ext>
     </p:extLst>
   </p:cSld>
@@ -8878,7 +8914,7 @@
           <p:cNvPr id="9" name="Korte controle: de redenering">
             <a:extLst xmlns:a="http://schemas.openxmlformats.org/drawingml/2006/main">
               <a:ext uri="{FF2B5EF4-FFF2-40B4-BE49-F238E27FC236}">
-                <a16:creationId xmlns:a16="http://schemas.microsoft.com/office/drawing/2014/main" id="{2C389DA5-91C7-4490-9E07-A610C6C00F80}"/>
+                <a16:creationId xmlns:a16="http://schemas.microsoft.com/office/drawing/2014/main" id="{0C05DB05-EC52-4E92-A00F-A7EBA9C8C6B4}"/>
               </a:ext>
             </a:extLst>
           </p:cNvPr>
@@ -8935,7 +8971,7 @@
           <p:cNvPr id="2" name="">
             <a:extLst xmlns:a="http://schemas.openxmlformats.org/drawingml/2006/main">
               <a:ext uri="{FF2B5EF4-FFF2-40B4-BE49-F238E27FC236}">
-                <a16:creationId xmlns:a16="http://schemas.microsoft.com/office/drawing/2014/main" id="{A9D2730A-3CE2-400B-889A-EBAEBBF96403}"/>
+                <a16:creationId xmlns:a16="http://schemas.microsoft.com/office/drawing/2014/main" id="{3B271956-B1EC-4C77-881A-D8902EB78254}"/>
               </a:ext>
             </a:extLst>
           </p:cNvPr>
@@ -8964,7 +9000,7 @@
           <p:cNvPr id="3" name="§2.2.2 Elasticiteit en omzet">
             <a:extLst xmlns:a="http://schemas.openxmlformats.org/drawingml/2006/main">
               <a:ext uri="{FF2B5EF4-FFF2-40B4-BE49-F238E27FC236}">
-                <a16:creationId xmlns:a16="http://schemas.microsoft.com/office/drawing/2014/main" id="{84086E75-84A8-4149-8BFB-2598AB0D7BCF}"/>
+                <a16:creationId xmlns:a16="http://schemas.microsoft.com/office/drawing/2014/main" id="{43A4FC06-DAD5-47AE-91F0-7D05A9FCDE0E}"/>
               </a:ext>
             </a:extLst>
           </p:cNvPr>
@@ -9021,7 +9057,7 @@
           <p:cNvPr id="4" name="14">
             <a:extLst xmlns:a="http://schemas.openxmlformats.org/drawingml/2006/main">
               <a:ext uri="{FF2B5EF4-FFF2-40B4-BE49-F238E27FC236}">
-                <a16:creationId xmlns:a16="http://schemas.microsoft.com/office/drawing/2014/main" id="{FA019B61-3BDB-4798-B798-9120050B0322}"/>
+                <a16:creationId xmlns:a16="http://schemas.microsoft.com/office/drawing/2014/main" id="{08E306D0-EFA5-4A60-BA7E-937E89A011DD}"/>
               </a:ext>
             </a:extLst>
           </p:cNvPr>
@@ -9078,7 +9114,7 @@
           <p:cNvPr id="5" name="Een aanbieder verlaagt de prijs een klein beetje.">
             <a:extLst xmlns:a="http://schemas.openxmlformats.org/drawingml/2006/main">
               <a:ext uri="{FF2B5EF4-FFF2-40B4-BE49-F238E27FC236}">
-                <a16:creationId xmlns:a16="http://schemas.microsoft.com/office/drawing/2014/main" id="{673517B8-CAAA-4D26-91FC-3E5FEBCE0C65}"/>
+                <a16:creationId xmlns:a16="http://schemas.microsoft.com/office/drawing/2014/main" id="{F3B41A8E-959A-4BC7-A4A5-D3D8F4B332A8}"/>
               </a:ext>
             </a:extLst>
           </p:cNvPr>
@@ -9135,7 +9171,7 @@
           <p:cNvPr id="6" name="De lokale Ev is −0,5.">
             <a:extLst xmlns:a="http://schemas.openxmlformats.org/drawingml/2006/main">
               <a:ext uri="{FF2B5EF4-FFF2-40B4-BE49-F238E27FC236}">
-                <a16:creationId xmlns:a16="http://schemas.microsoft.com/office/drawing/2014/main" id="{6A60DE64-25A3-4A41-BF14-C56E9ECAB392}"/>
+                <a16:creationId xmlns:a16="http://schemas.microsoft.com/office/drawing/2014/main" id="{243896C9-C56D-4726-A3C9-30ECB302792F}"/>
               </a:ext>
             </a:extLst>
           </p:cNvPr>
@@ -9192,7 +9228,7 @@
           <p:cNvPr id="7" name="Prijsinelastisch: de omzet daalt volgens de lokale">
             <a:extLst xmlns:a="http://schemas.openxmlformats.org/drawingml/2006/main">
               <a:ext uri="{FF2B5EF4-FFF2-40B4-BE49-F238E27FC236}">
-                <a16:creationId xmlns:a16="http://schemas.microsoft.com/office/drawing/2014/main" id="{2651A648-82CF-4B42-9D89-59D2AE6B6FC0}"/>
+                <a16:creationId xmlns:a16="http://schemas.microsoft.com/office/drawing/2014/main" id="{15E97846-FDBB-4FED-B158-71AE3C673199}"/>
               </a:ext>
             </a:extLst>
           </p:cNvPr>
@@ -9249,7 +9285,7 @@
           <p:cNvPr id="8" name="De winstrichting blijft onbekend zonder de kosten.">
             <a:extLst xmlns:a="http://schemas.openxmlformats.org/drawingml/2006/main">
               <a:ext uri="{FF2B5EF4-FFF2-40B4-BE49-F238E27FC236}">
-                <a16:creationId xmlns:a16="http://schemas.microsoft.com/office/drawing/2014/main" id="{39DB76B5-9CE1-4BC8-BBD4-C71D8D466CE4}"/>
+                <a16:creationId xmlns:a16="http://schemas.microsoft.com/office/drawing/2014/main" id="{1862C642-D283-490A-B905-9931D4F15B53}"/>
               </a:ext>
             </a:extLst>
           </p:cNvPr>
@@ -9304,7 +9340,7 @@
     </p:spTree>
     <p:extLst>
       <p:ext uri="{BB962C8B-B14F-4D97-AF65-F5344CB8AC3E}">
-        <p14:creationId xmlns:p14="http://schemas.microsoft.com/office/powerpoint/2010/main" val="1399096056"/>
+        <p14:creationId xmlns:p14="http://schemas.microsoft.com/office/powerpoint/2010/main" val="563617164"/>
       </p:ext>
     </p:extLst>
   </p:cSld>
@@ -9335,7 +9371,7 @@
           <p:cNvPr id="29" name="Deze les: §2.2.2 Elasticiteit en omzet">
             <a:extLst xmlns:a="http://schemas.openxmlformats.org/drawingml/2006/main">
               <a:ext uri="{FF2B5EF4-FFF2-40B4-BE49-F238E27FC236}">
-                <a16:creationId xmlns:a16="http://schemas.microsoft.com/office/drawing/2014/main" id="{EC1B4984-7692-4299-82EA-732FA09E59C0}"/>
+                <a16:creationId xmlns:a16="http://schemas.microsoft.com/office/drawing/2014/main" id="{BE428355-8F5A-47E9-9645-82377D78A108}"/>
               </a:ext>
             </a:extLst>
           </p:cNvPr>
@@ -9392,7 +9428,7 @@
           <p:cNvPr id="2" name="">
             <a:extLst xmlns:a="http://schemas.openxmlformats.org/drawingml/2006/main">
               <a:ext uri="{FF2B5EF4-FFF2-40B4-BE49-F238E27FC236}">
-                <a16:creationId xmlns:a16="http://schemas.microsoft.com/office/drawing/2014/main" id="{F0AD7133-04F2-4FD6-B110-2D4212E3006C}"/>
+                <a16:creationId xmlns:a16="http://schemas.microsoft.com/office/drawing/2014/main" id="{5D3B35E4-16C4-406B-9A4D-18D20BD94B38}"/>
               </a:ext>
             </a:extLst>
           </p:cNvPr>
@@ -9421,7 +9457,7 @@
           <p:cNvPr id="3" name="§2.2.2 Elasticiteit en omzet">
             <a:extLst xmlns:a="http://schemas.openxmlformats.org/drawingml/2006/main">
               <a:ext uri="{FF2B5EF4-FFF2-40B4-BE49-F238E27FC236}">
-                <a16:creationId xmlns:a16="http://schemas.microsoft.com/office/drawing/2014/main" id="{35465445-43E8-4AF1-9AA7-97E4030CCCCD}"/>
+                <a16:creationId xmlns:a16="http://schemas.microsoft.com/office/drawing/2014/main" id="{09A8BA35-439D-4248-B7C6-7BDB0018EABD}"/>
               </a:ext>
             </a:extLst>
           </p:cNvPr>
@@ -9478,7 +9514,7 @@
           <p:cNvPr id="4" name="15">
             <a:extLst xmlns:a="http://schemas.openxmlformats.org/drawingml/2006/main">
               <a:ext uri="{FF2B5EF4-FFF2-40B4-BE49-F238E27FC236}">
-                <a16:creationId xmlns:a16="http://schemas.microsoft.com/office/drawing/2014/main" id="{4EB8FEC0-C743-4D62-86DD-BEA2E894EB33}"/>
+                <a16:creationId xmlns:a16="http://schemas.microsoft.com/office/drawing/2014/main" id="{A40041E1-EB0E-4C51-8D4C-39EC6934FE88}"/>
               </a:ext>
             </a:extLst>
           </p:cNvPr>
@@ -9535,7 +9571,7 @@
           <p:cNvPr id="5" name="phase">
             <a:extLst xmlns:a="http://schemas.openxmlformats.org/drawingml/2006/main">
               <a:ext uri="{FF2B5EF4-FFF2-40B4-BE49-F238E27FC236}">
-                <a16:creationId xmlns:a16="http://schemas.microsoft.com/office/drawing/2014/main" id="{719973F4-6748-4053-BE66-377B388B15A1}"/>
+                <a16:creationId xmlns:a16="http://schemas.microsoft.com/office/drawing/2014/main" id="{C6C51E13-7096-4816-9F84-F1FFE1146322}"/>
               </a:ext>
             </a:extLst>
           </p:cNvPr>
@@ -9592,7 +9628,7 @@
           <p:cNvPr id="6" name="Lesroute">
             <a:extLst xmlns:a="http://schemas.openxmlformats.org/drawingml/2006/main">
               <a:ext uri="{FF2B5EF4-FFF2-40B4-BE49-F238E27FC236}">
-                <a16:creationId xmlns:a16="http://schemas.microsoft.com/office/drawing/2014/main" id="{F120A787-0D11-4EE0-8245-981B1391C82A}"/>
+                <a16:creationId xmlns:a16="http://schemas.microsoft.com/office/drawing/2014/main" id="{1DA63DC1-5782-4FA0-BFBB-6F06BDD4A557}"/>
               </a:ext>
             </a:extLst>
           </p:cNvPr>
@@ -9649,7 +9685,7 @@
           <p:cNvPr id="7" name="route-number-1">
             <a:extLst xmlns:a="http://schemas.openxmlformats.org/drawingml/2006/main">
               <a:ext uri="{FF2B5EF4-FFF2-40B4-BE49-F238E27FC236}">
-                <a16:creationId xmlns:a16="http://schemas.microsoft.com/office/drawing/2014/main" id="{BFCFE2DF-F68F-449B-A042-04204ADAE548}"/>
+                <a16:creationId xmlns:a16="http://schemas.microsoft.com/office/drawing/2014/main" id="{F9F07995-A280-4C55-B0F1-40BEDFFA8867}"/>
               </a:ext>
             </a:extLst>
           </p:cNvPr>
@@ -9706,7 +9742,7 @@
           <p:cNvPr id="8" name="route-1">
             <a:extLst xmlns:a="http://schemas.openxmlformats.org/drawingml/2006/main">
               <a:ext uri="{FF2B5EF4-FFF2-40B4-BE49-F238E27FC236}">
-                <a16:creationId xmlns:a16="http://schemas.microsoft.com/office/drawing/2014/main" id="{6730CB29-86A0-4FD4-B0CC-C9A66545D2ED}"/>
+                <a16:creationId xmlns:a16="http://schemas.microsoft.com/office/drawing/2014/main" id="{EB5E9DE0-443F-4628-86A2-B91F0282EC79}"/>
               </a:ext>
             </a:extLst>
           </p:cNvPr>
@@ -9763,7 +9799,7 @@
           <p:cNvPr id="9" name="route-number-2">
             <a:extLst xmlns:a="http://schemas.openxmlformats.org/drawingml/2006/main">
               <a:ext uri="{FF2B5EF4-FFF2-40B4-BE49-F238E27FC236}">
-                <a16:creationId xmlns:a16="http://schemas.microsoft.com/office/drawing/2014/main" id="{4E40B957-795B-4C0F-98E5-6F4D6B84C241}"/>
+                <a16:creationId xmlns:a16="http://schemas.microsoft.com/office/drawing/2014/main" id="{63A0FD84-BB3C-4206-863F-55FE70CCE7B6}"/>
               </a:ext>
             </a:extLst>
           </p:cNvPr>
@@ -9820,7 +9856,7 @@
           <p:cNvPr id="10" name="route-2">
             <a:extLst xmlns:a="http://schemas.openxmlformats.org/drawingml/2006/main">
               <a:ext uri="{FF2B5EF4-FFF2-40B4-BE49-F238E27FC236}">
-                <a16:creationId xmlns:a16="http://schemas.microsoft.com/office/drawing/2014/main" id="{BAC158EC-9022-41D8-9288-681E1345F0F9}"/>
+                <a16:creationId xmlns:a16="http://schemas.microsoft.com/office/drawing/2014/main" id="{120626FA-7046-4CE6-815E-4242FEAE9D36}"/>
               </a:ext>
             </a:extLst>
           </p:cNvPr>
@@ -9877,7 +9913,7 @@
           <p:cNvPr id="11" name="route-number-3">
             <a:extLst xmlns:a="http://schemas.openxmlformats.org/drawingml/2006/main">
               <a:ext uri="{FF2B5EF4-FFF2-40B4-BE49-F238E27FC236}">
-                <a16:creationId xmlns:a16="http://schemas.microsoft.com/office/drawing/2014/main" id="{67FDDFA3-99E4-4C46-BF38-32A98099D6AA}"/>
+                <a16:creationId xmlns:a16="http://schemas.microsoft.com/office/drawing/2014/main" id="{0B5E94AA-D806-47C1-9618-6AAD31E65298}"/>
               </a:ext>
             </a:extLst>
           </p:cNvPr>
@@ -9934,7 +9970,7 @@
           <p:cNvPr id="12" name="route-3">
             <a:extLst xmlns:a="http://schemas.openxmlformats.org/drawingml/2006/main">
               <a:ext uri="{FF2B5EF4-FFF2-40B4-BE49-F238E27FC236}">
-                <a16:creationId xmlns:a16="http://schemas.microsoft.com/office/drawing/2014/main" id="{6D9094DD-37C4-494F-986E-F0281A1EB44B}"/>
+                <a16:creationId xmlns:a16="http://schemas.microsoft.com/office/drawing/2014/main" id="{2D9E5C02-42AC-4D07-BB7B-80C6E0B3E3CB}"/>
               </a:ext>
             </a:extLst>
           </p:cNvPr>
@@ -9991,7 +10027,7 @@
           <p:cNvPr id="13" name="route-number-4">
             <a:extLst xmlns:a="http://schemas.openxmlformats.org/drawingml/2006/main">
               <a:ext uri="{FF2B5EF4-FFF2-40B4-BE49-F238E27FC236}">
-                <a16:creationId xmlns:a16="http://schemas.microsoft.com/office/drawing/2014/main" id="{C981A35B-E51F-473A-AEA5-CB5E86692BDE}"/>
+                <a16:creationId xmlns:a16="http://schemas.microsoft.com/office/drawing/2014/main" id="{30E277DC-5B96-4F18-B17F-0E99A859ACCC}"/>
               </a:ext>
             </a:extLst>
           </p:cNvPr>
@@ -10048,7 +10084,7 @@
           <p:cNvPr id="14" name="route-4">
             <a:extLst xmlns:a="http://schemas.openxmlformats.org/drawingml/2006/main">
               <a:ext uri="{FF2B5EF4-FFF2-40B4-BE49-F238E27FC236}">
-                <a16:creationId xmlns:a16="http://schemas.microsoft.com/office/drawing/2014/main" id="{884373BB-C009-45F9-9AFB-4648B24FEE70}"/>
+                <a16:creationId xmlns:a16="http://schemas.microsoft.com/office/drawing/2014/main" id="{91920884-5565-43B3-874F-A35A34792093}"/>
               </a:ext>
             </a:extLst>
           </p:cNvPr>
@@ -10105,7 +10141,7 @@
           <p:cNvPr id="15" name="route-number-5">
             <a:extLst xmlns:a="http://schemas.openxmlformats.org/drawingml/2006/main">
               <a:ext uri="{FF2B5EF4-FFF2-40B4-BE49-F238E27FC236}">
-                <a16:creationId xmlns:a16="http://schemas.microsoft.com/office/drawing/2014/main" id="{35A0EB90-5A99-44B6-AFAB-88E8E955F44A}"/>
+                <a16:creationId xmlns:a16="http://schemas.microsoft.com/office/drawing/2014/main" id="{787387E6-8BE1-4F35-AD33-44749B9EDDAA}"/>
               </a:ext>
             </a:extLst>
           </p:cNvPr>
@@ -10162,7 +10198,7 @@
           <p:cNvPr id="16" name="route-5">
             <a:extLst xmlns:a="http://schemas.openxmlformats.org/drawingml/2006/main">
               <a:ext uri="{FF2B5EF4-FFF2-40B4-BE49-F238E27FC236}">
-                <a16:creationId xmlns:a16="http://schemas.microsoft.com/office/drawing/2014/main" id="{A474059F-AA72-407C-81C1-CC708796D32E}"/>
+                <a16:creationId xmlns:a16="http://schemas.microsoft.com/office/drawing/2014/main" id="{C145C3A5-2CD9-449B-866B-884267441879}"/>
               </a:ext>
             </a:extLst>
           </p:cNvPr>
@@ -10219,7 +10255,7 @@
           <p:cNvPr id="17" name="route-number-6">
             <a:extLst xmlns:a="http://schemas.openxmlformats.org/drawingml/2006/main">
               <a:ext uri="{FF2B5EF4-FFF2-40B4-BE49-F238E27FC236}">
-                <a16:creationId xmlns:a16="http://schemas.microsoft.com/office/drawing/2014/main" id="{C560A9E7-7E83-4C5A-9DF7-CEB7DA9E89F1}"/>
+                <a16:creationId xmlns:a16="http://schemas.microsoft.com/office/drawing/2014/main" id="{90D38C4F-FDB5-4B9B-AE08-D83B3AC9E177}"/>
               </a:ext>
             </a:extLst>
           </p:cNvPr>
@@ -10276,7 +10312,7 @@
           <p:cNvPr id="18" name="route-6">
             <a:extLst xmlns:a="http://schemas.openxmlformats.org/drawingml/2006/main">
               <a:ext uri="{FF2B5EF4-FFF2-40B4-BE49-F238E27FC236}">
-                <a16:creationId xmlns:a16="http://schemas.microsoft.com/office/drawing/2014/main" id="{341F2CA3-2FE1-4B0C-8D04-1C170FE44D18}"/>
+                <a16:creationId xmlns:a16="http://schemas.microsoft.com/office/drawing/2014/main" id="{75B7D472-496F-4774-B783-915DB8DC319B}"/>
               </a:ext>
             </a:extLst>
           </p:cNvPr>
@@ -10333,7 +10369,7 @@
           <p:cNvPr id="19" name="route-number-7">
             <a:extLst xmlns:a="http://schemas.openxmlformats.org/drawingml/2006/main">
               <a:ext uri="{FF2B5EF4-FFF2-40B4-BE49-F238E27FC236}">
-                <a16:creationId xmlns:a16="http://schemas.microsoft.com/office/drawing/2014/main" id="{400535AB-75D8-41B5-B7B6-88FFF1B83481}"/>
+                <a16:creationId xmlns:a16="http://schemas.microsoft.com/office/drawing/2014/main" id="{7FCD4F2D-26F4-4B7E-9FBA-04FB694394AF}"/>
               </a:ext>
             </a:extLst>
           </p:cNvPr>
@@ -10390,7 +10426,7 @@
           <p:cNvPr id="20" name="route-7">
             <a:extLst xmlns:a="http://schemas.openxmlformats.org/drawingml/2006/main">
               <a:ext uri="{FF2B5EF4-FFF2-40B4-BE49-F238E27FC236}">
-                <a16:creationId xmlns:a16="http://schemas.microsoft.com/office/drawing/2014/main" id="{7371D4F0-1730-4651-9C0A-B2E8E1881C0D}"/>
+                <a16:creationId xmlns:a16="http://schemas.microsoft.com/office/drawing/2014/main" id="{93935DDC-57A3-472C-9A3B-00188169FB9F}"/>
               </a:ext>
             </a:extLst>
           </p:cNvPr>
@@ -10447,7 +10483,7 @@
           <p:cNvPr id="21" name="Lesdoelen">
             <a:extLst xmlns:a="http://schemas.openxmlformats.org/drawingml/2006/main">
               <a:ext uri="{FF2B5EF4-FFF2-40B4-BE49-F238E27FC236}">
-                <a16:creationId xmlns:a16="http://schemas.microsoft.com/office/drawing/2014/main" id="{B0CFE000-4158-4A7A-BCF5-D28282FD676E}"/>
+                <a16:creationId xmlns:a16="http://schemas.microsoft.com/office/drawing/2014/main" id="{CEF59C4A-E2F2-40AB-AB2C-97F79D4894FD}"/>
               </a:ext>
             </a:extLst>
           </p:cNvPr>
@@ -10504,7 +10540,7 @@
           <p:cNvPr id="22" name="overview-goals">
             <a:extLst xmlns:a="http://schemas.openxmlformats.org/drawingml/2006/main">
               <a:ext uri="{FF2B5EF4-FFF2-40B4-BE49-F238E27FC236}">
-                <a16:creationId xmlns:a16="http://schemas.microsoft.com/office/drawing/2014/main" id="{376836E2-AA4F-45C3-88F4-78DAE619F531}"/>
+                <a16:creationId xmlns:a16="http://schemas.microsoft.com/office/drawing/2014/main" id="{6E896D07-0121-4653-B98B-83BAD00E04E4}"/>
               </a:ext>
             </a:extLst>
           </p:cNvPr>
@@ -10607,7 +10643,7 @@
           <p:cNvPr id="23" name="">
             <a:extLst xmlns:a="http://schemas.openxmlformats.org/drawingml/2006/main">
               <a:ext uri="{FF2B5EF4-FFF2-40B4-BE49-F238E27FC236}">
-                <a16:creationId xmlns:a16="http://schemas.microsoft.com/office/drawing/2014/main" id="{3B92609A-A287-401E-82F1-769F4FD312B5}"/>
+                <a16:creationId xmlns:a16="http://schemas.microsoft.com/office/drawing/2014/main" id="{49A7EC20-B573-4532-96CA-8B07A6D69BFC}"/>
               </a:ext>
             </a:extLst>
           </p:cNvPr>
@@ -10636,7 +10672,7 @@
           <p:cNvPr id="24" name="Startopdracht">
             <a:extLst xmlns:a="http://schemas.openxmlformats.org/drawingml/2006/main">
               <a:ext uri="{FF2B5EF4-FFF2-40B4-BE49-F238E27FC236}">
-                <a16:creationId xmlns:a16="http://schemas.microsoft.com/office/drawing/2014/main" id="{3EF9182C-255D-4C76-AA4E-5B39523DACFF}"/>
+                <a16:creationId xmlns:a16="http://schemas.microsoft.com/office/drawing/2014/main" id="{9E752B61-0264-4CC9-88F7-D139D4179F05}"/>
               </a:ext>
             </a:extLst>
           </p:cNvPr>
@@ -10693,7 +10729,7 @@
           <p:cNvPr id="25" name="overview-start">
             <a:extLst xmlns:a="http://schemas.openxmlformats.org/drawingml/2006/main">
               <a:ext uri="{FF2B5EF4-FFF2-40B4-BE49-F238E27FC236}">
-                <a16:creationId xmlns:a16="http://schemas.microsoft.com/office/drawing/2014/main" id="{C2DF14C1-2391-4685-B798-F8B0A3EEE168}"/>
+                <a16:creationId xmlns:a16="http://schemas.microsoft.com/office/drawing/2014/main" id="{A1D65640-37F1-400D-A153-BB99179D7D44}"/>
               </a:ext>
             </a:extLst>
           </p:cNvPr>
@@ -10722,48 +10758,48 @@
           <a:lstStyle xmlns:a="http://schemas.openxmlformats.org/drawingml/2006/main"/>
           <a:p xmlns:a="http://schemas.openxmlformats.org/drawingml/2006/main">
             <a:pPr algn="l">
-              <a:defRPr sz="2475" b="0">
-                <a:solidFill>
-                  <a:srgbClr val="183247"/>
-                </a:solidFill>
-                <a:latin typeface="Arial"/>
-                <a:ea typeface="Arial"/>
-                <a:cs typeface="Arial"/>
-              </a:defRPr>
-            </a:pPr>
-            <a:r>
-              <a:rPr sz="2475" b="0">
-                <a:solidFill>
-                  <a:srgbClr val="183247"/>
-                </a:solidFill>
-                <a:latin typeface="Arial"/>
-                <a:ea typeface="Arial"/>
-                <a:cs typeface="Arial"/>
-              </a:rPr>
-              <a:t>Pagina 48</a:t>
+              <a:defRPr sz="2250" b="0">
+                <a:solidFill>
+                  <a:srgbClr val="183247"/>
+                </a:solidFill>
+                <a:latin typeface="Arial"/>
+                <a:ea typeface="Arial"/>
+                <a:cs typeface="Arial"/>
+              </a:defRPr>
+            </a:pPr>
+            <a:r>
+              <a:rPr sz="2250" b="0">
+                <a:solidFill>
+                  <a:srgbClr val="183247"/>
+                </a:solidFill>
+                <a:latin typeface="Arial"/>
+                <a:ea typeface="Arial"/>
+                <a:cs typeface="Arial"/>
+              </a:rPr>
+              <a:t>Pagina 48 · Opgaven 1 en 2</a:t>
             </a:r>
           </a:p>
           <a:p xmlns:a="http://schemas.openxmlformats.org/drawingml/2006/main">
             <a:pPr algn="l">
-              <a:defRPr sz="2475" b="0">
-                <a:solidFill>
-                  <a:srgbClr val="183247"/>
-                </a:solidFill>
-                <a:latin typeface="Arial"/>
-                <a:ea typeface="Arial"/>
-                <a:cs typeface="Arial"/>
-              </a:defRPr>
-            </a:pPr>
-            <a:r>
-              <a:rPr sz="2475" b="0">
-                <a:solidFill>
-                  <a:srgbClr val="183247"/>
-                </a:solidFill>
-                <a:latin typeface="Arial"/>
-                <a:ea typeface="Arial"/>
-                <a:cs typeface="Arial"/>
-              </a:rPr>
-              <a:t>Opgaven 1 en 2</a:t>
+              <a:defRPr sz="2250" b="0">
+                <a:solidFill>
+                  <a:srgbClr val="183247"/>
+                </a:solidFill>
+                <a:latin typeface="Arial"/>
+                <a:ea typeface="Arial"/>
+                <a:cs typeface="Arial"/>
+              </a:defRPr>
+            </a:pPr>
+            <a:r>
+              <a:rPr sz="2250" b="0">
+                <a:solidFill>
+                  <a:srgbClr val="183247"/>
+                </a:solidFill>
+                <a:latin typeface="Arial"/>
+                <a:ea typeface="Arial"/>
+                <a:cs typeface="Arial"/>
+              </a:rPr>
+              <a:t>2a: verkennen, theorie p. 45</a:t>
             </a:r>
           </a:p>
         </p:txBody>
@@ -10773,7 +10809,7 @@
           <p:cNvPr id="26" name="">
             <a:extLst xmlns:a="http://schemas.openxmlformats.org/drawingml/2006/main">
               <a:ext uri="{FF2B5EF4-FFF2-40B4-BE49-F238E27FC236}">
-                <a16:creationId xmlns:a16="http://schemas.microsoft.com/office/drawing/2014/main" id="{E8428B52-9C2A-4E1C-B52C-ADAF906F66F7}"/>
+                <a16:creationId xmlns:a16="http://schemas.microsoft.com/office/drawing/2014/main" id="{8EF8C5C3-B51A-4168-BF45-6F49097596E5}"/>
               </a:ext>
             </a:extLst>
           </p:cNvPr>
@@ -10802,7 +10838,7 @@
           <p:cNvPr id="27" name="Huiswerk">
             <a:extLst xmlns:a="http://schemas.openxmlformats.org/drawingml/2006/main">
               <a:ext uri="{FF2B5EF4-FFF2-40B4-BE49-F238E27FC236}">
-                <a16:creationId xmlns:a16="http://schemas.microsoft.com/office/drawing/2014/main" id="{6E84DD1C-D8F5-45DB-893D-1DD46A9E2453}"/>
+                <a16:creationId xmlns:a16="http://schemas.microsoft.com/office/drawing/2014/main" id="{3C0567B3-BB7F-4268-AD80-7B36CC63EEB9}"/>
               </a:ext>
             </a:extLst>
           </p:cNvPr>
@@ -10859,7 +10895,7 @@
           <p:cNvPr id="28" name="overview-homework">
             <a:extLst xmlns:a="http://schemas.openxmlformats.org/drawingml/2006/main">
               <a:ext uri="{FF2B5EF4-FFF2-40B4-BE49-F238E27FC236}">
-                <a16:creationId xmlns:a16="http://schemas.microsoft.com/office/drawing/2014/main" id="{475CD123-5A71-4C2C-9BC9-919E017F9EC6}"/>
+                <a16:creationId xmlns:a16="http://schemas.microsoft.com/office/drawing/2014/main" id="{EEA490A6-71F8-4647-B094-E6AD81CC7584}"/>
               </a:ext>
             </a:extLst>
           </p:cNvPr>
@@ -11006,7 +11042,7 @@
     </p:spTree>
     <p:extLst>
       <p:ext uri="{BB962C8B-B14F-4D97-AF65-F5344CB8AC3E}">
-        <p14:creationId xmlns:p14="http://schemas.microsoft.com/office/powerpoint/2010/main" val="1466499282"/>
+        <p14:creationId xmlns:p14="http://schemas.microsoft.com/office/powerpoint/2010/main" val="464617973"/>
       </p:ext>
     </p:extLst>
   </p:cSld>
@@ -11037,7 +11073,7 @@
           <p:cNvPr id="8" name="Opgave 7: Bioscoop Nova en StreamNow">
             <a:extLst xmlns:a="http://schemas.openxmlformats.org/drawingml/2006/main">
               <a:ext uri="{FF2B5EF4-FFF2-40B4-BE49-F238E27FC236}">
-                <a16:creationId xmlns:a16="http://schemas.microsoft.com/office/drawing/2014/main" id="{7081148A-EFE8-4C72-9D8F-582A76B2E4A3}"/>
+                <a16:creationId xmlns:a16="http://schemas.microsoft.com/office/drawing/2014/main" id="{F2D2732B-0144-4912-97EB-977ED2E0310C}"/>
               </a:ext>
             </a:extLst>
           </p:cNvPr>
@@ -11094,7 +11130,7 @@
           <p:cNvPr id="2" name="">
             <a:extLst xmlns:a="http://schemas.openxmlformats.org/drawingml/2006/main">
               <a:ext uri="{FF2B5EF4-FFF2-40B4-BE49-F238E27FC236}">
-                <a16:creationId xmlns:a16="http://schemas.microsoft.com/office/drawing/2014/main" id="{0CF54819-53A3-4B24-ACB6-04878E1FAF07}"/>
+                <a16:creationId xmlns:a16="http://schemas.microsoft.com/office/drawing/2014/main" id="{8D3F4C1E-090F-4737-A21C-836A07681050}"/>
               </a:ext>
             </a:extLst>
           </p:cNvPr>
@@ -11123,7 +11159,7 @@
           <p:cNvPr id="3" name="§2.2.2 Elasticiteit en omzet · Opgave 7 · Boekpagi">
             <a:extLst xmlns:a="http://schemas.openxmlformats.org/drawingml/2006/main">
               <a:ext uri="{FF2B5EF4-FFF2-40B4-BE49-F238E27FC236}">
-                <a16:creationId xmlns:a16="http://schemas.microsoft.com/office/drawing/2014/main" id="{C9822B51-1233-4831-B3EB-3A8CA4C1729C}"/>
+                <a16:creationId xmlns:a16="http://schemas.microsoft.com/office/drawing/2014/main" id="{EA1BA5D2-A9C8-4A8A-B1BD-1E6E8A55DC2B}"/>
               </a:ext>
             </a:extLst>
           </p:cNvPr>
@@ -11180,7 +11216,7 @@
           <p:cNvPr id="4" name="16">
             <a:extLst xmlns:a="http://schemas.openxmlformats.org/drawingml/2006/main">
               <a:ext uri="{FF2B5EF4-FFF2-40B4-BE49-F238E27FC236}">
-                <a16:creationId xmlns:a16="http://schemas.microsoft.com/office/drawing/2014/main" id="{21574857-FED2-48FC-BB63-8257699A8BAA}"/>
+                <a16:creationId xmlns:a16="http://schemas.microsoft.com/office/drawing/2014/main" id="{0BAFA67C-034D-4061-BD97-3FEBC70B6463}"/>
               </a:ext>
             </a:extLst>
           </p:cNvPr>
@@ -11237,7 +11273,7 @@
           <p:cNvPr id="5" name="Gebruik TO = P × Q. Alle gegevens die je nodig heb">
             <a:extLst xmlns:a="http://schemas.openxmlformats.org/drawingml/2006/main">
               <a:ext uri="{FF2B5EF4-FFF2-40B4-BE49-F238E27FC236}">
-                <a16:creationId xmlns:a16="http://schemas.microsoft.com/office/drawing/2014/main" id="{D0083EBA-6C89-49BC-BAC7-8A0A3B5EE764}"/>
+                <a16:creationId xmlns:a16="http://schemas.microsoft.com/office/drawing/2014/main" id="{44576EAC-2FD6-4C41-AF8C-00623007DB35}"/>
               </a:ext>
             </a:extLst>
           </p:cNvPr>
@@ -11784,7 +11820,7 @@
           <p:cNvPr id="7" name="Bij beide aanbieders stijgt P en daalt Q.">
             <a:extLst xmlns:a="http://schemas.openxmlformats.org/drawingml/2006/main">
               <a:ext uri="{FF2B5EF4-FFF2-40B4-BE49-F238E27FC236}">
-                <a16:creationId xmlns:a16="http://schemas.microsoft.com/office/drawing/2014/main" id="{925DF533-CBCA-4FE8-96B6-C6FA8514B5C1}"/>
+                <a16:creationId xmlns:a16="http://schemas.microsoft.com/office/drawing/2014/main" id="{424BB713-CE81-4AB9-8C93-5E70D7F4833D}"/>
               </a:ext>
             </a:extLst>
           </p:cNvPr>
@@ -11839,7 +11875,7 @@
     </p:spTree>
     <p:extLst>
       <p:ext uri="{BB962C8B-B14F-4D97-AF65-F5344CB8AC3E}">
-        <p14:creationId xmlns:p14="http://schemas.microsoft.com/office/powerpoint/2010/main" val="1769064323"/>
+        <p14:creationId xmlns:p14="http://schemas.microsoft.com/office/powerpoint/2010/main" val="469293851"/>
       </p:ext>
     </p:extLst>
   </p:cSld>
@@ -11870,7 +11906,7 @@
           <p:cNvPr id="13" name="Opgave 7: vragen a tot en met d">
             <a:extLst xmlns:a="http://schemas.openxmlformats.org/drawingml/2006/main">
               <a:ext uri="{FF2B5EF4-FFF2-40B4-BE49-F238E27FC236}">
-                <a16:creationId xmlns:a16="http://schemas.microsoft.com/office/drawing/2014/main" id="{4A720525-1CC3-4474-AE0F-90E294871573}"/>
+                <a16:creationId xmlns:a16="http://schemas.microsoft.com/office/drawing/2014/main" id="{6786E071-77C5-46D2-836B-13A625F51C82}"/>
               </a:ext>
             </a:extLst>
           </p:cNvPr>
@@ -11927,7 +11963,7 @@
           <p:cNvPr id="2" name="">
             <a:extLst xmlns:a="http://schemas.openxmlformats.org/drawingml/2006/main">
               <a:ext uri="{FF2B5EF4-FFF2-40B4-BE49-F238E27FC236}">
-                <a16:creationId xmlns:a16="http://schemas.microsoft.com/office/drawing/2014/main" id="{672F623D-C62D-437D-B8C4-CC7CEA09681F}"/>
+                <a16:creationId xmlns:a16="http://schemas.microsoft.com/office/drawing/2014/main" id="{68170920-559A-4F66-BE82-06C5928CF838}"/>
               </a:ext>
             </a:extLst>
           </p:cNvPr>
@@ -11956,7 +11992,7 @@
           <p:cNvPr id="3" name="§2.2.2 Elasticiteit en omzet · Opgave 7 · Boekpagi">
             <a:extLst xmlns:a="http://schemas.openxmlformats.org/drawingml/2006/main">
               <a:ext uri="{FF2B5EF4-FFF2-40B4-BE49-F238E27FC236}">
-                <a16:creationId xmlns:a16="http://schemas.microsoft.com/office/drawing/2014/main" id="{8A258554-CA2D-4E32-9859-ACCFD57F24E4}"/>
+                <a16:creationId xmlns:a16="http://schemas.microsoft.com/office/drawing/2014/main" id="{7A46E507-4635-4C86-853E-B79BEE1363C1}"/>
               </a:ext>
             </a:extLst>
           </p:cNvPr>
@@ -12013,7 +12049,7 @@
           <p:cNvPr id="4" name="17">
             <a:extLst xmlns:a="http://schemas.openxmlformats.org/drawingml/2006/main">
               <a:ext uri="{FF2B5EF4-FFF2-40B4-BE49-F238E27FC236}">
-                <a16:creationId xmlns:a16="http://schemas.microsoft.com/office/drawing/2014/main" id="{2CDF328D-AC1E-4727-8D65-977F8F6024E5}"/>
+                <a16:creationId xmlns:a16="http://schemas.microsoft.com/office/drawing/2014/main" id="{292FE1B5-4AC0-4B3E-A342-C30832917E17}"/>
               </a:ext>
             </a:extLst>
           </p:cNvPr>
@@ -12070,7 +12106,7 @@
           <p:cNvPr id="5" name="a)">
             <a:extLst xmlns:a="http://schemas.openxmlformats.org/drawingml/2006/main">
               <a:ext uri="{FF2B5EF4-FFF2-40B4-BE49-F238E27FC236}">
-                <a16:creationId xmlns:a16="http://schemas.microsoft.com/office/drawing/2014/main" id="{9F169525-2376-48FC-8144-7B5ABCC94A00}"/>
+                <a16:creationId xmlns:a16="http://schemas.microsoft.com/office/drawing/2014/main" id="{031DF24B-6DAB-4D7C-B4CF-580BCE709735}"/>
               </a:ext>
             </a:extLst>
           </p:cNvPr>
@@ -12127,7 +12163,7 @@
           <p:cNvPr id="6" name="Bereken voor Bioscoop Nova TO vóór en na de prijsv">
             <a:extLst xmlns:a="http://schemas.openxmlformats.org/drawingml/2006/main">
               <a:ext uri="{FF2B5EF4-FFF2-40B4-BE49-F238E27FC236}">
-                <a16:creationId xmlns:a16="http://schemas.microsoft.com/office/drawing/2014/main" id="{C4A9A958-FC01-424A-8EA9-E68D98407AB3}"/>
+                <a16:creationId xmlns:a16="http://schemas.microsoft.com/office/drawing/2014/main" id="{8A443C44-2F14-4B5B-A176-8DB3CBEAFC26}"/>
               </a:ext>
             </a:extLst>
           </p:cNvPr>
@@ -12184,7 +12220,7 @@
           <p:cNvPr id="7" name="b)">
             <a:extLst xmlns:a="http://schemas.openxmlformats.org/drawingml/2006/main">
               <a:ext uri="{FF2B5EF4-FFF2-40B4-BE49-F238E27FC236}">
-                <a16:creationId xmlns:a16="http://schemas.microsoft.com/office/drawing/2014/main" id="{7A8147F8-30BF-4850-8FEF-3794FA3C6ABA}"/>
+                <a16:creationId xmlns:a16="http://schemas.microsoft.com/office/drawing/2014/main" id="{1EE08D0A-0D3E-4B73-8320-64554E880401}"/>
               </a:ext>
             </a:extLst>
           </p:cNvPr>
@@ -12241,7 +12277,7 @@
           <p:cNvPr id="8" name="Bereken de procentuele verandering van TO bij Bios">
             <a:extLst xmlns:a="http://schemas.openxmlformats.org/drawingml/2006/main">
               <a:ext uri="{FF2B5EF4-FFF2-40B4-BE49-F238E27FC236}">
-                <a16:creationId xmlns:a16="http://schemas.microsoft.com/office/drawing/2014/main" id="{B40DE674-8326-4DA2-929B-F3E2E0C7915C}"/>
+                <a16:creationId xmlns:a16="http://schemas.microsoft.com/office/drawing/2014/main" id="{6489DAD3-DBD6-4C9F-944E-96621679478E}"/>
               </a:ext>
             </a:extLst>
           </p:cNvPr>
@@ -12298,7 +12334,7 @@
           <p:cNvPr id="9" name="c)">
             <a:extLst xmlns:a="http://schemas.openxmlformats.org/drawingml/2006/main">
               <a:ext uri="{FF2B5EF4-FFF2-40B4-BE49-F238E27FC236}">
-                <a16:creationId xmlns:a16="http://schemas.microsoft.com/office/drawing/2014/main" id="{028FF9F2-C62D-4B84-A5E4-FF0BC9160A4A}"/>
+                <a16:creationId xmlns:a16="http://schemas.microsoft.com/office/drawing/2014/main" id="{673343AE-4A5B-47A5-8A41-C527E72DC19B}"/>
               </a:ext>
             </a:extLst>
           </p:cNvPr>
@@ -12355,7 +12391,7 @@
           <p:cNvPr id="10" name="Bereken voor StreamNow TO vóór en na de prijsverho">
             <a:extLst xmlns:a="http://schemas.openxmlformats.org/drawingml/2006/main">
               <a:ext uri="{FF2B5EF4-FFF2-40B4-BE49-F238E27FC236}">
-                <a16:creationId xmlns:a16="http://schemas.microsoft.com/office/drawing/2014/main" id="{AC0D7362-F56B-414A-AE2E-42218A90455C}"/>
+                <a16:creationId xmlns:a16="http://schemas.microsoft.com/office/drawing/2014/main" id="{FCF6D826-A490-4CE7-86A2-F6EA50F9A468}"/>
               </a:ext>
             </a:extLst>
           </p:cNvPr>
@@ -12412,7 +12448,7 @@
           <p:cNvPr id="11" name="d)">
             <a:extLst xmlns:a="http://schemas.openxmlformats.org/drawingml/2006/main">
               <a:ext uri="{FF2B5EF4-FFF2-40B4-BE49-F238E27FC236}">
-                <a16:creationId xmlns:a16="http://schemas.microsoft.com/office/drawing/2014/main" id="{68B7D4A2-F219-4BAC-B899-73AC50514E54}"/>
+                <a16:creationId xmlns:a16="http://schemas.microsoft.com/office/drawing/2014/main" id="{EE617FF0-5D24-4E9B-868C-0B73884F5CEC}"/>
               </a:ext>
             </a:extLst>
           </p:cNvPr>
@@ -12469,7 +12505,7 @@
           <p:cNvPr id="12" name="Bereken de procentuele verandering van TO bij Stre">
             <a:extLst xmlns:a="http://schemas.openxmlformats.org/drawingml/2006/main">
               <a:ext uri="{FF2B5EF4-FFF2-40B4-BE49-F238E27FC236}">
-                <a16:creationId xmlns:a16="http://schemas.microsoft.com/office/drawing/2014/main" id="{AED419C2-EA80-4AB5-B8BF-BB7AE9C81344}"/>
+                <a16:creationId xmlns:a16="http://schemas.microsoft.com/office/drawing/2014/main" id="{5CBDE61D-F13C-43C7-BCAF-3D1358FE0D08}"/>
               </a:ext>
             </a:extLst>
           </p:cNvPr>
@@ -12524,7 +12560,7 @@
     </p:spTree>
     <p:extLst>
       <p:ext uri="{BB962C8B-B14F-4D97-AF65-F5344CB8AC3E}">
-        <p14:creationId xmlns:p14="http://schemas.microsoft.com/office/powerpoint/2010/main" val="171518752"/>
+        <p14:creationId xmlns:p14="http://schemas.microsoft.com/office/powerpoint/2010/main" val="233924303"/>
       </p:ext>
     </p:extLst>
   </p:cSld>
@@ -12555,7 +12591,7 @@
           <p:cNvPr id="9" name="Opgave 7: vragen e en f">
             <a:extLst xmlns:a="http://schemas.openxmlformats.org/drawingml/2006/main">
               <a:ext uri="{FF2B5EF4-FFF2-40B4-BE49-F238E27FC236}">
-                <a16:creationId xmlns:a16="http://schemas.microsoft.com/office/drawing/2014/main" id="{BA68DC66-8A93-4441-816F-58BD4FFA2450}"/>
+                <a16:creationId xmlns:a16="http://schemas.microsoft.com/office/drawing/2014/main" id="{E54D57BB-B1E4-469C-A9E0-E651A0FE0DC6}"/>
               </a:ext>
             </a:extLst>
           </p:cNvPr>
@@ -12612,7 +12648,7 @@
           <p:cNvPr id="2" name="">
             <a:extLst xmlns:a="http://schemas.openxmlformats.org/drawingml/2006/main">
               <a:ext uri="{FF2B5EF4-FFF2-40B4-BE49-F238E27FC236}">
-                <a16:creationId xmlns:a16="http://schemas.microsoft.com/office/drawing/2014/main" id="{E442354B-04AD-4E79-A42C-695FDC9BCD2E}"/>
+                <a16:creationId xmlns:a16="http://schemas.microsoft.com/office/drawing/2014/main" id="{6D1C1339-CCD9-489A-9D9C-D3B75ECAC072}"/>
               </a:ext>
             </a:extLst>
           </p:cNvPr>
@@ -12641,7 +12677,7 @@
           <p:cNvPr id="3" name="§2.2.2 Elasticiteit en omzet · Opgave 7 · Boekpagi">
             <a:extLst xmlns:a="http://schemas.openxmlformats.org/drawingml/2006/main">
               <a:ext uri="{FF2B5EF4-FFF2-40B4-BE49-F238E27FC236}">
-                <a16:creationId xmlns:a16="http://schemas.microsoft.com/office/drawing/2014/main" id="{230708B6-C4C2-4C63-8A96-EEF730BEF065}"/>
+                <a16:creationId xmlns:a16="http://schemas.microsoft.com/office/drawing/2014/main" id="{8BEB55E1-17A8-430B-AF09-23B482A722AD}"/>
               </a:ext>
             </a:extLst>
           </p:cNvPr>
@@ -12698,7 +12734,7 @@
           <p:cNvPr id="4" name="18">
             <a:extLst xmlns:a="http://schemas.openxmlformats.org/drawingml/2006/main">
               <a:ext uri="{FF2B5EF4-FFF2-40B4-BE49-F238E27FC236}">
-                <a16:creationId xmlns:a16="http://schemas.microsoft.com/office/drawing/2014/main" id="{7E1235B4-3ABB-4E21-A1E0-591F65D32FBC}"/>
+                <a16:creationId xmlns:a16="http://schemas.microsoft.com/office/drawing/2014/main" id="{5D218C5F-2145-4072-837D-B9E2717E78E7}"/>
               </a:ext>
             </a:extLst>
           </p:cNvPr>
@@ -12755,7 +12791,7 @@
           <p:cNvPr id="5" name="e)">
             <a:extLst xmlns:a="http://schemas.openxmlformats.org/drawingml/2006/main">
               <a:ext uri="{FF2B5EF4-FFF2-40B4-BE49-F238E27FC236}">
-                <a16:creationId xmlns:a16="http://schemas.microsoft.com/office/drawing/2014/main" id="{BFAFF98E-6307-4A98-8578-075D471CDEED}"/>
+                <a16:creationId xmlns:a16="http://schemas.microsoft.com/office/drawing/2014/main" id="{20D55691-80CD-4258-9BFD-6FFA52C817F2}"/>
               </a:ext>
             </a:extLst>
           </p:cNvPr>
@@ -12812,7 +12848,7 @@
           <p:cNvPr id="6" name="Formuleer de lokale omzetregel voor een kleine pri">
             <a:extLst xmlns:a="http://schemas.openxmlformats.org/drawingml/2006/main">
               <a:ext uri="{FF2B5EF4-FFF2-40B4-BE49-F238E27FC236}">
-                <a16:creationId xmlns:a16="http://schemas.microsoft.com/office/drawing/2014/main" id="{BE33A88C-B0F0-4BC0-B888-2D0E5F7BE89F}"/>
+                <a16:creationId xmlns:a16="http://schemas.microsoft.com/office/drawing/2014/main" id="{730D2A28-4103-4B32-A55F-ADFA164DD969}"/>
               </a:ext>
             </a:extLst>
           </p:cNvPr>
@@ -12915,7 +12951,7 @@
           <p:cNvPr id="7" name="f)">
             <a:extLst xmlns:a="http://schemas.openxmlformats.org/drawingml/2006/main">
               <a:ext uri="{FF2B5EF4-FFF2-40B4-BE49-F238E27FC236}">
-                <a16:creationId xmlns:a16="http://schemas.microsoft.com/office/drawing/2014/main" id="{83894266-2C5E-45E6-B8A5-D5DBB280BB09}"/>
+                <a16:creationId xmlns:a16="http://schemas.microsoft.com/office/drawing/2014/main" id="{29649A2B-DB50-4102-8ACD-2434DA657638}"/>
               </a:ext>
             </a:extLst>
           </p:cNvPr>
@@ -12972,7 +13008,7 @@
           <p:cNvPr id="8" name="Leg uit waarom uit deze omzetgegevens niet volgt d">
             <a:extLst xmlns:a="http://schemas.openxmlformats.org/drawingml/2006/main">
               <a:ext uri="{FF2B5EF4-FFF2-40B4-BE49-F238E27FC236}">
-                <a16:creationId xmlns:a16="http://schemas.microsoft.com/office/drawing/2014/main" id="{06594B8E-FA96-4702-BC12-18ABD7528BC9}"/>
+                <a16:creationId xmlns:a16="http://schemas.microsoft.com/office/drawing/2014/main" id="{FEB14F5B-4922-4293-A722-4945851FF706}"/>
               </a:ext>
             </a:extLst>
           </p:cNvPr>
@@ -13027,7 +13063,7 @@
     </p:spTree>
     <p:extLst>
       <p:ext uri="{BB962C8B-B14F-4D97-AF65-F5344CB8AC3E}">
-        <p14:creationId xmlns:p14="http://schemas.microsoft.com/office/powerpoint/2010/main" val="1097866563"/>
+        <p14:creationId xmlns:p14="http://schemas.microsoft.com/office/powerpoint/2010/main" val="256096306"/>
       </p:ext>
     </p:extLst>
   </p:cSld>
@@ -13058,7 +13094,7 @@
           <p:cNvPr id="8" name="Opgave 7a: Nova, omzet vóór en na">
             <a:extLst xmlns:a="http://schemas.openxmlformats.org/drawingml/2006/main">
               <a:ext uri="{FF2B5EF4-FFF2-40B4-BE49-F238E27FC236}">
-                <a16:creationId xmlns:a16="http://schemas.microsoft.com/office/drawing/2014/main" id="{B764BE4D-B931-4A6D-BC73-7B7C8A0C0B83}"/>
+                <a16:creationId xmlns:a16="http://schemas.microsoft.com/office/drawing/2014/main" id="{6869D4C1-FB84-4602-A678-66571FB94489}"/>
               </a:ext>
             </a:extLst>
           </p:cNvPr>
@@ -13115,7 +13151,7 @@
           <p:cNvPr id="2" name="">
             <a:extLst xmlns:a="http://schemas.openxmlformats.org/drawingml/2006/main">
               <a:ext uri="{FF2B5EF4-FFF2-40B4-BE49-F238E27FC236}">
-                <a16:creationId xmlns:a16="http://schemas.microsoft.com/office/drawing/2014/main" id="{D857439A-5BF4-4114-9E6A-91FDBACFE83D}"/>
+                <a16:creationId xmlns:a16="http://schemas.microsoft.com/office/drawing/2014/main" id="{D7AA97B6-5FA3-49E1-9D32-ACAB35A2D7E7}"/>
               </a:ext>
             </a:extLst>
           </p:cNvPr>
@@ -13144,7 +13180,7 @@
           <p:cNvPr id="3" name="§2.2.2 Elasticiteit en omzet · Opgave 7 · Boekpagi">
             <a:extLst xmlns:a="http://schemas.openxmlformats.org/drawingml/2006/main">
               <a:ext uri="{FF2B5EF4-FFF2-40B4-BE49-F238E27FC236}">
-                <a16:creationId xmlns:a16="http://schemas.microsoft.com/office/drawing/2014/main" id="{72A89D08-1ED0-4C23-B555-B8F32F448F90}"/>
+                <a16:creationId xmlns:a16="http://schemas.microsoft.com/office/drawing/2014/main" id="{6F370B09-A077-439B-BBAE-D0E5DC13B08D}"/>
               </a:ext>
             </a:extLst>
           </p:cNvPr>
@@ -13201,7 +13237,7 @@
           <p:cNvPr id="4" name="19">
             <a:extLst xmlns:a="http://schemas.openxmlformats.org/drawingml/2006/main">
               <a:ext uri="{FF2B5EF4-FFF2-40B4-BE49-F238E27FC236}">
-                <a16:creationId xmlns:a16="http://schemas.microsoft.com/office/drawing/2014/main" id="{792C5810-AB00-43CD-82F0-EFB6BC0752BE}"/>
+                <a16:creationId xmlns:a16="http://schemas.microsoft.com/office/drawing/2014/main" id="{C0100B0E-3C94-46B5-A5C1-32D198FFF3F8}"/>
               </a:ext>
             </a:extLst>
           </p:cNvPr>
@@ -13258,7 +13294,7 @@
           <p:cNvPr id="5" name="TO = P × Q">
             <a:extLst xmlns:a="http://schemas.openxmlformats.org/drawingml/2006/main">
               <a:ext uri="{FF2B5EF4-FFF2-40B4-BE49-F238E27FC236}">
-                <a16:creationId xmlns:a16="http://schemas.microsoft.com/office/drawing/2014/main" id="{C29204FB-EC9D-4AB3-B9EF-BC004FF2D316}"/>
+                <a16:creationId xmlns:a16="http://schemas.microsoft.com/office/drawing/2014/main" id="{4954A597-1862-45E3-A349-D03EF43A7D4A}"/>
               </a:ext>
             </a:extLst>
           </p:cNvPr>
@@ -13560,7 +13596,7 @@
           <p:cNvPr id="7" name="Controle: € 40 meer omzet per week.">
             <a:extLst xmlns:a="http://schemas.openxmlformats.org/drawingml/2006/main">
               <a:ext uri="{FF2B5EF4-FFF2-40B4-BE49-F238E27FC236}">
-                <a16:creationId xmlns:a16="http://schemas.microsoft.com/office/drawing/2014/main" id="{7AFED6D5-C0CF-455D-8ECE-0E4E8B451B08}"/>
+                <a16:creationId xmlns:a16="http://schemas.microsoft.com/office/drawing/2014/main" id="{0EF89FB0-42F8-49A5-B0AA-5F3A0DBBE350}"/>
               </a:ext>
             </a:extLst>
           </p:cNvPr>
@@ -13615,7 +13651,7 @@
     </p:spTree>
     <p:extLst>
       <p:ext uri="{BB962C8B-B14F-4D97-AF65-F5344CB8AC3E}">
-        <p14:creationId xmlns:p14="http://schemas.microsoft.com/office/powerpoint/2010/main" val="2121113961"/>
+        <p14:creationId xmlns:p14="http://schemas.microsoft.com/office/powerpoint/2010/main" val="255391002"/>
       </p:ext>
     </p:extLst>
   </p:cSld>
@@ -13646,7 +13682,7 @@
           <p:cNvPr id="16" name="Lesdoelen">
             <a:extLst xmlns:a="http://schemas.openxmlformats.org/drawingml/2006/main">
               <a:ext uri="{FF2B5EF4-FFF2-40B4-BE49-F238E27FC236}">
-                <a16:creationId xmlns:a16="http://schemas.microsoft.com/office/drawing/2014/main" id="{2DAA0AC5-F644-4E7E-BD83-8AEFE8AA63D8}"/>
+                <a16:creationId xmlns:a16="http://schemas.microsoft.com/office/drawing/2014/main" id="{C5036522-B1D6-4DBA-A71E-6FEF188949CC}"/>
               </a:ext>
             </a:extLst>
           </p:cNvPr>
@@ -13703,7 +13739,7 @@
           <p:cNvPr id="2" name="">
             <a:extLst xmlns:a="http://schemas.openxmlformats.org/drawingml/2006/main">
               <a:ext uri="{FF2B5EF4-FFF2-40B4-BE49-F238E27FC236}">
-                <a16:creationId xmlns:a16="http://schemas.microsoft.com/office/drawing/2014/main" id="{91313512-6FBC-4BB7-8F37-DE8A37BAF36C}"/>
+                <a16:creationId xmlns:a16="http://schemas.microsoft.com/office/drawing/2014/main" id="{BB5FD95D-73A3-44A8-A6DC-9ABAE73F681A}"/>
               </a:ext>
             </a:extLst>
           </p:cNvPr>
@@ -13732,7 +13768,7 @@
           <p:cNvPr id="3" name="§2.2.2 Elasticiteit en omzet">
             <a:extLst xmlns:a="http://schemas.openxmlformats.org/drawingml/2006/main">
               <a:ext uri="{FF2B5EF4-FFF2-40B4-BE49-F238E27FC236}">
-                <a16:creationId xmlns:a16="http://schemas.microsoft.com/office/drawing/2014/main" id="{CFFD021F-5C48-4E72-BB76-8088AB3B8D82}"/>
+                <a16:creationId xmlns:a16="http://schemas.microsoft.com/office/drawing/2014/main" id="{074D3A15-D1A2-446F-8054-D9DAB2F57359}"/>
               </a:ext>
             </a:extLst>
           </p:cNvPr>
@@ -13789,7 +13825,7 @@
           <p:cNvPr id="4" name="2">
             <a:extLst xmlns:a="http://schemas.openxmlformats.org/drawingml/2006/main">
               <a:ext uri="{FF2B5EF4-FFF2-40B4-BE49-F238E27FC236}">
-                <a16:creationId xmlns:a16="http://schemas.microsoft.com/office/drawing/2014/main" id="{CE126265-001C-49EB-B1E0-3D7E1A1E7F60}"/>
+                <a16:creationId xmlns:a16="http://schemas.microsoft.com/office/drawing/2014/main" id="{49849C96-278D-4DEE-A3EC-7625660DAFAD}"/>
               </a:ext>
             </a:extLst>
           </p:cNvPr>
@@ -13846,7 +13882,7 @@
           <p:cNvPr id="5" name="Omzet vergelijken">
             <a:extLst xmlns:a="http://schemas.openxmlformats.org/drawingml/2006/main">
               <a:ext uri="{FF2B5EF4-FFF2-40B4-BE49-F238E27FC236}">
-                <a16:creationId xmlns:a16="http://schemas.microsoft.com/office/drawing/2014/main" id="{E8E49CC8-C212-4CD1-90AA-89E4B8D128C3}"/>
+                <a16:creationId xmlns:a16="http://schemas.microsoft.com/office/drawing/2014/main" id="{997D7CEC-5B4C-4E78-B0CD-D3CA0D3BB07F}"/>
               </a:ext>
             </a:extLst>
           </p:cNvPr>
@@ -13903,7 +13939,7 @@
           <p:cNvPr id="6" name="Je berekent TO vóór en na de prijswijziging.">
             <a:extLst xmlns:a="http://schemas.openxmlformats.org/drawingml/2006/main">
               <a:ext uri="{FF2B5EF4-FFF2-40B4-BE49-F238E27FC236}">
-                <a16:creationId xmlns:a16="http://schemas.microsoft.com/office/drawing/2014/main" id="{E4FE6869-711A-408F-9EFA-6CF3EE873DE5}"/>
+                <a16:creationId xmlns:a16="http://schemas.microsoft.com/office/drawing/2014/main" id="{DA4E2A83-9750-4CBD-B90B-7A2DF3E46964}"/>
               </a:ext>
             </a:extLst>
           </p:cNvPr>
@@ -13960,7 +13996,7 @@
           <p:cNvPr id="7" name="">
             <a:extLst xmlns:a="http://schemas.openxmlformats.org/drawingml/2006/main">
               <a:ext uri="{FF2B5EF4-FFF2-40B4-BE49-F238E27FC236}">
-                <a16:creationId xmlns:a16="http://schemas.microsoft.com/office/drawing/2014/main" id="{6325D0B0-4919-4C6A-AB75-1DAD006A368E}"/>
+                <a16:creationId xmlns:a16="http://schemas.microsoft.com/office/drawing/2014/main" id="{5E65FF15-957E-4B64-B7CD-402C18FED422}"/>
               </a:ext>
             </a:extLst>
           </p:cNvPr>
@@ -13989,7 +14025,7 @@
           <p:cNvPr id="8" name="Een verandering in procenten">
             <a:extLst xmlns:a="http://schemas.openxmlformats.org/drawingml/2006/main">
               <a:ext uri="{FF2B5EF4-FFF2-40B4-BE49-F238E27FC236}">
-                <a16:creationId xmlns:a16="http://schemas.microsoft.com/office/drawing/2014/main" id="{5B2644F2-654D-469F-96F8-DC9FBF33443D}"/>
+                <a16:creationId xmlns:a16="http://schemas.microsoft.com/office/drawing/2014/main" id="{20A15BA4-2A18-4CD6-BAE1-9658192434CA}"/>
               </a:ext>
             </a:extLst>
           </p:cNvPr>
@@ -14046,7 +14082,7 @@
           <p:cNvPr id="9" name="Je vergelijkt het verschil met de oude omzet.">
             <a:extLst xmlns:a="http://schemas.openxmlformats.org/drawingml/2006/main">
               <a:ext uri="{FF2B5EF4-FFF2-40B4-BE49-F238E27FC236}">
-                <a16:creationId xmlns:a16="http://schemas.microsoft.com/office/drawing/2014/main" id="{BA0B1C0A-AEFB-4D78-B314-F270538C3577}"/>
+                <a16:creationId xmlns:a16="http://schemas.microsoft.com/office/drawing/2014/main" id="{2F4ECDC0-089C-4BF0-BD17-2FE6436422AE}"/>
               </a:ext>
             </a:extLst>
           </p:cNvPr>
@@ -14103,7 +14139,7 @@
           <p:cNvPr id="10" name="">
             <a:extLst xmlns:a="http://schemas.openxmlformats.org/drawingml/2006/main">
               <a:ext uri="{FF2B5EF4-FFF2-40B4-BE49-F238E27FC236}">
-                <a16:creationId xmlns:a16="http://schemas.microsoft.com/office/drawing/2014/main" id="{C4BE2911-E205-423D-A3D0-B307DDFEA775}"/>
+                <a16:creationId xmlns:a16="http://schemas.microsoft.com/office/drawing/2014/main" id="{DC9156A5-00A8-42B7-AF0F-CAFA372BAC6D}"/>
               </a:ext>
             </a:extLst>
           </p:cNvPr>
@@ -14132,7 +14168,7 @@
           <p:cNvPr id="11" name="Elasticiteit gebruiken">
             <a:extLst xmlns:a="http://schemas.openxmlformats.org/drawingml/2006/main">
               <a:ext uri="{FF2B5EF4-FFF2-40B4-BE49-F238E27FC236}">
-                <a16:creationId xmlns:a16="http://schemas.microsoft.com/office/drawing/2014/main" id="{3BE7C1B6-9148-49F4-808C-B24F8F1CB0EC}"/>
+                <a16:creationId xmlns:a16="http://schemas.microsoft.com/office/drawing/2014/main" id="{67E19A68-D317-4CAA-983E-7132A5CBA748}"/>
               </a:ext>
             </a:extLst>
           </p:cNvPr>
@@ -14189,7 +14225,7 @@
           <p:cNvPr id="12" name="Je verklaart de uitkomst en de grens van de lokale">
             <a:extLst xmlns:a="http://schemas.openxmlformats.org/drawingml/2006/main">
               <a:ext uri="{FF2B5EF4-FFF2-40B4-BE49-F238E27FC236}">
-                <a16:creationId xmlns:a16="http://schemas.microsoft.com/office/drawing/2014/main" id="{87BE9092-1424-4BC5-88CE-0B5DA0FA9E10}"/>
+                <a16:creationId xmlns:a16="http://schemas.microsoft.com/office/drawing/2014/main" id="{5A59EE8E-480C-43D7-8AD4-06528C681B98}"/>
               </a:ext>
             </a:extLst>
           </p:cNvPr>
@@ -14246,7 +14282,7 @@
           <p:cNvPr id="13" name="">
             <a:extLst xmlns:a="http://schemas.openxmlformats.org/drawingml/2006/main">
               <a:ext uri="{FF2B5EF4-FFF2-40B4-BE49-F238E27FC236}">
-                <a16:creationId xmlns:a16="http://schemas.microsoft.com/office/drawing/2014/main" id="{54BA3FDC-4B24-4945-B7A5-666D08E3C3F2}"/>
+                <a16:creationId xmlns:a16="http://schemas.microsoft.com/office/drawing/2014/main" id="{DE855CD8-D4D1-4CF3-8D55-5712574AD5FD}"/>
               </a:ext>
             </a:extLst>
           </p:cNvPr>
@@ -14275,7 +14311,7 @@
           <p:cNvPr id="14" name="Winst onderscheiden">
             <a:extLst xmlns:a="http://schemas.openxmlformats.org/drawingml/2006/main">
               <a:ext uri="{FF2B5EF4-FFF2-40B4-BE49-F238E27FC236}">
-                <a16:creationId xmlns:a16="http://schemas.microsoft.com/office/drawing/2014/main" id="{1A9FFEF8-2BF2-4B33-801D-875099AA46C8}"/>
+                <a16:creationId xmlns:a16="http://schemas.microsoft.com/office/drawing/2014/main" id="{4A17EE7F-E299-43E4-87A6-35A98D570597}"/>
               </a:ext>
             </a:extLst>
           </p:cNvPr>
@@ -14332,7 +14368,7 @@
           <p:cNvPr id="15" name="Je benoemt welke kostengegevens nog ontbreken.">
             <a:extLst xmlns:a="http://schemas.openxmlformats.org/drawingml/2006/main">
               <a:ext uri="{FF2B5EF4-FFF2-40B4-BE49-F238E27FC236}">
-                <a16:creationId xmlns:a16="http://schemas.microsoft.com/office/drawing/2014/main" id="{ED47F2AC-F8C7-41B8-A5BD-EB167A0642FE}"/>
+                <a16:creationId xmlns:a16="http://schemas.microsoft.com/office/drawing/2014/main" id="{43766ED8-22F8-4977-BFAA-33C0EBE8825E}"/>
               </a:ext>
             </a:extLst>
           </p:cNvPr>
@@ -14387,7 +14423,7 @@
     </p:spTree>
     <p:extLst>
       <p:ext uri="{BB962C8B-B14F-4D97-AF65-F5344CB8AC3E}">
-        <p14:creationId xmlns:p14="http://schemas.microsoft.com/office/powerpoint/2010/main" val="385122778"/>
+        <p14:creationId xmlns:p14="http://schemas.microsoft.com/office/powerpoint/2010/main" val="1748820780"/>
       </p:ext>
     </p:extLst>
   </p:cSld>
@@ -14418,7 +14454,7 @@
           <p:cNvPr id="10" name="Opgave 7b: Nova, verandering en Ev">
             <a:extLst xmlns:a="http://schemas.openxmlformats.org/drawingml/2006/main">
               <a:ext uri="{FF2B5EF4-FFF2-40B4-BE49-F238E27FC236}">
-                <a16:creationId xmlns:a16="http://schemas.microsoft.com/office/drawing/2014/main" id="{C7F6B424-C2EB-47FB-B73D-DE00FCFD8857}"/>
+                <a16:creationId xmlns:a16="http://schemas.microsoft.com/office/drawing/2014/main" id="{03490F49-6E9D-4F84-8C82-3B2E3A483750}"/>
               </a:ext>
             </a:extLst>
           </p:cNvPr>
@@ -14475,7 +14511,7 @@
           <p:cNvPr id="2" name="">
             <a:extLst xmlns:a="http://schemas.openxmlformats.org/drawingml/2006/main">
               <a:ext uri="{FF2B5EF4-FFF2-40B4-BE49-F238E27FC236}">
-                <a16:creationId xmlns:a16="http://schemas.microsoft.com/office/drawing/2014/main" id="{4301FDD1-A1AC-4C54-B3D5-FB58FDBD7A22}"/>
+                <a16:creationId xmlns:a16="http://schemas.microsoft.com/office/drawing/2014/main" id="{21D983F6-F588-46FE-B7D4-8638A10AA5C4}"/>
               </a:ext>
             </a:extLst>
           </p:cNvPr>
@@ -14504,7 +14540,7 @@
           <p:cNvPr id="3" name="§2.2.2 Elasticiteit en omzet · Opgave 7 · Boekpagi">
             <a:extLst xmlns:a="http://schemas.openxmlformats.org/drawingml/2006/main">
               <a:ext uri="{FF2B5EF4-FFF2-40B4-BE49-F238E27FC236}">
-                <a16:creationId xmlns:a16="http://schemas.microsoft.com/office/drawing/2014/main" id="{5F51E753-A2CA-4EDA-A178-6619A012AE8A}"/>
+                <a16:creationId xmlns:a16="http://schemas.microsoft.com/office/drawing/2014/main" id="{CAD2C042-0A11-4BA8-8070-493CBDB4CD65}"/>
               </a:ext>
             </a:extLst>
           </p:cNvPr>
@@ -14561,7 +14597,7 @@
           <p:cNvPr id="4" name="20">
             <a:extLst xmlns:a="http://schemas.openxmlformats.org/drawingml/2006/main">
               <a:ext uri="{FF2B5EF4-FFF2-40B4-BE49-F238E27FC236}">
-                <a16:creationId xmlns:a16="http://schemas.microsoft.com/office/drawing/2014/main" id="{756F8576-446C-4A5E-A49F-B10A1FC6A03A}"/>
+                <a16:creationId xmlns:a16="http://schemas.microsoft.com/office/drawing/2014/main" id="{C3C38FC3-D3D6-4EC4-904A-4D76BA5EB2D2}"/>
               </a:ext>
             </a:extLst>
           </p:cNvPr>
@@ -14618,7 +14654,7 @@
           <p:cNvPr id="5" name="%ΔTO = (TO nieuw − TO oud) / TO oud × 100%">
             <a:extLst xmlns:a="http://schemas.openxmlformats.org/drawingml/2006/main">
               <a:ext uri="{FF2B5EF4-FFF2-40B4-BE49-F238E27FC236}">
-                <a16:creationId xmlns:a16="http://schemas.microsoft.com/office/drawing/2014/main" id="{D77A8BBF-861B-47EB-B2AA-DCDC8FC1534A}"/>
+                <a16:creationId xmlns:a16="http://schemas.microsoft.com/office/drawing/2014/main" id="{563A1C65-41F9-4DD5-B343-29BE4CC2A51A}"/>
               </a:ext>
             </a:extLst>
           </p:cNvPr>
@@ -14675,7 +14711,7 @@
           <p:cNvPr id="6" name="= (5.040 − 5.000) / 5.000 × 100% = +0,8%">
             <a:extLst xmlns:a="http://schemas.openxmlformats.org/drawingml/2006/main">
               <a:ext uri="{FF2B5EF4-FFF2-40B4-BE49-F238E27FC236}">
-                <a16:creationId xmlns:a16="http://schemas.microsoft.com/office/drawing/2014/main" id="{B9B21610-B9AF-4918-B5A3-A614036EFB27}"/>
+                <a16:creationId xmlns:a16="http://schemas.microsoft.com/office/drawing/2014/main" id="{5C0EF1AA-6702-4D0A-92B3-DC5D175CFC69}"/>
               </a:ext>
             </a:extLst>
           </p:cNvPr>
@@ -14903,7 +14939,7 @@
           <p:cNvPr id="8" name="Prijsinelastisch: −1 &lt; −0,8 &lt; 0.">
             <a:extLst xmlns:a="http://schemas.openxmlformats.org/drawingml/2006/main">
               <a:ext uri="{FF2B5EF4-FFF2-40B4-BE49-F238E27FC236}">
-                <a16:creationId xmlns:a16="http://schemas.microsoft.com/office/drawing/2014/main" id="{92A6CBB8-6C95-4850-AAF1-EB451A15409D}"/>
+                <a16:creationId xmlns:a16="http://schemas.microsoft.com/office/drawing/2014/main" id="{2A4C583E-AB3B-44EB-BBD9-39433CFCF73D}"/>
               </a:ext>
             </a:extLst>
           </p:cNvPr>
@@ -14960,7 +14996,7 @@
           <p:cNvPr id="9" name="De relatief zwakke afzetdaling past hier bij de om">
             <a:extLst xmlns:a="http://schemas.openxmlformats.org/drawingml/2006/main">
               <a:ext uri="{FF2B5EF4-FFF2-40B4-BE49-F238E27FC236}">
-                <a16:creationId xmlns:a16="http://schemas.microsoft.com/office/drawing/2014/main" id="{37ADBA44-D6DB-4A78-BB71-17BF55AC7D03}"/>
+                <a16:creationId xmlns:a16="http://schemas.microsoft.com/office/drawing/2014/main" id="{3AA1E3A0-9465-4C32-8AAC-7862A939612B}"/>
               </a:ext>
             </a:extLst>
           </p:cNvPr>
@@ -15015,7 +15051,7 @@
     </p:spTree>
     <p:extLst>
       <p:ext uri="{BB962C8B-B14F-4D97-AF65-F5344CB8AC3E}">
-        <p14:creationId xmlns:p14="http://schemas.microsoft.com/office/powerpoint/2010/main" val="1703258804"/>
+        <p14:creationId xmlns:p14="http://schemas.microsoft.com/office/powerpoint/2010/main" val="163836435"/>
       </p:ext>
     </p:extLst>
   </p:cSld>
@@ -15046,7 +15082,7 @@
           <p:cNvPr id="8" name="Opgave 7c: StreamNow, omzet vóór en na">
             <a:extLst xmlns:a="http://schemas.openxmlformats.org/drawingml/2006/main">
               <a:ext uri="{FF2B5EF4-FFF2-40B4-BE49-F238E27FC236}">
-                <a16:creationId xmlns:a16="http://schemas.microsoft.com/office/drawing/2014/main" id="{3BB1547C-089A-441C-A4A9-3E3512AD5D3C}"/>
+                <a16:creationId xmlns:a16="http://schemas.microsoft.com/office/drawing/2014/main" id="{62A5FA28-3409-4151-8737-585A10071C45}"/>
               </a:ext>
             </a:extLst>
           </p:cNvPr>
@@ -15103,7 +15139,7 @@
           <p:cNvPr id="2" name="">
             <a:extLst xmlns:a="http://schemas.openxmlformats.org/drawingml/2006/main">
               <a:ext uri="{FF2B5EF4-FFF2-40B4-BE49-F238E27FC236}">
-                <a16:creationId xmlns:a16="http://schemas.microsoft.com/office/drawing/2014/main" id="{3C3C3D3F-A9F3-4792-97D9-24CE015DB98B}"/>
+                <a16:creationId xmlns:a16="http://schemas.microsoft.com/office/drawing/2014/main" id="{E2C9ED83-8F15-4DE6-BEDD-0DADAF02CAA0}"/>
               </a:ext>
             </a:extLst>
           </p:cNvPr>
@@ -15132,7 +15168,7 @@
           <p:cNvPr id="3" name="§2.2.2 Elasticiteit en omzet · Opgave 7 · Boekpagi">
             <a:extLst xmlns:a="http://schemas.openxmlformats.org/drawingml/2006/main">
               <a:ext uri="{FF2B5EF4-FFF2-40B4-BE49-F238E27FC236}">
-                <a16:creationId xmlns:a16="http://schemas.microsoft.com/office/drawing/2014/main" id="{FB43202F-26AC-4400-A22F-EFAE8B23D1C0}"/>
+                <a16:creationId xmlns:a16="http://schemas.microsoft.com/office/drawing/2014/main" id="{4D1630A8-53E8-430D-B905-A57824372C49}"/>
               </a:ext>
             </a:extLst>
           </p:cNvPr>
@@ -15189,7 +15225,7 @@
           <p:cNvPr id="4" name="21">
             <a:extLst xmlns:a="http://schemas.openxmlformats.org/drawingml/2006/main">
               <a:ext uri="{FF2B5EF4-FFF2-40B4-BE49-F238E27FC236}">
-                <a16:creationId xmlns:a16="http://schemas.microsoft.com/office/drawing/2014/main" id="{A8A5527E-8A5F-4C65-8C38-3DA463A5C2E4}"/>
+                <a16:creationId xmlns:a16="http://schemas.microsoft.com/office/drawing/2014/main" id="{B7582F16-7CDB-45D6-A8EE-9C168BC0B8A5}"/>
               </a:ext>
             </a:extLst>
           </p:cNvPr>
@@ -15246,7 +15282,7 @@
           <p:cNvPr id="5" name="TO = P × Q">
             <a:extLst xmlns:a="http://schemas.openxmlformats.org/drawingml/2006/main">
               <a:ext uri="{FF2B5EF4-FFF2-40B4-BE49-F238E27FC236}">
-                <a16:creationId xmlns:a16="http://schemas.microsoft.com/office/drawing/2014/main" id="{49E969EE-D9E1-4E17-A621-D86BC44F439E}"/>
+                <a16:creationId xmlns:a16="http://schemas.microsoft.com/office/drawing/2014/main" id="{0F236051-40A3-4E7E-9579-F0E03243695E}"/>
               </a:ext>
             </a:extLst>
           </p:cNvPr>
@@ -15548,7 +15584,7 @@
           <p:cNvPr id="7" name="Controle: € 2.400 minder omzet per maand.">
             <a:extLst xmlns:a="http://schemas.openxmlformats.org/drawingml/2006/main">
               <a:ext uri="{FF2B5EF4-FFF2-40B4-BE49-F238E27FC236}">
-                <a16:creationId xmlns:a16="http://schemas.microsoft.com/office/drawing/2014/main" id="{69D1C0B7-1323-48F1-8F09-C913FC581A21}"/>
+                <a16:creationId xmlns:a16="http://schemas.microsoft.com/office/drawing/2014/main" id="{66093F0E-0ACA-46E3-A233-A32AA82F29E8}"/>
               </a:ext>
             </a:extLst>
           </p:cNvPr>
@@ -15603,7 +15639,7 @@
     </p:spTree>
     <p:extLst>
       <p:ext uri="{BB962C8B-B14F-4D97-AF65-F5344CB8AC3E}">
-        <p14:creationId xmlns:p14="http://schemas.microsoft.com/office/powerpoint/2010/main" val="854910033"/>
+        <p14:creationId xmlns:p14="http://schemas.microsoft.com/office/powerpoint/2010/main" val="852734567"/>
       </p:ext>
     </p:extLst>
   </p:cSld>
@@ -15634,7 +15670,7 @@
           <p:cNvPr id="10" name="Opgave 7d: StreamNow, verandering en Ev">
             <a:extLst xmlns:a="http://schemas.openxmlformats.org/drawingml/2006/main">
               <a:ext uri="{FF2B5EF4-FFF2-40B4-BE49-F238E27FC236}">
-                <a16:creationId xmlns:a16="http://schemas.microsoft.com/office/drawing/2014/main" id="{FFCF1833-D314-4C02-A4A8-46082E60A0F0}"/>
+                <a16:creationId xmlns:a16="http://schemas.microsoft.com/office/drawing/2014/main" id="{14849A09-EEF6-4DBE-8C88-7313EF164F62}"/>
               </a:ext>
             </a:extLst>
           </p:cNvPr>
@@ -15691,7 +15727,7 @@
           <p:cNvPr id="2" name="">
             <a:extLst xmlns:a="http://schemas.openxmlformats.org/drawingml/2006/main">
               <a:ext uri="{FF2B5EF4-FFF2-40B4-BE49-F238E27FC236}">
-                <a16:creationId xmlns:a16="http://schemas.microsoft.com/office/drawing/2014/main" id="{AE097183-1DC9-4532-82B0-8EA0CFCE3B3D}"/>
+                <a16:creationId xmlns:a16="http://schemas.microsoft.com/office/drawing/2014/main" id="{360F2785-7967-4A3D-B0E1-C26B087E71DA}"/>
               </a:ext>
             </a:extLst>
           </p:cNvPr>
@@ -15720,7 +15756,7 @@
           <p:cNvPr id="3" name="§2.2.2 Elasticiteit en omzet · Opgave 7 · Boekpagi">
             <a:extLst xmlns:a="http://schemas.openxmlformats.org/drawingml/2006/main">
               <a:ext uri="{FF2B5EF4-FFF2-40B4-BE49-F238E27FC236}">
-                <a16:creationId xmlns:a16="http://schemas.microsoft.com/office/drawing/2014/main" id="{EE34540D-A80A-46A0-A475-643EB7F8D007}"/>
+                <a16:creationId xmlns:a16="http://schemas.microsoft.com/office/drawing/2014/main" id="{2C7CBF7D-69D6-48AD-8E80-3A7143F696C4}"/>
               </a:ext>
             </a:extLst>
           </p:cNvPr>
@@ -15777,7 +15813,7 @@
           <p:cNvPr id="4" name="22">
             <a:extLst xmlns:a="http://schemas.openxmlformats.org/drawingml/2006/main">
               <a:ext uri="{FF2B5EF4-FFF2-40B4-BE49-F238E27FC236}">
-                <a16:creationId xmlns:a16="http://schemas.microsoft.com/office/drawing/2014/main" id="{96A22960-6818-4FFD-8452-2337C409BB3C}"/>
+                <a16:creationId xmlns:a16="http://schemas.microsoft.com/office/drawing/2014/main" id="{31DF61BB-9DF4-4014-A149-B64188AEA7FC}"/>
               </a:ext>
             </a:extLst>
           </p:cNvPr>
@@ -15834,7 +15870,7 @@
           <p:cNvPr id="5" name="%ΔTO = (TO nieuw − TO oud) / TO oud × 100%">
             <a:extLst xmlns:a="http://schemas.openxmlformats.org/drawingml/2006/main">
               <a:ext uri="{FF2B5EF4-FFF2-40B4-BE49-F238E27FC236}">
-                <a16:creationId xmlns:a16="http://schemas.microsoft.com/office/drawing/2014/main" id="{BBEEC34F-0A3B-4776-89D5-BB8F40F38C52}"/>
+                <a16:creationId xmlns:a16="http://schemas.microsoft.com/office/drawing/2014/main" id="{9D5E0D8D-A9C0-466C-8267-9F35E53AF35F}"/>
               </a:ext>
             </a:extLst>
           </p:cNvPr>
@@ -15891,7 +15927,7 @@
           <p:cNvPr id="6" name="= (17.600 − 20.000) / 20.000 × 100% = −12%">
             <a:extLst xmlns:a="http://schemas.openxmlformats.org/drawingml/2006/main">
               <a:ext uri="{FF2B5EF4-FFF2-40B4-BE49-F238E27FC236}">
-                <a16:creationId xmlns:a16="http://schemas.microsoft.com/office/drawing/2014/main" id="{EAD22A35-417A-4353-82FA-396E042396B2}"/>
+                <a16:creationId xmlns:a16="http://schemas.microsoft.com/office/drawing/2014/main" id="{B26F3CED-CCBD-4D75-A4C5-886CD83F94A6}"/>
               </a:ext>
             </a:extLst>
           </p:cNvPr>
@@ -16119,7 +16155,7 @@
           <p:cNvPr id="8" name="Prijselastisch: Ev &lt; −1.">
             <a:extLst xmlns:a="http://schemas.openxmlformats.org/drawingml/2006/main">
               <a:ext uri="{FF2B5EF4-FFF2-40B4-BE49-F238E27FC236}">
-                <a16:creationId xmlns:a16="http://schemas.microsoft.com/office/drawing/2014/main" id="{A901CECE-0CE8-4FA3-AA24-0B618F5C6A9D}"/>
+                <a16:creationId xmlns:a16="http://schemas.microsoft.com/office/drawing/2014/main" id="{9DFA5B9A-BF5D-43C0-8351-F0A0562884FA}"/>
               </a:ext>
             </a:extLst>
           </p:cNvPr>
@@ -16176,7 +16212,7 @@
           <p:cNvPr id="9" name="De relatief sterke afzetdaling past hier bij de om">
             <a:extLst xmlns:a="http://schemas.openxmlformats.org/drawingml/2006/main">
               <a:ext uri="{FF2B5EF4-FFF2-40B4-BE49-F238E27FC236}">
-                <a16:creationId xmlns:a16="http://schemas.microsoft.com/office/drawing/2014/main" id="{56312000-327E-409B-AFD9-1A00844719CA}"/>
+                <a16:creationId xmlns:a16="http://schemas.microsoft.com/office/drawing/2014/main" id="{AF426322-B6B1-4E60-A4B5-64199A81D151}"/>
               </a:ext>
             </a:extLst>
           </p:cNvPr>
@@ -16231,7 +16267,7 @@
     </p:spTree>
     <p:extLst>
       <p:ext uri="{BB962C8B-B14F-4D97-AF65-F5344CB8AC3E}">
-        <p14:creationId xmlns:p14="http://schemas.microsoft.com/office/powerpoint/2010/main" val="1848198769"/>
+        <p14:creationId xmlns:p14="http://schemas.microsoft.com/office/powerpoint/2010/main" val="413662535"/>
       </p:ext>
     </p:extLst>
   </p:cSld>
@@ -16262,7 +16298,7 @@
           <p:cNvPr id="8" name="Opgave 7e: de lokale omzetregel">
             <a:extLst xmlns:a="http://schemas.openxmlformats.org/drawingml/2006/main">
               <a:ext uri="{FF2B5EF4-FFF2-40B4-BE49-F238E27FC236}">
-                <a16:creationId xmlns:a16="http://schemas.microsoft.com/office/drawing/2014/main" id="{C31EB2FB-DC7A-454B-85A4-F312125C4BD9}"/>
+                <a16:creationId xmlns:a16="http://schemas.microsoft.com/office/drawing/2014/main" id="{07656620-620D-41CD-BEB9-08E6C0F71AD9}"/>
               </a:ext>
             </a:extLst>
           </p:cNvPr>
@@ -16319,7 +16355,7 @@
           <p:cNvPr id="2" name="">
             <a:extLst xmlns:a="http://schemas.openxmlformats.org/drawingml/2006/main">
               <a:ext uri="{FF2B5EF4-FFF2-40B4-BE49-F238E27FC236}">
-                <a16:creationId xmlns:a16="http://schemas.microsoft.com/office/drawing/2014/main" id="{623F00E2-CEA2-43B9-AF78-239270DB3CC3}"/>
+                <a16:creationId xmlns:a16="http://schemas.microsoft.com/office/drawing/2014/main" id="{D0120C4D-6242-40FC-AAF4-9F497CF784E0}"/>
               </a:ext>
             </a:extLst>
           </p:cNvPr>
@@ -16348,7 +16384,7 @@
           <p:cNvPr id="3" name="§2.2.2 Elasticiteit en omzet · Opgave 7 · Boekpagi">
             <a:extLst xmlns:a="http://schemas.openxmlformats.org/drawingml/2006/main">
               <a:ext uri="{FF2B5EF4-FFF2-40B4-BE49-F238E27FC236}">
-                <a16:creationId xmlns:a16="http://schemas.microsoft.com/office/drawing/2014/main" id="{41558B4E-B580-4A14-A23E-43C257702907}"/>
+                <a16:creationId xmlns:a16="http://schemas.microsoft.com/office/drawing/2014/main" id="{208F3F3A-DA83-4E6D-96F6-F12761D9A2A4}"/>
               </a:ext>
             </a:extLst>
           </p:cNvPr>
@@ -16405,7 +16441,7 @@
           <p:cNvPr id="4" name="23">
             <a:extLst xmlns:a="http://schemas.openxmlformats.org/drawingml/2006/main">
               <a:ext uri="{FF2B5EF4-FFF2-40B4-BE49-F238E27FC236}">
-                <a16:creationId xmlns:a16="http://schemas.microsoft.com/office/drawing/2014/main" id="{1BB6E647-110C-4C07-AAF6-92A803105632}"/>
+                <a16:creationId xmlns:a16="http://schemas.microsoft.com/office/drawing/2014/main" id="{03F6F450-078A-4F6E-8A83-3347B3E224FB}"/>
               </a:ext>
             </a:extLst>
           </p:cNvPr>
@@ -16462,7 +16498,7 @@
           <p:cNvPr id="5" name="Bij een kleine prijsverandering rond de huidige si">
             <a:extLst xmlns:a="http://schemas.openxmlformats.org/drawingml/2006/main">
               <a:ext uri="{FF2B5EF4-FFF2-40B4-BE49-F238E27FC236}">
-                <a16:creationId xmlns:a16="http://schemas.microsoft.com/office/drawing/2014/main" id="{938EA089-AD70-40A6-AC72-B01247030989}"/>
+                <a16:creationId xmlns:a16="http://schemas.microsoft.com/office/drawing/2014/main" id="{B3FD5FC1-9835-44F8-973D-90BD8248F980}"/>
               </a:ext>
             </a:extLst>
           </p:cNvPr>
@@ -16903,7 +16939,7 @@
           <p:cNvPr id="7" name="Bij gegeven oude en nieuwe waarden: TO altijd nare">
             <a:extLst xmlns:a="http://schemas.openxmlformats.org/drawingml/2006/main">
               <a:ext uri="{FF2B5EF4-FFF2-40B4-BE49-F238E27FC236}">
-                <a16:creationId xmlns:a16="http://schemas.microsoft.com/office/drawing/2014/main" id="{337ABF01-10EF-4DA2-9CDE-E7C53578BD98}"/>
+                <a16:creationId xmlns:a16="http://schemas.microsoft.com/office/drawing/2014/main" id="{1EBCBBB9-E9E6-482F-AE63-B2B5B454C627}"/>
               </a:ext>
             </a:extLst>
           </p:cNvPr>
@@ -16958,7 +16994,7 @@
     </p:spTree>
     <p:extLst>
       <p:ext uri="{BB962C8B-B14F-4D97-AF65-F5344CB8AC3E}">
-        <p14:creationId xmlns:p14="http://schemas.microsoft.com/office/powerpoint/2010/main" val="157364395"/>
+        <p14:creationId xmlns:p14="http://schemas.microsoft.com/office/powerpoint/2010/main" val="1129142225"/>
       </p:ext>
     </p:extLst>
   </p:cSld>
@@ -16989,7 +17025,7 @@
           <p:cNvPr id="8" name="Opgave 7e: een grote, eindige verandering">
             <a:extLst xmlns:a="http://schemas.openxmlformats.org/drawingml/2006/main">
               <a:ext uri="{FF2B5EF4-FFF2-40B4-BE49-F238E27FC236}">
-                <a16:creationId xmlns:a16="http://schemas.microsoft.com/office/drawing/2014/main" id="{66ACD139-306F-4448-B084-8644DC44E49C}"/>
+                <a16:creationId xmlns:a16="http://schemas.microsoft.com/office/drawing/2014/main" id="{0285F590-3139-48EE-B057-49C26A309E69}"/>
               </a:ext>
             </a:extLst>
           </p:cNvPr>
@@ -17046,7 +17082,7 @@
           <p:cNvPr id="2" name="">
             <a:extLst xmlns:a="http://schemas.openxmlformats.org/drawingml/2006/main">
               <a:ext uri="{FF2B5EF4-FFF2-40B4-BE49-F238E27FC236}">
-                <a16:creationId xmlns:a16="http://schemas.microsoft.com/office/drawing/2014/main" id="{10598D26-B1EE-448E-B01B-260CAD43203C}"/>
+                <a16:creationId xmlns:a16="http://schemas.microsoft.com/office/drawing/2014/main" id="{619D1A58-CB68-48F5-B03E-7BDE25265B52}"/>
               </a:ext>
             </a:extLst>
           </p:cNvPr>
@@ -17075,7 +17111,7 @@
           <p:cNvPr id="3" name="§2.2.2 Elasticiteit en omzet · Opgave 7 · Boekpagi">
             <a:extLst xmlns:a="http://schemas.openxmlformats.org/drawingml/2006/main">
               <a:ext uri="{FF2B5EF4-FFF2-40B4-BE49-F238E27FC236}">
-                <a16:creationId xmlns:a16="http://schemas.microsoft.com/office/drawing/2014/main" id="{4D9B294C-6841-4C01-BE6E-B1BD375488F4}"/>
+                <a16:creationId xmlns:a16="http://schemas.microsoft.com/office/drawing/2014/main" id="{3B6D8630-CA17-44D8-8E0E-1B2441B8277B}"/>
               </a:ext>
             </a:extLst>
           </p:cNvPr>
@@ -17132,7 +17168,7 @@
           <p:cNvPr id="4" name="24">
             <a:extLst xmlns:a="http://schemas.openxmlformats.org/drawingml/2006/main">
               <a:ext uri="{FF2B5EF4-FFF2-40B4-BE49-F238E27FC236}">
-                <a16:creationId xmlns:a16="http://schemas.microsoft.com/office/drawing/2014/main" id="{52CC9365-A6E5-4FB4-851C-215A81A19E3E}"/>
+                <a16:creationId xmlns:a16="http://schemas.microsoft.com/office/drawing/2014/main" id="{996234D3-9207-44D5-8C41-62E9C4614DB9}"/>
               </a:ext>
             </a:extLst>
           </p:cNvPr>
@@ -17189,7 +17225,7 @@
           <p:cNvPr id="5" name="Een gemeten Ev geldt niet automatisch bij elke pri">
             <a:extLst xmlns:a="http://schemas.openxmlformats.org/drawingml/2006/main">
               <a:ext uri="{FF2B5EF4-FFF2-40B4-BE49-F238E27FC236}">
-                <a16:creationId xmlns:a16="http://schemas.microsoft.com/office/drawing/2014/main" id="{57B48A1E-400A-432A-A251-39E5742BE441}"/>
+                <a16:creationId xmlns:a16="http://schemas.microsoft.com/office/drawing/2014/main" id="{0595B9BE-39E1-4386-8B08-A0C5D01B0539}"/>
               </a:ext>
             </a:extLst>
           </p:cNvPr>
@@ -17246,7 +17282,7 @@
           <p:cNvPr id="6" name="De omzetfactor is de prijsfactor × de hoeveelheids">
             <a:extLst xmlns:a="http://schemas.openxmlformats.org/drawingml/2006/main">
               <a:ext uri="{FF2B5EF4-FFF2-40B4-BE49-F238E27FC236}">
-                <a16:creationId xmlns:a16="http://schemas.microsoft.com/office/drawing/2014/main" id="{5CD4F1F0-7DB4-430A-8F3F-EDA0C615B770}"/>
+                <a16:creationId xmlns:a16="http://schemas.microsoft.com/office/drawing/2014/main" id="{5FC1FF6A-8E4D-4966-B448-215E9784C3EB}"/>
               </a:ext>
             </a:extLst>
           </p:cNvPr>
@@ -17546,7 +17582,7 @@
     </p:spTree>
     <p:extLst>
       <p:ext uri="{BB962C8B-B14F-4D97-AF65-F5344CB8AC3E}">
-        <p14:creationId xmlns:p14="http://schemas.microsoft.com/office/powerpoint/2010/main" val="1272636248"/>
+        <p14:creationId xmlns:p14="http://schemas.microsoft.com/office/powerpoint/2010/main" val="871587023"/>
       </p:ext>
     </p:extLst>
   </p:cSld>
@@ -17577,7 +17613,7 @@
           <p:cNvPr id="8" name="Opgave 7f: de winst is nog onbekend">
             <a:extLst xmlns:a="http://schemas.openxmlformats.org/drawingml/2006/main">
               <a:ext uri="{FF2B5EF4-FFF2-40B4-BE49-F238E27FC236}">
-                <a16:creationId xmlns:a16="http://schemas.microsoft.com/office/drawing/2014/main" id="{63F6AA8C-94B3-4E7E-A8F8-5C69BBC5CEE0}"/>
+                <a16:creationId xmlns:a16="http://schemas.microsoft.com/office/drawing/2014/main" id="{EC791BEF-1193-43C1-9E8D-8531BFACA377}"/>
               </a:ext>
             </a:extLst>
           </p:cNvPr>
@@ -17634,7 +17670,7 @@
           <p:cNvPr id="2" name="">
             <a:extLst xmlns:a="http://schemas.openxmlformats.org/drawingml/2006/main">
               <a:ext uri="{FF2B5EF4-FFF2-40B4-BE49-F238E27FC236}">
-                <a16:creationId xmlns:a16="http://schemas.microsoft.com/office/drawing/2014/main" id="{3F32D717-D815-4D51-9CFC-94B3AF5F4B3C}"/>
+                <a16:creationId xmlns:a16="http://schemas.microsoft.com/office/drawing/2014/main" id="{EE6AE8DF-9AAD-4600-83F4-55B1DF20FC3B}"/>
               </a:ext>
             </a:extLst>
           </p:cNvPr>
@@ -17663,7 +17699,7 @@
           <p:cNvPr id="3" name="§2.2.2 Elasticiteit en omzet · Opgave 7 · Boekpagi">
             <a:extLst xmlns:a="http://schemas.openxmlformats.org/drawingml/2006/main">
               <a:ext uri="{FF2B5EF4-FFF2-40B4-BE49-F238E27FC236}">
-                <a16:creationId xmlns:a16="http://schemas.microsoft.com/office/drawing/2014/main" id="{4C3C5920-E119-4057-81D6-B81DFF1E274C}"/>
+                <a16:creationId xmlns:a16="http://schemas.microsoft.com/office/drawing/2014/main" id="{5B1E2996-B814-447F-BD28-304A191CE9A0}"/>
               </a:ext>
             </a:extLst>
           </p:cNvPr>
@@ -17720,7 +17756,7 @@
           <p:cNvPr id="4" name="25">
             <a:extLst xmlns:a="http://schemas.openxmlformats.org/drawingml/2006/main">
               <a:ext uri="{FF2B5EF4-FFF2-40B4-BE49-F238E27FC236}">
-                <a16:creationId xmlns:a16="http://schemas.microsoft.com/office/drawing/2014/main" id="{B2E58FFC-8593-42D2-A65C-FD148B887E1C}"/>
+                <a16:creationId xmlns:a16="http://schemas.microsoft.com/office/drawing/2014/main" id="{FF93B253-0D45-431C-9338-BD0084B0BFDF}"/>
               </a:ext>
             </a:extLst>
           </p:cNvPr>
@@ -17777,7 +17813,7 @@
           <p:cNvPr id="5" name="Winst = TO − TK">
             <a:extLst xmlns:a="http://schemas.openxmlformats.org/drawingml/2006/main">
               <a:ext uri="{FF2B5EF4-FFF2-40B4-BE49-F238E27FC236}">
-                <a16:creationId xmlns:a16="http://schemas.microsoft.com/office/drawing/2014/main" id="{CFAA4EC1-8E33-4983-A44E-EE4984C20CA2}"/>
+                <a16:creationId xmlns:a16="http://schemas.microsoft.com/office/drawing/2014/main" id="{F3A9198B-476C-42F6-83D3-B240F2062AF5}"/>
               </a:ext>
             </a:extLst>
           </p:cNvPr>
@@ -17956,7 +17992,7 @@
           <p:cNvPr id="7" name="Zonder kosten vóór en na volgt geen zekere winstve">
             <a:extLst xmlns:a="http://schemas.openxmlformats.org/drawingml/2006/main">
               <a:ext uri="{FF2B5EF4-FFF2-40B4-BE49-F238E27FC236}">
-                <a16:creationId xmlns:a16="http://schemas.microsoft.com/office/drawing/2014/main" id="{44019AB8-57CC-4048-A6DF-A0AFD3D6C46C}"/>
+                <a16:creationId xmlns:a16="http://schemas.microsoft.com/office/drawing/2014/main" id="{D018233D-F01F-4A3C-A425-616B10D99C46}"/>
               </a:ext>
             </a:extLst>
           </p:cNvPr>
@@ -18011,7 +18047,7 @@
     </p:spTree>
     <p:extLst>
       <p:ext uri="{BB962C8B-B14F-4D97-AF65-F5344CB8AC3E}">
-        <p14:creationId xmlns:p14="http://schemas.microsoft.com/office/powerpoint/2010/main" val="1877949273"/>
+        <p14:creationId xmlns:p14="http://schemas.microsoft.com/office/powerpoint/2010/main" val="286161603"/>
       </p:ext>
     </p:extLst>
   </p:cSld>
@@ -18042,7 +18078,7 @@
           <p:cNvPr id="29" name="Deze les: §2.2.2 Elasticiteit en omzet">
             <a:extLst xmlns:a="http://schemas.openxmlformats.org/drawingml/2006/main">
               <a:ext uri="{FF2B5EF4-FFF2-40B4-BE49-F238E27FC236}">
-                <a16:creationId xmlns:a16="http://schemas.microsoft.com/office/drawing/2014/main" id="{B391B46C-F555-4679-AE1C-6E6F4FE6FD59}"/>
+                <a16:creationId xmlns:a16="http://schemas.microsoft.com/office/drawing/2014/main" id="{A43E35D8-BF91-41D0-BD82-0EEA2CDDAC15}"/>
               </a:ext>
             </a:extLst>
           </p:cNvPr>
@@ -18099,7 +18135,7 @@
           <p:cNvPr id="2" name="">
             <a:extLst xmlns:a="http://schemas.openxmlformats.org/drawingml/2006/main">
               <a:ext uri="{FF2B5EF4-FFF2-40B4-BE49-F238E27FC236}">
-                <a16:creationId xmlns:a16="http://schemas.microsoft.com/office/drawing/2014/main" id="{40F22FD0-F6E8-497A-8900-1889A82020E3}"/>
+                <a16:creationId xmlns:a16="http://schemas.microsoft.com/office/drawing/2014/main" id="{D6AD50A8-ED87-4B37-AD48-134176CECFEB}"/>
               </a:ext>
             </a:extLst>
           </p:cNvPr>
@@ -18128,7 +18164,7 @@
           <p:cNvPr id="3" name="§2.2.2 Elasticiteit en omzet">
             <a:extLst xmlns:a="http://schemas.openxmlformats.org/drawingml/2006/main">
               <a:ext uri="{FF2B5EF4-FFF2-40B4-BE49-F238E27FC236}">
-                <a16:creationId xmlns:a16="http://schemas.microsoft.com/office/drawing/2014/main" id="{E815AE13-0646-4920-A40D-0B39BD1B0428}"/>
+                <a16:creationId xmlns:a16="http://schemas.microsoft.com/office/drawing/2014/main" id="{8CBD0CF5-B3CD-4E8F-B918-DAF7A2BD2CC8}"/>
               </a:ext>
             </a:extLst>
           </p:cNvPr>
@@ -18185,7 +18221,7 @@
           <p:cNvPr id="4" name="26">
             <a:extLst xmlns:a="http://schemas.openxmlformats.org/drawingml/2006/main">
               <a:ext uri="{FF2B5EF4-FFF2-40B4-BE49-F238E27FC236}">
-                <a16:creationId xmlns:a16="http://schemas.microsoft.com/office/drawing/2014/main" id="{64A46E70-FDA3-4393-87E4-749AE1389573}"/>
+                <a16:creationId xmlns:a16="http://schemas.microsoft.com/office/drawing/2014/main" id="{FB07952B-0E62-4538-B786-2965362CC157}"/>
               </a:ext>
             </a:extLst>
           </p:cNvPr>
@@ -18242,7 +18278,7 @@
           <p:cNvPr id="5" name="phase">
             <a:extLst xmlns:a="http://schemas.openxmlformats.org/drawingml/2006/main">
               <a:ext uri="{FF2B5EF4-FFF2-40B4-BE49-F238E27FC236}">
-                <a16:creationId xmlns:a16="http://schemas.microsoft.com/office/drawing/2014/main" id="{A8ECCC12-F5F4-4AB6-BEE4-FC9EE194B13A}"/>
+                <a16:creationId xmlns:a16="http://schemas.microsoft.com/office/drawing/2014/main" id="{CFB4F1E1-EFFC-4E1A-90A3-0172DC9B6F79}"/>
               </a:ext>
             </a:extLst>
           </p:cNvPr>
@@ -18299,7 +18335,7 @@
           <p:cNvPr id="6" name="Lesroute">
             <a:extLst xmlns:a="http://schemas.openxmlformats.org/drawingml/2006/main">
               <a:ext uri="{FF2B5EF4-FFF2-40B4-BE49-F238E27FC236}">
-                <a16:creationId xmlns:a16="http://schemas.microsoft.com/office/drawing/2014/main" id="{EAE3216E-19B0-4C4D-A0A5-9CC8D10826FC}"/>
+                <a16:creationId xmlns:a16="http://schemas.microsoft.com/office/drawing/2014/main" id="{BC74D23B-4E84-47EE-995C-7324F34F0068}"/>
               </a:ext>
             </a:extLst>
           </p:cNvPr>
@@ -18356,7 +18392,7 @@
           <p:cNvPr id="7" name="route-number-1">
             <a:extLst xmlns:a="http://schemas.openxmlformats.org/drawingml/2006/main">
               <a:ext uri="{FF2B5EF4-FFF2-40B4-BE49-F238E27FC236}">
-                <a16:creationId xmlns:a16="http://schemas.microsoft.com/office/drawing/2014/main" id="{56AA59A9-3E7F-4199-B3D1-B1591BD4FEC7}"/>
+                <a16:creationId xmlns:a16="http://schemas.microsoft.com/office/drawing/2014/main" id="{91CA0E41-5CB0-44DA-8C76-7BC6412695B2}"/>
               </a:ext>
             </a:extLst>
           </p:cNvPr>
@@ -18413,7 +18449,7 @@
           <p:cNvPr id="8" name="route-1">
             <a:extLst xmlns:a="http://schemas.openxmlformats.org/drawingml/2006/main">
               <a:ext uri="{FF2B5EF4-FFF2-40B4-BE49-F238E27FC236}">
-                <a16:creationId xmlns:a16="http://schemas.microsoft.com/office/drawing/2014/main" id="{9A7094D2-F5E6-4068-ADAB-1922EC4618D5}"/>
+                <a16:creationId xmlns:a16="http://schemas.microsoft.com/office/drawing/2014/main" id="{DE764993-BFE6-4716-8E17-DD4EDFBAC0BE}"/>
               </a:ext>
             </a:extLst>
           </p:cNvPr>
@@ -18470,7 +18506,7 @@
           <p:cNvPr id="9" name="route-number-2">
             <a:extLst xmlns:a="http://schemas.openxmlformats.org/drawingml/2006/main">
               <a:ext uri="{FF2B5EF4-FFF2-40B4-BE49-F238E27FC236}">
-                <a16:creationId xmlns:a16="http://schemas.microsoft.com/office/drawing/2014/main" id="{C9A483A3-F8EC-4252-9DF9-3B54B824F537}"/>
+                <a16:creationId xmlns:a16="http://schemas.microsoft.com/office/drawing/2014/main" id="{51943A16-513A-4E05-9E42-F01D9D92AD8A}"/>
               </a:ext>
             </a:extLst>
           </p:cNvPr>
@@ -18527,7 +18563,7 @@
           <p:cNvPr id="10" name="route-2">
             <a:extLst xmlns:a="http://schemas.openxmlformats.org/drawingml/2006/main">
               <a:ext uri="{FF2B5EF4-FFF2-40B4-BE49-F238E27FC236}">
-                <a16:creationId xmlns:a16="http://schemas.microsoft.com/office/drawing/2014/main" id="{8B5F6D5F-3676-4ECE-B973-616F00BB3FEB}"/>
+                <a16:creationId xmlns:a16="http://schemas.microsoft.com/office/drawing/2014/main" id="{41901A29-21FD-4268-93E0-28F6EE0175AF}"/>
               </a:ext>
             </a:extLst>
           </p:cNvPr>
@@ -18584,7 +18620,7 @@
           <p:cNvPr id="11" name="route-number-3">
             <a:extLst xmlns:a="http://schemas.openxmlformats.org/drawingml/2006/main">
               <a:ext uri="{FF2B5EF4-FFF2-40B4-BE49-F238E27FC236}">
-                <a16:creationId xmlns:a16="http://schemas.microsoft.com/office/drawing/2014/main" id="{329AADBB-1315-4334-B41D-68F5F4179991}"/>
+                <a16:creationId xmlns:a16="http://schemas.microsoft.com/office/drawing/2014/main" id="{6CC765FF-ADCA-48AE-B2D9-A6D475F35C3E}"/>
               </a:ext>
             </a:extLst>
           </p:cNvPr>
@@ -18641,7 +18677,7 @@
           <p:cNvPr id="12" name="route-3">
             <a:extLst xmlns:a="http://schemas.openxmlformats.org/drawingml/2006/main">
               <a:ext uri="{FF2B5EF4-FFF2-40B4-BE49-F238E27FC236}">
-                <a16:creationId xmlns:a16="http://schemas.microsoft.com/office/drawing/2014/main" id="{F8474224-2CF1-4D8E-AB32-A7386AC8EF24}"/>
+                <a16:creationId xmlns:a16="http://schemas.microsoft.com/office/drawing/2014/main" id="{20EAF27A-EC9D-424D-A640-6EEAAB9F86E8}"/>
               </a:ext>
             </a:extLst>
           </p:cNvPr>
@@ -18698,7 +18734,7 @@
           <p:cNvPr id="13" name="route-number-4">
             <a:extLst xmlns:a="http://schemas.openxmlformats.org/drawingml/2006/main">
               <a:ext uri="{FF2B5EF4-FFF2-40B4-BE49-F238E27FC236}">
-                <a16:creationId xmlns:a16="http://schemas.microsoft.com/office/drawing/2014/main" id="{05A6609A-B4AC-4A89-8CC7-1A9F8EAB7761}"/>
+                <a16:creationId xmlns:a16="http://schemas.microsoft.com/office/drawing/2014/main" id="{6469A7CF-421D-490F-B871-E6B81C2F2B3A}"/>
               </a:ext>
             </a:extLst>
           </p:cNvPr>
@@ -18755,7 +18791,7 @@
           <p:cNvPr id="14" name="route-4">
             <a:extLst xmlns:a="http://schemas.openxmlformats.org/drawingml/2006/main">
               <a:ext uri="{FF2B5EF4-FFF2-40B4-BE49-F238E27FC236}">
-                <a16:creationId xmlns:a16="http://schemas.microsoft.com/office/drawing/2014/main" id="{DB672B84-35C3-4F91-AED8-A5F3F58DE5C7}"/>
+                <a16:creationId xmlns:a16="http://schemas.microsoft.com/office/drawing/2014/main" id="{9D75B045-ACA9-4BB0-B0FA-874AE27AE665}"/>
               </a:ext>
             </a:extLst>
           </p:cNvPr>
@@ -18812,7 +18848,7 @@
           <p:cNvPr id="15" name="route-number-5">
             <a:extLst xmlns:a="http://schemas.openxmlformats.org/drawingml/2006/main">
               <a:ext uri="{FF2B5EF4-FFF2-40B4-BE49-F238E27FC236}">
-                <a16:creationId xmlns:a16="http://schemas.microsoft.com/office/drawing/2014/main" id="{C70853CB-98B9-4946-A7F3-6EB6B6316FEE}"/>
+                <a16:creationId xmlns:a16="http://schemas.microsoft.com/office/drawing/2014/main" id="{01DDCE0E-EA96-4CA1-9351-4DFCA821E328}"/>
               </a:ext>
             </a:extLst>
           </p:cNvPr>
@@ -18869,7 +18905,7 @@
           <p:cNvPr id="16" name="route-5">
             <a:extLst xmlns:a="http://schemas.openxmlformats.org/drawingml/2006/main">
               <a:ext uri="{FF2B5EF4-FFF2-40B4-BE49-F238E27FC236}">
-                <a16:creationId xmlns:a16="http://schemas.microsoft.com/office/drawing/2014/main" id="{0CAB3CB1-18C2-47E4-AF59-193491DBC085}"/>
+                <a16:creationId xmlns:a16="http://schemas.microsoft.com/office/drawing/2014/main" id="{20E6CF1D-A952-4350-AA06-98D70AB2828D}"/>
               </a:ext>
             </a:extLst>
           </p:cNvPr>
@@ -18926,7 +18962,7 @@
           <p:cNvPr id="17" name="route-number-6">
             <a:extLst xmlns:a="http://schemas.openxmlformats.org/drawingml/2006/main">
               <a:ext uri="{FF2B5EF4-FFF2-40B4-BE49-F238E27FC236}">
-                <a16:creationId xmlns:a16="http://schemas.microsoft.com/office/drawing/2014/main" id="{9588A737-515E-47EE-8235-BCE346E5B171}"/>
+                <a16:creationId xmlns:a16="http://schemas.microsoft.com/office/drawing/2014/main" id="{C43F24ED-4F72-40C5-B4AE-AC9DCCF0BE39}"/>
               </a:ext>
             </a:extLst>
           </p:cNvPr>
@@ -18983,7 +19019,7 @@
           <p:cNvPr id="18" name="route-6">
             <a:extLst xmlns:a="http://schemas.openxmlformats.org/drawingml/2006/main">
               <a:ext uri="{FF2B5EF4-FFF2-40B4-BE49-F238E27FC236}">
-                <a16:creationId xmlns:a16="http://schemas.microsoft.com/office/drawing/2014/main" id="{B1B10A56-4728-4789-9C02-04E400F9D704}"/>
+                <a16:creationId xmlns:a16="http://schemas.microsoft.com/office/drawing/2014/main" id="{B9800BB3-57CD-47BA-BFB6-8791521A980A}"/>
               </a:ext>
             </a:extLst>
           </p:cNvPr>
@@ -19040,7 +19076,7 @@
           <p:cNvPr id="19" name="route-number-7">
             <a:extLst xmlns:a="http://schemas.openxmlformats.org/drawingml/2006/main">
               <a:ext uri="{FF2B5EF4-FFF2-40B4-BE49-F238E27FC236}">
-                <a16:creationId xmlns:a16="http://schemas.microsoft.com/office/drawing/2014/main" id="{E1086656-B902-406A-A2DB-3135D5BA563C}"/>
+                <a16:creationId xmlns:a16="http://schemas.microsoft.com/office/drawing/2014/main" id="{43DC781D-29EA-4054-AF28-A19AB4AAD1C3}"/>
               </a:ext>
             </a:extLst>
           </p:cNvPr>
@@ -19097,7 +19133,7 @@
           <p:cNvPr id="20" name="route-7">
             <a:extLst xmlns:a="http://schemas.openxmlformats.org/drawingml/2006/main">
               <a:ext uri="{FF2B5EF4-FFF2-40B4-BE49-F238E27FC236}">
-                <a16:creationId xmlns:a16="http://schemas.microsoft.com/office/drawing/2014/main" id="{D24DA41A-606C-4CF8-A6EA-4454B22EE4CC}"/>
+                <a16:creationId xmlns:a16="http://schemas.microsoft.com/office/drawing/2014/main" id="{2B282774-453F-494D-860F-E593235DB02F}"/>
               </a:ext>
             </a:extLst>
           </p:cNvPr>
@@ -19154,7 +19190,7 @@
           <p:cNvPr id="21" name="Lesdoelen">
             <a:extLst xmlns:a="http://schemas.openxmlformats.org/drawingml/2006/main">
               <a:ext uri="{FF2B5EF4-FFF2-40B4-BE49-F238E27FC236}">
-                <a16:creationId xmlns:a16="http://schemas.microsoft.com/office/drawing/2014/main" id="{68BE3CC4-8C3D-49A1-8FBB-21EED5D4B3B3}"/>
+                <a16:creationId xmlns:a16="http://schemas.microsoft.com/office/drawing/2014/main" id="{8C574900-F88C-4786-A6BE-79D379948183}"/>
               </a:ext>
             </a:extLst>
           </p:cNvPr>
@@ -19211,7 +19247,7 @@
           <p:cNvPr id="22" name="overview-goals">
             <a:extLst xmlns:a="http://schemas.openxmlformats.org/drawingml/2006/main">
               <a:ext uri="{FF2B5EF4-FFF2-40B4-BE49-F238E27FC236}">
-                <a16:creationId xmlns:a16="http://schemas.microsoft.com/office/drawing/2014/main" id="{F0E920C1-CA1F-4612-9094-BE305E51FA0E}"/>
+                <a16:creationId xmlns:a16="http://schemas.microsoft.com/office/drawing/2014/main" id="{E58D5BDA-8772-4033-B04C-2F98F2E988CA}"/>
               </a:ext>
             </a:extLst>
           </p:cNvPr>
@@ -19314,7 +19350,7 @@
           <p:cNvPr id="23" name="">
             <a:extLst xmlns:a="http://schemas.openxmlformats.org/drawingml/2006/main">
               <a:ext uri="{FF2B5EF4-FFF2-40B4-BE49-F238E27FC236}">
-                <a16:creationId xmlns:a16="http://schemas.microsoft.com/office/drawing/2014/main" id="{AC309769-ADAF-494D-8C33-CF40381827A2}"/>
+                <a16:creationId xmlns:a16="http://schemas.microsoft.com/office/drawing/2014/main" id="{DA196773-22B4-4D83-9F67-81F462434E0A}"/>
               </a:ext>
             </a:extLst>
           </p:cNvPr>
@@ -19343,7 +19379,7 @@
           <p:cNvPr id="24" name="Startopdracht">
             <a:extLst xmlns:a="http://schemas.openxmlformats.org/drawingml/2006/main">
               <a:ext uri="{FF2B5EF4-FFF2-40B4-BE49-F238E27FC236}">
-                <a16:creationId xmlns:a16="http://schemas.microsoft.com/office/drawing/2014/main" id="{18895697-683A-4F44-8C6A-A899B6D4727B}"/>
+                <a16:creationId xmlns:a16="http://schemas.microsoft.com/office/drawing/2014/main" id="{548B5773-C111-4A50-B4AB-249A1DA116AF}"/>
               </a:ext>
             </a:extLst>
           </p:cNvPr>
@@ -19400,7 +19436,7 @@
           <p:cNvPr id="25" name="overview-start">
             <a:extLst xmlns:a="http://schemas.openxmlformats.org/drawingml/2006/main">
               <a:ext uri="{FF2B5EF4-FFF2-40B4-BE49-F238E27FC236}">
-                <a16:creationId xmlns:a16="http://schemas.microsoft.com/office/drawing/2014/main" id="{10DD9470-1CF4-44F6-B7D0-EAA891F5B452}"/>
+                <a16:creationId xmlns:a16="http://schemas.microsoft.com/office/drawing/2014/main" id="{DA83CA3F-AD2D-4BCC-984C-889AD3ED9A29}"/>
               </a:ext>
             </a:extLst>
           </p:cNvPr>
@@ -19429,48 +19465,48 @@
           <a:lstStyle xmlns:a="http://schemas.openxmlformats.org/drawingml/2006/main"/>
           <a:p xmlns:a="http://schemas.openxmlformats.org/drawingml/2006/main">
             <a:pPr algn="l">
-              <a:defRPr sz="2475" b="0">
-                <a:solidFill>
-                  <a:srgbClr val="183247"/>
-                </a:solidFill>
-                <a:latin typeface="Arial"/>
-                <a:ea typeface="Arial"/>
-                <a:cs typeface="Arial"/>
-              </a:defRPr>
-            </a:pPr>
-            <a:r>
-              <a:rPr sz="2475" b="0">
-                <a:solidFill>
-                  <a:srgbClr val="183247"/>
-                </a:solidFill>
-                <a:latin typeface="Arial"/>
-                <a:ea typeface="Arial"/>
-                <a:cs typeface="Arial"/>
-              </a:rPr>
-              <a:t>Pagina 48</a:t>
+              <a:defRPr sz="2250" b="0">
+                <a:solidFill>
+                  <a:srgbClr val="183247"/>
+                </a:solidFill>
+                <a:latin typeface="Arial"/>
+                <a:ea typeface="Arial"/>
+                <a:cs typeface="Arial"/>
+              </a:defRPr>
+            </a:pPr>
+            <a:r>
+              <a:rPr sz="2250" b="0">
+                <a:solidFill>
+                  <a:srgbClr val="183247"/>
+                </a:solidFill>
+                <a:latin typeface="Arial"/>
+                <a:ea typeface="Arial"/>
+                <a:cs typeface="Arial"/>
+              </a:rPr>
+              <a:t>Pagina 48 · Opgaven 1 en 2</a:t>
             </a:r>
           </a:p>
           <a:p xmlns:a="http://schemas.openxmlformats.org/drawingml/2006/main">
             <a:pPr algn="l">
-              <a:defRPr sz="2475" b="0">
-                <a:solidFill>
-                  <a:srgbClr val="183247"/>
-                </a:solidFill>
-                <a:latin typeface="Arial"/>
-                <a:ea typeface="Arial"/>
-                <a:cs typeface="Arial"/>
-              </a:defRPr>
-            </a:pPr>
-            <a:r>
-              <a:rPr sz="2475" b="0">
-                <a:solidFill>
-                  <a:srgbClr val="183247"/>
-                </a:solidFill>
-                <a:latin typeface="Arial"/>
-                <a:ea typeface="Arial"/>
-                <a:cs typeface="Arial"/>
-              </a:rPr>
-              <a:t>Opgaven 1 en 2</a:t>
+              <a:defRPr sz="2250" b="0">
+                <a:solidFill>
+                  <a:srgbClr val="183247"/>
+                </a:solidFill>
+                <a:latin typeface="Arial"/>
+                <a:ea typeface="Arial"/>
+                <a:cs typeface="Arial"/>
+              </a:defRPr>
+            </a:pPr>
+            <a:r>
+              <a:rPr sz="2250" b="0">
+                <a:solidFill>
+                  <a:srgbClr val="183247"/>
+                </a:solidFill>
+                <a:latin typeface="Arial"/>
+                <a:ea typeface="Arial"/>
+                <a:cs typeface="Arial"/>
+              </a:rPr>
+              <a:t>2a: verkennen, theorie p. 45</a:t>
             </a:r>
           </a:p>
         </p:txBody>
@@ -19480,7 +19516,7 @@
           <p:cNvPr id="26" name="">
             <a:extLst xmlns:a="http://schemas.openxmlformats.org/drawingml/2006/main">
               <a:ext uri="{FF2B5EF4-FFF2-40B4-BE49-F238E27FC236}">
-                <a16:creationId xmlns:a16="http://schemas.microsoft.com/office/drawing/2014/main" id="{AC51D935-4137-4322-98F4-49B2B40D6C3C}"/>
+                <a16:creationId xmlns:a16="http://schemas.microsoft.com/office/drawing/2014/main" id="{BA0B235C-47B6-4C41-A580-06492F910117}"/>
               </a:ext>
             </a:extLst>
           </p:cNvPr>
@@ -19509,7 +19545,7 @@
           <p:cNvPr id="27" name="Huiswerk">
             <a:extLst xmlns:a="http://schemas.openxmlformats.org/drawingml/2006/main">
               <a:ext uri="{FF2B5EF4-FFF2-40B4-BE49-F238E27FC236}">
-                <a16:creationId xmlns:a16="http://schemas.microsoft.com/office/drawing/2014/main" id="{D6AD9F81-9A59-4749-A7B7-6C8D18BF261C}"/>
+                <a16:creationId xmlns:a16="http://schemas.microsoft.com/office/drawing/2014/main" id="{C949BAE1-4F20-4905-BCF1-789A9A87E906}"/>
               </a:ext>
             </a:extLst>
           </p:cNvPr>
@@ -19566,7 +19602,7 @@
           <p:cNvPr id="28" name="overview-homework">
             <a:extLst xmlns:a="http://schemas.openxmlformats.org/drawingml/2006/main">
               <a:ext uri="{FF2B5EF4-FFF2-40B4-BE49-F238E27FC236}">
-                <a16:creationId xmlns:a16="http://schemas.microsoft.com/office/drawing/2014/main" id="{FBA8262D-B7FA-41A5-A5E6-2CDA5B387FCC}"/>
+                <a16:creationId xmlns:a16="http://schemas.microsoft.com/office/drawing/2014/main" id="{595EBDB6-3336-4DB3-9FBC-45F8284BF851}"/>
               </a:ext>
             </a:extLst>
           </p:cNvPr>
@@ -19713,7 +19749,7 @@
     </p:spTree>
     <p:extLst>
       <p:ext uri="{BB962C8B-B14F-4D97-AF65-F5344CB8AC3E}">
-        <p14:creationId xmlns:p14="http://schemas.microsoft.com/office/powerpoint/2010/main" val="572662283"/>
+        <p14:creationId xmlns:p14="http://schemas.microsoft.com/office/powerpoint/2010/main" val="307384417"/>
       </p:ext>
     </p:extLst>
   </p:cSld>
@@ -19744,7 +19780,7 @@
           <p:cNvPr id="9" name="KeramiekStudio: prijs en afzet">
             <a:extLst xmlns:a="http://schemas.openxmlformats.org/drawingml/2006/main">
               <a:ext uri="{FF2B5EF4-FFF2-40B4-BE49-F238E27FC236}">
-                <a16:creationId xmlns:a16="http://schemas.microsoft.com/office/drawing/2014/main" id="{B701C809-7E1E-4119-BB79-36DF98848767}"/>
+                <a16:creationId xmlns:a16="http://schemas.microsoft.com/office/drawing/2014/main" id="{6951719B-2BC6-4AC1-9B73-D1F9BD6B51D6}"/>
               </a:ext>
             </a:extLst>
           </p:cNvPr>
@@ -19801,7 +19837,7 @@
           <p:cNvPr id="2" name="">
             <a:extLst xmlns:a="http://schemas.openxmlformats.org/drawingml/2006/main">
               <a:ext uri="{FF2B5EF4-FFF2-40B4-BE49-F238E27FC236}">
-                <a16:creationId xmlns:a16="http://schemas.microsoft.com/office/drawing/2014/main" id="{7AA4606D-9795-486D-A350-F8C2ED4B7232}"/>
+                <a16:creationId xmlns:a16="http://schemas.microsoft.com/office/drawing/2014/main" id="{76CE7AC9-F39C-4A21-AD0A-31723827B783}"/>
               </a:ext>
             </a:extLst>
           </p:cNvPr>
@@ -19830,7 +19866,7 @@
           <p:cNvPr id="3" name="Uitlegvoorbeeld — niet uit het boek">
             <a:extLst xmlns:a="http://schemas.openxmlformats.org/drawingml/2006/main">
               <a:ext uri="{FF2B5EF4-FFF2-40B4-BE49-F238E27FC236}">
-                <a16:creationId xmlns:a16="http://schemas.microsoft.com/office/drawing/2014/main" id="{2B8F30C1-8849-4702-85E7-46386A9E8340}"/>
+                <a16:creationId xmlns:a16="http://schemas.microsoft.com/office/drawing/2014/main" id="{C1EB3393-ADAD-498E-9E9B-8B88C304EF24}"/>
               </a:ext>
             </a:extLst>
           </p:cNvPr>
@@ -19887,7 +19923,7 @@
           <p:cNvPr id="4" name="3">
             <a:extLst xmlns:a="http://schemas.openxmlformats.org/drawingml/2006/main">
               <a:ext uri="{FF2B5EF4-FFF2-40B4-BE49-F238E27FC236}">
-                <a16:creationId xmlns:a16="http://schemas.microsoft.com/office/drawing/2014/main" id="{E18AB8B6-8216-4A80-83BC-199D0966B094}"/>
+                <a16:creationId xmlns:a16="http://schemas.microsoft.com/office/drawing/2014/main" id="{0064C0B6-ECAB-4BD6-AB03-A79CCAFD2CA3}"/>
               </a:ext>
             </a:extLst>
           </p:cNvPr>
@@ -19944,7 +19980,7 @@
           <p:cNvPr id="5" name="Verkochte workshopplaatsen per maand">
             <a:extLst xmlns:a="http://schemas.openxmlformats.org/drawingml/2006/main">
               <a:ext uri="{FF2B5EF4-FFF2-40B4-BE49-F238E27FC236}">
-                <a16:creationId xmlns:a16="http://schemas.microsoft.com/office/drawing/2014/main" id="{F62CB677-EAF1-4365-8F05-0E73A3B28C61}"/>
+                <a16:creationId xmlns:a16="http://schemas.microsoft.com/office/drawing/2014/main" id="{DABA3B7C-D1E7-4372-90F7-8501076C8620}"/>
               </a:ext>
             </a:extLst>
           </p:cNvPr>
@@ -20246,7 +20282,7 @@
           <p:cNvPr id="7" name="TO = P × Q">
             <a:extLst xmlns:a="http://schemas.openxmlformats.org/drawingml/2006/main">
               <a:ext uri="{FF2B5EF4-FFF2-40B4-BE49-F238E27FC236}">
-                <a16:creationId xmlns:a16="http://schemas.microsoft.com/office/drawing/2014/main" id="{02C4D38E-0924-465E-991B-5678D3D64CB4}"/>
+                <a16:creationId xmlns:a16="http://schemas.microsoft.com/office/drawing/2014/main" id="{D873F8C2-BA5A-4040-81C2-8F9650BEC8C1}"/>
               </a:ext>
             </a:extLst>
           </p:cNvPr>
@@ -20303,7 +20339,7 @@
           <p:cNvPr id="8" name="Alle gevraagde plaatsen worden verkocht: Q = Qv.">
             <a:extLst xmlns:a="http://schemas.openxmlformats.org/drawingml/2006/main">
               <a:ext uri="{FF2B5EF4-FFF2-40B4-BE49-F238E27FC236}">
-                <a16:creationId xmlns:a16="http://schemas.microsoft.com/office/drawing/2014/main" id="{48E01B34-9640-4743-AA87-886AA6F06EFD}"/>
+                <a16:creationId xmlns:a16="http://schemas.microsoft.com/office/drawing/2014/main" id="{ACBD3974-D421-49CE-9D76-37B4374AB619}"/>
               </a:ext>
             </a:extLst>
           </p:cNvPr>
@@ -20358,7 +20394,7 @@
     </p:spTree>
     <p:extLst>
       <p:ext uri="{BB962C8B-B14F-4D97-AF65-F5344CB8AC3E}">
-        <p14:creationId xmlns:p14="http://schemas.microsoft.com/office/powerpoint/2010/main" val="800878598"/>
+        <p14:creationId xmlns:p14="http://schemas.microsoft.com/office/powerpoint/2010/main" val="211342377"/>
       </p:ext>
     </p:extLst>
   </p:cSld>
@@ -20389,7 +20425,7 @@
           <p:cNvPr id="12" name="Omzet als oppervlakte">
             <a:extLst xmlns:a="http://schemas.openxmlformats.org/drawingml/2006/main">
               <a:ext uri="{FF2B5EF4-FFF2-40B4-BE49-F238E27FC236}">
-                <a16:creationId xmlns:a16="http://schemas.microsoft.com/office/drawing/2014/main" id="{30C43F93-754D-4DAC-89BD-057E6619810E}"/>
+                <a16:creationId xmlns:a16="http://schemas.microsoft.com/office/drawing/2014/main" id="{34F89FDF-504F-44EF-B9F1-23CD91D8C08E}"/>
               </a:ext>
             </a:extLst>
           </p:cNvPr>
@@ -20446,7 +20482,7 @@
           <p:cNvPr id="2" name="">
             <a:extLst xmlns:a="http://schemas.openxmlformats.org/drawingml/2006/main">
               <a:ext uri="{FF2B5EF4-FFF2-40B4-BE49-F238E27FC236}">
-                <a16:creationId xmlns:a16="http://schemas.microsoft.com/office/drawing/2014/main" id="{2688B181-5E73-4A26-B74E-8E4B97576D18}"/>
+                <a16:creationId xmlns:a16="http://schemas.microsoft.com/office/drawing/2014/main" id="{362E4A83-5C1B-4930-9B71-44BC1B8E40E2}"/>
               </a:ext>
             </a:extLst>
           </p:cNvPr>
@@ -20475,7 +20511,7 @@
           <p:cNvPr id="3" name="Uitlegvoorbeeld — niet uit het boek">
             <a:extLst xmlns:a="http://schemas.openxmlformats.org/drawingml/2006/main">
               <a:ext uri="{FF2B5EF4-FFF2-40B4-BE49-F238E27FC236}">
-                <a16:creationId xmlns:a16="http://schemas.microsoft.com/office/drawing/2014/main" id="{F19449DA-6ED9-4B24-8318-E2B9BA38AFCD}"/>
+                <a16:creationId xmlns:a16="http://schemas.microsoft.com/office/drawing/2014/main" id="{29D23FEB-D6BB-4385-9E9D-017E408DCCF6}"/>
               </a:ext>
             </a:extLst>
           </p:cNvPr>
@@ -20532,7 +20568,7 @@
           <p:cNvPr id="4" name="4">
             <a:extLst xmlns:a="http://schemas.openxmlformats.org/drawingml/2006/main">
               <a:ext uri="{FF2B5EF4-FFF2-40B4-BE49-F238E27FC236}">
-                <a16:creationId xmlns:a16="http://schemas.microsoft.com/office/drawing/2014/main" id="{925A35C8-0B08-4EC2-88DB-59E8BB5CCCE9}"/>
+                <a16:creationId xmlns:a16="http://schemas.microsoft.com/office/drawing/2014/main" id="{C93A5AEE-0953-4F1C-84CA-2E9C3CAC6ACA}"/>
               </a:ext>
             </a:extLst>
           </p:cNvPr>
@@ -20589,7 +20625,7 @@
           <p:cNvPr id="5" name="KeramiekStudio: oud P = € 30, Q = 160">
             <a:extLst xmlns:a="http://schemas.openxmlformats.org/drawingml/2006/main">
               <a:ext uri="{FF2B5EF4-FFF2-40B4-BE49-F238E27FC236}">
-                <a16:creationId xmlns:a16="http://schemas.microsoft.com/office/drawing/2014/main" id="{AC860DA0-77FF-4140-9236-0EC3FDE836B0}"/>
+                <a16:creationId xmlns:a16="http://schemas.microsoft.com/office/drawing/2014/main" id="{805BAAA3-0170-4F08-B366-41DB47F1A103}"/>
               </a:ext>
             </a:extLst>
           </p:cNvPr>
@@ -20653,7 +20689,7 @@
         </p:xfrm>
         <a:graphic xmlns:a="http://schemas.openxmlformats.org/drawingml/2006/main">
           <a:graphicData uri="http://schemas.openxmlformats.org/drawingml/2006/chart">
-            <c:chart xmlns:r="http://schemas.openxmlformats.org/officeDocument/2006/relationships" xmlns:c="http://schemas.openxmlformats.org/drawingml/2006/chart" r:id="R924bf4a103fe41da"/>
+            <c:chart xmlns:r="http://schemas.openxmlformats.org/officeDocument/2006/relationships" xmlns:c="http://schemas.openxmlformats.org/drawingml/2006/chart" r:id="R6bbacbfa9b0f420c"/>
           </a:graphicData>
         </a:graphic>
       </p:graphicFrame>
@@ -20662,7 +20698,7 @@
           <p:cNvPr id="7" name="TO oud">
             <a:extLst xmlns:a="http://schemas.openxmlformats.org/drawingml/2006/main">
               <a:ext uri="{FF2B5EF4-FFF2-40B4-BE49-F238E27FC236}">
-                <a16:creationId xmlns:a16="http://schemas.microsoft.com/office/drawing/2014/main" id="{C3CDC9E8-4CA4-4742-A46C-B16AC2CFEE22}"/>
+                <a16:creationId xmlns:a16="http://schemas.microsoft.com/office/drawing/2014/main" id="{199DE62A-763F-46A4-A6FB-39877F76FC9A}"/>
               </a:ext>
             </a:extLst>
           </p:cNvPr>
@@ -20719,7 +20755,7 @@
           <p:cNvPr id="8" name="30 × 160">
             <a:extLst xmlns:a="http://schemas.openxmlformats.org/drawingml/2006/main">
               <a:ext uri="{FF2B5EF4-FFF2-40B4-BE49-F238E27FC236}">
-                <a16:creationId xmlns:a16="http://schemas.microsoft.com/office/drawing/2014/main" id="{9DD576C7-912D-46BC-B1C4-0DB05C54F029}"/>
+                <a16:creationId xmlns:a16="http://schemas.microsoft.com/office/drawing/2014/main" id="{36C83C2A-72C6-49EA-B515-FFB188404876}"/>
               </a:ext>
             </a:extLst>
           </p:cNvPr>
@@ -20776,7 +20812,7 @@
           <p:cNvPr id="9" name="= € 4.800">
             <a:extLst xmlns:a="http://schemas.openxmlformats.org/drawingml/2006/main">
               <a:ext uri="{FF2B5EF4-FFF2-40B4-BE49-F238E27FC236}">
-                <a16:creationId xmlns:a16="http://schemas.microsoft.com/office/drawing/2014/main" id="{59F5ABAB-3490-40FC-A7F3-0BB2842AFB1E}"/>
+                <a16:creationId xmlns:a16="http://schemas.microsoft.com/office/drawing/2014/main" id="{9AD54A8D-C5DD-4626-8A4A-6B65D3D1811B}"/>
               </a:ext>
             </a:extLst>
           </p:cNvPr>
@@ -20833,7 +20869,7 @@
           <p:cNvPr id="10" name="per maand">
             <a:extLst xmlns:a="http://schemas.openxmlformats.org/drawingml/2006/main">
               <a:ext uri="{FF2B5EF4-FFF2-40B4-BE49-F238E27FC236}">
-                <a16:creationId xmlns:a16="http://schemas.microsoft.com/office/drawing/2014/main" id="{EAE4EE92-DCE3-4520-B0C9-03527643A743}"/>
+                <a16:creationId xmlns:a16="http://schemas.microsoft.com/office/drawing/2014/main" id="{1862973B-B48D-4C5B-9018-700AB4202291}"/>
               </a:ext>
             </a:extLst>
           </p:cNvPr>
@@ -20890,7 +20926,7 @@
           <p:cNvPr id="11" name="Breedte × hoogte&#10;geeft de omzet.">
             <a:extLst xmlns:a="http://schemas.openxmlformats.org/drawingml/2006/main">
               <a:ext uri="{FF2B5EF4-FFF2-40B4-BE49-F238E27FC236}">
-                <a16:creationId xmlns:a16="http://schemas.microsoft.com/office/drawing/2014/main" id="{A10C1F8E-4D3C-4ED3-8E49-85ACEF351EAE}"/>
+                <a16:creationId xmlns:a16="http://schemas.microsoft.com/office/drawing/2014/main" id="{5479A3F8-FE1D-4DF1-A894-2518337474EC}"/>
               </a:ext>
             </a:extLst>
           </p:cNvPr>
@@ -20968,7 +21004,7 @@
     </p:spTree>
     <p:extLst>
       <p:ext uri="{BB962C8B-B14F-4D97-AF65-F5344CB8AC3E}">
-        <p14:creationId xmlns:p14="http://schemas.microsoft.com/office/powerpoint/2010/main" val="1206210556"/>
+        <p14:creationId xmlns:p14="http://schemas.microsoft.com/office/powerpoint/2010/main" val="1106198858"/>
       </p:ext>
     </p:extLst>
   </p:cSld>
@@ -20999,7 +21035,7 @@
           <p:cNvPr id="12" name="De nieuwe omzetrechthoek">
             <a:extLst xmlns:a="http://schemas.openxmlformats.org/drawingml/2006/main">
               <a:ext uri="{FF2B5EF4-FFF2-40B4-BE49-F238E27FC236}">
-                <a16:creationId xmlns:a16="http://schemas.microsoft.com/office/drawing/2014/main" id="{4027DBEF-27BE-4B8E-9AC3-4DA59D6C36C6}"/>
+                <a16:creationId xmlns:a16="http://schemas.microsoft.com/office/drawing/2014/main" id="{7C5C09A1-6792-481C-B9B6-6EB0A51F7BE2}"/>
               </a:ext>
             </a:extLst>
           </p:cNvPr>
@@ -21056,7 +21092,7 @@
           <p:cNvPr id="2" name="">
             <a:extLst xmlns:a="http://schemas.openxmlformats.org/drawingml/2006/main">
               <a:ext uri="{FF2B5EF4-FFF2-40B4-BE49-F238E27FC236}">
-                <a16:creationId xmlns:a16="http://schemas.microsoft.com/office/drawing/2014/main" id="{711BF3FE-2B2E-40E7-9470-F72CB3A21784}"/>
+                <a16:creationId xmlns:a16="http://schemas.microsoft.com/office/drawing/2014/main" id="{1634303F-7CF5-4020-A338-2CC3972DA980}"/>
               </a:ext>
             </a:extLst>
           </p:cNvPr>
@@ -21085,7 +21121,7 @@
           <p:cNvPr id="3" name="Uitlegvoorbeeld — niet uit het boek">
             <a:extLst xmlns:a="http://schemas.openxmlformats.org/drawingml/2006/main">
               <a:ext uri="{FF2B5EF4-FFF2-40B4-BE49-F238E27FC236}">
-                <a16:creationId xmlns:a16="http://schemas.microsoft.com/office/drawing/2014/main" id="{5E9B44D7-7549-4B61-BF6C-B4F889A72057}"/>
+                <a16:creationId xmlns:a16="http://schemas.microsoft.com/office/drawing/2014/main" id="{3FF66E7D-B0A5-4D7F-8052-9B518E1EEB28}"/>
               </a:ext>
             </a:extLst>
           </p:cNvPr>
@@ -21142,7 +21178,7 @@
           <p:cNvPr id="4" name="5">
             <a:extLst xmlns:a="http://schemas.openxmlformats.org/drawingml/2006/main">
               <a:ext uri="{FF2B5EF4-FFF2-40B4-BE49-F238E27FC236}">
-                <a16:creationId xmlns:a16="http://schemas.microsoft.com/office/drawing/2014/main" id="{832DEC32-EDD1-4404-910B-9606E77E9C84}"/>
+                <a16:creationId xmlns:a16="http://schemas.microsoft.com/office/drawing/2014/main" id="{ED4FA3A3-637F-47CC-869C-7FE1EB629951}"/>
               </a:ext>
             </a:extLst>
           </p:cNvPr>
@@ -21199,7 +21235,7 @@
           <p:cNvPr id="5" name="KeramiekStudio: oud gestreept, nieuw groen">
             <a:extLst xmlns:a="http://schemas.openxmlformats.org/drawingml/2006/main">
               <a:ext uri="{FF2B5EF4-FFF2-40B4-BE49-F238E27FC236}">
-                <a16:creationId xmlns:a16="http://schemas.microsoft.com/office/drawing/2014/main" id="{E4F1ED5E-19D5-44DF-ACCD-A38618ABA3EE}"/>
+                <a16:creationId xmlns:a16="http://schemas.microsoft.com/office/drawing/2014/main" id="{A6F584BF-CD86-4477-A541-246C688FB092}"/>
               </a:ext>
             </a:extLst>
           </p:cNvPr>
@@ -21263,7 +21299,7 @@
         </p:xfrm>
         <a:graphic xmlns:a="http://schemas.openxmlformats.org/drawingml/2006/main">
           <a:graphicData uri="http://schemas.openxmlformats.org/drawingml/2006/chart">
-            <c:chart xmlns:r="http://schemas.openxmlformats.org/officeDocument/2006/relationships" xmlns:c="http://schemas.openxmlformats.org/drawingml/2006/chart" r:id="R0448feca7b514e30"/>
+            <c:chart xmlns:r="http://schemas.openxmlformats.org/officeDocument/2006/relationships" xmlns:c="http://schemas.openxmlformats.org/drawingml/2006/chart" r:id="R343356ded0e6416f"/>
           </a:graphicData>
         </a:graphic>
       </p:graphicFrame>
@@ -21272,7 +21308,7 @@
           <p:cNvPr id="7" name="TO nieuw">
             <a:extLst xmlns:a="http://schemas.openxmlformats.org/drawingml/2006/main">
               <a:ext uri="{FF2B5EF4-FFF2-40B4-BE49-F238E27FC236}">
-                <a16:creationId xmlns:a16="http://schemas.microsoft.com/office/drawing/2014/main" id="{E2B430F3-9029-43E2-892F-993A07B05E90}"/>
+                <a16:creationId xmlns:a16="http://schemas.microsoft.com/office/drawing/2014/main" id="{F139D673-7D0D-48E6-BB33-2BCA4E40B97C}"/>
               </a:ext>
             </a:extLst>
           </p:cNvPr>
@@ -21329,7 +21365,7 @@
           <p:cNvPr id="8" name="33 × 152">
             <a:extLst xmlns:a="http://schemas.openxmlformats.org/drawingml/2006/main">
               <a:ext uri="{FF2B5EF4-FFF2-40B4-BE49-F238E27FC236}">
-                <a16:creationId xmlns:a16="http://schemas.microsoft.com/office/drawing/2014/main" id="{5AD37B15-81C5-445A-9766-18E2A2B9B6BC}"/>
+                <a16:creationId xmlns:a16="http://schemas.microsoft.com/office/drawing/2014/main" id="{CAD22502-539B-4AEF-806E-19028DA61D72}"/>
               </a:ext>
             </a:extLst>
           </p:cNvPr>
@@ -21386,7 +21422,7 @@
           <p:cNvPr id="9" name="= € 5.016">
             <a:extLst xmlns:a="http://schemas.openxmlformats.org/drawingml/2006/main">
               <a:ext uri="{FF2B5EF4-FFF2-40B4-BE49-F238E27FC236}">
-                <a16:creationId xmlns:a16="http://schemas.microsoft.com/office/drawing/2014/main" id="{C360588D-F3F6-4C4A-987C-F2B5395227D7}"/>
+                <a16:creationId xmlns:a16="http://schemas.microsoft.com/office/drawing/2014/main" id="{1FC32523-CDFE-45FC-9E53-E05703C2546D}"/>
               </a:ext>
             </a:extLst>
           </p:cNvPr>
@@ -21443,7 +21479,7 @@
           <p:cNvPr id="10" name="per maand">
             <a:extLst xmlns:a="http://schemas.openxmlformats.org/drawingml/2006/main">
               <a:ext uri="{FF2B5EF4-FFF2-40B4-BE49-F238E27FC236}">
-                <a16:creationId xmlns:a16="http://schemas.microsoft.com/office/drawing/2014/main" id="{7A1DDDC5-51BC-4870-A5A9-A9EAE31CB90E}"/>
+                <a16:creationId xmlns:a16="http://schemas.microsoft.com/office/drawing/2014/main" id="{2BD98845-C985-4225-B08B-43D89CFCCBDC}"/>
               </a:ext>
             </a:extLst>
           </p:cNvPr>
@@ -21500,7 +21536,7 @@
           <p:cNvPr id="11" name="Hoger én smaller.&#10;De oppervlakte&#10;wordt groter.">
             <a:extLst xmlns:a="http://schemas.openxmlformats.org/drawingml/2006/main">
               <a:ext uri="{FF2B5EF4-FFF2-40B4-BE49-F238E27FC236}">
-                <a16:creationId xmlns:a16="http://schemas.microsoft.com/office/drawing/2014/main" id="{8E90559A-777E-42BA-88CA-D8D623C8B64D}"/>
+                <a16:creationId xmlns:a16="http://schemas.microsoft.com/office/drawing/2014/main" id="{0B17DDD6-DDCC-48B4-B203-6D7565FAA991}"/>
               </a:ext>
             </a:extLst>
           </p:cNvPr>
@@ -21601,7 +21637,7 @@
     </p:spTree>
     <p:extLst>
       <p:ext uri="{BB962C8B-B14F-4D97-AF65-F5344CB8AC3E}">
-        <p14:creationId xmlns:p14="http://schemas.microsoft.com/office/powerpoint/2010/main" val="92690907"/>
+        <p14:creationId xmlns:p14="http://schemas.microsoft.com/office/powerpoint/2010/main" val="359499696"/>
       </p:ext>
     </p:extLst>
   </p:cSld>
@@ -21632,7 +21668,7 @@
           <p:cNvPr id="10" name="De procentuele omzetverandering">
             <a:extLst xmlns:a="http://schemas.openxmlformats.org/drawingml/2006/main">
               <a:ext uri="{FF2B5EF4-FFF2-40B4-BE49-F238E27FC236}">
-                <a16:creationId xmlns:a16="http://schemas.microsoft.com/office/drawing/2014/main" id="{0655114C-0C00-4E74-83D6-9E5DB4497048}"/>
+                <a16:creationId xmlns:a16="http://schemas.microsoft.com/office/drawing/2014/main" id="{CF99027F-3752-4030-A52A-3F23494C8404}"/>
               </a:ext>
             </a:extLst>
           </p:cNvPr>
@@ -21689,7 +21725,7 @@
           <p:cNvPr id="2" name="">
             <a:extLst xmlns:a="http://schemas.openxmlformats.org/drawingml/2006/main">
               <a:ext uri="{FF2B5EF4-FFF2-40B4-BE49-F238E27FC236}">
-                <a16:creationId xmlns:a16="http://schemas.microsoft.com/office/drawing/2014/main" id="{B7E3F912-47B6-44E7-B8DB-2C7F8FBEB862}"/>
+                <a16:creationId xmlns:a16="http://schemas.microsoft.com/office/drawing/2014/main" id="{9579EE52-74B6-4416-B092-AE4DC48293E1}"/>
               </a:ext>
             </a:extLst>
           </p:cNvPr>
@@ -21718,7 +21754,7 @@
           <p:cNvPr id="3" name="Uitlegvoorbeeld — niet uit het boek">
             <a:extLst xmlns:a="http://schemas.openxmlformats.org/drawingml/2006/main">
               <a:ext uri="{FF2B5EF4-FFF2-40B4-BE49-F238E27FC236}">
-                <a16:creationId xmlns:a16="http://schemas.microsoft.com/office/drawing/2014/main" id="{24399ADE-875B-4FB0-83E0-D66EFFBA2885}"/>
+                <a16:creationId xmlns:a16="http://schemas.microsoft.com/office/drawing/2014/main" id="{D34168BC-6894-4071-AC1A-91398A330E36}"/>
               </a:ext>
             </a:extLst>
           </p:cNvPr>
@@ -21775,7 +21811,7 @@
           <p:cNvPr id="4" name="6">
             <a:extLst xmlns:a="http://schemas.openxmlformats.org/drawingml/2006/main">
               <a:ext uri="{FF2B5EF4-FFF2-40B4-BE49-F238E27FC236}">
-                <a16:creationId xmlns:a16="http://schemas.microsoft.com/office/drawing/2014/main" id="{944B4D87-3E18-4358-854F-7F791FF32E27}"/>
+                <a16:creationId xmlns:a16="http://schemas.microsoft.com/office/drawing/2014/main" id="{CF86E886-6870-4805-804C-939000503F92}"/>
               </a:ext>
             </a:extLst>
           </p:cNvPr>
@@ -21832,7 +21868,7 @@
           <p:cNvPr id="5" name="KeramiekStudio: € 4.800 naar € 5.016 per maand">
             <a:extLst xmlns:a="http://schemas.openxmlformats.org/drawingml/2006/main">
               <a:ext uri="{FF2B5EF4-FFF2-40B4-BE49-F238E27FC236}">
-                <a16:creationId xmlns:a16="http://schemas.microsoft.com/office/drawing/2014/main" id="{47F33941-7662-4D40-AA8B-7802BF335D5F}"/>
+                <a16:creationId xmlns:a16="http://schemas.microsoft.com/office/drawing/2014/main" id="{326C45F9-4D97-4360-A618-78A773157856}"/>
               </a:ext>
             </a:extLst>
           </p:cNvPr>
@@ -21889,7 +21925,7 @@
           <p:cNvPr id="6" name="%ΔTO = (TO nieuw − TO oud) / TO oud × 100%">
             <a:extLst xmlns:a="http://schemas.openxmlformats.org/drawingml/2006/main">
               <a:ext uri="{FF2B5EF4-FFF2-40B4-BE49-F238E27FC236}">
-                <a16:creationId xmlns:a16="http://schemas.microsoft.com/office/drawing/2014/main" id="{0520C028-1A74-4740-9B3F-74CBA764B943}"/>
+                <a16:creationId xmlns:a16="http://schemas.microsoft.com/office/drawing/2014/main" id="{867B6719-CDCB-4B86-B55C-7A576A87DA65}"/>
               </a:ext>
             </a:extLst>
           </p:cNvPr>
@@ -21946,7 +21982,7 @@
           <p:cNvPr id="7" name="= (5.016 − 4.800) / 4.800 × 100%">
             <a:extLst xmlns:a="http://schemas.openxmlformats.org/drawingml/2006/main">
               <a:ext uri="{FF2B5EF4-FFF2-40B4-BE49-F238E27FC236}">
-                <a16:creationId xmlns:a16="http://schemas.microsoft.com/office/drawing/2014/main" id="{BF8880D4-2131-4748-9457-D5E063B473EF}"/>
+                <a16:creationId xmlns:a16="http://schemas.microsoft.com/office/drawing/2014/main" id="{2D9303C3-6A8D-4D20-9027-5A0217372E63}"/>
               </a:ext>
             </a:extLst>
           </p:cNvPr>
@@ -22003,7 +22039,7 @@
           <p:cNvPr id="8" name="= +4,5%">
             <a:extLst xmlns:a="http://schemas.openxmlformats.org/drawingml/2006/main">
               <a:ext uri="{FF2B5EF4-FFF2-40B4-BE49-F238E27FC236}">
-                <a16:creationId xmlns:a16="http://schemas.microsoft.com/office/drawing/2014/main" id="{32EC3D80-1CD6-4687-932A-54A9A55C7AC4}"/>
+                <a16:creationId xmlns:a16="http://schemas.microsoft.com/office/drawing/2014/main" id="{78E4BBE6-5379-4EA1-925A-EBF50E1016F7}"/>
               </a:ext>
             </a:extLst>
           </p:cNvPr>
@@ -22060,7 +22096,7 @@
           <p:cNvPr id="9" name="€ 216 extra omzet, vergeleken met de oude € 4.800.">
             <a:extLst xmlns:a="http://schemas.openxmlformats.org/drawingml/2006/main">
               <a:ext uri="{FF2B5EF4-FFF2-40B4-BE49-F238E27FC236}">
-                <a16:creationId xmlns:a16="http://schemas.microsoft.com/office/drawing/2014/main" id="{7985A4F1-1ADD-4BD8-8951-852708B00363}"/>
+                <a16:creationId xmlns:a16="http://schemas.microsoft.com/office/drawing/2014/main" id="{9381B4DC-FF21-4F0E-AECD-427FA79E882B}"/>
               </a:ext>
             </a:extLst>
           </p:cNvPr>
@@ -22115,7 +22151,7 @@
     </p:spTree>
     <p:extLst>
       <p:ext uri="{BB962C8B-B14F-4D97-AF65-F5344CB8AC3E}">
-        <p14:creationId xmlns:p14="http://schemas.microsoft.com/office/powerpoint/2010/main" val="1587865912"/>
+        <p14:creationId xmlns:p14="http://schemas.microsoft.com/office/powerpoint/2010/main" val="303760269"/>
       </p:ext>
     </p:extLst>
   </p:cSld>
@@ -22146,7 +22182,7 @@
           <p:cNvPr id="9" name="Een relatief zwakke hoeveelheidsreactie">
             <a:extLst xmlns:a="http://schemas.openxmlformats.org/drawingml/2006/main">
               <a:ext uri="{FF2B5EF4-FFF2-40B4-BE49-F238E27FC236}">
-                <a16:creationId xmlns:a16="http://schemas.microsoft.com/office/drawing/2014/main" id="{103A710D-1AC9-411B-8F49-2FE88B227B21}"/>
+                <a16:creationId xmlns:a16="http://schemas.microsoft.com/office/drawing/2014/main" id="{62AEF727-2C93-49BB-98F2-7208BEAD4AE0}"/>
               </a:ext>
             </a:extLst>
           </p:cNvPr>
@@ -22203,7 +22239,7 @@
           <p:cNvPr id="2" name="">
             <a:extLst xmlns:a="http://schemas.openxmlformats.org/drawingml/2006/main">
               <a:ext uri="{FF2B5EF4-FFF2-40B4-BE49-F238E27FC236}">
-                <a16:creationId xmlns:a16="http://schemas.microsoft.com/office/drawing/2014/main" id="{FDDB6182-7187-466B-BF8C-5BFAA77A5B21}"/>
+                <a16:creationId xmlns:a16="http://schemas.microsoft.com/office/drawing/2014/main" id="{059C5562-B218-4C4D-B83D-8790A8A67F7E}"/>
               </a:ext>
             </a:extLst>
           </p:cNvPr>
@@ -22232,7 +22268,7 @@
           <p:cNvPr id="3" name="Uitlegvoorbeeld — niet uit het boek">
             <a:extLst xmlns:a="http://schemas.openxmlformats.org/drawingml/2006/main">
               <a:ext uri="{FF2B5EF4-FFF2-40B4-BE49-F238E27FC236}">
-                <a16:creationId xmlns:a16="http://schemas.microsoft.com/office/drawing/2014/main" id="{1040CA18-0CF3-48E0-ADBC-A7FC8B64844A}"/>
+                <a16:creationId xmlns:a16="http://schemas.microsoft.com/office/drawing/2014/main" id="{F1D580CD-9A1A-4F42-B1E3-F2D9B6CE2FB4}"/>
               </a:ext>
             </a:extLst>
           </p:cNvPr>
@@ -22289,7 +22325,7 @@
           <p:cNvPr id="4" name="7">
             <a:extLst xmlns:a="http://schemas.openxmlformats.org/drawingml/2006/main">
               <a:ext uri="{FF2B5EF4-FFF2-40B4-BE49-F238E27FC236}">
-                <a16:creationId xmlns:a16="http://schemas.microsoft.com/office/drawing/2014/main" id="{44EDE5B6-2DBF-49F9-AA9D-5493DFE50C56}"/>
+                <a16:creationId xmlns:a16="http://schemas.microsoft.com/office/drawing/2014/main" id="{F785F0CD-23A0-4653-B575-99A0FB61FFC0}"/>
               </a:ext>
             </a:extLst>
           </p:cNvPr>
@@ -22518,7 +22554,7 @@
           <p:cNvPr id="6" name="Ev = −5% / +10% = −0,5">
             <a:extLst xmlns:a="http://schemas.openxmlformats.org/drawingml/2006/main">
               <a:ext uri="{FF2B5EF4-FFF2-40B4-BE49-F238E27FC236}">
-                <a16:creationId xmlns:a16="http://schemas.microsoft.com/office/drawing/2014/main" id="{E62DCBFE-1BF4-42A8-B6B7-02F41B28DC92}"/>
+                <a16:creationId xmlns:a16="http://schemas.microsoft.com/office/drawing/2014/main" id="{013F12CC-1509-42EF-BA70-9DA6CCF7EAF0}"/>
               </a:ext>
             </a:extLst>
           </p:cNvPr>
@@ -22575,7 +22611,7 @@
           <p:cNvPr id="7" name="−1 &lt; −0,5 &lt; 0: prijsinelastische vraag">
             <a:extLst xmlns:a="http://schemas.openxmlformats.org/drawingml/2006/main">
               <a:ext uri="{FF2B5EF4-FFF2-40B4-BE49-F238E27FC236}">
-                <a16:creationId xmlns:a16="http://schemas.microsoft.com/office/drawing/2014/main" id="{398F200E-9197-44E0-A7A3-2DB9A685EC53}"/>
+                <a16:creationId xmlns:a16="http://schemas.microsoft.com/office/drawing/2014/main" id="{3E657EE1-2B44-4900-B73F-B1E5CEE0CE96}"/>
               </a:ext>
             </a:extLst>
           </p:cNvPr>
@@ -22632,7 +22668,7 @@
           <p:cNvPr id="8" name="In deze meting stijgt TO met 4,5%.">
             <a:extLst xmlns:a="http://schemas.openxmlformats.org/drawingml/2006/main">
               <a:ext uri="{FF2B5EF4-FFF2-40B4-BE49-F238E27FC236}">
-                <a16:creationId xmlns:a16="http://schemas.microsoft.com/office/drawing/2014/main" id="{826268D8-A884-4354-9C4F-043958BC778E}"/>
+                <a16:creationId xmlns:a16="http://schemas.microsoft.com/office/drawing/2014/main" id="{19957B47-BDD7-4D9F-A87C-F1849D0D99EB}"/>
               </a:ext>
             </a:extLst>
           </p:cNvPr>
@@ -22687,7 +22723,7 @@
     </p:spTree>
     <p:extLst>
       <p:ext uri="{BB962C8B-B14F-4D97-AF65-F5344CB8AC3E}">
-        <p14:creationId xmlns:p14="http://schemas.microsoft.com/office/powerpoint/2010/main" val="2035144003"/>
+        <p14:creationId xmlns:p14="http://schemas.microsoft.com/office/powerpoint/2010/main" val="50904072"/>
       </p:ext>
     </p:extLst>
   </p:cSld>
@@ -22718,7 +22754,7 @@
           <p:cNvPr id="8" name="KajakStek: minder verhuringen">
             <a:extLst xmlns:a="http://schemas.openxmlformats.org/drawingml/2006/main">
               <a:ext uri="{FF2B5EF4-FFF2-40B4-BE49-F238E27FC236}">
-                <a16:creationId xmlns:a16="http://schemas.microsoft.com/office/drawing/2014/main" id="{B1DA511E-1C6D-44F3-8239-746BC6C90F5F}"/>
+                <a16:creationId xmlns:a16="http://schemas.microsoft.com/office/drawing/2014/main" id="{518BD810-3AB4-4B2F-A997-8E61F487CFEB}"/>
               </a:ext>
             </a:extLst>
           </p:cNvPr>
@@ -22775,7 +22811,7 @@
           <p:cNvPr id="2" name="">
             <a:extLst xmlns:a="http://schemas.openxmlformats.org/drawingml/2006/main">
               <a:ext uri="{FF2B5EF4-FFF2-40B4-BE49-F238E27FC236}">
-                <a16:creationId xmlns:a16="http://schemas.microsoft.com/office/drawing/2014/main" id="{49D806A7-8946-4E99-887A-9FCCF1B7923F}"/>
+                <a16:creationId xmlns:a16="http://schemas.microsoft.com/office/drawing/2014/main" id="{38061DF1-3100-45E6-AB0C-5EC7713330CD}"/>
               </a:ext>
             </a:extLst>
           </p:cNvPr>
@@ -22804,7 +22840,7 @@
           <p:cNvPr id="3" name="Uitlegvoorbeeld — niet uit het boek">
             <a:extLst xmlns:a="http://schemas.openxmlformats.org/drawingml/2006/main">
               <a:ext uri="{FF2B5EF4-FFF2-40B4-BE49-F238E27FC236}">
-                <a16:creationId xmlns:a16="http://schemas.microsoft.com/office/drawing/2014/main" id="{83A8D8DD-4AB8-4701-8A17-28258D074F4F}"/>
+                <a16:creationId xmlns:a16="http://schemas.microsoft.com/office/drawing/2014/main" id="{0FDD8D01-4B6E-418A-A8C5-D1B3B71579FC}"/>
               </a:ext>
             </a:extLst>
           </p:cNvPr>
@@ -22861,7 +22897,7 @@
           <p:cNvPr id="4" name="8">
             <a:extLst xmlns:a="http://schemas.openxmlformats.org/drawingml/2006/main">
               <a:ext uri="{FF2B5EF4-FFF2-40B4-BE49-F238E27FC236}">
-                <a16:creationId xmlns:a16="http://schemas.microsoft.com/office/drawing/2014/main" id="{1138CDC4-793B-4108-B6C3-1AE56205A2E8}"/>
+                <a16:creationId xmlns:a16="http://schemas.microsoft.com/office/drawing/2014/main" id="{649915B3-2689-4D82-9D79-A9AD291B2F2F}"/>
               </a:ext>
             </a:extLst>
           </p:cNvPr>
@@ -22918,7 +22954,7 @@
           <p:cNvPr id="5" name="Alle gevraagde kajaks worden verhuurd.">
             <a:extLst xmlns:a="http://schemas.openxmlformats.org/drawingml/2006/main">
               <a:ext uri="{FF2B5EF4-FFF2-40B4-BE49-F238E27FC236}">
-                <a16:creationId xmlns:a16="http://schemas.microsoft.com/office/drawing/2014/main" id="{B0CF5B95-5EFE-430D-BDA6-101BCE1DB3A3}"/>
+                <a16:creationId xmlns:a16="http://schemas.microsoft.com/office/drawing/2014/main" id="{29015F35-E61F-4E99-B40D-5F19A102E08A}"/>
               </a:ext>
             </a:extLst>
           </p:cNvPr>
@@ -23293,7 +23329,7 @@
           <p:cNvPr id="7" name="TO daalt met € 800 per week.">
             <a:extLst xmlns:a="http://schemas.openxmlformats.org/drawingml/2006/main">
               <a:ext uri="{FF2B5EF4-FFF2-40B4-BE49-F238E27FC236}">
-                <a16:creationId xmlns:a16="http://schemas.microsoft.com/office/drawing/2014/main" id="{732536B4-71CB-420B-BF14-7939DF5D705C}"/>
+                <a16:creationId xmlns:a16="http://schemas.microsoft.com/office/drawing/2014/main" id="{6A2951EA-00EA-4B80-8304-99CF071FFE19}"/>
               </a:ext>
             </a:extLst>
           </p:cNvPr>
@@ -23348,7 +23384,7 @@
     </p:spTree>
     <p:extLst>
       <p:ext uri="{BB962C8B-B14F-4D97-AF65-F5344CB8AC3E}">
-        <p14:creationId xmlns:p14="http://schemas.microsoft.com/office/powerpoint/2010/main" val="1292920533"/>
+        <p14:creationId xmlns:p14="http://schemas.microsoft.com/office/powerpoint/2010/main" val="301340417"/>
       </p:ext>
     </p:extLst>
   </p:cSld>
@@ -23379,7 +23415,7 @@
           <p:cNvPr id="9" name="Een relatief sterke hoeveelheidsreactie">
             <a:extLst xmlns:a="http://schemas.openxmlformats.org/drawingml/2006/main">
               <a:ext uri="{FF2B5EF4-FFF2-40B4-BE49-F238E27FC236}">
-                <a16:creationId xmlns:a16="http://schemas.microsoft.com/office/drawing/2014/main" id="{B8A70567-83E4-42BD-B00D-C8449DF908AF}"/>
+                <a16:creationId xmlns:a16="http://schemas.microsoft.com/office/drawing/2014/main" id="{F009462F-FFA8-49C2-A141-198C4DE2060B}"/>
               </a:ext>
             </a:extLst>
           </p:cNvPr>
@@ -23436,7 +23472,7 @@
           <p:cNvPr id="2" name="">
             <a:extLst xmlns:a="http://schemas.openxmlformats.org/drawingml/2006/main">
               <a:ext uri="{FF2B5EF4-FFF2-40B4-BE49-F238E27FC236}">
-                <a16:creationId xmlns:a16="http://schemas.microsoft.com/office/drawing/2014/main" id="{4C8BF6CE-98AB-4823-8ADF-E6B2EB452246}"/>
+                <a16:creationId xmlns:a16="http://schemas.microsoft.com/office/drawing/2014/main" id="{A69734C7-7D21-4352-8B0F-8EB1FA781D4B}"/>
               </a:ext>
             </a:extLst>
           </p:cNvPr>
@@ -23465,7 +23501,7 @@
           <p:cNvPr id="3" name="Uitlegvoorbeeld — niet uit het boek">
             <a:extLst xmlns:a="http://schemas.openxmlformats.org/drawingml/2006/main">
               <a:ext uri="{FF2B5EF4-FFF2-40B4-BE49-F238E27FC236}">
-                <a16:creationId xmlns:a16="http://schemas.microsoft.com/office/drawing/2014/main" id="{93440A23-181C-43AA-A7A9-1E1A66930E37}"/>
+                <a16:creationId xmlns:a16="http://schemas.microsoft.com/office/drawing/2014/main" id="{1A45C65C-C6E9-4A64-98DF-70DF0CC8632A}"/>
               </a:ext>
             </a:extLst>
           </p:cNvPr>
@@ -23522,7 +23558,7 @@
           <p:cNvPr id="4" name="9">
             <a:extLst xmlns:a="http://schemas.openxmlformats.org/drawingml/2006/main">
               <a:ext uri="{FF2B5EF4-FFF2-40B4-BE49-F238E27FC236}">
-                <a16:creationId xmlns:a16="http://schemas.microsoft.com/office/drawing/2014/main" id="{34302AA1-142F-40E6-9A6A-8D79C0E63AAA}"/>
+                <a16:creationId xmlns:a16="http://schemas.microsoft.com/office/drawing/2014/main" id="{4D525E58-FB33-4710-AC7E-0954468921B0}"/>
               </a:ext>
             </a:extLst>
           </p:cNvPr>
@@ -23579,7 +23615,7 @@
           <p:cNvPr id="5" name="KajakStek: € 5.000 naar € 4.200 per week">
             <a:extLst xmlns:a="http://schemas.openxmlformats.org/drawingml/2006/main">
               <a:ext uri="{FF2B5EF4-FFF2-40B4-BE49-F238E27FC236}">
-                <a16:creationId xmlns:a16="http://schemas.microsoft.com/office/drawing/2014/main" id="{FCF654F0-A919-4F4B-A04F-BE8DD8720B7C}"/>
+                <a16:creationId xmlns:a16="http://schemas.microsoft.com/office/drawing/2014/main" id="{0C62FBF2-6296-430B-947D-5A6A214BC833}"/>
               </a:ext>
             </a:extLst>
           </p:cNvPr>
@@ -23636,7 +23672,7 @@
           <p:cNvPr id="6" name="%ΔTO = (4.200 − 5.000) / 5.000 × 100% = −16%">
             <a:extLst xmlns:a="http://schemas.openxmlformats.org/drawingml/2006/main">
               <a:ext uri="{FF2B5EF4-FFF2-40B4-BE49-F238E27FC236}">
-                <a16:creationId xmlns:a16="http://schemas.microsoft.com/office/drawing/2014/main" id="{434D6F57-96CC-42C0-83B9-F1390424FE5C}"/>
+                <a16:creationId xmlns:a16="http://schemas.microsoft.com/office/drawing/2014/main" id="{73F67BAA-836B-46AF-A0C6-2F55D8C0A879}"/>
               </a:ext>
             </a:extLst>
           </p:cNvPr>
@@ -23864,7 +23900,7 @@
           <p:cNvPr id="8" name="Ev &lt; −1: prijselastisch. TO daalt in deze meting.">
             <a:extLst xmlns:a="http://schemas.openxmlformats.org/drawingml/2006/main">
               <a:ext uri="{FF2B5EF4-FFF2-40B4-BE49-F238E27FC236}">
-                <a16:creationId xmlns:a16="http://schemas.microsoft.com/office/drawing/2014/main" id="{489C2BB2-DF52-4391-9E85-00BEE21167B5}"/>
+                <a16:creationId xmlns:a16="http://schemas.microsoft.com/office/drawing/2014/main" id="{286F91CB-D77C-40D0-893E-9308A9A4E4E2}"/>
               </a:ext>
             </a:extLst>
           </p:cNvPr>
@@ -23919,7 +23955,7 @@
     </p:spTree>
     <p:extLst>
       <p:ext uri="{BB962C8B-B14F-4D97-AF65-F5344CB8AC3E}">
-        <p14:creationId xmlns:p14="http://schemas.microsoft.com/office/powerpoint/2010/main" val="703778619"/>
+        <p14:creationId xmlns:p14="http://schemas.microsoft.com/office/powerpoint/2010/main" val="1527736211"/>
       </p:ext>
     </p:extLst>
   </p:cSld>

--- a/Boek 2 - Kosten, opbrengsten, elasticiteit en surplus/edities/chat-2026/bronnen/H2/paragrafen/2.2.2 Elasticiteit en omzet/2.2.2 Elasticiteit en omzet – presentatie.pptx
+++ b/Boek 2 - Kosten, opbrengsten, elasticiteit en surplus/edities/chat-2026/bronnen/H2/paragrafen/2.2.2 Elasticiteit en omzet/2.2.2 Elasticiteit en omzet – presentatie.pptx
@@ -2,38 +2,38 @@
 <file path=ppt/presentation.xml><?xml version="1.0" encoding="utf-8"?>
 <p:presentation xmlns:p="http://schemas.openxmlformats.org/presentationml/2006/main">
   <p:sldMasterIdLst>
-    <p:sldMasterId xmlns:r="http://schemas.openxmlformats.org/officeDocument/2006/relationships" id="2147483648" r:id="Rfa79b33a43144914"/>
+    <p:sldMasterId xmlns:r="http://schemas.openxmlformats.org/officeDocument/2006/relationships" id="2147483648" r:id="Rc3b9954930d94cef"/>
   </p:sldMasterIdLst>
   <p:notesMasterIdLst>
-    <p:notesMasterId xmlns:r="http://schemas.openxmlformats.org/officeDocument/2006/relationships" r:id="R8d5e4c2bb626420e"/>
+    <p:notesMasterId xmlns:r="http://schemas.openxmlformats.org/officeDocument/2006/relationships" r:id="R4f8bebd0adcd4df4"/>
   </p:notesMasterIdLst>
   <p:sldIdLst>
-    <p:sldId xmlns:r="http://schemas.openxmlformats.org/officeDocument/2006/relationships" id="256" r:id="R0e7f0717272f4e2d"/>
-    <p:sldId xmlns:r="http://schemas.openxmlformats.org/officeDocument/2006/relationships" id="257" r:id="R49c925c74ddb46ff"/>
-    <p:sldId xmlns:r="http://schemas.openxmlformats.org/officeDocument/2006/relationships" id="258" r:id="R8ceddafd2e8e4a33"/>
-    <p:sldId xmlns:r="http://schemas.openxmlformats.org/officeDocument/2006/relationships" id="259" r:id="R3dc0df7df1ca4a8a"/>
-    <p:sldId xmlns:r="http://schemas.openxmlformats.org/officeDocument/2006/relationships" id="260" r:id="Rf451c2ae103c4c5a"/>
-    <p:sldId xmlns:r="http://schemas.openxmlformats.org/officeDocument/2006/relationships" id="261" r:id="R6948d12318b74eac"/>
-    <p:sldId xmlns:r="http://schemas.openxmlformats.org/officeDocument/2006/relationships" id="262" r:id="Rba1dadd96798419e"/>
-    <p:sldId xmlns:r="http://schemas.openxmlformats.org/officeDocument/2006/relationships" id="263" r:id="R56bddbcc26094ac5"/>
-    <p:sldId xmlns:r="http://schemas.openxmlformats.org/officeDocument/2006/relationships" id="264" r:id="Rdef2d14f80164430"/>
-    <p:sldId xmlns:r="http://schemas.openxmlformats.org/officeDocument/2006/relationships" id="265" r:id="R6f34161a50ee4961"/>
-    <p:sldId xmlns:r="http://schemas.openxmlformats.org/officeDocument/2006/relationships" id="266" r:id="R131a65016af142be"/>
-    <p:sldId xmlns:r="http://schemas.openxmlformats.org/officeDocument/2006/relationships" id="267" r:id="R03d855eb3e9d4f59"/>
-    <p:sldId xmlns:r="http://schemas.openxmlformats.org/officeDocument/2006/relationships" id="268" r:id="Ra4ae7cfe8d1047a8"/>
-    <p:sldId xmlns:r="http://schemas.openxmlformats.org/officeDocument/2006/relationships" id="269" r:id="R23d90f46b2a847ef"/>
-    <p:sldId xmlns:r="http://schemas.openxmlformats.org/officeDocument/2006/relationships" id="270" r:id="R3e597dacf5044c3e"/>
-    <p:sldId xmlns:r="http://schemas.openxmlformats.org/officeDocument/2006/relationships" id="271" r:id="R69d716e5f81b4c89"/>
-    <p:sldId xmlns:r="http://schemas.openxmlformats.org/officeDocument/2006/relationships" id="272" r:id="Rb5d61c3e42484ec7"/>
-    <p:sldId xmlns:r="http://schemas.openxmlformats.org/officeDocument/2006/relationships" id="273" r:id="R2e1592c732cc409e"/>
-    <p:sldId xmlns:r="http://schemas.openxmlformats.org/officeDocument/2006/relationships" id="274" r:id="R4f80921ee01f4b5c"/>
-    <p:sldId xmlns:r="http://schemas.openxmlformats.org/officeDocument/2006/relationships" id="275" r:id="R2baf9fb176ab4659"/>
-    <p:sldId xmlns:r="http://schemas.openxmlformats.org/officeDocument/2006/relationships" id="276" r:id="Rd45fda880c404a1e"/>
-    <p:sldId xmlns:r="http://schemas.openxmlformats.org/officeDocument/2006/relationships" id="277" r:id="Rdf8ab002e34e41e7"/>
-    <p:sldId xmlns:r="http://schemas.openxmlformats.org/officeDocument/2006/relationships" id="278" r:id="Rb7c9e097537c4f69"/>
-    <p:sldId xmlns:r="http://schemas.openxmlformats.org/officeDocument/2006/relationships" id="279" r:id="R971581be185d4dc7"/>
-    <p:sldId xmlns:r="http://schemas.openxmlformats.org/officeDocument/2006/relationships" id="280" r:id="R8daad41866c84970"/>
-    <p:sldId xmlns:r="http://schemas.openxmlformats.org/officeDocument/2006/relationships" id="281" r:id="R5e47d6026b6c4285"/>
+    <p:sldId xmlns:r="http://schemas.openxmlformats.org/officeDocument/2006/relationships" id="256" r:id="R27835cb9c249462f"/>
+    <p:sldId xmlns:r="http://schemas.openxmlformats.org/officeDocument/2006/relationships" id="257" r:id="R5efed051fc0a4408"/>
+    <p:sldId xmlns:r="http://schemas.openxmlformats.org/officeDocument/2006/relationships" id="258" r:id="R9df24e88fc8d4b70"/>
+    <p:sldId xmlns:r="http://schemas.openxmlformats.org/officeDocument/2006/relationships" id="259" r:id="Re011418eae9c4bc7"/>
+    <p:sldId xmlns:r="http://schemas.openxmlformats.org/officeDocument/2006/relationships" id="260" r:id="R87073b95366641b7"/>
+    <p:sldId xmlns:r="http://schemas.openxmlformats.org/officeDocument/2006/relationships" id="261" r:id="Rd83681f8d76e4719"/>
+    <p:sldId xmlns:r="http://schemas.openxmlformats.org/officeDocument/2006/relationships" id="262" r:id="Reba66603b82c45a3"/>
+    <p:sldId xmlns:r="http://schemas.openxmlformats.org/officeDocument/2006/relationships" id="263" r:id="Rebcc65d533474a07"/>
+    <p:sldId xmlns:r="http://schemas.openxmlformats.org/officeDocument/2006/relationships" id="264" r:id="R001be7961e0944e0"/>
+    <p:sldId xmlns:r="http://schemas.openxmlformats.org/officeDocument/2006/relationships" id="265" r:id="R9b40b2d910b14e9b"/>
+    <p:sldId xmlns:r="http://schemas.openxmlformats.org/officeDocument/2006/relationships" id="266" r:id="R93a76805c513400e"/>
+    <p:sldId xmlns:r="http://schemas.openxmlformats.org/officeDocument/2006/relationships" id="267" r:id="Re9f5274ad9934e1c"/>
+    <p:sldId xmlns:r="http://schemas.openxmlformats.org/officeDocument/2006/relationships" id="268" r:id="R680342cdd0c54bb1"/>
+    <p:sldId xmlns:r="http://schemas.openxmlformats.org/officeDocument/2006/relationships" id="269" r:id="R920bd6a0baf24321"/>
+    <p:sldId xmlns:r="http://schemas.openxmlformats.org/officeDocument/2006/relationships" id="270" r:id="Rd0b04d49ec524794"/>
+    <p:sldId xmlns:r="http://schemas.openxmlformats.org/officeDocument/2006/relationships" id="271" r:id="R7de546c46d5143eb"/>
+    <p:sldId xmlns:r="http://schemas.openxmlformats.org/officeDocument/2006/relationships" id="272" r:id="Rf4491695f8844b33"/>
+    <p:sldId xmlns:r="http://schemas.openxmlformats.org/officeDocument/2006/relationships" id="273" r:id="R61f4991f910b4657"/>
+    <p:sldId xmlns:r="http://schemas.openxmlformats.org/officeDocument/2006/relationships" id="274" r:id="R2d935656aa9c441d"/>
+    <p:sldId xmlns:r="http://schemas.openxmlformats.org/officeDocument/2006/relationships" id="275" r:id="R78dd05d2924349b1"/>
+    <p:sldId xmlns:r="http://schemas.openxmlformats.org/officeDocument/2006/relationships" id="276" r:id="R52d647a98422430c"/>
+    <p:sldId xmlns:r="http://schemas.openxmlformats.org/officeDocument/2006/relationships" id="277" r:id="R23500f4cbf0e4ff6"/>
+    <p:sldId xmlns:r="http://schemas.openxmlformats.org/officeDocument/2006/relationships" id="278" r:id="R10a0fff33c7b4dd3"/>
+    <p:sldId xmlns:r="http://schemas.openxmlformats.org/officeDocument/2006/relationships" id="279" r:id="R0d3c458dda534ee0"/>
+    <p:sldId xmlns:r="http://schemas.openxmlformats.org/officeDocument/2006/relationships" id="280" r:id="Rcefae6a696104af3"/>
+    <p:sldId xmlns:r="http://schemas.openxmlformats.org/officeDocument/2006/relationships" id="281" r:id="R7205a59963e547a4"/>
   </p:sldIdLst>
   <p:sldSz cx="15240000" cy="8572500"/>
   <p:notesSz cx="6858000" cy="9144000"/>
@@ -492,7 +492,7 @@
           <a:p xmlns:a="http://schemas.openxmlformats.org/drawingml/2006/main">
             <a:r>
               <a:rPr sz="1400"/>
-              <a:t>Start en terugblik: Opgave 1 gebruikt TO uit §2.1.2, dia 3, en Ev uit §2.2.1. Opgave 2b gebruikt het onderscheid omzet/winst uit §2.1.2, dia 4. De lokale omzetregel in opgave 2a is nieuw. Zoek de uitleg en voorwaarden op p. 45 op. Opgave 2b kan het eerdere onderscheid tussen omzet en winst ophalen. Laat leerlingen bij deze verkenning aanwijzen welke uitleg zij gebruiken en hun twijfel noteren. Verwacht de nieuwe bewerking nog niet zonder steun. Bij terugkeer naar dit overzicht vóór het basiswerk: laat leerlingen opgave 2a opnieuw proberen na de uitleg, bespreek hun redenering en geef zo nodig extra steun. Dit is een verkennende start, geen toets van al beheerste nieuwe leerstof.</a:t>
+              <a:t>Start en terugblik: Opgave 1 gebruikt TO uit §2.1.2, dia 3, en procentuele verandering met de oude waarde als basis, zoals opgehaald in §2.2.1. Opgave 2b gebruikt het onderscheid omzet/winst uit §2.1.2, dia 4. De lokale omzetregel in opgave 2a is nieuw. Zoek de uitleg en voorwaarden op p. 45 op. Opgave 2b kan het eerdere onderscheid tussen omzet en winst ophalen. Laat leerlingen bij deze verkenning aanwijzen welke uitleg zij gebruiken en hun twijfel noteren. Verwacht de nieuwe bewerking nog niet zonder steun. Bij terugkeer naar dit overzicht vóór het basiswerk: laat leerlingen opgave 2a opnieuw proberen na de uitleg, bespreek hun redenering en geef zo nodig extra steun. Dit is een verkennende start, geen toets van al beheerste nieuwe leerstof.</a:t>
             </a:r>
           </a:p>
           <a:p xmlns:a="http://schemas.openxmlformats.org/drawingml/2006/main">
@@ -1254,7 +1254,7 @@
           <a:p xmlns:a="http://schemas.openxmlformats.org/drawingml/2006/main">
             <a:r>
               <a:rPr sz="1400"/>
-              <a:t>Start en terugblik: Opgave 1 gebruikt TO uit §2.1.2, dia 3, en Ev uit §2.2.1. Opgave 2b gebruikt het onderscheid omzet/winst uit §2.1.2, dia 4. De lokale omzetregel in opgave 2a is nieuw. Zoek de uitleg en voorwaarden op p. 45 op. Opgave 2b kan het eerdere onderscheid tussen omzet en winst ophalen. Laat leerlingen bij deze verkenning aanwijzen welke uitleg zij gebruiken en hun twijfel noteren. Verwacht de nieuwe bewerking nog niet zonder steun. Bij terugkeer naar dit overzicht vóór het basiswerk: laat leerlingen opgave 2a opnieuw proberen na de uitleg, bespreek hun redenering en geef zo nodig extra steun. Dit is een verkennende start, geen toets van al beheerste nieuwe leerstof.</a:t>
+              <a:t>Start en terugblik: Opgave 1 gebruikt TO uit §2.1.2, dia 3, en procentuele verandering met de oude waarde als basis, zoals opgehaald in §2.2.1. Opgave 2b gebruikt het onderscheid omzet/winst uit §2.1.2, dia 4. De lokale omzetregel in opgave 2a is nieuw. Zoek de uitleg en voorwaarden op p. 45 op. Opgave 2b kan het eerdere onderscheid tussen omzet en winst ophalen. Laat leerlingen bij deze verkenning aanwijzen welke uitleg zij gebruiken en hun twijfel noteren. Verwacht de nieuwe bewerking nog niet zonder steun. Bij terugkeer naar dit overzicht vóór het basiswerk: laat leerlingen opgave 2a opnieuw proberen na de uitleg, bespreek hun redenering en geef zo nodig extra steun. Dit is een verkennende start, geen toets van al beheerste nieuwe leerstof.</a:t>
             </a:r>
           </a:p>
           <a:p xmlns:a="http://schemas.openxmlformats.org/drawingml/2006/main">
@@ -2766,7 +2766,7 @@
           <a:p xmlns:a="http://schemas.openxmlformats.org/drawingml/2006/main">
             <a:r>
               <a:rPr sz="1400"/>
-              <a:t>Start en terugblik: Opgave 1 gebruikt TO uit §2.1.2, dia 3, en Ev uit §2.2.1. Opgave 2b gebruikt het onderscheid omzet/winst uit §2.1.2, dia 4. De lokale omzetregel in opgave 2a is nieuw. Zoek de uitleg en voorwaarden op p. 45 op. Opgave 2b kan het eerdere onderscheid tussen omzet en winst ophalen. Laat leerlingen bij deze verkenning aanwijzen welke uitleg zij gebruiken en hun twijfel noteren. Verwacht de nieuwe bewerking nog niet zonder steun. Bij terugkeer naar dit overzicht vóór het basiswerk: laat leerlingen opgave 2a opnieuw proberen na de uitleg, bespreek hun redenering en geef zo nodig extra steun. Dit is een verkennende start, geen toets van al beheerste nieuwe leerstof.</a:t>
+              <a:t>Start en terugblik: Opgave 1 gebruikt TO uit §2.1.2, dia 3, en procentuele verandering met de oude waarde als basis, zoals opgehaald in §2.2.1. Opgave 2b gebruikt het onderscheid omzet/winst uit §2.1.2, dia 4. De lokale omzetregel in opgave 2a is nieuw. Zoek de uitleg en voorwaarden op p. 45 op. Opgave 2b kan het eerdere onderscheid tussen omzet en winst ophalen. Laat leerlingen bij deze verkenning aanwijzen welke uitleg zij gebruiken en hun twijfel noteren. Verwacht de nieuwe bewerking nog niet zonder steun. Bij terugkeer naar dit overzicht vóór het basiswerk: laat leerlingen opgave 2a opnieuw proberen na de uitleg, bespreek hun redenering en geef zo nodig extra steun. Dit is een verkennende start, geen toets van al beheerste nieuwe leerstof.</a:t>
             </a:r>
           </a:p>
           <a:p xmlns:a="http://schemas.openxmlformats.org/drawingml/2006/main">
@@ -3751,7 +3751,7 @@
   </p:cSld>
   <p:clrMap bg1="lt1" tx1="dk1" bg2="lt2" tx2="dk2" accent1="accent1" accent2="accent2" accent3="accent3" accent4="accent4" accent5="accent5" accent6="accent6" hlink="hlink" folHlink="folHlink"/>
   <p:sldLayoutIdLst>
-    <p:sldLayoutId xmlns:r="http://schemas.openxmlformats.org/officeDocument/2006/relationships" id="2147483649" r:id="R64d0d45189b0492f"/>
+    <p:sldLayoutId xmlns:r="http://schemas.openxmlformats.org/officeDocument/2006/relationships" id="2147483649" r:id="R70587c291e254d50"/>
   </p:sldLayoutIdLst>
   <p:txStyles>
     <p:titleStyle>
@@ -4926,7 +4926,7 @@
           <p:cNvPr id="29" name="Deze les: §2.2.2 Elasticiteit en omzet">
             <a:extLst xmlns:a="http://schemas.openxmlformats.org/drawingml/2006/main">
               <a:ext uri="{FF2B5EF4-FFF2-40B4-BE49-F238E27FC236}">
-                <a16:creationId xmlns:a16="http://schemas.microsoft.com/office/drawing/2014/main" id="{F0071A19-F2F6-49D3-8780-AD1F40D58387}"/>
+                <a16:creationId xmlns:a16="http://schemas.microsoft.com/office/drawing/2014/main" id="{963CEA79-26B9-41F5-98A1-4BFC2F73AD85}"/>
               </a:ext>
             </a:extLst>
           </p:cNvPr>
@@ -4983,7 +4983,7 @@
           <p:cNvPr id="2" name="">
             <a:extLst xmlns:a="http://schemas.openxmlformats.org/drawingml/2006/main">
               <a:ext uri="{FF2B5EF4-FFF2-40B4-BE49-F238E27FC236}">
-                <a16:creationId xmlns:a16="http://schemas.microsoft.com/office/drawing/2014/main" id="{E3A17116-5A01-4042-9A1A-FA10C9C6B273}"/>
+                <a16:creationId xmlns:a16="http://schemas.microsoft.com/office/drawing/2014/main" id="{EEF71EAA-3515-467B-ABC2-DA6E5F938A34}"/>
               </a:ext>
             </a:extLst>
           </p:cNvPr>
@@ -5012,7 +5012,7 @@
           <p:cNvPr id="3" name="§2.2.2 Elasticiteit en omzet">
             <a:extLst xmlns:a="http://schemas.openxmlformats.org/drawingml/2006/main">
               <a:ext uri="{FF2B5EF4-FFF2-40B4-BE49-F238E27FC236}">
-                <a16:creationId xmlns:a16="http://schemas.microsoft.com/office/drawing/2014/main" id="{5E5CFB3D-A554-4470-BC07-15606850253C}"/>
+                <a16:creationId xmlns:a16="http://schemas.microsoft.com/office/drawing/2014/main" id="{01334B25-9965-4BD1-89C3-29E7CCAD6B5B}"/>
               </a:ext>
             </a:extLst>
           </p:cNvPr>
@@ -5069,7 +5069,7 @@
           <p:cNvPr id="4" name="1">
             <a:extLst xmlns:a="http://schemas.openxmlformats.org/drawingml/2006/main">
               <a:ext uri="{FF2B5EF4-FFF2-40B4-BE49-F238E27FC236}">
-                <a16:creationId xmlns:a16="http://schemas.microsoft.com/office/drawing/2014/main" id="{37B9DB3C-9C5E-4C0C-8E06-B0B7EB7E647C}"/>
+                <a16:creationId xmlns:a16="http://schemas.microsoft.com/office/drawing/2014/main" id="{6D3D366A-AA6B-4D54-915C-A634E3115A4C}"/>
               </a:ext>
             </a:extLst>
           </p:cNvPr>
@@ -5126,7 +5126,7 @@
           <p:cNvPr id="5" name="phase">
             <a:extLst xmlns:a="http://schemas.openxmlformats.org/drawingml/2006/main">
               <a:ext uri="{FF2B5EF4-FFF2-40B4-BE49-F238E27FC236}">
-                <a16:creationId xmlns:a16="http://schemas.microsoft.com/office/drawing/2014/main" id="{9FEE102C-BBA8-4FDB-AE1E-199C25A7D3DE}"/>
+                <a16:creationId xmlns:a16="http://schemas.microsoft.com/office/drawing/2014/main" id="{F5267D0C-9B48-45F2-AF76-2FAD0A8DFC07}"/>
               </a:ext>
             </a:extLst>
           </p:cNvPr>
@@ -5183,7 +5183,7 @@
           <p:cNvPr id="6" name="Lesroute">
             <a:extLst xmlns:a="http://schemas.openxmlformats.org/drawingml/2006/main">
               <a:ext uri="{FF2B5EF4-FFF2-40B4-BE49-F238E27FC236}">
-                <a16:creationId xmlns:a16="http://schemas.microsoft.com/office/drawing/2014/main" id="{6CAC0D22-AE8E-41AD-BB01-BCB6A9C09337}"/>
+                <a16:creationId xmlns:a16="http://schemas.microsoft.com/office/drawing/2014/main" id="{A0EC28C5-A1DD-4339-8A47-9C14E4A3CB7A}"/>
               </a:ext>
             </a:extLst>
           </p:cNvPr>
@@ -5240,7 +5240,7 @@
           <p:cNvPr id="7" name="route-number-1">
             <a:extLst xmlns:a="http://schemas.openxmlformats.org/drawingml/2006/main">
               <a:ext uri="{FF2B5EF4-FFF2-40B4-BE49-F238E27FC236}">
-                <a16:creationId xmlns:a16="http://schemas.microsoft.com/office/drawing/2014/main" id="{5A979EE3-872F-4AA6-9B94-F2834CFC2E8B}"/>
+                <a16:creationId xmlns:a16="http://schemas.microsoft.com/office/drawing/2014/main" id="{46BDE59F-F6E3-402D-A345-779141BC4358}"/>
               </a:ext>
             </a:extLst>
           </p:cNvPr>
@@ -5297,7 +5297,7 @@
           <p:cNvPr id="8" name="route-1">
             <a:extLst xmlns:a="http://schemas.openxmlformats.org/drawingml/2006/main">
               <a:ext uri="{FF2B5EF4-FFF2-40B4-BE49-F238E27FC236}">
-                <a16:creationId xmlns:a16="http://schemas.microsoft.com/office/drawing/2014/main" id="{26D78FBC-7477-4F3B-A140-F562AF25F716}"/>
+                <a16:creationId xmlns:a16="http://schemas.microsoft.com/office/drawing/2014/main" id="{31638BCE-A9BD-48B0-972E-A56AE0BC6ACC}"/>
               </a:ext>
             </a:extLst>
           </p:cNvPr>
@@ -5354,7 +5354,7 @@
           <p:cNvPr id="9" name="route-number-2">
             <a:extLst xmlns:a="http://schemas.openxmlformats.org/drawingml/2006/main">
               <a:ext uri="{FF2B5EF4-FFF2-40B4-BE49-F238E27FC236}">
-                <a16:creationId xmlns:a16="http://schemas.microsoft.com/office/drawing/2014/main" id="{5C61D5F2-92B9-451B-A8F5-CAA025631D6A}"/>
+                <a16:creationId xmlns:a16="http://schemas.microsoft.com/office/drawing/2014/main" id="{9B6E9CBE-4704-4915-A0AC-8AFA5C7F3E3C}"/>
               </a:ext>
             </a:extLst>
           </p:cNvPr>
@@ -5411,7 +5411,7 @@
           <p:cNvPr id="10" name="route-2">
             <a:extLst xmlns:a="http://schemas.openxmlformats.org/drawingml/2006/main">
               <a:ext uri="{FF2B5EF4-FFF2-40B4-BE49-F238E27FC236}">
-                <a16:creationId xmlns:a16="http://schemas.microsoft.com/office/drawing/2014/main" id="{1B7C2433-1888-4C2E-B471-2719E5AD308A}"/>
+                <a16:creationId xmlns:a16="http://schemas.microsoft.com/office/drawing/2014/main" id="{BBA47777-F01F-451F-8268-8CACC1A846D9}"/>
               </a:ext>
             </a:extLst>
           </p:cNvPr>
@@ -5468,7 +5468,7 @@
           <p:cNvPr id="11" name="route-number-3">
             <a:extLst xmlns:a="http://schemas.openxmlformats.org/drawingml/2006/main">
               <a:ext uri="{FF2B5EF4-FFF2-40B4-BE49-F238E27FC236}">
-                <a16:creationId xmlns:a16="http://schemas.microsoft.com/office/drawing/2014/main" id="{53302EBD-E4D4-4967-8336-90C174142A87}"/>
+                <a16:creationId xmlns:a16="http://schemas.microsoft.com/office/drawing/2014/main" id="{1CC7234B-D187-4329-BD10-F1A0C8F6C9AE}"/>
               </a:ext>
             </a:extLst>
           </p:cNvPr>
@@ -5525,7 +5525,7 @@
           <p:cNvPr id="12" name="route-3">
             <a:extLst xmlns:a="http://schemas.openxmlformats.org/drawingml/2006/main">
               <a:ext uri="{FF2B5EF4-FFF2-40B4-BE49-F238E27FC236}">
-                <a16:creationId xmlns:a16="http://schemas.microsoft.com/office/drawing/2014/main" id="{BA7CFC4F-B79E-436B-B2EB-3C0DC4CFD6B4}"/>
+                <a16:creationId xmlns:a16="http://schemas.microsoft.com/office/drawing/2014/main" id="{BABDE710-AA79-41A4-A72D-8E741FEA1BE0}"/>
               </a:ext>
             </a:extLst>
           </p:cNvPr>
@@ -5582,7 +5582,7 @@
           <p:cNvPr id="13" name="route-number-4">
             <a:extLst xmlns:a="http://schemas.openxmlformats.org/drawingml/2006/main">
               <a:ext uri="{FF2B5EF4-FFF2-40B4-BE49-F238E27FC236}">
-                <a16:creationId xmlns:a16="http://schemas.microsoft.com/office/drawing/2014/main" id="{CA785BBD-3A25-441F-A6D9-5B5F9FE94C72}"/>
+                <a16:creationId xmlns:a16="http://schemas.microsoft.com/office/drawing/2014/main" id="{C8201255-50E2-4843-A97C-9DB62DDF2854}"/>
               </a:ext>
             </a:extLst>
           </p:cNvPr>
@@ -5639,7 +5639,7 @@
           <p:cNvPr id="14" name="route-4">
             <a:extLst xmlns:a="http://schemas.openxmlformats.org/drawingml/2006/main">
               <a:ext uri="{FF2B5EF4-FFF2-40B4-BE49-F238E27FC236}">
-                <a16:creationId xmlns:a16="http://schemas.microsoft.com/office/drawing/2014/main" id="{B3EE3340-EE6E-4CFD-9AB1-D8161200607B}"/>
+                <a16:creationId xmlns:a16="http://schemas.microsoft.com/office/drawing/2014/main" id="{E66B20F0-3126-45AA-860B-9C5C118A9B7D}"/>
               </a:ext>
             </a:extLst>
           </p:cNvPr>
@@ -5696,7 +5696,7 @@
           <p:cNvPr id="15" name="route-number-5">
             <a:extLst xmlns:a="http://schemas.openxmlformats.org/drawingml/2006/main">
               <a:ext uri="{FF2B5EF4-FFF2-40B4-BE49-F238E27FC236}">
-                <a16:creationId xmlns:a16="http://schemas.microsoft.com/office/drawing/2014/main" id="{B3702B7E-F330-40CC-9EC8-A91205E55D62}"/>
+                <a16:creationId xmlns:a16="http://schemas.microsoft.com/office/drawing/2014/main" id="{FC3851AD-C3C5-4226-92A7-9ADFBE40052E}"/>
               </a:ext>
             </a:extLst>
           </p:cNvPr>
@@ -5753,7 +5753,7 @@
           <p:cNvPr id="16" name="route-5">
             <a:extLst xmlns:a="http://schemas.openxmlformats.org/drawingml/2006/main">
               <a:ext uri="{FF2B5EF4-FFF2-40B4-BE49-F238E27FC236}">
-                <a16:creationId xmlns:a16="http://schemas.microsoft.com/office/drawing/2014/main" id="{1720059D-1C2A-4145-90A2-A2EFE1057250}"/>
+                <a16:creationId xmlns:a16="http://schemas.microsoft.com/office/drawing/2014/main" id="{6F89881C-2F8B-417C-B9A9-8514F7FA415F}"/>
               </a:ext>
             </a:extLst>
           </p:cNvPr>
@@ -5810,7 +5810,7 @@
           <p:cNvPr id="17" name="route-number-6">
             <a:extLst xmlns:a="http://schemas.openxmlformats.org/drawingml/2006/main">
               <a:ext uri="{FF2B5EF4-FFF2-40B4-BE49-F238E27FC236}">
-                <a16:creationId xmlns:a16="http://schemas.microsoft.com/office/drawing/2014/main" id="{D3085FFA-D427-4035-B609-BEBB5E8DEAA9}"/>
+                <a16:creationId xmlns:a16="http://schemas.microsoft.com/office/drawing/2014/main" id="{DA6B610B-30B3-40D7-931F-D9825E7FDA85}"/>
               </a:ext>
             </a:extLst>
           </p:cNvPr>
@@ -5867,7 +5867,7 @@
           <p:cNvPr id="18" name="route-6">
             <a:extLst xmlns:a="http://schemas.openxmlformats.org/drawingml/2006/main">
               <a:ext uri="{FF2B5EF4-FFF2-40B4-BE49-F238E27FC236}">
-                <a16:creationId xmlns:a16="http://schemas.microsoft.com/office/drawing/2014/main" id="{9A82502F-C3FF-4FF0-9BA8-AB5895EF6424}"/>
+                <a16:creationId xmlns:a16="http://schemas.microsoft.com/office/drawing/2014/main" id="{87B25FF4-FC7C-433E-A721-92EDEDA604AD}"/>
               </a:ext>
             </a:extLst>
           </p:cNvPr>
@@ -5924,7 +5924,7 @@
           <p:cNvPr id="19" name="route-number-7">
             <a:extLst xmlns:a="http://schemas.openxmlformats.org/drawingml/2006/main">
               <a:ext uri="{FF2B5EF4-FFF2-40B4-BE49-F238E27FC236}">
-                <a16:creationId xmlns:a16="http://schemas.microsoft.com/office/drawing/2014/main" id="{F26BA015-31CD-4AFE-B85F-D018813D44FC}"/>
+                <a16:creationId xmlns:a16="http://schemas.microsoft.com/office/drawing/2014/main" id="{24B71BAB-A651-438C-A92E-C86B72F1A0E7}"/>
               </a:ext>
             </a:extLst>
           </p:cNvPr>
@@ -5981,7 +5981,7 @@
           <p:cNvPr id="20" name="route-7">
             <a:extLst xmlns:a="http://schemas.openxmlformats.org/drawingml/2006/main">
               <a:ext uri="{FF2B5EF4-FFF2-40B4-BE49-F238E27FC236}">
-                <a16:creationId xmlns:a16="http://schemas.microsoft.com/office/drawing/2014/main" id="{EF896C06-9086-4529-B35F-AC83F59607E2}"/>
+                <a16:creationId xmlns:a16="http://schemas.microsoft.com/office/drawing/2014/main" id="{9D191B9B-95A8-4091-9C33-E1952C52705D}"/>
               </a:ext>
             </a:extLst>
           </p:cNvPr>
@@ -6038,7 +6038,7 @@
           <p:cNvPr id="21" name="Lesdoelen">
             <a:extLst xmlns:a="http://schemas.openxmlformats.org/drawingml/2006/main">
               <a:ext uri="{FF2B5EF4-FFF2-40B4-BE49-F238E27FC236}">
-                <a16:creationId xmlns:a16="http://schemas.microsoft.com/office/drawing/2014/main" id="{66B83EC7-B1A6-42DF-9BB6-7A9EE8F0F111}"/>
+                <a16:creationId xmlns:a16="http://schemas.microsoft.com/office/drawing/2014/main" id="{D5F6BBC2-D3A0-4A39-861E-6EB759AAC14A}"/>
               </a:ext>
             </a:extLst>
           </p:cNvPr>
@@ -6095,7 +6095,7 @@
           <p:cNvPr id="22" name="overview-goals">
             <a:extLst xmlns:a="http://schemas.openxmlformats.org/drawingml/2006/main">
               <a:ext uri="{FF2B5EF4-FFF2-40B4-BE49-F238E27FC236}">
-                <a16:creationId xmlns:a16="http://schemas.microsoft.com/office/drawing/2014/main" id="{9D814DB7-86AC-4B9F-A52D-031162859902}"/>
+                <a16:creationId xmlns:a16="http://schemas.microsoft.com/office/drawing/2014/main" id="{2A7FF8F1-D813-4206-B3EF-A44C46EA7BD8}"/>
               </a:ext>
             </a:extLst>
           </p:cNvPr>
@@ -6198,7 +6198,7 @@
           <p:cNvPr id="23" name="">
             <a:extLst xmlns:a="http://schemas.openxmlformats.org/drawingml/2006/main">
               <a:ext uri="{FF2B5EF4-FFF2-40B4-BE49-F238E27FC236}">
-                <a16:creationId xmlns:a16="http://schemas.microsoft.com/office/drawing/2014/main" id="{3106C64C-923F-4FB4-B138-8F23C2F4A310}"/>
+                <a16:creationId xmlns:a16="http://schemas.microsoft.com/office/drawing/2014/main" id="{6AD81FC1-9BDC-4BB5-86FC-0E453B50A5E7}"/>
               </a:ext>
             </a:extLst>
           </p:cNvPr>
@@ -6227,7 +6227,7 @@
           <p:cNvPr id="24" name="Startopdracht">
             <a:extLst xmlns:a="http://schemas.openxmlformats.org/drawingml/2006/main">
               <a:ext uri="{FF2B5EF4-FFF2-40B4-BE49-F238E27FC236}">
-                <a16:creationId xmlns:a16="http://schemas.microsoft.com/office/drawing/2014/main" id="{5BA9D824-741B-47C8-98F4-09961930E4B3}"/>
+                <a16:creationId xmlns:a16="http://schemas.microsoft.com/office/drawing/2014/main" id="{4811CCF4-D14D-49EF-B765-C44D5F7225A3}"/>
               </a:ext>
             </a:extLst>
           </p:cNvPr>
@@ -6284,7 +6284,7 @@
           <p:cNvPr id="25" name="overview-start">
             <a:extLst xmlns:a="http://schemas.openxmlformats.org/drawingml/2006/main">
               <a:ext uri="{FF2B5EF4-FFF2-40B4-BE49-F238E27FC236}">
-                <a16:creationId xmlns:a16="http://schemas.microsoft.com/office/drawing/2014/main" id="{A10193B2-39B2-41F4-A186-D0CF917F2E0C}"/>
+                <a16:creationId xmlns:a16="http://schemas.microsoft.com/office/drawing/2014/main" id="{029A47FB-69EF-47C1-B2FC-D4AAE2A7C31F}"/>
               </a:ext>
             </a:extLst>
           </p:cNvPr>
@@ -6364,7 +6364,7 @@
           <p:cNvPr id="26" name="">
             <a:extLst xmlns:a="http://schemas.openxmlformats.org/drawingml/2006/main">
               <a:ext uri="{FF2B5EF4-FFF2-40B4-BE49-F238E27FC236}">
-                <a16:creationId xmlns:a16="http://schemas.microsoft.com/office/drawing/2014/main" id="{60B50E0A-DDB9-4290-AB5C-D154401E4B34}"/>
+                <a16:creationId xmlns:a16="http://schemas.microsoft.com/office/drawing/2014/main" id="{E0F728BA-65CE-46A4-8897-D585FAE9ADB2}"/>
               </a:ext>
             </a:extLst>
           </p:cNvPr>
@@ -6393,7 +6393,7 @@
           <p:cNvPr id="27" name="Huiswerk">
             <a:extLst xmlns:a="http://schemas.openxmlformats.org/drawingml/2006/main">
               <a:ext uri="{FF2B5EF4-FFF2-40B4-BE49-F238E27FC236}">
-                <a16:creationId xmlns:a16="http://schemas.microsoft.com/office/drawing/2014/main" id="{D656B6FE-1B14-4FE3-85FD-CEE36A2F1DC8}"/>
+                <a16:creationId xmlns:a16="http://schemas.microsoft.com/office/drawing/2014/main" id="{3593F68E-361F-411B-9CC4-7AA382410009}"/>
               </a:ext>
             </a:extLst>
           </p:cNvPr>
@@ -6450,7 +6450,7 @@
           <p:cNvPr id="28" name="overview-homework">
             <a:extLst xmlns:a="http://schemas.openxmlformats.org/drawingml/2006/main">
               <a:ext uri="{FF2B5EF4-FFF2-40B4-BE49-F238E27FC236}">
-                <a16:creationId xmlns:a16="http://schemas.microsoft.com/office/drawing/2014/main" id="{F3CBC081-42FA-49C7-8B48-BF868ABCAEEB}"/>
+                <a16:creationId xmlns:a16="http://schemas.microsoft.com/office/drawing/2014/main" id="{45F0A596-C86D-4DA5-9885-95D6DDA8E66F}"/>
               </a:ext>
             </a:extLst>
           </p:cNvPr>
@@ -6597,7 +6597,7 @@
     </p:spTree>
     <p:extLst>
       <p:ext uri="{BB962C8B-B14F-4D97-AF65-F5344CB8AC3E}">
-        <p14:creationId xmlns:p14="http://schemas.microsoft.com/office/powerpoint/2010/main" val="1885401424"/>
+        <p14:creationId xmlns:p14="http://schemas.microsoft.com/office/powerpoint/2010/main" val="33659835"/>
       </p:ext>
     </p:extLst>
   </p:cSld>
@@ -6628,7 +6628,7 @@
           <p:cNvPr id="8" name="De lokale omzetregel">
             <a:extLst xmlns:a="http://schemas.openxmlformats.org/drawingml/2006/main">
               <a:ext uri="{FF2B5EF4-FFF2-40B4-BE49-F238E27FC236}">
-                <a16:creationId xmlns:a16="http://schemas.microsoft.com/office/drawing/2014/main" id="{3AFB2DA6-BE47-4871-BA36-1A2BE66502B0}"/>
+                <a16:creationId xmlns:a16="http://schemas.microsoft.com/office/drawing/2014/main" id="{F006D42E-7A81-42D4-BDA0-28AA29D99D3B}"/>
               </a:ext>
             </a:extLst>
           </p:cNvPr>
@@ -6685,7 +6685,7 @@
           <p:cNvPr id="2" name="">
             <a:extLst xmlns:a="http://schemas.openxmlformats.org/drawingml/2006/main">
               <a:ext uri="{FF2B5EF4-FFF2-40B4-BE49-F238E27FC236}">
-                <a16:creationId xmlns:a16="http://schemas.microsoft.com/office/drawing/2014/main" id="{DF6C72B6-1450-4303-9D25-467AB757C0FD}"/>
+                <a16:creationId xmlns:a16="http://schemas.microsoft.com/office/drawing/2014/main" id="{19DF8714-5596-42F4-83CA-C422695992C6}"/>
               </a:ext>
             </a:extLst>
           </p:cNvPr>
@@ -6714,7 +6714,7 @@
           <p:cNvPr id="3" name="§2.2.2 Elasticiteit en omzet">
             <a:extLst xmlns:a="http://schemas.openxmlformats.org/drawingml/2006/main">
               <a:ext uri="{FF2B5EF4-FFF2-40B4-BE49-F238E27FC236}">
-                <a16:creationId xmlns:a16="http://schemas.microsoft.com/office/drawing/2014/main" id="{371FFE5D-AC92-4F86-B456-FD306595EF75}"/>
+                <a16:creationId xmlns:a16="http://schemas.microsoft.com/office/drawing/2014/main" id="{E389D0F7-441A-47EA-9B7C-6FFFD6F6BF27}"/>
               </a:ext>
             </a:extLst>
           </p:cNvPr>
@@ -6771,7 +6771,7 @@
           <p:cNvPr id="4" name="10">
             <a:extLst xmlns:a="http://schemas.openxmlformats.org/drawingml/2006/main">
               <a:ext uri="{FF2B5EF4-FFF2-40B4-BE49-F238E27FC236}">
-                <a16:creationId xmlns:a16="http://schemas.microsoft.com/office/drawing/2014/main" id="{E4A652C5-FEC7-4546-A5A6-AE0965324DFC}"/>
+                <a16:creationId xmlns:a16="http://schemas.microsoft.com/office/drawing/2014/main" id="{DC41B385-E903-44D1-B471-CEA96C2B8578}"/>
               </a:ext>
             </a:extLst>
           </p:cNvPr>
@@ -6828,7 +6828,7 @@
           <p:cNvPr id="5" name="Bij een kleine prijsverandering rond de huidige si">
             <a:extLst xmlns:a="http://schemas.openxmlformats.org/drawingml/2006/main">
               <a:ext uri="{FF2B5EF4-FFF2-40B4-BE49-F238E27FC236}">
-                <a16:creationId xmlns:a16="http://schemas.microsoft.com/office/drawing/2014/main" id="{6553FA6D-FBBF-4BC4-A793-691EDFA57132}"/>
+                <a16:creationId xmlns:a16="http://schemas.microsoft.com/office/drawing/2014/main" id="{BE076DEE-3138-43AD-AE92-BAA488330F40}"/>
               </a:ext>
             </a:extLst>
           </p:cNvPr>
@@ -7269,7 +7269,7 @@
           <p:cNvPr id="7" name="Bij gegeven oude en nieuwe waarden: TO altijd nare">
             <a:extLst xmlns:a="http://schemas.openxmlformats.org/drawingml/2006/main">
               <a:ext uri="{FF2B5EF4-FFF2-40B4-BE49-F238E27FC236}">
-                <a16:creationId xmlns:a16="http://schemas.microsoft.com/office/drawing/2014/main" id="{C8D95E11-9B10-460A-A48D-2F05EC9C9E3C}"/>
+                <a16:creationId xmlns:a16="http://schemas.microsoft.com/office/drawing/2014/main" id="{2FDA0B0D-4E78-47DD-A203-7E8E922FD4B2}"/>
               </a:ext>
             </a:extLst>
           </p:cNvPr>
@@ -7324,7 +7324,7 @@
     </p:spTree>
     <p:extLst>
       <p:ext uri="{BB962C8B-B14F-4D97-AF65-F5344CB8AC3E}">
-        <p14:creationId xmlns:p14="http://schemas.microsoft.com/office/powerpoint/2010/main" val="833151734"/>
+        <p14:creationId xmlns:p14="http://schemas.microsoft.com/office/powerpoint/2010/main" val="967525577"/>
       </p:ext>
     </p:extLst>
   </p:cSld>
@@ -7355,7 +7355,7 @@
           <p:cNvPr id="10" name="Prijs en afzet zijn twee factoren">
             <a:extLst xmlns:a="http://schemas.openxmlformats.org/drawingml/2006/main">
               <a:ext uri="{FF2B5EF4-FFF2-40B4-BE49-F238E27FC236}">
-                <a16:creationId xmlns:a16="http://schemas.microsoft.com/office/drawing/2014/main" id="{DBC39277-2B65-4B4A-B7A2-4BBDFB284827}"/>
+                <a16:creationId xmlns:a16="http://schemas.microsoft.com/office/drawing/2014/main" id="{B856D1DD-5D34-4A7A-AD5A-51136CC44062}"/>
               </a:ext>
             </a:extLst>
           </p:cNvPr>
@@ -7412,7 +7412,7 @@
           <p:cNvPr id="2" name="">
             <a:extLst xmlns:a="http://schemas.openxmlformats.org/drawingml/2006/main">
               <a:ext uri="{FF2B5EF4-FFF2-40B4-BE49-F238E27FC236}">
-                <a16:creationId xmlns:a16="http://schemas.microsoft.com/office/drawing/2014/main" id="{A6BA3492-F7C6-429D-8FEA-0EE34B6EDCC4}"/>
+                <a16:creationId xmlns:a16="http://schemas.microsoft.com/office/drawing/2014/main" id="{DC983B9D-89F3-4506-BE4F-76B6F35B7A0A}"/>
               </a:ext>
             </a:extLst>
           </p:cNvPr>
@@ -7441,7 +7441,7 @@
           <p:cNvPr id="3" name="Uitlegvoorbeeld — niet uit het boek">
             <a:extLst xmlns:a="http://schemas.openxmlformats.org/drawingml/2006/main">
               <a:ext uri="{FF2B5EF4-FFF2-40B4-BE49-F238E27FC236}">
-                <a16:creationId xmlns:a16="http://schemas.microsoft.com/office/drawing/2014/main" id="{FF20D397-C5B7-4F0B-82CB-CD3DC259C22B}"/>
+                <a16:creationId xmlns:a16="http://schemas.microsoft.com/office/drawing/2014/main" id="{19B736DE-DA51-4340-AB40-912E2E0241AA}"/>
               </a:ext>
             </a:extLst>
           </p:cNvPr>
@@ -7498,7 +7498,7 @@
           <p:cNvPr id="4" name="11">
             <a:extLst xmlns:a="http://schemas.openxmlformats.org/drawingml/2006/main">
               <a:ext uri="{FF2B5EF4-FFF2-40B4-BE49-F238E27FC236}">
-                <a16:creationId xmlns:a16="http://schemas.microsoft.com/office/drawing/2014/main" id="{C1794922-E4AD-4A8B-A8ED-EF574F8722E3}"/>
+                <a16:creationId xmlns:a16="http://schemas.microsoft.com/office/drawing/2014/main" id="{C9A7702D-05C9-4D0F-9310-DFDB1BA13400}"/>
               </a:ext>
             </a:extLst>
           </p:cNvPr>
@@ -7555,7 +7555,7 @@
           <p:cNvPr id="5" name="KajakStek: P +20%, Q −30%">
             <a:extLst xmlns:a="http://schemas.openxmlformats.org/drawingml/2006/main">
               <a:ext uri="{FF2B5EF4-FFF2-40B4-BE49-F238E27FC236}">
-                <a16:creationId xmlns:a16="http://schemas.microsoft.com/office/drawing/2014/main" id="{4883DAE8-3A73-46CF-9C2A-F8C3EFAD6214}"/>
+                <a16:creationId xmlns:a16="http://schemas.microsoft.com/office/drawing/2014/main" id="{6F265554-D1BE-4955-AE34-43C43F544145}"/>
               </a:ext>
             </a:extLst>
           </p:cNvPr>
@@ -7612,7 +7612,7 @@
           <p:cNvPr id="6" name="TO nieuw / TO oud = (P nieuw / P oud) × (Q nieuw /">
             <a:extLst xmlns:a="http://schemas.openxmlformats.org/drawingml/2006/main">
               <a:ext uri="{FF2B5EF4-FFF2-40B4-BE49-F238E27FC236}">
-                <a16:creationId xmlns:a16="http://schemas.microsoft.com/office/drawing/2014/main" id="{C59F4A9B-F289-4635-9753-3359E1D32AA8}"/>
+                <a16:creationId xmlns:a16="http://schemas.microsoft.com/office/drawing/2014/main" id="{001A645C-0E2F-4919-9E76-C2A132048D4C}"/>
               </a:ext>
             </a:extLst>
           </p:cNvPr>
@@ -7669,7 +7669,7 @@
           <p:cNvPr id="7" name="= 1,20 × 0,70 = 0,84">
             <a:extLst xmlns:a="http://schemas.openxmlformats.org/drawingml/2006/main">
               <a:ext uri="{FF2B5EF4-FFF2-40B4-BE49-F238E27FC236}">
-                <a16:creationId xmlns:a16="http://schemas.microsoft.com/office/drawing/2014/main" id="{F96DFF06-FA24-41A4-A7D7-4BFA895A0577}"/>
+                <a16:creationId xmlns:a16="http://schemas.microsoft.com/office/drawing/2014/main" id="{A97E4398-72FE-4E22-BB02-41082E50513D}"/>
               </a:ext>
             </a:extLst>
           </p:cNvPr>
@@ -7726,7 +7726,7 @@
           <p:cNvPr id="8" name="84% van de oude omzet: een daling van 16%.">
             <a:extLst xmlns:a="http://schemas.openxmlformats.org/drawingml/2006/main">
               <a:ext uri="{FF2B5EF4-FFF2-40B4-BE49-F238E27FC236}">
-                <a16:creationId xmlns:a16="http://schemas.microsoft.com/office/drawing/2014/main" id="{579E2E6F-FF90-41B9-8085-54A609A03215}"/>
+                <a16:creationId xmlns:a16="http://schemas.microsoft.com/office/drawing/2014/main" id="{A0A3CD11-662A-41DC-BEFB-A3BEBB308E57}"/>
               </a:ext>
             </a:extLst>
           </p:cNvPr>
@@ -7783,7 +7783,7 @@
           <p:cNvPr id="9" name="Optellen van +20% en −30% zou −10% geven.">
             <a:extLst xmlns:a="http://schemas.openxmlformats.org/drawingml/2006/main">
               <a:ext uri="{FF2B5EF4-FFF2-40B4-BE49-F238E27FC236}">
-                <a16:creationId xmlns:a16="http://schemas.microsoft.com/office/drawing/2014/main" id="{068E6C73-4801-4BBD-A4E6-5F6E2DB77351}"/>
+                <a16:creationId xmlns:a16="http://schemas.microsoft.com/office/drawing/2014/main" id="{55099539-24D3-4F27-A75B-72DE8A88CF74}"/>
               </a:ext>
             </a:extLst>
           </p:cNvPr>
@@ -7838,7 +7838,7 @@
     </p:spTree>
     <p:extLst>
       <p:ext uri="{BB962C8B-B14F-4D97-AF65-F5344CB8AC3E}">
-        <p14:creationId xmlns:p14="http://schemas.microsoft.com/office/powerpoint/2010/main" val="1902227510"/>
+        <p14:creationId xmlns:p14="http://schemas.microsoft.com/office/powerpoint/2010/main" val="132269395"/>
       </p:ext>
     </p:extLst>
   </p:cSld>
@@ -7869,7 +7869,7 @@
           <p:cNvPr id="8" name="Omzet en winst">
             <a:extLst xmlns:a="http://schemas.openxmlformats.org/drawingml/2006/main">
               <a:ext uri="{FF2B5EF4-FFF2-40B4-BE49-F238E27FC236}">
-                <a16:creationId xmlns:a16="http://schemas.microsoft.com/office/drawing/2014/main" id="{E49D9F7F-1FE3-4044-92BF-DB4EC7438CEB}"/>
+                <a16:creationId xmlns:a16="http://schemas.microsoft.com/office/drawing/2014/main" id="{1CBA8493-B8EF-4AE4-99D3-044162B1CD38}"/>
               </a:ext>
             </a:extLst>
           </p:cNvPr>
@@ -7926,7 +7926,7 @@
           <p:cNvPr id="2" name="">
             <a:extLst xmlns:a="http://schemas.openxmlformats.org/drawingml/2006/main">
               <a:ext uri="{FF2B5EF4-FFF2-40B4-BE49-F238E27FC236}">
-                <a16:creationId xmlns:a16="http://schemas.microsoft.com/office/drawing/2014/main" id="{A9FD4BA5-00B0-4CEA-8B8D-9B7C04C200FD}"/>
+                <a16:creationId xmlns:a16="http://schemas.microsoft.com/office/drawing/2014/main" id="{499B87B6-A506-4E15-98F6-4025FABD9B8B}"/>
               </a:ext>
             </a:extLst>
           </p:cNvPr>
@@ -7955,7 +7955,7 @@
           <p:cNvPr id="3" name="§2.2.2 Elasticiteit en omzet">
             <a:extLst xmlns:a="http://schemas.openxmlformats.org/drawingml/2006/main">
               <a:ext uri="{FF2B5EF4-FFF2-40B4-BE49-F238E27FC236}">
-                <a16:creationId xmlns:a16="http://schemas.microsoft.com/office/drawing/2014/main" id="{B8E424B5-9D0D-4C82-A28C-A7A6418DF909}"/>
+                <a16:creationId xmlns:a16="http://schemas.microsoft.com/office/drawing/2014/main" id="{24796468-F673-4371-B4AD-82792503B62B}"/>
               </a:ext>
             </a:extLst>
           </p:cNvPr>
@@ -8012,7 +8012,7 @@
           <p:cNvPr id="4" name="12">
             <a:extLst xmlns:a="http://schemas.openxmlformats.org/drawingml/2006/main">
               <a:ext uri="{FF2B5EF4-FFF2-40B4-BE49-F238E27FC236}">
-                <a16:creationId xmlns:a16="http://schemas.microsoft.com/office/drawing/2014/main" id="{BA8E20B0-A1B8-4C48-8D4D-F651E9546431}"/>
+                <a16:creationId xmlns:a16="http://schemas.microsoft.com/office/drawing/2014/main" id="{8A1F9A56-92EC-44B6-86A0-A8A341CBB045}"/>
               </a:ext>
             </a:extLst>
           </p:cNvPr>
@@ -8069,7 +8069,7 @@
           <p:cNvPr id="5" name="Winst = TO − TK">
             <a:extLst xmlns:a="http://schemas.openxmlformats.org/drawingml/2006/main">
               <a:ext uri="{FF2B5EF4-FFF2-40B4-BE49-F238E27FC236}">
-                <a16:creationId xmlns:a16="http://schemas.microsoft.com/office/drawing/2014/main" id="{B99ED7A6-4CF1-4913-B2BB-5336E57D608D}"/>
+                <a16:creationId xmlns:a16="http://schemas.microsoft.com/office/drawing/2014/main" id="{420FB235-1FAB-4529-8CF1-5AE940E38E49}"/>
               </a:ext>
             </a:extLst>
           </p:cNvPr>
@@ -8371,7 +8371,7 @@
           <p:cNvPr id="7" name="Een omzetverandering geeft nog geen zekere winstri">
             <a:extLst xmlns:a="http://schemas.openxmlformats.org/drawingml/2006/main">
               <a:ext uri="{FF2B5EF4-FFF2-40B4-BE49-F238E27FC236}">
-                <a16:creationId xmlns:a16="http://schemas.microsoft.com/office/drawing/2014/main" id="{A8D640D0-8DEB-4684-B513-1F9CAA3E859D}"/>
+                <a16:creationId xmlns:a16="http://schemas.microsoft.com/office/drawing/2014/main" id="{F1DCCD13-E51F-4E0B-B94E-54100858D81F}"/>
               </a:ext>
             </a:extLst>
           </p:cNvPr>
@@ -8426,7 +8426,7 @@
     </p:spTree>
     <p:extLst>
       <p:ext uri="{BB962C8B-B14F-4D97-AF65-F5344CB8AC3E}">
-        <p14:creationId xmlns:p14="http://schemas.microsoft.com/office/powerpoint/2010/main" val="659783118"/>
+        <p14:creationId xmlns:p14="http://schemas.microsoft.com/office/powerpoint/2010/main" val="1779586727"/>
       </p:ext>
     </p:extLst>
   </p:cSld>
@@ -8457,7 +8457,7 @@
           <p:cNvPr id="9" name="Korte controle">
             <a:extLst xmlns:a="http://schemas.openxmlformats.org/drawingml/2006/main">
               <a:ext uri="{FF2B5EF4-FFF2-40B4-BE49-F238E27FC236}">
-                <a16:creationId xmlns:a16="http://schemas.microsoft.com/office/drawing/2014/main" id="{86C90071-7393-4FF8-85F3-1A79F69FD669}"/>
+                <a16:creationId xmlns:a16="http://schemas.microsoft.com/office/drawing/2014/main" id="{CB2D7A8E-4818-47F7-9EE4-5238C7592D40}"/>
               </a:ext>
             </a:extLst>
           </p:cNvPr>
@@ -8514,7 +8514,7 @@
           <p:cNvPr id="2" name="">
             <a:extLst xmlns:a="http://schemas.openxmlformats.org/drawingml/2006/main">
               <a:ext uri="{FF2B5EF4-FFF2-40B4-BE49-F238E27FC236}">
-                <a16:creationId xmlns:a16="http://schemas.microsoft.com/office/drawing/2014/main" id="{D61E1C02-47A3-4577-ADF7-60EE0143A0CC}"/>
+                <a16:creationId xmlns:a16="http://schemas.microsoft.com/office/drawing/2014/main" id="{16D513D4-2A41-44C6-8922-61DE36113B5E}"/>
               </a:ext>
             </a:extLst>
           </p:cNvPr>
@@ -8543,7 +8543,7 @@
           <p:cNvPr id="3" name="§2.2.2 Elasticiteit en omzet">
             <a:extLst xmlns:a="http://schemas.openxmlformats.org/drawingml/2006/main">
               <a:ext uri="{FF2B5EF4-FFF2-40B4-BE49-F238E27FC236}">
-                <a16:creationId xmlns:a16="http://schemas.microsoft.com/office/drawing/2014/main" id="{E8F07D8D-4716-47DD-AB48-DC220434F977}"/>
+                <a16:creationId xmlns:a16="http://schemas.microsoft.com/office/drawing/2014/main" id="{16068297-B078-4556-8B47-3A6352970B06}"/>
               </a:ext>
             </a:extLst>
           </p:cNvPr>
@@ -8600,7 +8600,7 @@
           <p:cNvPr id="4" name="13">
             <a:extLst xmlns:a="http://schemas.openxmlformats.org/drawingml/2006/main">
               <a:ext uri="{FF2B5EF4-FFF2-40B4-BE49-F238E27FC236}">
-                <a16:creationId xmlns:a16="http://schemas.microsoft.com/office/drawing/2014/main" id="{FE32AB8A-A129-4946-896C-0ABAFE92136E}"/>
+                <a16:creationId xmlns:a16="http://schemas.microsoft.com/office/drawing/2014/main" id="{3BD27029-907A-4AAC-8B9C-92B4B76B96C6}"/>
               </a:ext>
             </a:extLst>
           </p:cNvPr>
@@ -8657,7 +8657,7 @@
           <p:cNvPr id="5" name="Een aanbieder verlaagt de prijs een klein beetje.">
             <a:extLst xmlns:a="http://schemas.openxmlformats.org/drawingml/2006/main">
               <a:ext uri="{FF2B5EF4-FFF2-40B4-BE49-F238E27FC236}">
-                <a16:creationId xmlns:a16="http://schemas.microsoft.com/office/drawing/2014/main" id="{4BB05D2D-66D0-448D-AAED-D266D2F84242}"/>
+                <a16:creationId xmlns:a16="http://schemas.microsoft.com/office/drawing/2014/main" id="{FB69B124-9390-4F9F-9C6C-626E01A5248D}"/>
               </a:ext>
             </a:extLst>
           </p:cNvPr>
@@ -8714,7 +8714,7 @@
           <p:cNvPr id="6" name="De lokale Ev is −0,5.">
             <a:extLst xmlns:a="http://schemas.openxmlformats.org/drawingml/2006/main">
               <a:ext uri="{FF2B5EF4-FFF2-40B4-BE49-F238E27FC236}">
-                <a16:creationId xmlns:a16="http://schemas.microsoft.com/office/drawing/2014/main" id="{B10C93E4-F7A3-4E6F-AA4D-7565C931BAD9}"/>
+                <a16:creationId xmlns:a16="http://schemas.microsoft.com/office/drawing/2014/main" id="{4E63F469-BA98-4581-BF35-84DFB7584C16}"/>
               </a:ext>
             </a:extLst>
           </p:cNvPr>
@@ -8771,7 +8771,7 @@
           <p:cNvPr id="7" name="Wat verwacht je voor TO? Leg uit.">
             <a:extLst xmlns:a="http://schemas.openxmlformats.org/drawingml/2006/main">
               <a:ext uri="{FF2B5EF4-FFF2-40B4-BE49-F238E27FC236}">
-                <a16:creationId xmlns:a16="http://schemas.microsoft.com/office/drawing/2014/main" id="{7CA52634-FA96-4474-B146-330CC284A48E}"/>
+                <a16:creationId xmlns:a16="http://schemas.microsoft.com/office/drawing/2014/main" id="{E3264DA9-2300-411C-94C7-20F49365709A}"/>
               </a:ext>
             </a:extLst>
           </p:cNvPr>
@@ -8828,7 +8828,7 @@
           <p:cNvPr id="8" name="Kun je ook de richting van de winst voorspellen?">
             <a:extLst xmlns:a="http://schemas.openxmlformats.org/drawingml/2006/main">
               <a:ext uri="{FF2B5EF4-FFF2-40B4-BE49-F238E27FC236}">
-                <a16:creationId xmlns:a16="http://schemas.microsoft.com/office/drawing/2014/main" id="{729F3943-713A-4DA6-9A9C-97840A49D631}"/>
+                <a16:creationId xmlns:a16="http://schemas.microsoft.com/office/drawing/2014/main" id="{38BD22D9-6427-40F9-8DAF-FE62F6D0281D}"/>
               </a:ext>
             </a:extLst>
           </p:cNvPr>
@@ -8883,7 +8883,7 @@
     </p:spTree>
     <p:extLst>
       <p:ext uri="{BB962C8B-B14F-4D97-AF65-F5344CB8AC3E}">
-        <p14:creationId xmlns:p14="http://schemas.microsoft.com/office/powerpoint/2010/main" val="1090165805"/>
+        <p14:creationId xmlns:p14="http://schemas.microsoft.com/office/powerpoint/2010/main" val="1463467380"/>
       </p:ext>
     </p:extLst>
   </p:cSld>
@@ -8914,7 +8914,7 @@
           <p:cNvPr id="9" name="Korte controle: de redenering">
             <a:extLst xmlns:a="http://schemas.openxmlformats.org/drawingml/2006/main">
               <a:ext uri="{FF2B5EF4-FFF2-40B4-BE49-F238E27FC236}">
-                <a16:creationId xmlns:a16="http://schemas.microsoft.com/office/drawing/2014/main" id="{0C05DB05-EC52-4E92-A00F-A7EBA9C8C6B4}"/>
+                <a16:creationId xmlns:a16="http://schemas.microsoft.com/office/drawing/2014/main" id="{62707CD6-447B-43B5-A8C8-AD313F850108}"/>
               </a:ext>
             </a:extLst>
           </p:cNvPr>
@@ -8971,7 +8971,7 @@
           <p:cNvPr id="2" name="">
             <a:extLst xmlns:a="http://schemas.openxmlformats.org/drawingml/2006/main">
               <a:ext uri="{FF2B5EF4-FFF2-40B4-BE49-F238E27FC236}">
-                <a16:creationId xmlns:a16="http://schemas.microsoft.com/office/drawing/2014/main" id="{3B271956-B1EC-4C77-881A-D8902EB78254}"/>
+                <a16:creationId xmlns:a16="http://schemas.microsoft.com/office/drawing/2014/main" id="{1623C33E-E57C-41C6-82C4-E12B75EBC16D}"/>
               </a:ext>
             </a:extLst>
           </p:cNvPr>
@@ -9000,7 +9000,7 @@
           <p:cNvPr id="3" name="§2.2.2 Elasticiteit en omzet">
             <a:extLst xmlns:a="http://schemas.openxmlformats.org/drawingml/2006/main">
               <a:ext uri="{FF2B5EF4-FFF2-40B4-BE49-F238E27FC236}">
-                <a16:creationId xmlns:a16="http://schemas.microsoft.com/office/drawing/2014/main" id="{43A4FC06-DAD5-47AE-91F0-7D05A9FCDE0E}"/>
+                <a16:creationId xmlns:a16="http://schemas.microsoft.com/office/drawing/2014/main" id="{A17525BC-8162-4706-9C4A-9DFE4AAB1DB0}"/>
               </a:ext>
             </a:extLst>
           </p:cNvPr>
@@ -9057,7 +9057,7 @@
           <p:cNvPr id="4" name="14">
             <a:extLst xmlns:a="http://schemas.openxmlformats.org/drawingml/2006/main">
               <a:ext uri="{FF2B5EF4-FFF2-40B4-BE49-F238E27FC236}">
-                <a16:creationId xmlns:a16="http://schemas.microsoft.com/office/drawing/2014/main" id="{08E306D0-EFA5-4A60-BA7E-937E89A011DD}"/>
+                <a16:creationId xmlns:a16="http://schemas.microsoft.com/office/drawing/2014/main" id="{9D2C18DE-4804-491B-A377-8BB2CE33EB81}"/>
               </a:ext>
             </a:extLst>
           </p:cNvPr>
@@ -9114,7 +9114,7 @@
           <p:cNvPr id="5" name="Een aanbieder verlaagt de prijs een klein beetje.">
             <a:extLst xmlns:a="http://schemas.openxmlformats.org/drawingml/2006/main">
               <a:ext uri="{FF2B5EF4-FFF2-40B4-BE49-F238E27FC236}">
-                <a16:creationId xmlns:a16="http://schemas.microsoft.com/office/drawing/2014/main" id="{F3B41A8E-959A-4BC7-A4A5-D3D8F4B332A8}"/>
+                <a16:creationId xmlns:a16="http://schemas.microsoft.com/office/drawing/2014/main" id="{D141E7DE-1097-4015-AEF7-0AADF2BCBD0F}"/>
               </a:ext>
             </a:extLst>
           </p:cNvPr>
@@ -9171,7 +9171,7 @@
           <p:cNvPr id="6" name="De lokale Ev is −0,5.">
             <a:extLst xmlns:a="http://schemas.openxmlformats.org/drawingml/2006/main">
               <a:ext uri="{FF2B5EF4-FFF2-40B4-BE49-F238E27FC236}">
-                <a16:creationId xmlns:a16="http://schemas.microsoft.com/office/drawing/2014/main" id="{243896C9-C56D-4726-A3C9-30ECB302792F}"/>
+                <a16:creationId xmlns:a16="http://schemas.microsoft.com/office/drawing/2014/main" id="{5B2E131A-FC70-4F54-99E2-A37E2744C39A}"/>
               </a:ext>
             </a:extLst>
           </p:cNvPr>
@@ -9228,7 +9228,7 @@
           <p:cNvPr id="7" name="Prijsinelastisch: de omzet daalt volgens de lokale">
             <a:extLst xmlns:a="http://schemas.openxmlformats.org/drawingml/2006/main">
               <a:ext uri="{FF2B5EF4-FFF2-40B4-BE49-F238E27FC236}">
-                <a16:creationId xmlns:a16="http://schemas.microsoft.com/office/drawing/2014/main" id="{15E97846-FDBB-4FED-B158-71AE3C673199}"/>
+                <a16:creationId xmlns:a16="http://schemas.microsoft.com/office/drawing/2014/main" id="{3370FF60-BF3A-4BD0-A66B-C97C16330BAE}"/>
               </a:ext>
             </a:extLst>
           </p:cNvPr>
@@ -9285,7 +9285,7 @@
           <p:cNvPr id="8" name="De winstrichting blijft onbekend zonder de kosten.">
             <a:extLst xmlns:a="http://schemas.openxmlformats.org/drawingml/2006/main">
               <a:ext uri="{FF2B5EF4-FFF2-40B4-BE49-F238E27FC236}">
-                <a16:creationId xmlns:a16="http://schemas.microsoft.com/office/drawing/2014/main" id="{1862C642-D283-490A-B905-9931D4F15B53}"/>
+                <a16:creationId xmlns:a16="http://schemas.microsoft.com/office/drawing/2014/main" id="{856DDED2-E345-4954-BB5F-35525D6EF90C}"/>
               </a:ext>
             </a:extLst>
           </p:cNvPr>
@@ -9340,7 +9340,7 @@
     </p:spTree>
     <p:extLst>
       <p:ext uri="{BB962C8B-B14F-4D97-AF65-F5344CB8AC3E}">
-        <p14:creationId xmlns:p14="http://schemas.microsoft.com/office/powerpoint/2010/main" val="563617164"/>
+        <p14:creationId xmlns:p14="http://schemas.microsoft.com/office/powerpoint/2010/main" val="1792517551"/>
       </p:ext>
     </p:extLst>
   </p:cSld>
@@ -9371,7 +9371,7 @@
           <p:cNvPr id="29" name="Deze les: §2.2.2 Elasticiteit en omzet">
             <a:extLst xmlns:a="http://schemas.openxmlformats.org/drawingml/2006/main">
               <a:ext uri="{FF2B5EF4-FFF2-40B4-BE49-F238E27FC236}">
-                <a16:creationId xmlns:a16="http://schemas.microsoft.com/office/drawing/2014/main" id="{BE428355-8F5A-47E9-9645-82377D78A108}"/>
+                <a16:creationId xmlns:a16="http://schemas.microsoft.com/office/drawing/2014/main" id="{D67A8439-70B1-442B-AF38-169358EDAFD7}"/>
               </a:ext>
             </a:extLst>
           </p:cNvPr>
@@ -9428,7 +9428,7 @@
           <p:cNvPr id="2" name="">
             <a:extLst xmlns:a="http://schemas.openxmlformats.org/drawingml/2006/main">
               <a:ext uri="{FF2B5EF4-FFF2-40B4-BE49-F238E27FC236}">
-                <a16:creationId xmlns:a16="http://schemas.microsoft.com/office/drawing/2014/main" id="{5D3B35E4-16C4-406B-9A4D-18D20BD94B38}"/>
+                <a16:creationId xmlns:a16="http://schemas.microsoft.com/office/drawing/2014/main" id="{6C114411-DE61-4F28-9B72-2D7F9E70C87F}"/>
               </a:ext>
             </a:extLst>
           </p:cNvPr>
@@ -9457,7 +9457,7 @@
           <p:cNvPr id="3" name="§2.2.2 Elasticiteit en omzet">
             <a:extLst xmlns:a="http://schemas.openxmlformats.org/drawingml/2006/main">
               <a:ext uri="{FF2B5EF4-FFF2-40B4-BE49-F238E27FC236}">
-                <a16:creationId xmlns:a16="http://schemas.microsoft.com/office/drawing/2014/main" id="{09A8BA35-439D-4248-B7C6-7BDB0018EABD}"/>
+                <a16:creationId xmlns:a16="http://schemas.microsoft.com/office/drawing/2014/main" id="{CD05109C-136E-4FEE-B754-70770064D886}"/>
               </a:ext>
             </a:extLst>
           </p:cNvPr>
@@ -9514,7 +9514,7 @@
           <p:cNvPr id="4" name="15">
             <a:extLst xmlns:a="http://schemas.openxmlformats.org/drawingml/2006/main">
               <a:ext uri="{FF2B5EF4-FFF2-40B4-BE49-F238E27FC236}">
-                <a16:creationId xmlns:a16="http://schemas.microsoft.com/office/drawing/2014/main" id="{A40041E1-EB0E-4C51-8D4C-39EC6934FE88}"/>
+                <a16:creationId xmlns:a16="http://schemas.microsoft.com/office/drawing/2014/main" id="{B306C56B-3F27-4CDA-865B-4574EDE7610E}"/>
               </a:ext>
             </a:extLst>
           </p:cNvPr>
@@ -9571,7 +9571,7 @@
           <p:cNvPr id="5" name="phase">
             <a:extLst xmlns:a="http://schemas.openxmlformats.org/drawingml/2006/main">
               <a:ext uri="{FF2B5EF4-FFF2-40B4-BE49-F238E27FC236}">
-                <a16:creationId xmlns:a16="http://schemas.microsoft.com/office/drawing/2014/main" id="{C6C51E13-7096-4816-9F84-F1FFE1146322}"/>
+                <a16:creationId xmlns:a16="http://schemas.microsoft.com/office/drawing/2014/main" id="{3851D327-AFA4-462B-BB5E-F51EF206AAE9}"/>
               </a:ext>
             </a:extLst>
           </p:cNvPr>
@@ -9628,7 +9628,7 @@
           <p:cNvPr id="6" name="Lesroute">
             <a:extLst xmlns:a="http://schemas.openxmlformats.org/drawingml/2006/main">
               <a:ext uri="{FF2B5EF4-FFF2-40B4-BE49-F238E27FC236}">
-                <a16:creationId xmlns:a16="http://schemas.microsoft.com/office/drawing/2014/main" id="{1DA63DC1-5782-4FA0-BFBB-6F06BDD4A557}"/>
+                <a16:creationId xmlns:a16="http://schemas.microsoft.com/office/drawing/2014/main" id="{3EC19FE4-9943-4A24-BDAF-A0FF32B6069A}"/>
               </a:ext>
             </a:extLst>
           </p:cNvPr>
@@ -9685,7 +9685,7 @@
           <p:cNvPr id="7" name="route-number-1">
             <a:extLst xmlns:a="http://schemas.openxmlformats.org/drawingml/2006/main">
               <a:ext uri="{FF2B5EF4-FFF2-40B4-BE49-F238E27FC236}">
-                <a16:creationId xmlns:a16="http://schemas.microsoft.com/office/drawing/2014/main" id="{F9F07995-A280-4C55-B0F1-40BEDFFA8867}"/>
+                <a16:creationId xmlns:a16="http://schemas.microsoft.com/office/drawing/2014/main" id="{2328905B-41A8-44D6-BD56-816799614E35}"/>
               </a:ext>
             </a:extLst>
           </p:cNvPr>
@@ -9742,7 +9742,7 @@
           <p:cNvPr id="8" name="route-1">
             <a:extLst xmlns:a="http://schemas.openxmlformats.org/drawingml/2006/main">
               <a:ext uri="{FF2B5EF4-FFF2-40B4-BE49-F238E27FC236}">
-                <a16:creationId xmlns:a16="http://schemas.microsoft.com/office/drawing/2014/main" id="{EB5E9DE0-443F-4628-86A2-B91F0282EC79}"/>
+                <a16:creationId xmlns:a16="http://schemas.microsoft.com/office/drawing/2014/main" id="{C5D484BD-34D5-42F4-8DB9-241D796D57EF}"/>
               </a:ext>
             </a:extLst>
           </p:cNvPr>
@@ -9799,7 +9799,7 @@
           <p:cNvPr id="9" name="route-number-2">
             <a:extLst xmlns:a="http://schemas.openxmlformats.org/drawingml/2006/main">
               <a:ext uri="{FF2B5EF4-FFF2-40B4-BE49-F238E27FC236}">
-                <a16:creationId xmlns:a16="http://schemas.microsoft.com/office/drawing/2014/main" id="{63A0FD84-BB3C-4206-863F-55FE70CCE7B6}"/>
+                <a16:creationId xmlns:a16="http://schemas.microsoft.com/office/drawing/2014/main" id="{749DEA59-4468-4AE7-B462-A89FE5C68B8D}"/>
               </a:ext>
             </a:extLst>
           </p:cNvPr>
@@ -9856,7 +9856,7 @@
           <p:cNvPr id="10" name="route-2">
             <a:extLst xmlns:a="http://schemas.openxmlformats.org/drawingml/2006/main">
               <a:ext uri="{FF2B5EF4-FFF2-40B4-BE49-F238E27FC236}">
-                <a16:creationId xmlns:a16="http://schemas.microsoft.com/office/drawing/2014/main" id="{120626FA-7046-4CE6-815E-4242FEAE9D36}"/>
+                <a16:creationId xmlns:a16="http://schemas.microsoft.com/office/drawing/2014/main" id="{CBA164C2-22F4-49BE-A26A-122280615A01}"/>
               </a:ext>
             </a:extLst>
           </p:cNvPr>
@@ -9913,7 +9913,7 @@
           <p:cNvPr id="11" name="route-number-3">
             <a:extLst xmlns:a="http://schemas.openxmlformats.org/drawingml/2006/main">
               <a:ext uri="{FF2B5EF4-FFF2-40B4-BE49-F238E27FC236}">
-                <a16:creationId xmlns:a16="http://schemas.microsoft.com/office/drawing/2014/main" id="{0B5E94AA-D806-47C1-9618-6AAD31E65298}"/>
+                <a16:creationId xmlns:a16="http://schemas.microsoft.com/office/drawing/2014/main" id="{80A635F3-49C5-47C7-8487-62989E346F99}"/>
               </a:ext>
             </a:extLst>
           </p:cNvPr>
@@ -9970,7 +9970,7 @@
           <p:cNvPr id="12" name="route-3">
             <a:extLst xmlns:a="http://schemas.openxmlformats.org/drawingml/2006/main">
               <a:ext uri="{FF2B5EF4-FFF2-40B4-BE49-F238E27FC236}">
-                <a16:creationId xmlns:a16="http://schemas.microsoft.com/office/drawing/2014/main" id="{2D9E5C02-42AC-4D07-BB7B-80C6E0B3E3CB}"/>
+                <a16:creationId xmlns:a16="http://schemas.microsoft.com/office/drawing/2014/main" id="{4BC5AF8F-160F-4D23-8234-C7B18EED683A}"/>
               </a:ext>
             </a:extLst>
           </p:cNvPr>
@@ -10027,7 +10027,7 @@
           <p:cNvPr id="13" name="route-number-4">
             <a:extLst xmlns:a="http://schemas.openxmlformats.org/drawingml/2006/main">
               <a:ext uri="{FF2B5EF4-FFF2-40B4-BE49-F238E27FC236}">
-                <a16:creationId xmlns:a16="http://schemas.microsoft.com/office/drawing/2014/main" id="{30E277DC-5B96-4F18-B17F-0E99A859ACCC}"/>
+                <a16:creationId xmlns:a16="http://schemas.microsoft.com/office/drawing/2014/main" id="{27078EB8-3002-4F16-90CC-DD8295F836A4}"/>
               </a:ext>
             </a:extLst>
           </p:cNvPr>
@@ -10084,7 +10084,7 @@
           <p:cNvPr id="14" name="route-4">
             <a:extLst xmlns:a="http://schemas.openxmlformats.org/drawingml/2006/main">
               <a:ext uri="{FF2B5EF4-FFF2-40B4-BE49-F238E27FC236}">
-                <a16:creationId xmlns:a16="http://schemas.microsoft.com/office/drawing/2014/main" id="{91920884-5565-43B3-874F-A35A34792093}"/>
+                <a16:creationId xmlns:a16="http://schemas.microsoft.com/office/drawing/2014/main" id="{B9CE6CFB-D50F-4B79-A21E-3F32AEBA7B62}"/>
               </a:ext>
             </a:extLst>
           </p:cNvPr>
@@ -10141,7 +10141,7 @@
           <p:cNvPr id="15" name="route-number-5">
             <a:extLst xmlns:a="http://schemas.openxmlformats.org/drawingml/2006/main">
               <a:ext uri="{FF2B5EF4-FFF2-40B4-BE49-F238E27FC236}">
-                <a16:creationId xmlns:a16="http://schemas.microsoft.com/office/drawing/2014/main" id="{787387E6-8BE1-4F35-AD33-44749B9EDDAA}"/>
+                <a16:creationId xmlns:a16="http://schemas.microsoft.com/office/drawing/2014/main" id="{9008DE85-5384-473F-A9DB-49480FA2EB88}"/>
               </a:ext>
             </a:extLst>
           </p:cNvPr>
@@ -10198,7 +10198,7 @@
           <p:cNvPr id="16" name="route-5">
             <a:extLst xmlns:a="http://schemas.openxmlformats.org/drawingml/2006/main">
               <a:ext uri="{FF2B5EF4-FFF2-40B4-BE49-F238E27FC236}">
-                <a16:creationId xmlns:a16="http://schemas.microsoft.com/office/drawing/2014/main" id="{C145C3A5-2CD9-449B-866B-884267441879}"/>
+                <a16:creationId xmlns:a16="http://schemas.microsoft.com/office/drawing/2014/main" id="{FB824D6B-376F-4D54-9C47-53BA1F3D837D}"/>
               </a:ext>
             </a:extLst>
           </p:cNvPr>
@@ -10255,7 +10255,7 @@
           <p:cNvPr id="17" name="route-number-6">
             <a:extLst xmlns:a="http://schemas.openxmlformats.org/drawingml/2006/main">
               <a:ext uri="{FF2B5EF4-FFF2-40B4-BE49-F238E27FC236}">
-                <a16:creationId xmlns:a16="http://schemas.microsoft.com/office/drawing/2014/main" id="{90D38C4F-FDB5-4B9B-AE08-D83B3AC9E177}"/>
+                <a16:creationId xmlns:a16="http://schemas.microsoft.com/office/drawing/2014/main" id="{04715E32-BE9F-4952-B144-9AF8EBB8A84A}"/>
               </a:ext>
             </a:extLst>
           </p:cNvPr>
@@ -10312,7 +10312,7 @@
           <p:cNvPr id="18" name="route-6">
             <a:extLst xmlns:a="http://schemas.openxmlformats.org/drawingml/2006/main">
               <a:ext uri="{FF2B5EF4-FFF2-40B4-BE49-F238E27FC236}">
-                <a16:creationId xmlns:a16="http://schemas.microsoft.com/office/drawing/2014/main" id="{75B7D472-496F-4774-B783-915DB8DC319B}"/>
+                <a16:creationId xmlns:a16="http://schemas.microsoft.com/office/drawing/2014/main" id="{81B69D2E-30AA-4835-A687-FBE46B3D0E03}"/>
               </a:ext>
             </a:extLst>
           </p:cNvPr>
@@ -10369,7 +10369,7 @@
           <p:cNvPr id="19" name="route-number-7">
             <a:extLst xmlns:a="http://schemas.openxmlformats.org/drawingml/2006/main">
               <a:ext uri="{FF2B5EF4-FFF2-40B4-BE49-F238E27FC236}">
-                <a16:creationId xmlns:a16="http://schemas.microsoft.com/office/drawing/2014/main" id="{7FCD4F2D-26F4-4B7E-9FBA-04FB694394AF}"/>
+                <a16:creationId xmlns:a16="http://schemas.microsoft.com/office/drawing/2014/main" id="{4F6787F5-0FEF-42BA-AB4A-C56AA9CCAD35}"/>
               </a:ext>
             </a:extLst>
           </p:cNvPr>
@@ -10426,7 +10426,7 @@
           <p:cNvPr id="20" name="route-7">
             <a:extLst xmlns:a="http://schemas.openxmlformats.org/drawingml/2006/main">
               <a:ext uri="{FF2B5EF4-FFF2-40B4-BE49-F238E27FC236}">
-                <a16:creationId xmlns:a16="http://schemas.microsoft.com/office/drawing/2014/main" id="{93935DDC-57A3-472C-9A3B-00188169FB9F}"/>
+                <a16:creationId xmlns:a16="http://schemas.microsoft.com/office/drawing/2014/main" id="{8AEBE07F-E38E-42F1-ACF0-AE6ABAD1AA29}"/>
               </a:ext>
             </a:extLst>
           </p:cNvPr>
@@ -10483,7 +10483,7 @@
           <p:cNvPr id="21" name="Lesdoelen">
             <a:extLst xmlns:a="http://schemas.openxmlformats.org/drawingml/2006/main">
               <a:ext uri="{FF2B5EF4-FFF2-40B4-BE49-F238E27FC236}">
-                <a16:creationId xmlns:a16="http://schemas.microsoft.com/office/drawing/2014/main" id="{CEF59C4A-E2F2-40AB-AB2C-97F79D4894FD}"/>
+                <a16:creationId xmlns:a16="http://schemas.microsoft.com/office/drawing/2014/main" id="{4A0A4837-AD8E-4030-8923-0D1404558B4F}"/>
               </a:ext>
             </a:extLst>
           </p:cNvPr>
@@ -10540,7 +10540,7 @@
           <p:cNvPr id="22" name="overview-goals">
             <a:extLst xmlns:a="http://schemas.openxmlformats.org/drawingml/2006/main">
               <a:ext uri="{FF2B5EF4-FFF2-40B4-BE49-F238E27FC236}">
-                <a16:creationId xmlns:a16="http://schemas.microsoft.com/office/drawing/2014/main" id="{6E896D07-0121-4653-B98B-83BAD00E04E4}"/>
+                <a16:creationId xmlns:a16="http://schemas.microsoft.com/office/drawing/2014/main" id="{8AF6EA2B-225B-4D66-9E50-6A9B8B620D57}"/>
               </a:ext>
             </a:extLst>
           </p:cNvPr>
@@ -10643,7 +10643,7 @@
           <p:cNvPr id="23" name="">
             <a:extLst xmlns:a="http://schemas.openxmlformats.org/drawingml/2006/main">
               <a:ext uri="{FF2B5EF4-FFF2-40B4-BE49-F238E27FC236}">
-                <a16:creationId xmlns:a16="http://schemas.microsoft.com/office/drawing/2014/main" id="{49A7EC20-B573-4532-96CA-8B07A6D69BFC}"/>
+                <a16:creationId xmlns:a16="http://schemas.microsoft.com/office/drawing/2014/main" id="{1962D68A-E157-427D-A06A-33C0DA9B8A90}"/>
               </a:ext>
             </a:extLst>
           </p:cNvPr>
@@ -10672,7 +10672,7 @@
           <p:cNvPr id="24" name="Startopdracht">
             <a:extLst xmlns:a="http://schemas.openxmlformats.org/drawingml/2006/main">
               <a:ext uri="{FF2B5EF4-FFF2-40B4-BE49-F238E27FC236}">
-                <a16:creationId xmlns:a16="http://schemas.microsoft.com/office/drawing/2014/main" id="{9E752B61-0264-4CC9-88F7-D139D4179F05}"/>
+                <a16:creationId xmlns:a16="http://schemas.microsoft.com/office/drawing/2014/main" id="{E4C4278D-4CF6-4E43-B0D3-07A20DB98A14}"/>
               </a:ext>
             </a:extLst>
           </p:cNvPr>
@@ -10729,7 +10729,7 @@
           <p:cNvPr id="25" name="overview-start">
             <a:extLst xmlns:a="http://schemas.openxmlformats.org/drawingml/2006/main">
               <a:ext uri="{FF2B5EF4-FFF2-40B4-BE49-F238E27FC236}">
-                <a16:creationId xmlns:a16="http://schemas.microsoft.com/office/drawing/2014/main" id="{A1D65640-37F1-400D-A153-BB99179D7D44}"/>
+                <a16:creationId xmlns:a16="http://schemas.microsoft.com/office/drawing/2014/main" id="{4E05A524-71FA-4DC5-82CE-3C77399CCF9C}"/>
               </a:ext>
             </a:extLst>
           </p:cNvPr>
@@ -10809,7 +10809,7 @@
           <p:cNvPr id="26" name="">
             <a:extLst xmlns:a="http://schemas.openxmlformats.org/drawingml/2006/main">
               <a:ext uri="{FF2B5EF4-FFF2-40B4-BE49-F238E27FC236}">
-                <a16:creationId xmlns:a16="http://schemas.microsoft.com/office/drawing/2014/main" id="{8EF8C5C3-B51A-4168-BF45-6F49097596E5}"/>
+                <a16:creationId xmlns:a16="http://schemas.microsoft.com/office/drawing/2014/main" id="{DDDEEB92-0B2B-4F1D-96B3-A9C7AE94C692}"/>
               </a:ext>
             </a:extLst>
           </p:cNvPr>
@@ -10838,7 +10838,7 @@
           <p:cNvPr id="27" name="Huiswerk">
             <a:extLst xmlns:a="http://schemas.openxmlformats.org/drawingml/2006/main">
               <a:ext uri="{FF2B5EF4-FFF2-40B4-BE49-F238E27FC236}">
-                <a16:creationId xmlns:a16="http://schemas.microsoft.com/office/drawing/2014/main" id="{3C0567B3-BB7F-4268-AD80-7B36CC63EEB9}"/>
+                <a16:creationId xmlns:a16="http://schemas.microsoft.com/office/drawing/2014/main" id="{B0AFA19A-D647-49EF-9FDE-09488C89FB75}"/>
               </a:ext>
             </a:extLst>
           </p:cNvPr>
@@ -10895,7 +10895,7 @@
           <p:cNvPr id="28" name="overview-homework">
             <a:extLst xmlns:a="http://schemas.openxmlformats.org/drawingml/2006/main">
               <a:ext uri="{FF2B5EF4-FFF2-40B4-BE49-F238E27FC236}">
-                <a16:creationId xmlns:a16="http://schemas.microsoft.com/office/drawing/2014/main" id="{EEA490A6-71F8-4647-B094-E6AD81CC7584}"/>
+                <a16:creationId xmlns:a16="http://schemas.microsoft.com/office/drawing/2014/main" id="{2EE3CD6F-1A40-455B-8738-7D991D843935}"/>
               </a:ext>
             </a:extLst>
           </p:cNvPr>
@@ -11042,7 +11042,7 @@
     </p:spTree>
     <p:extLst>
       <p:ext uri="{BB962C8B-B14F-4D97-AF65-F5344CB8AC3E}">
-        <p14:creationId xmlns:p14="http://schemas.microsoft.com/office/powerpoint/2010/main" val="464617973"/>
+        <p14:creationId xmlns:p14="http://schemas.microsoft.com/office/powerpoint/2010/main" val="2020906890"/>
       </p:ext>
     </p:extLst>
   </p:cSld>
@@ -11073,7 +11073,7 @@
           <p:cNvPr id="8" name="Opgave 7: Bioscoop Nova en StreamNow">
             <a:extLst xmlns:a="http://schemas.openxmlformats.org/drawingml/2006/main">
               <a:ext uri="{FF2B5EF4-FFF2-40B4-BE49-F238E27FC236}">
-                <a16:creationId xmlns:a16="http://schemas.microsoft.com/office/drawing/2014/main" id="{F2D2732B-0144-4912-97EB-977ED2E0310C}"/>
+                <a16:creationId xmlns:a16="http://schemas.microsoft.com/office/drawing/2014/main" id="{5E9150F4-FA77-4A91-A42C-5E75C27A3207}"/>
               </a:ext>
             </a:extLst>
           </p:cNvPr>
@@ -11130,7 +11130,7 @@
           <p:cNvPr id="2" name="">
             <a:extLst xmlns:a="http://schemas.openxmlformats.org/drawingml/2006/main">
               <a:ext uri="{FF2B5EF4-FFF2-40B4-BE49-F238E27FC236}">
-                <a16:creationId xmlns:a16="http://schemas.microsoft.com/office/drawing/2014/main" id="{8D3F4C1E-090F-4737-A21C-836A07681050}"/>
+                <a16:creationId xmlns:a16="http://schemas.microsoft.com/office/drawing/2014/main" id="{8432AEAC-1019-4F1C-8C2A-7A1AA7EDCEA1}"/>
               </a:ext>
             </a:extLst>
           </p:cNvPr>
@@ -11159,7 +11159,7 @@
           <p:cNvPr id="3" name="§2.2.2 Elasticiteit en omzet · Opgave 7 · Boekpagi">
             <a:extLst xmlns:a="http://schemas.openxmlformats.org/drawingml/2006/main">
               <a:ext uri="{FF2B5EF4-FFF2-40B4-BE49-F238E27FC236}">
-                <a16:creationId xmlns:a16="http://schemas.microsoft.com/office/drawing/2014/main" id="{EA1BA5D2-A9C8-4A8A-B1BD-1E6E8A55DC2B}"/>
+                <a16:creationId xmlns:a16="http://schemas.microsoft.com/office/drawing/2014/main" id="{C88D2674-6E3B-4755-B427-DD1011ADCA2C}"/>
               </a:ext>
             </a:extLst>
           </p:cNvPr>
@@ -11216,7 +11216,7 @@
           <p:cNvPr id="4" name="16">
             <a:extLst xmlns:a="http://schemas.openxmlformats.org/drawingml/2006/main">
               <a:ext uri="{FF2B5EF4-FFF2-40B4-BE49-F238E27FC236}">
-                <a16:creationId xmlns:a16="http://schemas.microsoft.com/office/drawing/2014/main" id="{0BAFA67C-034D-4061-BD97-3FEBC70B6463}"/>
+                <a16:creationId xmlns:a16="http://schemas.microsoft.com/office/drawing/2014/main" id="{58CDACAE-4D44-4B15-A880-B84BC9968884}"/>
               </a:ext>
             </a:extLst>
           </p:cNvPr>
@@ -11273,7 +11273,7 @@
           <p:cNvPr id="5" name="Gebruik TO = P × Q. Alle gegevens die je nodig heb">
             <a:extLst xmlns:a="http://schemas.openxmlformats.org/drawingml/2006/main">
               <a:ext uri="{FF2B5EF4-FFF2-40B4-BE49-F238E27FC236}">
-                <a16:creationId xmlns:a16="http://schemas.microsoft.com/office/drawing/2014/main" id="{44576EAC-2FD6-4C41-AF8C-00623007DB35}"/>
+                <a16:creationId xmlns:a16="http://schemas.microsoft.com/office/drawing/2014/main" id="{B20453F3-A34C-413D-BE87-74652B364E71}"/>
               </a:ext>
             </a:extLst>
           </p:cNvPr>
@@ -11820,7 +11820,7 @@
           <p:cNvPr id="7" name="Bij beide aanbieders stijgt P en daalt Q.">
             <a:extLst xmlns:a="http://schemas.openxmlformats.org/drawingml/2006/main">
               <a:ext uri="{FF2B5EF4-FFF2-40B4-BE49-F238E27FC236}">
-                <a16:creationId xmlns:a16="http://schemas.microsoft.com/office/drawing/2014/main" id="{424BB713-CE81-4AB9-8C93-5E70D7F4833D}"/>
+                <a16:creationId xmlns:a16="http://schemas.microsoft.com/office/drawing/2014/main" id="{B40A155E-3203-4371-AC57-E26927137B65}"/>
               </a:ext>
             </a:extLst>
           </p:cNvPr>
@@ -11875,7 +11875,7 @@
     </p:spTree>
     <p:extLst>
       <p:ext uri="{BB962C8B-B14F-4D97-AF65-F5344CB8AC3E}">
-        <p14:creationId xmlns:p14="http://schemas.microsoft.com/office/powerpoint/2010/main" val="469293851"/>
+        <p14:creationId xmlns:p14="http://schemas.microsoft.com/office/powerpoint/2010/main" val="1933517971"/>
       </p:ext>
     </p:extLst>
   </p:cSld>
@@ -11906,7 +11906,7 @@
           <p:cNvPr id="13" name="Opgave 7: vragen a tot en met d">
             <a:extLst xmlns:a="http://schemas.openxmlformats.org/drawingml/2006/main">
               <a:ext uri="{FF2B5EF4-FFF2-40B4-BE49-F238E27FC236}">
-                <a16:creationId xmlns:a16="http://schemas.microsoft.com/office/drawing/2014/main" id="{6786E071-77C5-46D2-836B-13A625F51C82}"/>
+                <a16:creationId xmlns:a16="http://schemas.microsoft.com/office/drawing/2014/main" id="{972C4902-0BAC-4A52-8FCB-25F91143ACE8}"/>
               </a:ext>
             </a:extLst>
           </p:cNvPr>
@@ -11963,7 +11963,7 @@
           <p:cNvPr id="2" name="">
             <a:extLst xmlns:a="http://schemas.openxmlformats.org/drawingml/2006/main">
               <a:ext uri="{FF2B5EF4-FFF2-40B4-BE49-F238E27FC236}">
-                <a16:creationId xmlns:a16="http://schemas.microsoft.com/office/drawing/2014/main" id="{68170920-559A-4F66-BE82-06C5928CF838}"/>
+                <a16:creationId xmlns:a16="http://schemas.microsoft.com/office/drawing/2014/main" id="{1D3C9F45-399A-44B5-A19A-9A09B506FACC}"/>
               </a:ext>
             </a:extLst>
           </p:cNvPr>
@@ -11992,7 +11992,7 @@
           <p:cNvPr id="3" name="§2.2.2 Elasticiteit en omzet · Opgave 7 · Boekpagi">
             <a:extLst xmlns:a="http://schemas.openxmlformats.org/drawingml/2006/main">
               <a:ext uri="{FF2B5EF4-FFF2-40B4-BE49-F238E27FC236}">
-                <a16:creationId xmlns:a16="http://schemas.microsoft.com/office/drawing/2014/main" id="{7A46E507-4635-4C86-853E-B79BEE1363C1}"/>
+                <a16:creationId xmlns:a16="http://schemas.microsoft.com/office/drawing/2014/main" id="{5DF0BCC5-CBB6-4163-A7D6-BC8E54B173FA}"/>
               </a:ext>
             </a:extLst>
           </p:cNvPr>
@@ -12049,7 +12049,7 @@
           <p:cNvPr id="4" name="17">
             <a:extLst xmlns:a="http://schemas.openxmlformats.org/drawingml/2006/main">
               <a:ext uri="{FF2B5EF4-FFF2-40B4-BE49-F238E27FC236}">
-                <a16:creationId xmlns:a16="http://schemas.microsoft.com/office/drawing/2014/main" id="{292FE1B5-4AC0-4B3E-A342-C30832917E17}"/>
+                <a16:creationId xmlns:a16="http://schemas.microsoft.com/office/drawing/2014/main" id="{F74F656B-8F47-40FF-94B2-2C945AA10124}"/>
               </a:ext>
             </a:extLst>
           </p:cNvPr>
@@ -12106,7 +12106,7 @@
           <p:cNvPr id="5" name="a)">
             <a:extLst xmlns:a="http://schemas.openxmlformats.org/drawingml/2006/main">
               <a:ext uri="{FF2B5EF4-FFF2-40B4-BE49-F238E27FC236}">
-                <a16:creationId xmlns:a16="http://schemas.microsoft.com/office/drawing/2014/main" id="{031DF24B-6DAB-4D7C-B4CF-580BCE709735}"/>
+                <a16:creationId xmlns:a16="http://schemas.microsoft.com/office/drawing/2014/main" id="{6545FFA0-4A4E-4B71-AF83-11CD65DDEB47}"/>
               </a:ext>
             </a:extLst>
           </p:cNvPr>
@@ -12163,7 +12163,7 @@
           <p:cNvPr id="6" name="Bereken voor Bioscoop Nova TO vóór en na de prijsv">
             <a:extLst xmlns:a="http://schemas.openxmlformats.org/drawingml/2006/main">
               <a:ext uri="{FF2B5EF4-FFF2-40B4-BE49-F238E27FC236}">
-                <a16:creationId xmlns:a16="http://schemas.microsoft.com/office/drawing/2014/main" id="{8A443C44-2F14-4B5B-A176-8DB3CBEAFC26}"/>
+                <a16:creationId xmlns:a16="http://schemas.microsoft.com/office/drawing/2014/main" id="{8ADC828A-A67C-4C66-9386-0FD851827CB8}"/>
               </a:ext>
             </a:extLst>
           </p:cNvPr>
@@ -12220,7 +12220,7 @@
           <p:cNvPr id="7" name="b)">
             <a:extLst xmlns:a="http://schemas.openxmlformats.org/drawingml/2006/main">
               <a:ext uri="{FF2B5EF4-FFF2-40B4-BE49-F238E27FC236}">
-                <a16:creationId xmlns:a16="http://schemas.microsoft.com/office/drawing/2014/main" id="{1EE08D0A-0D3E-4B73-8320-64554E880401}"/>
+                <a16:creationId xmlns:a16="http://schemas.microsoft.com/office/drawing/2014/main" id="{C2FA5194-52B0-4B33-AC2D-455298CC21FC}"/>
               </a:ext>
             </a:extLst>
           </p:cNvPr>
@@ -12277,7 +12277,7 @@
           <p:cNvPr id="8" name="Bereken de procentuele verandering van TO bij Bios">
             <a:extLst xmlns:a="http://schemas.openxmlformats.org/drawingml/2006/main">
               <a:ext uri="{FF2B5EF4-FFF2-40B4-BE49-F238E27FC236}">
-                <a16:creationId xmlns:a16="http://schemas.microsoft.com/office/drawing/2014/main" id="{6489DAD3-DBD6-4C9F-944E-96621679478E}"/>
+                <a16:creationId xmlns:a16="http://schemas.microsoft.com/office/drawing/2014/main" id="{3F4A78D6-38DB-4E39-BA3A-C5737528A792}"/>
               </a:ext>
             </a:extLst>
           </p:cNvPr>
@@ -12334,7 +12334,7 @@
           <p:cNvPr id="9" name="c)">
             <a:extLst xmlns:a="http://schemas.openxmlformats.org/drawingml/2006/main">
               <a:ext uri="{FF2B5EF4-FFF2-40B4-BE49-F238E27FC236}">
-                <a16:creationId xmlns:a16="http://schemas.microsoft.com/office/drawing/2014/main" id="{673343AE-4A5B-47A5-8A41-C527E72DC19B}"/>
+                <a16:creationId xmlns:a16="http://schemas.microsoft.com/office/drawing/2014/main" id="{2034F4F5-8CD0-4477-B9AA-5AC8E39CA129}"/>
               </a:ext>
             </a:extLst>
           </p:cNvPr>
@@ -12391,7 +12391,7 @@
           <p:cNvPr id="10" name="Bereken voor StreamNow TO vóór en na de prijsverho">
             <a:extLst xmlns:a="http://schemas.openxmlformats.org/drawingml/2006/main">
               <a:ext uri="{FF2B5EF4-FFF2-40B4-BE49-F238E27FC236}">
-                <a16:creationId xmlns:a16="http://schemas.microsoft.com/office/drawing/2014/main" id="{FCF6D826-A490-4CE7-86A2-F6EA50F9A468}"/>
+                <a16:creationId xmlns:a16="http://schemas.microsoft.com/office/drawing/2014/main" id="{505634F7-BE1C-4D6A-8A46-B50AACE3D5A9}"/>
               </a:ext>
             </a:extLst>
           </p:cNvPr>
@@ -12448,7 +12448,7 @@
           <p:cNvPr id="11" name="d)">
             <a:extLst xmlns:a="http://schemas.openxmlformats.org/drawingml/2006/main">
               <a:ext uri="{FF2B5EF4-FFF2-40B4-BE49-F238E27FC236}">
-                <a16:creationId xmlns:a16="http://schemas.microsoft.com/office/drawing/2014/main" id="{EE617FF0-5D24-4E9B-868C-0B73884F5CEC}"/>
+                <a16:creationId xmlns:a16="http://schemas.microsoft.com/office/drawing/2014/main" id="{C41D9991-8877-4233-9F6B-E280F8A85DDC}"/>
               </a:ext>
             </a:extLst>
           </p:cNvPr>
@@ -12505,7 +12505,7 @@
           <p:cNvPr id="12" name="Bereken de procentuele verandering van TO bij Stre">
             <a:extLst xmlns:a="http://schemas.openxmlformats.org/drawingml/2006/main">
               <a:ext uri="{FF2B5EF4-FFF2-40B4-BE49-F238E27FC236}">
-                <a16:creationId xmlns:a16="http://schemas.microsoft.com/office/drawing/2014/main" id="{5CBDE61D-F13C-43C7-BCAF-3D1358FE0D08}"/>
+                <a16:creationId xmlns:a16="http://schemas.microsoft.com/office/drawing/2014/main" id="{6EFF12C4-27C9-4004-BE50-F85F922E26F4}"/>
               </a:ext>
             </a:extLst>
           </p:cNvPr>
@@ -12560,7 +12560,7 @@
     </p:spTree>
     <p:extLst>
       <p:ext uri="{BB962C8B-B14F-4D97-AF65-F5344CB8AC3E}">
-        <p14:creationId xmlns:p14="http://schemas.microsoft.com/office/powerpoint/2010/main" val="233924303"/>
+        <p14:creationId xmlns:p14="http://schemas.microsoft.com/office/powerpoint/2010/main" val="332500987"/>
       </p:ext>
     </p:extLst>
   </p:cSld>
@@ -12591,7 +12591,7 @@
           <p:cNvPr id="9" name="Opgave 7: vragen e en f">
             <a:extLst xmlns:a="http://schemas.openxmlformats.org/drawingml/2006/main">
               <a:ext uri="{FF2B5EF4-FFF2-40B4-BE49-F238E27FC236}">
-                <a16:creationId xmlns:a16="http://schemas.microsoft.com/office/drawing/2014/main" id="{E54D57BB-B1E4-469C-A9E0-E651A0FE0DC6}"/>
+                <a16:creationId xmlns:a16="http://schemas.microsoft.com/office/drawing/2014/main" id="{4491F400-74F4-4F08-BF5A-736F08B0AB43}"/>
               </a:ext>
             </a:extLst>
           </p:cNvPr>
@@ -12648,7 +12648,7 @@
           <p:cNvPr id="2" name="">
             <a:extLst xmlns:a="http://schemas.openxmlformats.org/drawingml/2006/main">
               <a:ext uri="{FF2B5EF4-FFF2-40B4-BE49-F238E27FC236}">
-                <a16:creationId xmlns:a16="http://schemas.microsoft.com/office/drawing/2014/main" id="{6D1C1339-CCD9-489A-9D9C-D3B75ECAC072}"/>
+                <a16:creationId xmlns:a16="http://schemas.microsoft.com/office/drawing/2014/main" id="{7D27AEEF-53A9-4FA5-A498-B70BA34C979F}"/>
               </a:ext>
             </a:extLst>
           </p:cNvPr>
@@ -12677,7 +12677,7 @@
           <p:cNvPr id="3" name="§2.2.2 Elasticiteit en omzet · Opgave 7 · Boekpagi">
             <a:extLst xmlns:a="http://schemas.openxmlformats.org/drawingml/2006/main">
               <a:ext uri="{FF2B5EF4-FFF2-40B4-BE49-F238E27FC236}">
-                <a16:creationId xmlns:a16="http://schemas.microsoft.com/office/drawing/2014/main" id="{8BEB55E1-17A8-430B-AF09-23B482A722AD}"/>
+                <a16:creationId xmlns:a16="http://schemas.microsoft.com/office/drawing/2014/main" id="{CB567251-FEAA-46A8-A99A-3B7222C2B6D9}"/>
               </a:ext>
             </a:extLst>
           </p:cNvPr>
@@ -12734,7 +12734,7 @@
           <p:cNvPr id="4" name="18">
             <a:extLst xmlns:a="http://schemas.openxmlformats.org/drawingml/2006/main">
               <a:ext uri="{FF2B5EF4-FFF2-40B4-BE49-F238E27FC236}">
-                <a16:creationId xmlns:a16="http://schemas.microsoft.com/office/drawing/2014/main" id="{5D218C5F-2145-4072-837D-B9E2717E78E7}"/>
+                <a16:creationId xmlns:a16="http://schemas.microsoft.com/office/drawing/2014/main" id="{BFE2C251-CBAD-46B1-ABBA-04FE90799DDE}"/>
               </a:ext>
             </a:extLst>
           </p:cNvPr>
@@ -12791,7 +12791,7 @@
           <p:cNvPr id="5" name="e)">
             <a:extLst xmlns:a="http://schemas.openxmlformats.org/drawingml/2006/main">
               <a:ext uri="{FF2B5EF4-FFF2-40B4-BE49-F238E27FC236}">
-                <a16:creationId xmlns:a16="http://schemas.microsoft.com/office/drawing/2014/main" id="{20D55691-80CD-4258-9BFD-6FFA52C817F2}"/>
+                <a16:creationId xmlns:a16="http://schemas.microsoft.com/office/drawing/2014/main" id="{9F50624F-ADC4-47CF-9B58-3A2C82C4CF67}"/>
               </a:ext>
             </a:extLst>
           </p:cNvPr>
@@ -12848,7 +12848,7 @@
           <p:cNvPr id="6" name="Formuleer de lokale omzetregel voor een kleine pri">
             <a:extLst xmlns:a="http://schemas.openxmlformats.org/drawingml/2006/main">
               <a:ext uri="{FF2B5EF4-FFF2-40B4-BE49-F238E27FC236}">
-                <a16:creationId xmlns:a16="http://schemas.microsoft.com/office/drawing/2014/main" id="{730D2A28-4103-4B32-A55F-ADFA164DD969}"/>
+                <a16:creationId xmlns:a16="http://schemas.microsoft.com/office/drawing/2014/main" id="{310E55A6-1594-4F1C-BE2B-C7BE7EFCCD86}"/>
               </a:ext>
             </a:extLst>
           </p:cNvPr>
@@ -12951,7 +12951,7 @@
           <p:cNvPr id="7" name="f)">
             <a:extLst xmlns:a="http://schemas.openxmlformats.org/drawingml/2006/main">
               <a:ext uri="{FF2B5EF4-FFF2-40B4-BE49-F238E27FC236}">
-                <a16:creationId xmlns:a16="http://schemas.microsoft.com/office/drawing/2014/main" id="{29649A2B-DB50-4102-8ACD-2434DA657638}"/>
+                <a16:creationId xmlns:a16="http://schemas.microsoft.com/office/drawing/2014/main" id="{895CA476-B366-4CB8-8E54-C7BE59701575}"/>
               </a:ext>
             </a:extLst>
           </p:cNvPr>
@@ -13008,7 +13008,7 @@
           <p:cNvPr id="8" name="Leg uit waarom uit deze omzetgegevens niet volgt d">
             <a:extLst xmlns:a="http://schemas.openxmlformats.org/drawingml/2006/main">
               <a:ext uri="{FF2B5EF4-FFF2-40B4-BE49-F238E27FC236}">
-                <a16:creationId xmlns:a16="http://schemas.microsoft.com/office/drawing/2014/main" id="{FEB14F5B-4922-4293-A722-4945851FF706}"/>
+                <a16:creationId xmlns:a16="http://schemas.microsoft.com/office/drawing/2014/main" id="{B5A364DC-B184-4612-B8FD-86EFC1670092}"/>
               </a:ext>
             </a:extLst>
           </p:cNvPr>
@@ -13063,7 +13063,7 @@
     </p:spTree>
     <p:extLst>
       <p:ext uri="{BB962C8B-B14F-4D97-AF65-F5344CB8AC3E}">
-        <p14:creationId xmlns:p14="http://schemas.microsoft.com/office/powerpoint/2010/main" val="256096306"/>
+        <p14:creationId xmlns:p14="http://schemas.microsoft.com/office/powerpoint/2010/main" val="727046039"/>
       </p:ext>
     </p:extLst>
   </p:cSld>
@@ -13094,7 +13094,7 @@
           <p:cNvPr id="8" name="Opgave 7a: Nova, omzet vóór en na">
             <a:extLst xmlns:a="http://schemas.openxmlformats.org/drawingml/2006/main">
               <a:ext uri="{FF2B5EF4-FFF2-40B4-BE49-F238E27FC236}">
-                <a16:creationId xmlns:a16="http://schemas.microsoft.com/office/drawing/2014/main" id="{6869D4C1-FB84-4602-A678-66571FB94489}"/>
+                <a16:creationId xmlns:a16="http://schemas.microsoft.com/office/drawing/2014/main" id="{DCFAF647-F086-4EA0-8045-7A26ACAB502B}"/>
               </a:ext>
             </a:extLst>
           </p:cNvPr>
@@ -13151,7 +13151,7 @@
           <p:cNvPr id="2" name="">
             <a:extLst xmlns:a="http://schemas.openxmlformats.org/drawingml/2006/main">
               <a:ext uri="{FF2B5EF4-FFF2-40B4-BE49-F238E27FC236}">
-                <a16:creationId xmlns:a16="http://schemas.microsoft.com/office/drawing/2014/main" id="{D7AA97B6-5FA3-49E1-9D32-ACAB35A2D7E7}"/>
+                <a16:creationId xmlns:a16="http://schemas.microsoft.com/office/drawing/2014/main" id="{314FD209-1AEF-4EBA-AC99-17332E7CA764}"/>
               </a:ext>
             </a:extLst>
           </p:cNvPr>
@@ -13180,7 +13180,7 @@
           <p:cNvPr id="3" name="§2.2.2 Elasticiteit en omzet · Opgave 7 · Boekpagi">
             <a:extLst xmlns:a="http://schemas.openxmlformats.org/drawingml/2006/main">
               <a:ext uri="{FF2B5EF4-FFF2-40B4-BE49-F238E27FC236}">
-                <a16:creationId xmlns:a16="http://schemas.microsoft.com/office/drawing/2014/main" id="{6F370B09-A077-439B-BBAE-D0E5DC13B08D}"/>
+                <a16:creationId xmlns:a16="http://schemas.microsoft.com/office/drawing/2014/main" id="{4870B6CD-246B-4A2A-80BC-3142A4FCC6EA}"/>
               </a:ext>
             </a:extLst>
           </p:cNvPr>
@@ -13237,7 +13237,7 @@
           <p:cNvPr id="4" name="19">
             <a:extLst xmlns:a="http://schemas.openxmlformats.org/drawingml/2006/main">
               <a:ext uri="{FF2B5EF4-FFF2-40B4-BE49-F238E27FC236}">
-                <a16:creationId xmlns:a16="http://schemas.microsoft.com/office/drawing/2014/main" id="{C0100B0E-3C94-46B5-A5C1-32D198FFF3F8}"/>
+                <a16:creationId xmlns:a16="http://schemas.microsoft.com/office/drawing/2014/main" id="{88A37F4E-BE18-47C6-8CEA-C150D4A22B0A}"/>
               </a:ext>
             </a:extLst>
           </p:cNvPr>
@@ -13294,7 +13294,7 @@
           <p:cNvPr id="5" name="TO = P × Q">
             <a:extLst xmlns:a="http://schemas.openxmlformats.org/drawingml/2006/main">
               <a:ext uri="{FF2B5EF4-FFF2-40B4-BE49-F238E27FC236}">
-                <a16:creationId xmlns:a16="http://schemas.microsoft.com/office/drawing/2014/main" id="{4954A597-1862-45E3-A349-D03EF43A7D4A}"/>
+                <a16:creationId xmlns:a16="http://schemas.microsoft.com/office/drawing/2014/main" id="{14AC059B-0096-423D-8F04-0A2BFC6E8B1D}"/>
               </a:ext>
             </a:extLst>
           </p:cNvPr>
@@ -13596,7 +13596,7 @@
           <p:cNvPr id="7" name="Controle: € 40 meer omzet per week.">
             <a:extLst xmlns:a="http://schemas.openxmlformats.org/drawingml/2006/main">
               <a:ext uri="{FF2B5EF4-FFF2-40B4-BE49-F238E27FC236}">
-                <a16:creationId xmlns:a16="http://schemas.microsoft.com/office/drawing/2014/main" id="{0EF89FB0-42F8-49A5-B0AA-5F3A0DBBE350}"/>
+                <a16:creationId xmlns:a16="http://schemas.microsoft.com/office/drawing/2014/main" id="{066C4918-767F-4384-8D9C-03158ABDFAE7}"/>
               </a:ext>
             </a:extLst>
           </p:cNvPr>
@@ -13651,7 +13651,7 @@
     </p:spTree>
     <p:extLst>
       <p:ext uri="{BB962C8B-B14F-4D97-AF65-F5344CB8AC3E}">
-        <p14:creationId xmlns:p14="http://schemas.microsoft.com/office/powerpoint/2010/main" val="255391002"/>
+        <p14:creationId xmlns:p14="http://schemas.microsoft.com/office/powerpoint/2010/main" val="1292650218"/>
       </p:ext>
     </p:extLst>
   </p:cSld>
@@ -13682,7 +13682,7 @@
           <p:cNvPr id="16" name="Lesdoelen">
             <a:extLst xmlns:a="http://schemas.openxmlformats.org/drawingml/2006/main">
               <a:ext uri="{FF2B5EF4-FFF2-40B4-BE49-F238E27FC236}">
-                <a16:creationId xmlns:a16="http://schemas.microsoft.com/office/drawing/2014/main" id="{C5036522-B1D6-4DBA-A71E-6FEF188949CC}"/>
+                <a16:creationId xmlns:a16="http://schemas.microsoft.com/office/drawing/2014/main" id="{D08D229E-E63B-41D8-84FA-3575F143DE68}"/>
               </a:ext>
             </a:extLst>
           </p:cNvPr>
@@ -13739,7 +13739,7 @@
           <p:cNvPr id="2" name="">
             <a:extLst xmlns:a="http://schemas.openxmlformats.org/drawingml/2006/main">
               <a:ext uri="{FF2B5EF4-FFF2-40B4-BE49-F238E27FC236}">
-                <a16:creationId xmlns:a16="http://schemas.microsoft.com/office/drawing/2014/main" id="{BB5FD95D-73A3-44A8-A6DC-9ABAE73F681A}"/>
+                <a16:creationId xmlns:a16="http://schemas.microsoft.com/office/drawing/2014/main" id="{81072DD3-C0E7-47BF-A11F-4AA099FEC358}"/>
               </a:ext>
             </a:extLst>
           </p:cNvPr>
@@ -13768,7 +13768,7 @@
           <p:cNvPr id="3" name="§2.2.2 Elasticiteit en omzet">
             <a:extLst xmlns:a="http://schemas.openxmlformats.org/drawingml/2006/main">
               <a:ext uri="{FF2B5EF4-FFF2-40B4-BE49-F238E27FC236}">
-                <a16:creationId xmlns:a16="http://schemas.microsoft.com/office/drawing/2014/main" id="{074D3A15-D1A2-446F-8054-D9DAB2F57359}"/>
+                <a16:creationId xmlns:a16="http://schemas.microsoft.com/office/drawing/2014/main" id="{A583EA2E-E1DD-4D67-AE85-59E735F6F1AF}"/>
               </a:ext>
             </a:extLst>
           </p:cNvPr>
@@ -13825,7 +13825,7 @@
           <p:cNvPr id="4" name="2">
             <a:extLst xmlns:a="http://schemas.openxmlformats.org/drawingml/2006/main">
               <a:ext uri="{FF2B5EF4-FFF2-40B4-BE49-F238E27FC236}">
-                <a16:creationId xmlns:a16="http://schemas.microsoft.com/office/drawing/2014/main" id="{49849C96-278D-4DEE-A3EC-7625660DAFAD}"/>
+                <a16:creationId xmlns:a16="http://schemas.microsoft.com/office/drawing/2014/main" id="{BEBBA3CB-7FDD-4539-8AE4-34EF4B3F0C31}"/>
               </a:ext>
             </a:extLst>
           </p:cNvPr>
@@ -13882,7 +13882,7 @@
           <p:cNvPr id="5" name="Omzet vergelijken">
             <a:extLst xmlns:a="http://schemas.openxmlformats.org/drawingml/2006/main">
               <a:ext uri="{FF2B5EF4-FFF2-40B4-BE49-F238E27FC236}">
-                <a16:creationId xmlns:a16="http://schemas.microsoft.com/office/drawing/2014/main" id="{997D7CEC-5B4C-4E78-B0CD-D3CA0D3BB07F}"/>
+                <a16:creationId xmlns:a16="http://schemas.microsoft.com/office/drawing/2014/main" id="{605AB555-19F5-4A6C-AD0E-0A8B3A386ABB}"/>
               </a:ext>
             </a:extLst>
           </p:cNvPr>
@@ -13939,7 +13939,7 @@
           <p:cNvPr id="6" name="Je berekent TO vóór en na de prijswijziging.">
             <a:extLst xmlns:a="http://schemas.openxmlformats.org/drawingml/2006/main">
               <a:ext uri="{FF2B5EF4-FFF2-40B4-BE49-F238E27FC236}">
-                <a16:creationId xmlns:a16="http://schemas.microsoft.com/office/drawing/2014/main" id="{DA4E2A83-9750-4CBD-B90B-7A2DF3E46964}"/>
+                <a16:creationId xmlns:a16="http://schemas.microsoft.com/office/drawing/2014/main" id="{854D7925-5F4D-48F9-BEB6-25061FC37C44}"/>
               </a:ext>
             </a:extLst>
           </p:cNvPr>
@@ -13996,7 +13996,7 @@
           <p:cNvPr id="7" name="">
             <a:extLst xmlns:a="http://schemas.openxmlformats.org/drawingml/2006/main">
               <a:ext uri="{FF2B5EF4-FFF2-40B4-BE49-F238E27FC236}">
-                <a16:creationId xmlns:a16="http://schemas.microsoft.com/office/drawing/2014/main" id="{5E65FF15-957E-4B64-B7CD-402C18FED422}"/>
+                <a16:creationId xmlns:a16="http://schemas.microsoft.com/office/drawing/2014/main" id="{D1E95137-7296-4048-990A-4E88F083D231}"/>
               </a:ext>
             </a:extLst>
           </p:cNvPr>
@@ -14025,7 +14025,7 @@
           <p:cNvPr id="8" name="Een verandering in procenten">
             <a:extLst xmlns:a="http://schemas.openxmlformats.org/drawingml/2006/main">
               <a:ext uri="{FF2B5EF4-FFF2-40B4-BE49-F238E27FC236}">
-                <a16:creationId xmlns:a16="http://schemas.microsoft.com/office/drawing/2014/main" id="{20A15BA4-2A18-4CD6-BAE1-9658192434CA}"/>
+                <a16:creationId xmlns:a16="http://schemas.microsoft.com/office/drawing/2014/main" id="{C11C02B7-BB0E-47EC-989F-E3F11FBE923D}"/>
               </a:ext>
             </a:extLst>
           </p:cNvPr>
@@ -14082,7 +14082,7 @@
           <p:cNvPr id="9" name="Je vergelijkt het verschil met de oude omzet.">
             <a:extLst xmlns:a="http://schemas.openxmlformats.org/drawingml/2006/main">
               <a:ext uri="{FF2B5EF4-FFF2-40B4-BE49-F238E27FC236}">
-                <a16:creationId xmlns:a16="http://schemas.microsoft.com/office/drawing/2014/main" id="{2F4ECDC0-089C-4BF0-BD17-2FE6436422AE}"/>
+                <a16:creationId xmlns:a16="http://schemas.microsoft.com/office/drawing/2014/main" id="{AC648390-333F-483B-8891-1EBC207FB0B1}"/>
               </a:ext>
             </a:extLst>
           </p:cNvPr>
@@ -14139,7 +14139,7 @@
           <p:cNvPr id="10" name="">
             <a:extLst xmlns:a="http://schemas.openxmlformats.org/drawingml/2006/main">
               <a:ext uri="{FF2B5EF4-FFF2-40B4-BE49-F238E27FC236}">
-                <a16:creationId xmlns:a16="http://schemas.microsoft.com/office/drawing/2014/main" id="{DC9156A5-00A8-42B7-AF0F-CAFA372BAC6D}"/>
+                <a16:creationId xmlns:a16="http://schemas.microsoft.com/office/drawing/2014/main" id="{640BC6F2-02BA-44E8-9861-135907C61320}"/>
               </a:ext>
             </a:extLst>
           </p:cNvPr>
@@ -14168,7 +14168,7 @@
           <p:cNvPr id="11" name="Elasticiteit gebruiken">
             <a:extLst xmlns:a="http://schemas.openxmlformats.org/drawingml/2006/main">
               <a:ext uri="{FF2B5EF4-FFF2-40B4-BE49-F238E27FC236}">
-                <a16:creationId xmlns:a16="http://schemas.microsoft.com/office/drawing/2014/main" id="{67E19A68-D317-4CAA-983E-7132A5CBA748}"/>
+                <a16:creationId xmlns:a16="http://schemas.microsoft.com/office/drawing/2014/main" id="{71FF02E7-C876-4430-94B1-63A7497F43AF}"/>
               </a:ext>
             </a:extLst>
           </p:cNvPr>
@@ -14225,7 +14225,7 @@
           <p:cNvPr id="12" name="Je verklaart de uitkomst en de grens van de lokale">
             <a:extLst xmlns:a="http://schemas.openxmlformats.org/drawingml/2006/main">
               <a:ext uri="{FF2B5EF4-FFF2-40B4-BE49-F238E27FC236}">
-                <a16:creationId xmlns:a16="http://schemas.microsoft.com/office/drawing/2014/main" id="{5A59EE8E-480C-43D7-8AD4-06528C681B98}"/>
+                <a16:creationId xmlns:a16="http://schemas.microsoft.com/office/drawing/2014/main" id="{AE7BD8A2-5A7C-45B1-8732-31F15450622A}"/>
               </a:ext>
             </a:extLst>
           </p:cNvPr>
@@ -14282,7 +14282,7 @@
           <p:cNvPr id="13" name="">
             <a:extLst xmlns:a="http://schemas.openxmlformats.org/drawingml/2006/main">
               <a:ext uri="{FF2B5EF4-FFF2-40B4-BE49-F238E27FC236}">
-                <a16:creationId xmlns:a16="http://schemas.microsoft.com/office/drawing/2014/main" id="{DE855CD8-D4D1-4CF3-8D55-5712574AD5FD}"/>
+                <a16:creationId xmlns:a16="http://schemas.microsoft.com/office/drawing/2014/main" id="{065768E1-9785-4231-996A-73115EE57A2D}"/>
               </a:ext>
             </a:extLst>
           </p:cNvPr>
@@ -14311,7 +14311,7 @@
           <p:cNvPr id="14" name="Winst onderscheiden">
             <a:extLst xmlns:a="http://schemas.openxmlformats.org/drawingml/2006/main">
               <a:ext uri="{FF2B5EF4-FFF2-40B4-BE49-F238E27FC236}">
-                <a16:creationId xmlns:a16="http://schemas.microsoft.com/office/drawing/2014/main" id="{4A17EE7F-E299-43E4-87A6-35A98D570597}"/>
+                <a16:creationId xmlns:a16="http://schemas.microsoft.com/office/drawing/2014/main" id="{DF389EA6-02CF-46DA-B05D-C56C135A0158}"/>
               </a:ext>
             </a:extLst>
           </p:cNvPr>
@@ -14368,7 +14368,7 @@
           <p:cNvPr id="15" name="Je benoemt welke kostengegevens nog ontbreken.">
             <a:extLst xmlns:a="http://schemas.openxmlformats.org/drawingml/2006/main">
               <a:ext uri="{FF2B5EF4-FFF2-40B4-BE49-F238E27FC236}">
-                <a16:creationId xmlns:a16="http://schemas.microsoft.com/office/drawing/2014/main" id="{43766ED8-22F8-4977-BFAA-33C0EBE8825E}"/>
+                <a16:creationId xmlns:a16="http://schemas.microsoft.com/office/drawing/2014/main" id="{E81F7CD3-3B23-40E1-AFE5-F9C857672ABC}"/>
               </a:ext>
             </a:extLst>
           </p:cNvPr>
@@ -14423,7 +14423,7 @@
     </p:spTree>
     <p:extLst>
       <p:ext uri="{BB962C8B-B14F-4D97-AF65-F5344CB8AC3E}">
-        <p14:creationId xmlns:p14="http://schemas.microsoft.com/office/powerpoint/2010/main" val="1748820780"/>
+        <p14:creationId xmlns:p14="http://schemas.microsoft.com/office/powerpoint/2010/main" val="1315515778"/>
       </p:ext>
     </p:extLst>
   </p:cSld>
@@ -14454,7 +14454,7 @@
           <p:cNvPr id="10" name="Opgave 7b: Nova, verandering en Ev">
             <a:extLst xmlns:a="http://schemas.openxmlformats.org/drawingml/2006/main">
               <a:ext uri="{FF2B5EF4-FFF2-40B4-BE49-F238E27FC236}">
-                <a16:creationId xmlns:a16="http://schemas.microsoft.com/office/drawing/2014/main" id="{03490F49-6E9D-4F84-8C82-3B2E3A483750}"/>
+                <a16:creationId xmlns:a16="http://schemas.microsoft.com/office/drawing/2014/main" id="{632B916F-6DEA-48DE-AAE5-94EEF9FE7ACC}"/>
               </a:ext>
             </a:extLst>
           </p:cNvPr>
@@ -14511,7 +14511,7 @@
           <p:cNvPr id="2" name="">
             <a:extLst xmlns:a="http://schemas.openxmlformats.org/drawingml/2006/main">
               <a:ext uri="{FF2B5EF4-FFF2-40B4-BE49-F238E27FC236}">
-                <a16:creationId xmlns:a16="http://schemas.microsoft.com/office/drawing/2014/main" id="{21D983F6-F588-46FE-B7D4-8638A10AA5C4}"/>
+                <a16:creationId xmlns:a16="http://schemas.microsoft.com/office/drawing/2014/main" id="{276BE89E-6A52-4371-A3AA-9D416BBBC09E}"/>
               </a:ext>
             </a:extLst>
           </p:cNvPr>
@@ -14540,7 +14540,7 @@
           <p:cNvPr id="3" name="§2.2.2 Elasticiteit en omzet · Opgave 7 · Boekpagi">
             <a:extLst xmlns:a="http://schemas.openxmlformats.org/drawingml/2006/main">
               <a:ext uri="{FF2B5EF4-FFF2-40B4-BE49-F238E27FC236}">
-                <a16:creationId xmlns:a16="http://schemas.microsoft.com/office/drawing/2014/main" id="{CAD2C042-0A11-4BA8-8070-493CBDB4CD65}"/>
+                <a16:creationId xmlns:a16="http://schemas.microsoft.com/office/drawing/2014/main" id="{CE9A38E5-35FA-423B-AFBA-C250D15BABB4}"/>
               </a:ext>
             </a:extLst>
           </p:cNvPr>
@@ -14597,7 +14597,7 @@
           <p:cNvPr id="4" name="20">
             <a:extLst xmlns:a="http://schemas.openxmlformats.org/drawingml/2006/main">
               <a:ext uri="{FF2B5EF4-FFF2-40B4-BE49-F238E27FC236}">
-                <a16:creationId xmlns:a16="http://schemas.microsoft.com/office/drawing/2014/main" id="{C3C38FC3-D3D6-4EC4-904A-4D76BA5EB2D2}"/>
+                <a16:creationId xmlns:a16="http://schemas.microsoft.com/office/drawing/2014/main" id="{A951797A-1565-4C18-BE39-09EB0A3E3D3B}"/>
               </a:ext>
             </a:extLst>
           </p:cNvPr>
@@ -14654,7 +14654,7 @@
           <p:cNvPr id="5" name="%ΔTO = (TO nieuw − TO oud) / TO oud × 100%">
             <a:extLst xmlns:a="http://schemas.openxmlformats.org/drawingml/2006/main">
               <a:ext uri="{FF2B5EF4-FFF2-40B4-BE49-F238E27FC236}">
-                <a16:creationId xmlns:a16="http://schemas.microsoft.com/office/drawing/2014/main" id="{563A1C65-41F9-4DD5-B343-29BE4CC2A51A}"/>
+                <a16:creationId xmlns:a16="http://schemas.microsoft.com/office/drawing/2014/main" id="{E41D2C04-3920-49EB-A5A7-5FBF4F22DD74}"/>
               </a:ext>
             </a:extLst>
           </p:cNvPr>
@@ -14711,7 +14711,7 @@
           <p:cNvPr id="6" name="= (5.040 − 5.000) / 5.000 × 100% = +0,8%">
             <a:extLst xmlns:a="http://schemas.openxmlformats.org/drawingml/2006/main">
               <a:ext uri="{FF2B5EF4-FFF2-40B4-BE49-F238E27FC236}">
-                <a16:creationId xmlns:a16="http://schemas.microsoft.com/office/drawing/2014/main" id="{5C0EF1AA-6702-4D0A-92B3-DC5D175CFC69}"/>
+                <a16:creationId xmlns:a16="http://schemas.microsoft.com/office/drawing/2014/main" id="{11734A3A-3E15-4FD6-87E4-B8E02C83C337}"/>
               </a:ext>
             </a:extLst>
           </p:cNvPr>
@@ -14939,7 +14939,7 @@
           <p:cNvPr id="8" name="Prijsinelastisch: −1 &lt; −0,8 &lt; 0.">
             <a:extLst xmlns:a="http://schemas.openxmlformats.org/drawingml/2006/main">
               <a:ext uri="{FF2B5EF4-FFF2-40B4-BE49-F238E27FC236}">
-                <a16:creationId xmlns:a16="http://schemas.microsoft.com/office/drawing/2014/main" id="{2A4C583E-AB3B-44EB-BBD9-39433CFCF73D}"/>
+                <a16:creationId xmlns:a16="http://schemas.microsoft.com/office/drawing/2014/main" id="{442F1A82-7E20-4D7A-8D42-2330C8F7AB9A}"/>
               </a:ext>
             </a:extLst>
           </p:cNvPr>
@@ -14996,7 +14996,7 @@
           <p:cNvPr id="9" name="De relatief zwakke afzetdaling past hier bij de om">
             <a:extLst xmlns:a="http://schemas.openxmlformats.org/drawingml/2006/main">
               <a:ext uri="{FF2B5EF4-FFF2-40B4-BE49-F238E27FC236}">
-                <a16:creationId xmlns:a16="http://schemas.microsoft.com/office/drawing/2014/main" id="{3AA1E3A0-9465-4C32-8AAC-7862A939612B}"/>
+                <a16:creationId xmlns:a16="http://schemas.microsoft.com/office/drawing/2014/main" id="{B09CFECD-3278-4D5F-AE31-D08072C5803D}"/>
               </a:ext>
             </a:extLst>
           </p:cNvPr>
@@ -15051,7 +15051,7 @@
     </p:spTree>
     <p:extLst>
       <p:ext uri="{BB962C8B-B14F-4D97-AF65-F5344CB8AC3E}">
-        <p14:creationId xmlns:p14="http://schemas.microsoft.com/office/powerpoint/2010/main" val="163836435"/>
+        <p14:creationId xmlns:p14="http://schemas.microsoft.com/office/powerpoint/2010/main" val="1979151398"/>
       </p:ext>
     </p:extLst>
   </p:cSld>
@@ -15082,7 +15082,7 @@
           <p:cNvPr id="8" name="Opgave 7c: StreamNow, omzet vóór en na">
             <a:extLst xmlns:a="http://schemas.openxmlformats.org/drawingml/2006/main">
               <a:ext uri="{FF2B5EF4-FFF2-40B4-BE49-F238E27FC236}">
-                <a16:creationId xmlns:a16="http://schemas.microsoft.com/office/drawing/2014/main" id="{62A5FA28-3409-4151-8737-585A10071C45}"/>
+                <a16:creationId xmlns:a16="http://schemas.microsoft.com/office/drawing/2014/main" id="{975E15A7-B6CA-4E25-8BF1-52C72F31F6BF}"/>
               </a:ext>
             </a:extLst>
           </p:cNvPr>
@@ -15139,7 +15139,7 @@
           <p:cNvPr id="2" name="">
             <a:extLst xmlns:a="http://schemas.openxmlformats.org/drawingml/2006/main">
               <a:ext uri="{FF2B5EF4-FFF2-40B4-BE49-F238E27FC236}">
-                <a16:creationId xmlns:a16="http://schemas.microsoft.com/office/drawing/2014/main" id="{E2C9ED83-8F15-4DE6-BEDD-0DADAF02CAA0}"/>
+                <a16:creationId xmlns:a16="http://schemas.microsoft.com/office/drawing/2014/main" id="{8E82F8CD-0D09-4960-AC9E-3CFD46686C60}"/>
               </a:ext>
             </a:extLst>
           </p:cNvPr>
@@ -15168,7 +15168,7 @@
           <p:cNvPr id="3" name="§2.2.2 Elasticiteit en omzet · Opgave 7 · Boekpagi">
             <a:extLst xmlns:a="http://schemas.openxmlformats.org/drawingml/2006/main">
               <a:ext uri="{FF2B5EF4-FFF2-40B4-BE49-F238E27FC236}">
-                <a16:creationId xmlns:a16="http://schemas.microsoft.com/office/drawing/2014/main" id="{4D1630A8-53E8-430D-B905-A57824372C49}"/>
+                <a16:creationId xmlns:a16="http://schemas.microsoft.com/office/drawing/2014/main" id="{58ACC6B2-4AAA-46F1-A97C-CF510E0F5FD7}"/>
               </a:ext>
             </a:extLst>
           </p:cNvPr>
@@ -15225,7 +15225,7 @@
           <p:cNvPr id="4" name="21">
             <a:extLst xmlns:a="http://schemas.openxmlformats.org/drawingml/2006/main">
               <a:ext uri="{FF2B5EF4-FFF2-40B4-BE49-F238E27FC236}">
-                <a16:creationId xmlns:a16="http://schemas.microsoft.com/office/drawing/2014/main" id="{B7582F16-7CDB-45D6-A8EE-9C168BC0B8A5}"/>
+                <a16:creationId xmlns:a16="http://schemas.microsoft.com/office/drawing/2014/main" id="{50CE3644-59DC-46A8-A95D-35CE0CE8CFEE}"/>
               </a:ext>
             </a:extLst>
           </p:cNvPr>
@@ -15282,7 +15282,7 @@
           <p:cNvPr id="5" name="TO = P × Q">
             <a:extLst xmlns:a="http://schemas.openxmlformats.org/drawingml/2006/main">
               <a:ext uri="{FF2B5EF4-FFF2-40B4-BE49-F238E27FC236}">
-                <a16:creationId xmlns:a16="http://schemas.microsoft.com/office/drawing/2014/main" id="{0F236051-40A3-4E7E-9579-F0E03243695E}"/>
+                <a16:creationId xmlns:a16="http://schemas.microsoft.com/office/drawing/2014/main" id="{F8164E0E-DA65-482B-99FF-5DF543FF1B25}"/>
               </a:ext>
             </a:extLst>
           </p:cNvPr>
@@ -15584,7 +15584,7 @@
           <p:cNvPr id="7" name="Controle: € 2.400 minder omzet per maand.">
             <a:extLst xmlns:a="http://schemas.openxmlformats.org/drawingml/2006/main">
               <a:ext uri="{FF2B5EF4-FFF2-40B4-BE49-F238E27FC236}">
-                <a16:creationId xmlns:a16="http://schemas.microsoft.com/office/drawing/2014/main" id="{66093F0E-0ACA-46E3-A233-A32AA82F29E8}"/>
+                <a16:creationId xmlns:a16="http://schemas.microsoft.com/office/drawing/2014/main" id="{9EDEED80-77FE-436D-9510-9C733279574D}"/>
               </a:ext>
             </a:extLst>
           </p:cNvPr>
@@ -15639,7 +15639,7 @@
     </p:spTree>
     <p:extLst>
       <p:ext uri="{BB962C8B-B14F-4D97-AF65-F5344CB8AC3E}">
-        <p14:creationId xmlns:p14="http://schemas.microsoft.com/office/powerpoint/2010/main" val="852734567"/>
+        <p14:creationId xmlns:p14="http://schemas.microsoft.com/office/powerpoint/2010/main" val="1842970537"/>
       </p:ext>
     </p:extLst>
   </p:cSld>
@@ -15670,7 +15670,7 @@
           <p:cNvPr id="10" name="Opgave 7d: StreamNow, verandering en Ev">
             <a:extLst xmlns:a="http://schemas.openxmlformats.org/drawingml/2006/main">
               <a:ext uri="{FF2B5EF4-FFF2-40B4-BE49-F238E27FC236}">
-                <a16:creationId xmlns:a16="http://schemas.microsoft.com/office/drawing/2014/main" id="{14849A09-EEF6-4DBE-8C88-7313EF164F62}"/>
+                <a16:creationId xmlns:a16="http://schemas.microsoft.com/office/drawing/2014/main" id="{D98C205C-D141-4D2F-8E63-15189B9D4153}"/>
               </a:ext>
             </a:extLst>
           </p:cNvPr>
@@ -15727,7 +15727,7 @@
           <p:cNvPr id="2" name="">
             <a:extLst xmlns:a="http://schemas.openxmlformats.org/drawingml/2006/main">
               <a:ext uri="{FF2B5EF4-FFF2-40B4-BE49-F238E27FC236}">
-                <a16:creationId xmlns:a16="http://schemas.microsoft.com/office/drawing/2014/main" id="{360F2785-7967-4A3D-B0E1-C26B087E71DA}"/>
+                <a16:creationId xmlns:a16="http://schemas.microsoft.com/office/drawing/2014/main" id="{657C3253-B8C3-4B3C-AF6B-DFCCB1B1CBED}"/>
               </a:ext>
             </a:extLst>
           </p:cNvPr>
@@ -15756,7 +15756,7 @@
           <p:cNvPr id="3" name="§2.2.2 Elasticiteit en omzet · Opgave 7 · Boekpagi">
             <a:extLst xmlns:a="http://schemas.openxmlformats.org/drawingml/2006/main">
               <a:ext uri="{FF2B5EF4-FFF2-40B4-BE49-F238E27FC236}">
-                <a16:creationId xmlns:a16="http://schemas.microsoft.com/office/drawing/2014/main" id="{2C7CBF7D-69D6-48AD-8E80-3A7143F696C4}"/>
+                <a16:creationId xmlns:a16="http://schemas.microsoft.com/office/drawing/2014/main" id="{110610DC-EE67-4C13-8393-B44AF4495408}"/>
               </a:ext>
             </a:extLst>
           </p:cNvPr>
@@ -15813,7 +15813,7 @@
           <p:cNvPr id="4" name="22">
             <a:extLst xmlns:a="http://schemas.openxmlformats.org/drawingml/2006/main">
               <a:ext uri="{FF2B5EF4-FFF2-40B4-BE49-F238E27FC236}">
-                <a16:creationId xmlns:a16="http://schemas.microsoft.com/office/drawing/2014/main" id="{31DF61BB-9DF4-4014-A149-B64188AEA7FC}"/>
+                <a16:creationId xmlns:a16="http://schemas.microsoft.com/office/drawing/2014/main" id="{A17BA661-C99F-4095-88D9-41A4851C6DEF}"/>
               </a:ext>
             </a:extLst>
           </p:cNvPr>
@@ -15870,7 +15870,7 @@
           <p:cNvPr id="5" name="%ΔTO = (TO nieuw − TO oud) / TO oud × 100%">
             <a:extLst xmlns:a="http://schemas.openxmlformats.org/drawingml/2006/main">
               <a:ext uri="{FF2B5EF4-FFF2-40B4-BE49-F238E27FC236}">
-                <a16:creationId xmlns:a16="http://schemas.microsoft.com/office/drawing/2014/main" id="{9D5E0D8D-A9C0-466C-8267-9F35E53AF35F}"/>
+                <a16:creationId xmlns:a16="http://schemas.microsoft.com/office/drawing/2014/main" id="{F2E263C4-6A48-451F-817A-C9EC8A2F84B2}"/>
               </a:ext>
             </a:extLst>
           </p:cNvPr>
@@ -15927,7 +15927,7 @@
           <p:cNvPr id="6" name="= (17.600 − 20.000) / 20.000 × 100% = −12%">
             <a:extLst xmlns:a="http://schemas.openxmlformats.org/drawingml/2006/main">
               <a:ext uri="{FF2B5EF4-FFF2-40B4-BE49-F238E27FC236}">
-                <a16:creationId xmlns:a16="http://schemas.microsoft.com/office/drawing/2014/main" id="{B26F3CED-CCBD-4D75-A4C5-886CD83F94A6}"/>
+                <a16:creationId xmlns:a16="http://schemas.microsoft.com/office/drawing/2014/main" id="{A46F0C73-E957-4DF2-B686-475A1A707EAE}"/>
               </a:ext>
             </a:extLst>
           </p:cNvPr>
@@ -16155,7 +16155,7 @@
           <p:cNvPr id="8" name="Prijselastisch: Ev &lt; −1.">
             <a:extLst xmlns:a="http://schemas.openxmlformats.org/drawingml/2006/main">
               <a:ext uri="{FF2B5EF4-FFF2-40B4-BE49-F238E27FC236}">
-                <a16:creationId xmlns:a16="http://schemas.microsoft.com/office/drawing/2014/main" id="{9DFA5B9A-BF5D-43C0-8351-F0A0562884FA}"/>
+                <a16:creationId xmlns:a16="http://schemas.microsoft.com/office/drawing/2014/main" id="{3A5451D5-5345-4DED-AE7F-57CCE0E5EAAB}"/>
               </a:ext>
             </a:extLst>
           </p:cNvPr>
@@ -16212,7 +16212,7 @@
           <p:cNvPr id="9" name="De relatief sterke afzetdaling past hier bij de om">
             <a:extLst xmlns:a="http://schemas.openxmlformats.org/drawingml/2006/main">
               <a:ext uri="{FF2B5EF4-FFF2-40B4-BE49-F238E27FC236}">
-                <a16:creationId xmlns:a16="http://schemas.microsoft.com/office/drawing/2014/main" id="{AF426322-B6B1-4E60-A4B5-64199A81D151}"/>
+                <a16:creationId xmlns:a16="http://schemas.microsoft.com/office/drawing/2014/main" id="{C51E7F8B-50D3-4864-86D1-13EE91B1B3CB}"/>
               </a:ext>
             </a:extLst>
           </p:cNvPr>
@@ -16267,7 +16267,7 @@
     </p:spTree>
     <p:extLst>
       <p:ext uri="{BB962C8B-B14F-4D97-AF65-F5344CB8AC3E}">
-        <p14:creationId xmlns:p14="http://schemas.microsoft.com/office/powerpoint/2010/main" val="413662535"/>
+        <p14:creationId xmlns:p14="http://schemas.microsoft.com/office/powerpoint/2010/main" val="1049325388"/>
       </p:ext>
     </p:extLst>
   </p:cSld>
@@ -16298,7 +16298,7 @@
           <p:cNvPr id="8" name="Opgave 7e: de lokale omzetregel">
             <a:extLst xmlns:a="http://schemas.openxmlformats.org/drawingml/2006/main">
               <a:ext uri="{FF2B5EF4-FFF2-40B4-BE49-F238E27FC236}">
-                <a16:creationId xmlns:a16="http://schemas.microsoft.com/office/drawing/2014/main" id="{07656620-620D-41CD-BEB9-08E6C0F71AD9}"/>
+                <a16:creationId xmlns:a16="http://schemas.microsoft.com/office/drawing/2014/main" id="{3BB3BD37-8152-45E7-9BE0-7912F0D376DB}"/>
               </a:ext>
             </a:extLst>
           </p:cNvPr>
@@ -16355,7 +16355,7 @@
           <p:cNvPr id="2" name="">
             <a:extLst xmlns:a="http://schemas.openxmlformats.org/drawingml/2006/main">
               <a:ext uri="{FF2B5EF4-FFF2-40B4-BE49-F238E27FC236}">
-                <a16:creationId xmlns:a16="http://schemas.microsoft.com/office/drawing/2014/main" id="{D0120C4D-6242-40FC-AAF4-9F497CF784E0}"/>
+                <a16:creationId xmlns:a16="http://schemas.microsoft.com/office/drawing/2014/main" id="{EE478F8B-2585-4F6C-BE18-36BA7D9597C6}"/>
               </a:ext>
             </a:extLst>
           </p:cNvPr>
@@ -16384,7 +16384,7 @@
           <p:cNvPr id="3" name="§2.2.2 Elasticiteit en omzet · Opgave 7 · Boekpagi">
             <a:extLst xmlns:a="http://schemas.openxmlformats.org/drawingml/2006/main">
               <a:ext uri="{FF2B5EF4-FFF2-40B4-BE49-F238E27FC236}">
-                <a16:creationId xmlns:a16="http://schemas.microsoft.com/office/drawing/2014/main" id="{208F3F3A-DA83-4E6D-96F6-F12761D9A2A4}"/>
+                <a16:creationId xmlns:a16="http://schemas.microsoft.com/office/drawing/2014/main" id="{3EBA53AE-7F35-4882-93FC-27864C5A567F}"/>
               </a:ext>
             </a:extLst>
           </p:cNvPr>
@@ -16441,7 +16441,7 @@
           <p:cNvPr id="4" name="23">
             <a:extLst xmlns:a="http://schemas.openxmlformats.org/drawingml/2006/main">
               <a:ext uri="{FF2B5EF4-FFF2-40B4-BE49-F238E27FC236}">
-                <a16:creationId xmlns:a16="http://schemas.microsoft.com/office/drawing/2014/main" id="{03F6F450-078A-4F6E-8A83-3347B3E224FB}"/>
+                <a16:creationId xmlns:a16="http://schemas.microsoft.com/office/drawing/2014/main" id="{FCDA4A5F-9F6E-4DD5-8BB3-F19CC6221DDD}"/>
               </a:ext>
             </a:extLst>
           </p:cNvPr>
@@ -16498,7 +16498,7 @@
           <p:cNvPr id="5" name="Bij een kleine prijsverandering rond de huidige si">
             <a:extLst xmlns:a="http://schemas.openxmlformats.org/drawingml/2006/main">
               <a:ext uri="{FF2B5EF4-FFF2-40B4-BE49-F238E27FC236}">
-                <a16:creationId xmlns:a16="http://schemas.microsoft.com/office/drawing/2014/main" id="{B3FD5FC1-9835-44F8-973D-90BD8248F980}"/>
+                <a16:creationId xmlns:a16="http://schemas.microsoft.com/office/drawing/2014/main" id="{26D5C6A0-8EFC-4392-9FFF-A47D435D7D84}"/>
               </a:ext>
             </a:extLst>
           </p:cNvPr>
@@ -16939,7 +16939,7 @@
           <p:cNvPr id="7" name="Bij gegeven oude en nieuwe waarden: TO altijd nare">
             <a:extLst xmlns:a="http://schemas.openxmlformats.org/drawingml/2006/main">
               <a:ext uri="{FF2B5EF4-FFF2-40B4-BE49-F238E27FC236}">
-                <a16:creationId xmlns:a16="http://schemas.microsoft.com/office/drawing/2014/main" id="{1EBCBBB9-E9E6-482F-AE63-B2B5B454C627}"/>
+                <a16:creationId xmlns:a16="http://schemas.microsoft.com/office/drawing/2014/main" id="{55CC8F77-26A8-46EE-B1FF-FC02C40D052D}"/>
               </a:ext>
             </a:extLst>
           </p:cNvPr>
@@ -16994,7 +16994,7 @@
     </p:spTree>
     <p:extLst>
       <p:ext uri="{BB962C8B-B14F-4D97-AF65-F5344CB8AC3E}">
-        <p14:creationId xmlns:p14="http://schemas.microsoft.com/office/powerpoint/2010/main" val="1129142225"/>
+        <p14:creationId xmlns:p14="http://schemas.microsoft.com/office/powerpoint/2010/main" val="1413315854"/>
       </p:ext>
     </p:extLst>
   </p:cSld>
@@ -17025,7 +17025,7 @@
           <p:cNvPr id="8" name="Opgave 7e: een grote, eindige verandering">
             <a:extLst xmlns:a="http://schemas.openxmlformats.org/drawingml/2006/main">
               <a:ext uri="{FF2B5EF4-FFF2-40B4-BE49-F238E27FC236}">
-                <a16:creationId xmlns:a16="http://schemas.microsoft.com/office/drawing/2014/main" id="{0285F590-3139-48EE-B057-49C26A309E69}"/>
+                <a16:creationId xmlns:a16="http://schemas.microsoft.com/office/drawing/2014/main" id="{12C14A04-B3FA-4E19-968C-8074821B3626}"/>
               </a:ext>
             </a:extLst>
           </p:cNvPr>
@@ -17082,7 +17082,7 @@
           <p:cNvPr id="2" name="">
             <a:extLst xmlns:a="http://schemas.openxmlformats.org/drawingml/2006/main">
               <a:ext uri="{FF2B5EF4-FFF2-40B4-BE49-F238E27FC236}">
-                <a16:creationId xmlns:a16="http://schemas.microsoft.com/office/drawing/2014/main" id="{619D1A58-CB68-48F5-B03E-7BDE25265B52}"/>
+                <a16:creationId xmlns:a16="http://schemas.microsoft.com/office/drawing/2014/main" id="{4DD55092-4B77-4C1C-BE81-6B9227C4C57E}"/>
               </a:ext>
             </a:extLst>
           </p:cNvPr>
@@ -17111,7 +17111,7 @@
           <p:cNvPr id="3" name="§2.2.2 Elasticiteit en omzet · Opgave 7 · Boekpagi">
             <a:extLst xmlns:a="http://schemas.openxmlformats.org/drawingml/2006/main">
               <a:ext uri="{FF2B5EF4-FFF2-40B4-BE49-F238E27FC236}">
-                <a16:creationId xmlns:a16="http://schemas.microsoft.com/office/drawing/2014/main" id="{3B6D8630-CA17-44D8-8E0E-1B2441B8277B}"/>
+                <a16:creationId xmlns:a16="http://schemas.microsoft.com/office/drawing/2014/main" id="{ACEABBA4-D631-46F2-B293-6520CCE3E129}"/>
               </a:ext>
             </a:extLst>
           </p:cNvPr>
@@ -17168,7 +17168,7 @@
           <p:cNvPr id="4" name="24">
             <a:extLst xmlns:a="http://schemas.openxmlformats.org/drawingml/2006/main">
               <a:ext uri="{FF2B5EF4-FFF2-40B4-BE49-F238E27FC236}">
-                <a16:creationId xmlns:a16="http://schemas.microsoft.com/office/drawing/2014/main" id="{996234D3-9207-44D5-8C41-62E9C4614DB9}"/>
+                <a16:creationId xmlns:a16="http://schemas.microsoft.com/office/drawing/2014/main" id="{6524DDA8-49E2-40AE-AA0F-5253F21136EC}"/>
               </a:ext>
             </a:extLst>
           </p:cNvPr>
@@ -17225,7 +17225,7 @@
           <p:cNvPr id="5" name="Een gemeten Ev geldt niet automatisch bij elke pri">
             <a:extLst xmlns:a="http://schemas.openxmlformats.org/drawingml/2006/main">
               <a:ext uri="{FF2B5EF4-FFF2-40B4-BE49-F238E27FC236}">
-                <a16:creationId xmlns:a16="http://schemas.microsoft.com/office/drawing/2014/main" id="{0595B9BE-39E1-4386-8B08-A0C5D01B0539}"/>
+                <a16:creationId xmlns:a16="http://schemas.microsoft.com/office/drawing/2014/main" id="{3A205429-EEF6-4FAA-8D9F-59AF6A78D2D4}"/>
               </a:ext>
             </a:extLst>
           </p:cNvPr>
@@ -17282,7 +17282,7 @@
           <p:cNvPr id="6" name="De omzetfactor is de prijsfactor × de hoeveelheids">
             <a:extLst xmlns:a="http://schemas.openxmlformats.org/drawingml/2006/main">
               <a:ext uri="{FF2B5EF4-FFF2-40B4-BE49-F238E27FC236}">
-                <a16:creationId xmlns:a16="http://schemas.microsoft.com/office/drawing/2014/main" id="{5FC1FF6A-8E4D-4966-B448-215E9784C3EB}"/>
+                <a16:creationId xmlns:a16="http://schemas.microsoft.com/office/drawing/2014/main" id="{FBF3E9DA-3023-4E4C-B216-6263EC807988}"/>
               </a:ext>
             </a:extLst>
           </p:cNvPr>
@@ -17582,7 +17582,7 @@
     </p:spTree>
     <p:extLst>
       <p:ext uri="{BB962C8B-B14F-4D97-AF65-F5344CB8AC3E}">
-        <p14:creationId xmlns:p14="http://schemas.microsoft.com/office/powerpoint/2010/main" val="871587023"/>
+        <p14:creationId xmlns:p14="http://schemas.microsoft.com/office/powerpoint/2010/main" val="1277945676"/>
       </p:ext>
     </p:extLst>
   </p:cSld>
@@ -17613,7 +17613,7 @@
           <p:cNvPr id="8" name="Opgave 7f: de winst is nog onbekend">
             <a:extLst xmlns:a="http://schemas.openxmlformats.org/drawingml/2006/main">
               <a:ext uri="{FF2B5EF4-FFF2-40B4-BE49-F238E27FC236}">
-                <a16:creationId xmlns:a16="http://schemas.microsoft.com/office/drawing/2014/main" id="{EC791BEF-1193-43C1-9E8D-8531BFACA377}"/>
+                <a16:creationId xmlns:a16="http://schemas.microsoft.com/office/drawing/2014/main" id="{EB7B44DC-8F4F-4DB1-B239-CF92663A2294}"/>
               </a:ext>
             </a:extLst>
           </p:cNvPr>
@@ -17670,7 +17670,7 @@
           <p:cNvPr id="2" name="">
             <a:extLst xmlns:a="http://schemas.openxmlformats.org/drawingml/2006/main">
               <a:ext uri="{FF2B5EF4-FFF2-40B4-BE49-F238E27FC236}">
-                <a16:creationId xmlns:a16="http://schemas.microsoft.com/office/drawing/2014/main" id="{EE6AE8DF-9AAD-4600-83F4-55B1DF20FC3B}"/>
+                <a16:creationId xmlns:a16="http://schemas.microsoft.com/office/drawing/2014/main" id="{F52E9347-E6CF-4C58-8CF1-F6CC50FD0486}"/>
               </a:ext>
             </a:extLst>
           </p:cNvPr>
@@ -17699,7 +17699,7 @@
           <p:cNvPr id="3" name="§2.2.2 Elasticiteit en omzet · Opgave 7 · Boekpagi">
             <a:extLst xmlns:a="http://schemas.openxmlformats.org/drawingml/2006/main">
               <a:ext uri="{FF2B5EF4-FFF2-40B4-BE49-F238E27FC236}">
-                <a16:creationId xmlns:a16="http://schemas.microsoft.com/office/drawing/2014/main" id="{5B1E2996-B814-447F-BD28-304A191CE9A0}"/>
+                <a16:creationId xmlns:a16="http://schemas.microsoft.com/office/drawing/2014/main" id="{62D0C084-AB6C-4A8A-BEAC-8125F7CA6015}"/>
               </a:ext>
             </a:extLst>
           </p:cNvPr>
@@ -17756,7 +17756,7 @@
           <p:cNvPr id="4" name="25">
             <a:extLst xmlns:a="http://schemas.openxmlformats.org/drawingml/2006/main">
               <a:ext uri="{FF2B5EF4-FFF2-40B4-BE49-F238E27FC236}">
-                <a16:creationId xmlns:a16="http://schemas.microsoft.com/office/drawing/2014/main" id="{FF93B253-0D45-431C-9338-BD0084B0BFDF}"/>
+                <a16:creationId xmlns:a16="http://schemas.microsoft.com/office/drawing/2014/main" id="{820E8025-A236-4AE9-AAD5-91375BA85A95}"/>
               </a:ext>
             </a:extLst>
           </p:cNvPr>
@@ -17813,7 +17813,7 @@
           <p:cNvPr id="5" name="Winst = TO − TK">
             <a:extLst xmlns:a="http://schemas.openxmlformats.org/drawingml/2006/main">
               <a:ext uri="{FF2B5EF4-FFF2-40B4-BE49-F238E27FC236}">
-                <a16:creationId xmlns:a16="http://schemas.microsoft.com/office/drawing/2014/main" id="{F3A9198B-476C-42F6-83D3-B240F2062AF5}"/>
+                <a16:creationId xmlns:a16="http://schemas.microsoft.com/office/drawing/2014/main" id="{DF1BFD97-A039-4046-BCA0-060415A60E1A}"/>
               </a:ext>
             </a:extLst>
           </p:cNvPr>
@@ -17992,7 +17992,7 @@
           <p:cNvPr id="7" name="Zonder kosten vóór en na volgt geen zekere winstve">
             <a:extLst xmlns:a="http://schemas.openxmlformats.org/drawingml/2006/main">
               <a:ext uri="{FF2B5EF4-FFF2-40B4-BE49-F238E27FC236}">
-                <a16:creationId xmlns:a16="http://schemas.microsoft.com/office/drawing/2014/main" id="{D018233D-F01F-4A3C-A425-616B10D99C46}"/>
+                <a16:creationId xmlns:a16="http://schemas.microsoft.com/office/drawing/2014/main" id="{58BBE287-5405-483D-9107-24A20DDF96DF}"/>
               </a:ext>
             </a:extLst>
           </p:cNvPr>
@@ -18047,7 +18047,7 @@
     </p:spTree>
     <p:extLst>
       <p:ext uri="{BB962C8B-B14F-4D97-AF65-F5344CB8AC3E}">
-        <p14:creationId xmlns:p14="http://schemas.microsoft.com/office/powerpoint/2010/main" val="286161603"/>
+        <p14:creationId xmlns:p14="http://schemas.microsoft.com/office/powerpoint/2010/main" val="845289556"/>
       </p:ext>
     </p:extLst>
   </p:cSld>
@@ -18078,7 +18078,7 @@
           <p:cNvPr id="29" name="Deze les: §2.2.2 Elasticiteit en omzet">
             <a:extLst xmlns:a="http://schemas.openxmlformats.org/drawingml/2006/main">
               <a:ext uri="{FF2B5EF4-FFF2-40B4-BE49-F238E27FC236}">
-                <a16:creationId xmlns:a16="http://schemas.microsoft.com/office/drawing/2014/main" id="{A43E35D8-BF91-41D0-BD82-0EEA2CDDAC15}"/>
+                <a16:creationId xmlns:a16="http://schemas.microsoft.com/office/drawing/2014/main" id="{F216D3D7-3684-4F21-818C-754DD250C520}"/>
               </a:ext>
             </a:extLst>
           </p:cNvPr>
@@ -18135,7 +18135,7 @@
           <p:cNvPr id="2" name="">
             <a:extLst xmlns:a="http://schemas.openxmlformats.org/drawingml/2006/main">
               <a:ext uri="{FF2B5EF4-FFF2-40B4-BE49-F238E27FC236}">
-                <a16:creationId xmlns:a16="http://schemas.microsoft.com/office/drawing/2014/main" id="{D6AD50A8-ED87-4B37-AD48-134176CECFEB}"/>
+                <a16:creationId xmlns:a16="http://schemas.microsoft.com/office/drawing/2014/main" id="{3F98F72C-6DEF-4EB2-AAFE-C59C9BBA601B}"/>
               </a:ext>
             </a:extLst>
           </p:cNvPr>
@@ -18164,7 +18164,7 @@
           <p:cNvPr id="3" name="§2.2.2 Elasticiteit en omzet">
             <a:extLst xmlns:a="http://schemas.openxmlformats.org/drawingml/2006/main">
               <a:ext uri="{FF2B5EF4-FFF2-40B4-BE49-F238E27FC236}">
-                <a16:creationId xmlns:a16="http://schemas.microsoft.com/office/drawing/2014/main" id="{8CBD0CF5-B3CD-4E8F-B918-DAF7A2BD2CC8}"/>
+                <a16:creationId xmlns:a16="http://schemas.microsoft.com/office/drawing/2014/main" id="{DA1BBA5F-65F7-493E-8055-29AB1BC8846E}"/>
               </a:ext>
             </a:extLst>
           </p:cNvPr>
@@ -18221,7 +18221,7 @@
           <p:cNvPr id="4" name="26">
             <a:extLst xmlns:a="http://schemas.openxmlformats.org/drawingml/2006/main">
               <a:ext uri="{FF2B5EF4-FFF2-40B4-BE49-F238E27FC236}">
-                <a16:creationId xmlns:a16="http://schemas.microsoft.com/office/drawing/2014/main" id="{FB07952B-0E62-4538-B786-2965362CC157}"/>
+                <a16:creationId xmlns:a16="http://schemas.microsoft.com/office/drawing/2014/main" id="{071D2F9F-9398-4D89-B22D-5400708D44DF}"/>
               </a:ext>
             </a:extLst>
           </p:cNvPr>
@@ -18278,7 +18278,7 @@
           <p:cNvPr id="5" name="phase">
             <a:extLst xmlns:a="http://schemas.openxmlformats.org/drawingml/2006/main">
               <a:ext uri="{FF2B5EF4-FFF2-40B4-BE49-F238E27FC236}">
-                <a16:creationId xmlns:a16="http://schemas.microsoft.com/office/drawing/2014/main" id="{CFB4F1E1-EFFC-4E1A-90A3-0172DC9B6F79}"/>
+                <a16:creationId xmlns:a16="http://schemas.microsoft.com/office/drawing/2014/main" id="{52F882D9-F01E-44FB-A767-5767C652822E}"/>
               </a:ext>
             </a:extLst>
           </p:cNvPr>
@@ -18335,7 +18335,7 @@
           <p:cNvPr id="6" name="Lesroute">
             <a:extLst xmlns:a="http://schemas.openxmlformats.org/drawingml/2006/main">
               <a:ext uri="{FF2B5EF4-FFF2-40B4-BE49-F238E27FC236}">
-                <a16:creationId xmlns:a16="http://schemas.microsoft.com/office/drawing/2014/main" id="{BC74D23B-4E84-47EE-995C-7324F34F0068}"/>
+                <a16:creationId xmlns:a16="http://schemas.microsoft.com/office/drawing/2014/main" id="{2FB38364-7D4B-44B3-AA3C-3DBDB7B0B9A6}"/>
               </a:ext>
             </a:extLst>
           </p:cNvPr>
@@ -18392,7 +18392,7 @@
           <p:cNvPr id="7" name="route-number-1">
             <a:extLst xmlns:a="http://schemas.openxmlformats.org/drawingml/2006/main">
               <a:ext uri="{FF2B5EF4-FFF2-40B4-BE49-F238E27FC236}">
-                <a16:creationId xmlns:a16="http://schemas.microsoft.com/office/drawing/2014/main" id="{91CA0E41-5CB0-44DA-8C76-7BC6412695B2}"/>
+                <a16:creationId xmlns:a16="http://schemas.microsoft.com/office/drawing/2014/main" id="{C80165BA-1461-40C2-9E69-4913248707F6}"/>
               </a:ext>
             </a:extLst>
           </p:cNvPr>
@@ -18449,7 +18449,7 @@
           <p:cNvPr id="8" name="route-1">
             <a:extLst xmlns:a="http://schemas.openxmlformats.org/drawingml/2006/main">
               <a:ext uri="{FF2B5EF4-FFF2-40B4-BE49-F238E27FC236}">
-                <a16:creationId xmlns:a16="http://schemas.microsoft.com/office/drawing/2014/main" id="{DE764993-BFE6-4716-8E17-DD4EDFBAC0BE}"/>
+                <a16:creationId xmlns:a16="http://schemas.microsoft.com/office/drawing/2014/main" id="{A6AD676D-57DC-47F6-A18C-0E1ADC17D42A}"/>
               </a:ext>
             </a:extLst>
           </p:cNvPr>
@@ -18506,7 +18506,7 @@
           <p:cNvPr id="9" name="route-number-2">
             <a:extLst xmlns:a="http://schemas.openxmlformats.org/drawingml/2006/main">
               <a:ext uri="{FF2B5EF4-FFF2-40B4-BE49-F238E27FC236}">
-                <a16:creationId xmlns:a16="http://schemas.microsoft.com/office/drawing/2014/main" id="{51943A16-513A-4E05-9E42-F01D9D92AD8A}"/>
+                <a16:creationId xmlns:a16="http://schemas.microsoft.com/office/drawing/2014/main" id="{00857CAD-8927-400C-85A9-19019E469AAB}"/>
               </a:ext>
             </a:extLst>
           </p:cNvPr>
@@ -18563,7 +18563,7 @@
           <p:cNvPr id="10" name="route-2">
             <a:extLst xmlns:a="http://schemas.openxmlformats.org/drawingml/2006/main">
               <a:ext uri="{FF2B5EF4-FFF2-40B4-BE49-F238E27FC236}">
-                <a16:creationId xmlns:a16="http://schemas.microsoft.com/office/drawing/2014/main" id="{41901A29-21FD-4268-93E0-28F6EE0175AF}"/>
+                <a16:creationId xmlns:a16="http://schemas.microsoft.com/office/drawing/2014/main" id="{BCA28784-C6FA-4488-8E85-554129828E35}"/>
               </a:ext>
             </a:extLst>
           </p:cNvPr>
@@ -18620,7 +18620,7 @@
           <p:cNvPr id="11" name="route-number-3">
             <a:extLst xmlns:a="http://schemas.openxmlformats.org/drawingml/2006/main">
               <a:ext uri="{FF2B5EF4-FFF2-40B4-BE49-F238E27FC236}">
-                <a16:creationId xmlns:a16="http://schemas.microsoft.com/office/drawing/2014/main" id="{6CC765FF-ADCA-48AE-B2D9-A6D475F35C3E}"/>
+                <a16:creationId xmlns:a16="http://schemas.microsoft.com/office/drawing/2014/main" id="{DDE1BBC7-02A6-4877-9A42-58C802918E7D}"/>
               </a:ext>
             </a:extLst>
           </p:cNvPr>
@@ -18677,7 +18677,7 @@
           <p:cNvPr id="12" name="route-3">
             <a:extLst xmlns:a="http://schemas.openxmlformats.org/drawingml/2006/main">
               <a:ext uri="{FF2B5EF4-FFF2-40B4-BE49-F238E27FC236}">
-                <a16:creationId xmlns:a16="http://schemas.microsoft.com/office/drawing/2014/main" id="{20EAF27A-EC9D-424D-A640-6EEAAB9F86E8}"/>
+                <a16:creationId xmlns:a16="http://schemas.microsoft.com/office/drawing/2014/main" id="{B22EA197-C64C-42AA-819B-502496E42934}"/>
               </a:ext>
             </a:extLst>
           </p:cNvPr>
@@ -18734,7 +18734,7 @@
           <p:cNvPr id="13" name="route-number-4">
             <a:extLst xmlns:a="http://schemas.openxmlformats.org/drawingml/2006/main">
               <a:ext uri="{FF2B5EF4-FFF2-40B4-BE49-F238E27FC236}">
-                <a16:creationId xmlns:a16="http://schemas.microsoft.com/office/drawing/2014/main" id="{6469A7CF-421D-490F-B871-E6B81C2F2B3A}"/>
+                <a16:creationId xmlns:a16="http://schemas.microsoft.com/office/drawing/2014/main" id="{35C7A43E-9CF2-43E7-9FBA-827EA0AFBB5B}"/>
               </a:ext>
             </a:extLst>
           </p:cNvPr>
@@ -18791,7 +18791,7 @@
           <p:cNvPr id="14" name="route-4">
             <a:extLst xmlns:a="http://schemas.openxmlformats.org/drawingml/2006/main">
               <a:ext uri="{FF2B5EF4-FFF2-40B4-BE49-F238E27FC236}">
-                <a16:creationId xmlns:a16="http://schemas.microsoft.com/office/drawing/2014/main" id="{9D75B045-ACA9-4BB0-B0FA-874AE27AE665}"/>
+                <a16:creationId xmlns:a16="http://schemas.microsoft.com/office/drawing/2014/main" id="{905C3B65-4C5A-4AD5-B74C-5E767F9ABC01}"/>
               </a:ext>
             </a:extLst>
           </p:cNvPr>
@@ -18848,7 +18848,7 @@
           <p:cNvPr id="15" name="route-number-5">
             <a:extLst xmlns:a="http://schemas.openxmlformats.org/drawingml/2006/main">
               <a:ext uri="{FF2B5EF4-FFF2-40B4-BE49-F238E27FC236}">
-                <a16:creationId xmlns:a16="http://schemas.microsoft.com/office/drawing/2014/main" id="{01DDCE0E-EA96-4CA1-9351-4DFCA821E328}"/>
+                <a16:creationId xmlns:a16="http://schemas.microsoft.com/office/drawing/2014/main" id="{3239D9B9-C7B8-46B7-A4DF-CFA24075CA90}"/>
               </a:ext>
             </a:extLst>
           </p:cNvPr>
@@ -18905,7 +18905,7 @@
           <p:cNvPr id="16" name="route-5">
             <a:extLst xmlns:a="http://schemas.openxmlformats.org/drawingml/2006/main">
               <a:ext uri="{FF2B5EF4-FFF2-40B4-BE49-F238E27FC236}">
-                <a16:creationId xmlns:a16="http://schemas.microsoft.com/office/drawing/2014/main" id="{20E6CF1D-A952-4350-AA06-98D70AB2828D}"/>
+                <a16:creationId xmlns:a16="http://schemas.microsoft.com/office/drawing/2014/main" id="{C69EE50F-5485-4FBD-AE06-D2AF969462F0}"/>
               </a:ext>
             </a:extLst>
           </p:cNvPr>
@@ -18962,7 +18962,7 @@
           <p:cNvPr id="17" name="route-number-6">
             <a:extLst xmlns:a="http://schemas.openxmlformats.org/drawingml/2006/main">
               <a:ext uri="{FF2B5EF4-FFF2-40B4-BE49-F238E27FC236}">
-                <a16:creationId xmlns:a16="http://schemas.microsoft.com/office/drawing/2014/main" id="{C43F24ED-4F72-40C5-B4AE-AC9DCCF0BE39}"/>
+                <a16:creationId xmlns:a16="http://schemas.microsoft.com/office/drawing/2014/main" id="{9DA1D119-7990-49A9-9EEC-371B02A403BD}"/>
               </a:ext>
             </a:extLst>
           </p:cNvPr>
@@ -19019,7 +19019,7 @@
           <p:cNvPr id="18" name="route-6">
             <a:extLst xmlns:a="http://schemas.openxmlformats.org/drawingml/2006/main">
               <a:ext uri="{FF2B5EF4-FFF2-40B4-BE49-F238E27FC236}">
-                <a16:creationId xmlns:a16="http://schemas.microsoft.com/office/drawing/2014/main" id="{B9800BB3-57CD-47BA-BFB6-8791521A980A}"/>
+                <a16:creationId xmlns:a16="http://schemas.microsoft.com/office/drawing/2014/main" id="{5C1F649B-A700-4B2A-B309-AD99D14D90E6}"/>
               </a:ext>
             </a:extLst>
           </p:cNvPr>
@@ -19076,7 +19076,7 @@
           <p:cNvPr id="19" name="route-number-7">
             <a:extLst xmlns:a="http://schemas.openxmlformats.org/drawingml/2006/main">
               <a:ext uri="{FF2B5EF4-FFF2-40B4-BE49-F238E27FC236}">
-                <a16:creationId xmlns:a16="http://schemas.microsoft.com/office/drawing/2014/main" id="{43DC781D-29EA-4054-AF28-A19AB4AAD1C3}"/>
+                <a16:creationId xmlns:a16="http://schemas.microsoft.com/office/drawing/2014/main" id="{7C22F6D7-43DD-4961-8371-32C46BB04854}"/>
               </a:ext>
             </a:extLst>
           </p:cNvPr>
@@ -19133,7 +19133,7 @@
           <p:cNvPr id="20" name="route-7">
             <a:extLst xmlns:a="http://schemas.openxmlformats.org/drawingml/2006/main">
               <a:ext uri="{FF2B5EF4-FFF2-40B4-BE49-F238E27FC236}">
-                <a16:creationId xmlns:a16="http://schemas.microsoft.com/office/drawing/2014/main" id="{2B282774-453F-494D-860F-E593235DB02F}"/>
+                <a16:creationId xmlns:a16="http://schemas.microsoft.com/office/drawing/2014/main" id="{627492DC-744C-492C-9822-D5C4A68BD92C}"/>
               </a:ext>
             </a:extLst>
           </p:cNvPr>
@@ -19190,7 +19190,7 @@
           <p:cNvPr id="21" name="Lesdoelen">
             <a:extLst xmlns:a="http://schemas.openxmlformats.org/drawingml/2006/main">
               <a:ext uri="{FF2B5EF4-FFF2-40B4-BE49-F238E27FC236}">
-                <a16:creationId xmlns:a16="http://schemas.microsoft.com/office/drawing/2014/main" id="{8C574900-F88C-4786-A6BE-79D379948183}"/>
+                <a16:creationId xmlns:a16="http://schemas.microsoft.com/office/drawing/2014/main" id="{BD3EB903-B863-4802-B1E2-F68973CEFF6D}"/>
               </a:ext>
             </a:extLst>
           </p:cNvPr>
@@ -19247,7 +19247,7 @@
           <p:cNvPr id="22" name="overview-goals">
             <a:extLst xmlns:a="http://schemas.openxmlformats.org/drawingml/2006/main">
               <a:ext uri="{FF2B5EF4-FFF2-40B4-BE49-F238E27FC236}">
-                <a16:creationId xmlns:a16="http://schemas.microsoft.com/office/drawing/2014/main" id="{E58D5BDA-8772-4033-B04C-2F98F2E988CA}"/>
+                <a16:creationId xmlns:a16="http://schemas.microsoft.com/office/drawing/2014/main" id="{7D5E1864-B838-4C21-841C-5DD03543953F}"/>
               </a:ext>
             </a:extLst>
           </p:cNvPr>
@@ -19350,7 +19350,7 @@
           <p:cNvPr id="23" name="">
             <a:extLst xmlns:a="http://schemas.openxmlformats.org/drawingml/2006/main">
               <a:ext uri="{FF2B5EF4-FFF2-40B4-BE49-F238E27FC236}">
-                <a16:creationId xmlns:a16="http://schemas.microsoft.com/office/drawing/2014/main" id="{DA196773-22B4-4D83-9F67-81F462434E0A}"/>
+                <a16:creationId xmlns:a16="http://schemas.microsoft.com/office/drawing/2014/main" id="{948CDEAD-2AA3-4312-ABB6-DB1F59C96AC7}"/>
               </a:ext>
             </a:extLst>
           </p:cNvPr>
@@ -19379,7 +19379,7 @@
           <p:cNvPr id="24" name="Startopdracht">
             <a:extLst xmlns:a="http://schemas.openxmlformats.org/drawingml/2006/main">
               <a:ext uri="{FF2B5EF4-FFF2-40B4-BE49-F238E27FC236}">
-                <a16:creationId xmlns:a16="http://schemas.microsoft.com/office/drawing/2014/main" id="{548B5773-C111-4A50-B4AB-249A1DA116AF}"/>
+                <a16:creationId xmlns:a16="http://schemas.microsoft.com/office/drawing/2014/main" id="{6D6CE06C-ED0B-45A8-98D8-0D26C9B0867B}"/>
               </a:ext>
             </a:extLst>
           </p:cNvPr>
@@ -19436,7 +19436,7 @@
           <p:cNvPr id="25" name="overview-start">
             <a:extLst xmlns:a="http://schemas.openxmlformats.org/drawingml/2006/main">
               <a:ext uri="{FF2B5EF4-FFF2-40B4-BE49-F238E27FC236}">
-                <a16:creationId xmlns:a16="http://schemas.microsoft.com/office/drawing/2014/main" id="{DA83CA3F-AD2D-4BCC-984C-889AD3ED9A29}"/>
+                <a16:creationId xmlns:a16="http://schemas.microsoft.com/office/drawing/2014/main" id="{9C8B962A-6DB0-4AEA-B198-03051AC2506C}"/>
               </a:ext>
             </a:extLst>
           </p:cNvPr>
@@ -19516,7 +19516,7 @@
           <p:cNvPr id="26" name="">
             <a:extLst xmlns:a="http://schemas.openxmlformats.org/drawingml/2006/main">
               <a:ext uri="{FF2B5EF4-FFF2-40B4-BE49-F238E27FC236}">
-                <a16:creationId xmlns:a16="http://schemas.microsoft.com/office/drawing/2014/main" id="{BA0B235C-47B6-4C41-A580-06492F910117}"/>
+                <a16:creationId xmlns:a16="http://schemas.microsoft.com/office/drawing/2014/main" id="{AEC3C1F9-FC72-484E-9847-65533A8A3FC3}"/>
               </a:ext>
             </a:extLst>
           </p:cNvPr>
@@ -19545,7 +19545,7 @@
           <p:cNvPr id="27" name="Huiswerk">
             <a:extLst xmlns:a="http://schemas.openxmlformats.org/drawingml/2006/main">
               <a:ext uri="{FF2B5EF4-FFF2-40B4-BE49-F238E27FC236}">
-                <a16:creationId xmlns:a16="http://schemas.microsoft.com/office/drawing/2014/main" id="{C949BAE1-4F20-4905-BCF1-789A9A87E906}"/>
+                <a16:creationId xmlns:a16="http://schemas.microsoft.com/office/drawing/2014/main" id="{AA4AB2E1-E1F7-4581-9127-CFB24CDBB37C}"/>
               </a:ext>
             </a:extLst>
           </p:cNvPr>
@@ -19602,7 +19602,7 @@
           <p:cNvPr id="28" name="overview-homework">
             <a:extLst xmlns:a="http://schemas.openxmlformats.org/drawingml/2006/main">
               <a:ext uri="{FF2B5EF4-FFF2-40B4-BE49-F238E27FC236}">
-                <a16:creationId xmlns:a16="http://schemas.microsoft.com/office/drawing/2014/main" id="{595EBDB6-3336-4DB3-9FBC-45F8284BF851}"/>
+                <a16:creationId xmlns:a16="http://schemas.microsoft.com/office/drawing/2014/main" id="{7AAF804B-53D9-4936-B841-B7FE3D0A1A47}"/>
               </a:ext>
             </a:extLst>
           </p:cNvPr>
@@ -19749,7 +19749,7 @@
     </p:spTree>
     <p:extLst>
       <p:ext uri="{BB962C8B-B14F-4D97-AF65-F5344CB8AC3E}">
-        <p14:creationId xmlns:p14="http://schemas.microsoft.com/office/powerpoint/2010/main" val="307384417"/>
+        <p14:creationId xmlns:p14="http://schemas.microsoft.com/office/powerpoint/2010/main" val="1902993693"/>
       </p:ext>
     </p:extLst>
   </p:cSld>
@@ -19780,7 +19780,7 @@
           <p:cNvPr id="9" name="KeramiekStudio: prijs en afzet">
             <a:extLst xmlns:a="http://schemas.openxmlformats.org/drawingml/2006/main">
               <a:ext uri="{FF2B5EF4-FFF2-40B4-BE49-F238E27FC236}">
-                <a16:creationId xmlns:a16="http://schemas.microsoft.com/office/drawing/2014/main" id="{6951719B-2BC6-4AC1-9B73-D1F9BD6B51D6}"/>
+                <a16:creationId xmlns:a16="http://schemas.microsoft.com/office/drawing/2014/main" id="{2BC804DF-9C4E-4788-9857-1D48DBC9D537}"/>
               </a:ext>
             </a:extLst>
           </p:cNvPr>
@@ -19837,7 +19837,7 @@
           <p:cNvPr id="2" name="">
             <a:extLst xmlns:a="http://schemas.openxmlformats.org/drawingml/2006/main">
               <a:ext uri="{FF2B5EF4-FFF2-40B4-BE49-F238E27FC236}">
-                <a16:creationId xmlns:a16="http://schemas.microsoft.com/office/drawing/2014/main" id="{76CE7AC9-F39C-4A21-AD0A-31723827B783}"/>
+                <a16:creationId xmlns:a16="http://schemas.microsoft.com/office/drawing/2014/main" id="{B047BD96-ED58-4A93-9679-EEB2D6E6E530}"/>
               </a:ext>
             </a:extLst>
           </p:cNvPr>
@@ -19866,7 +19866,7 @@
           <p:cNvPr id="3" name="Uitlegvoorbeeld — niet uit het boek">
             <a:extLst xmlns:a="http://schemas.openxmlformats.org/drawingml/2006/main">
               <a:ext uri="{FF2B5EF4-FFF2-40B4-BE49-F238E27FC236}">
-                <a16:creationId xmlns:a16="http://schemas.microsoft.com/office/drawing/2014/main" id="{C1EB3393-ADAD-498E-9E9B-8B88C304EF24}"/>
+                <a16:creationId xmlns:a16="http://schemas.microsoft.com/office/drawing/2014/main" id="{EB82C71D-8C8E-4D0F-B766-C9F9C94C88F0}"/>
               </a:ext>
             </a:extLst>
           </p:cNvPr>
@@ -19923,7 +19923,7 @@
           <p:cNvPr id="4" name="3">
             <a:extLst xmlns:a="http://schemas.openxmlformats.org/drawingml/2006/main">
               <a:ext uri="{FF2B5EF4-FFF2-40B4-BE49-F238E27FC236}">
-                <a16:creationId xmlns:a16="http://schemas.microsoft.com/office/drawing/2014/main" id="{0064C0B6-ECAB-4BD6-AB03-A79CCAFD2CA3}"/>
+                <a16:creationId xmlns:a16="http://schemas.microsoft.com/office/drawing/2014/main" id="{C3B2C2AC-BA20-41EC-B8AE-F18522067813}"/>
               </a:ext>
             </a:extLst>
           </p:cNvPr>
@@ -19980,7 +19980,7 @@
           <p:cNvPr id="5" name="Verkochte workshopplaatsen per maand">
             <a:extLst xmlns:a="http://schemas.openxmlformats.org/drawingml/2006/main">
               <a:ext uri="{FF2B5EF4-FFF2-40B4-BE49-F238E27FC236}">
-                <a16:creationId xmlns:a16="http://schemas.microsoft.com/office/drawing/2014/main" id="{DABA3B7C-D1E7-4372-90F7-8501076C8620}"/>
+                <a16:creationId xmlns:a16="http://schemas.microsoft.com/office/drawing/2014/main" id="{541E0621-1039-4EA0-BCE9-EB29041E08B6}"/>
               </a:ext>
             </a:extLst>
           </p:cNvPr>
@@ -20282,7 +20282,7 @@
           <p:cNvPr id="7" name="TO = P × Q">
             <a:extLst xmlns:a="http://schemas.openxmlformats.org/drawingml/2006/main">
               <a:ext uri="{FF2B5EF4-FFF2-40B4-BE49-F238E27FC236}">
-                <a16:creationId xmlns:a16="http://schemas.microsoft.com/office/drawing/2014/main" id="{D873F8C2-BA5A-4040-81C2-8F9650BEC8C1}"/>
+                <a16:creationId xmlns:a16="http://schemas.microsoft.com/office/drawing/2014/main" id="{7F605E18-DCF9-4CDA-A359-0496F6C8E2E8}"/>
               </a:ext>
             </a:extLst>
           </p:cNvPr>
@@ -20339,7 +20339,7 @@
           <p:cNvPr id="8" name="Alle gevraagde plaatsen worden verkocht: Q = Qv.">
             <a:extLst xmlns:a="http://schemas.openxmlformats.org/drawingml/2006/main">
               <a:ext uri="{FF2B5EF4-FFF2-40B4-BE49-F238E27FC236}">
-                <a16:creationId xmlns:a16="http://schemas.microsoft.com/office/drawing/2014/main" id="{ACBD3974-D421-49CE-9D76-37B4374AB619}"/>
+                <a16:creationId xmlns:a16="http://schemas.microsoft.com/office/drawing/2014/main" id="{36CC5232-CD00-4AD2-9379-403F7377703E}"/>
               </a:ext>
             </a:extLst>
           </p:cNvPr>
@@ -20394,7 +20394,7 @@
     </p:spTree>
     <p:extLst>
       <p:ext uri="{BB962C8B-B14F-4D97-AF65-F5344CB8AC3E}">
-        <p14:creationId xmlns:p14="http://schemas.microsoft.com/office/powerpoint/2010/main" val="211342377"/>
+        <p14:creationId xmlns:p14="http://schemas.microsoft.com/office/powerpoint/2010/main" val="1426629938"/>
       </p:ext>
     </p:extLst>
   </p:cSld>
@@ -20425,7 +20425,7 @@
           <p:cNvPr id="12" name="Omzet als oppervlakte">
             <a:extLst xmlns:a="http://schemas.openxmlformats.org/drawingml/2006/main">
               <a:ext uri="{FF2B5EF4-FFF2-40B4-BE49-F238E27FC236}">
-                <a16:creationId xmlns:a16="http://schemas.microsoft.com/office/drawing/2014/main" id="{34F89FDF-504F-44EF-B9F1-23CD91D8C08E}"/>
+                <a16:creationId xmlns:a16="http://schemas.microsoft.com/office/drawing/2014/main" id="{D6F0F6BD-A786-4662-B976-05CCAFEEAE1F}"/>
               </a:ext>
             </a:extLst>
           </p:cNvPr>
@@ -20482,7 +20482,7 @@
           <p:cNvPr id="2" name="">
             <a:extLst xmlns:a="http://schemas.openxmlformats.org/drawingml/2006/main">
               <a:ext uri="{FF2B5EF4-FFF2-40B4-BE49-F238E27FC236}">
-                <a16:creationId xmlns:a16="http://schemas.microsoft.com/office/drawing/2014/main" id="{362E4A83-5C1B-4930-9B71-44BC1B8E40E2}"/>
+                <a16:creationId xmlns:a16="http://schemas.microsoft.com/office/drawing/2014/main" id="{2C707924-1F0A-4746-88FA-85E706273C49}"/>
               </a:ext>
             </a:extLst>
           </p:cNvPr>
@@ -20511,7 +20511,7 @@
           <p:cNvPr id="3" name="Uitlegvoorbeeld — niet uit het boek">
             <a:extLst xmlns:a="http://schemas.openxmlformats.org/drawingml/2006/main">
               <a:ext uri="{FF2B5EF4-FFF2-40B4-BE49-F238E27FC236}">
-                <a16:creationId xmlns:a16="http://schemas.microsoft.com/office/drawing/2014/main" id="{29D23FEB-D6BB-4385-9E9D-017E408DCCF6}"/>
+                <a16:creationId xmlns:a16="http://schemas.microsoft.com/office/drawing/2014/main" id="{77590571-E815-480D-AE70-CC6495162C4C}"/>
               </a:ext>
             </a:extLst>
           </p:cNvPr>
@@ -20568,7 +20568,7 @@
           <p:cNvPr id="4" name="4">
             <a:extLst xmlns:a="http://schemas.openxmlformats.org/drawingml/2006/main">
               <a:ext uri="{FF2B5EF4-FFF2-40B4-BE49-F238E27FC236}">
-                <a16:creationId xmlns:a16="http://schemas.microsoft.com/office/drawing/2014/main" id="{C93A5AEE-0953-4F1C-84CA-2E9C3CAC6ACA}"/>
+                <a16:creationId xmlns:a16="http://schemas.microsoft.com/office/drawing/2014/main" id="{D1440AF4-0735-413D-B3BA-789F84105EBE}"/>
               </a:ext>
             </a:extLst>
           </p:cNvPr>
@@ -20625,7 +20625,7 @@
           <p:cNvPr id="5" name="KeramiekStudio: oud P = € 30, Q = 160">
             <a:extLst xmlns:a="http://schemas.openxmlformats.org/drawingml/2006/main">
               <a:ext uri="{FF2B5EF4-FFF2-40B4-BE49-F238E27FC236}">
-                <a16:creationId xmlns:a16="http://schemas.microsoft.com/office/drawing/2014/main" id="{805BAAA3-0170-4F08-B366-41DB47F1A103}"/>
+                <a16:creationId xmlns:a16="http://schemas.microsoft.com/office/drawing/2014/main" id="{9BCAB47B-AC87-4B69-9B14-42E51E4FB13F}"/>
               </a:ext>
             </a:extLst>
           </p:cNvPr>
@@ -20689,7 +20689,7 @@
         </p:xfrm>
         <a:graphic xmlns:a="http://schemas.openxmlformats.org/drawingml/2006/main">
           <a:graphicData uri="http://schemas.openxmlformats.org/drawingml/2006/chart">
-            <c:chart xmlns:r="http://schemas.openxmlformats.org/officeDocument/2006/relationships" xmlns:c="http://schemas.openxmlformats.org/drawingml/2006/chart" r:id="R6bbacbfa9b0f420c"/>
+            <c:chart xmlns:r="http://schemas.openxmlformats.org/officeDocument/2006/relationships" xmlns:c="http://schemas.openxmlformats.org/drawingml/2006/chart" r:id="R3ee3fa3e50a44cf8"/>
           </a:graphicData>
         </a:graphic>
       </p:graphicFrame>
@@ -20698,7 +20698,7 @@
           <p:cNvPr id="7" name="TO oud">
             <a:extLst xmlns:a="http://schemas.openxmlformats.org/drawingml/2006/main">
               <a:ext uri="{FF2B5EF4-FFF2-40B4-BE49-F238E27FC236}">
-                <a16:creationId xmlns:a16="http://schemas.microsoft.com/office/drawing/2014/main" id="{199DE62A-763F-46A4-A6FB-39877F76FC9A}"/>
+                <a16:creationId xmlns:a16="http://schemas.microsoft.com/office/drawing/2014/main" id="{3AFCA4DC-0060-45B8-A600-DEE93B4548A0}"/>
               </a:ext>
             </a:extLst>
           </p:cNvPr>
@@ -20755,7 +20755,7 @@
           <p:cNvPr id="8" name="30 × 160">
             <a:extLst xmlns:a="http://schemas.openxmlformats.org/drawingml/2006/main">
               <a:ext uri="{FF2B5EF4-FFF2-40B4-BE49-F238E27FC236}">
-                <a16:creationId xmlns:a16="http://schemas.microsoft.com/office/drawing/2014/main" id="{36C83C2A-72C6-49EA-B515-FFB188404876}"/>
+                <a16:creationId xmlns:a16="http://schemas.microsoft.com/office/drawing/2014/main" id="{20D523E3-1F43-4886-954B-B419F73446DB}"/>
               </a:ext>
             </a:extLst>
           </p:cNvPr>
@@ -20812,7 +20812,7 @@
           <p:cNvPr id="9" name="= € 4.800">
             <a:extLst xmlns:a="http://schemas.openxmlformats.org/drawingml/2006/main">
               <a:ext uri="{FF2B5EF4-FFF2-40B4-BE49-F238E27FC236}">
-                <a16:creationId xmlns:a16="http://schemas.microsoft.com/office/drawing/2014/main" id="{9AD54A8D-C5DD-4626-8A4A-6B65D3D1811B}"/>
+                <a16:creationId xmlns:a16="http://schemas.microsoft.com/office/drawing/2014/main" id="{771ABDFF-FFE8-4284-9E84-08622933B6BF}"/>
               </a:ext>
             </a:extLst>
           </p:cNvPr>
@@ -20869,7 +20869,7 @@
           <p:cNvPr id="10" name="per maand">
             <a:extLst xmlns:a="http://schemas.openxmlformats.org/drawingml/2006/main">
               <a:ext uri="{FF2B5EF4-FFF2-40B4-BE49-F238E27FC236}">
-                <a16:creationId xmlns:a16="http://schemas.microsoft.com/office/drawing/2014/main" id="{1862973B-B48D-4C5B-9018-700AB4202291}"/>
+                <a16:creationId xmlns:a16="http://schemas.microsoft.com/office/drawing/2014/main" id="{CC521BA3-D81E-4C2F-9ED3-6C6C63AB3707}"/>
               </a:ext>
             </a:extLst>
           </p:cNvPr>
@@ -20926,7 +20926,7 @@
           <p:cNvPr id="11" name="Breedte × hoogte&#10;geeft de omzet.">
             <a:extLst xmlns:a="http://schemas.openxmlformats.org/drawingml/2006/main">
               <a:ext uri="{FF2B5EF4-FFF2-40B4-BE49-F238E27FC236}">
-                <a16:creationId xmlns:a16="http://schemas.microsoft.com/office/drawing/2014/main" id="{5479A3F8-FE1D-4DF1-A894-2518337474EC}"/>
+                <a16:creationId xmlns:a16="http://schemas.microsoft.com/office/drawing/2014/main" id="{E08CAD02-7F0C-43D8-B2F7-F343FCF0434A}"/>
               </a:ext>
             </a:extLst>
           </p:cNvPr>
@@ -21004,7 +21004,7 @@
     </p:spTree>
     <p:extLst>
       <p:ext uri="{BB962C8B-B14F-4D97-AF65-F5344CB8AC3E}">
-        <p14:creationId xmlns:p14="http://schemas.microsoft.com/office/powerpoint/2010/main" val="1106198858"/>
+        <p14:creationId xmlns:p14="http://schemas.microsoft.com/office/powerpoint/2010/main" val="1242478242"/>
       </p:ext>
     </p:extLst>
   </p:cSld>
@@ -21035,7 +21035,7 @@
           <p:cNvPr id="12" name="De nieuwe omzetrechthoek">
             <a:extLst xmlns:a="http://schemas.openxmlformats.org/drawingml/2006/main">
               <a:ext uri="{FF2B5EF4-FFF2-40B4-BE49-F238E27FC236}">
-                <a16:creationId xmlns:a16="http://schemas.microsoft.com/office/drawing/2014/main" id="{7C5C09A1-6792-481C-B9B6-6EB0A51F7BE2}"/>
+                <a16:creationId xmlns:a16="http://schemas.microsoft.com/office/drawing/2014/main" id="{71BFB8C7-A873-4A9B-A948-00B9BF5DD783}"/>
               </a:ext>
             </a:extLst>
           </p:cNvPr>
@@ -21092,7 +21092,7 @@
           <p:cNvPr id="2" name="">
             <a:extLst xmlns:a="http://schemas.openxmlformats.org/drawingml/2006/main">
               <a:ext uri="{FF2B5EF4-FFF2-40B4-BE49-F238E27FC236}">
-                <a16:creationId xmlns:a16="http://schemas.microsoft.com/office/drawing/2014/main" id="{1634303F-7CF5-4020-A338-2CC3972DA980}"/>
+                <a16:creationId xmlns:a16="http://schemas.microsoft.com/office/drawing/2014/main" id="{212090A3-1379-4718-BF97-983F6A9D7603}"/>
               </a:ext>
             </a:extLst>
           </p:cNvPr>
@@ -21121,7 +21121,7 @@
           <p:cNvPr id="3" name="Uitlegvoorbeeld — niet uit het boek">
             <a:extLst xmlns:a="http://schemas.openxmlformats.org/drawingml/2006/main">
               <a:ext uri="{FF2B5EF4-FFF2-40B4-BE49-F238E27FC236}">
-                <a16:creationId xmlns:a16="http://schemas.microsoft.com/office/drawing/2014/main" id="{3FF66E7D-B0A5-4D7F-8052-9B518E1EEB28}"/>
+                <a16:creationId xmlns:a16="http://schemas.microsoft.com/office/drawing/2014/main" id="{F7CA6CAB-A1FA-44CF-9CE5-06C18B3F201A}"/>
               </a:ext>
             </a:extLst>
           </p:cNvPr>
@@ -21178,7 +21178,7 @@
           <p:cNvPr id="4" name="5">
             <a:extLst xmlns:a="http://schemas.openxmlformats.org/drawingml/2006/main">
               <a:ext uri="{FF2B5EF4-FFF2-40B4-BE49-F238E27FC236}">
-                <a16:creationId xmlns:a16="http://schemas.microsoft.com/office/drawing/2014/main" id="{ED4FA3A3-637F-47CC-869C-7FE1EB629951}"/>
+                <a16:creationId xmlns:a16="http://schemas.microsoft.com/office/drawing/2014/main" id="{D5851D74-86A9-4101-BFEA-912D2E107573}"/>
               </a:ext>
             </a:extLst>
           </p:cNvPr>
@@ -21235,7 +21235,7 @@
           <p:cNvPr id="5" name="KeramiekStudio: oud gestreept, nieuw groen">
             <a:extLst xmlns:a="http://schemas.openxmlformats.org/drawingml/2006/main">
               <a:ext uri="{FF2B5EF4-FFF2-40B4-BE49-F238E27FC236}">
-                <a16:creationId xmlns:a16="http://schemas.microsoft.com/office/drawing/2014/main" id="{A6F584BF-CD86-4477-A541-246C688FB092}"/>
+                <a16:creationId xmlns:a16="http://schemas.microsoft.com/office/drawing/2014/main" id="{6D460271-2C5C-407E-8C12-672C22CBA833}"/>
               </a:ext>
             </a:extLst>
           </p:cNvPr>
@@ -21299,7 +21299,7 @@
         </p:xfrm>
         <a:graphic xmlns:a="http://schemas.openxmlformats.org/drawingml/2006/main">
           <a:graphicData uri="http://schemas.openxmlformats.org/drawingml/2006/chart">
-            <c:chart xmlns:r="http://schemas.openxmlformats.org/officeDocument/2006/relationships" xmlns:c="http://schemas.openxmlformats.org/drawingml/2006/chart" r:id="R343356ded0e6416f"/>
+            <c:chart xmlns:r="http://schemas.openxmlformats.org/officeDocument/2006/relationships" xmlns:c="http://schemas.openxmlformats.org/drawingml/2006/chart" r:id="R0d5c9a88d43d4299"/>
           </a:graphicData>
         </a:graphic>
       </p:graphicFrame>
@@ -21308,7 +21308,7 @@
           <p:cNvPr id="7" name="TO nieuw">
             <a:extLst xmlns:a="http://schemas.openxmlformats.org/drawingml/2006/main">
               <a:ext uri="{FF2B5EF4-FFF2-40B4-BE49-F238E27FC236}">
-                <a16:creationId xmlns:a16="http://schemas.microsoft.com/office/drawing/2014/main" id="{F139D673-7D0D-48E6-BB33-2BCA4E40B97C}"/>
+                <a16:creationId xmlns:a16="http://schemas.microsoft.com/office/drawing/2014/main" id="{960AFA3F-211F-4EBA-8C79-FB3AF55B17D0}"/>
               </a:ext>
             </a:extLst>
           </p:cNvPr>
@@ -21365,7 +21365,7 @@
           <p:cNvPr id="8" name="33 × 152">
             <a:extLst xmlns:a="http://schemas.openxmlformats.org/drawingml/2006/main">
               <a:ext uri="{FF2B5EF4-FFF2-40B4-BE49-F238E27FC236}">
-                <a16:creationId xmlns:a16="http://schemas.microsoft.com/office/drawing/2014/main" id="{CAD22502-539B-4AEF-806E-19028DA61D72}"/>
+                <a16:creationId xmlns:a16="http://schemas.microsoft.com/office/drawing/2014/main" id="{7FC76874-6DAA-4B16-9303-C07FEA2F5115}"/>
               </a:ext>
             </a:extLst>
           </p:cNvPr>
@@ -21422,7 +21422,7 @@
           <p:cNvPr id="9" name="= € 5.016">
             <a:extLst xmlns:a="http://schemas.openxmlformats.org/drawingml/2006/main">
               <a:ext uri="{FF2B5EF4-FFF2-40B4-BE49-F238E27FC236}">
-                <a16:creationId xmlns:a16="http://schemas.microsoft.com/office/drawing/2014/main" id="{1FC32523-CDFE-45FC-9E53-E05703C2546D}"/>
+                <a16:creationId xmlns:a16="http://schemas.microsoft.com/office/drawing/2014/main" id="{D5EB734D-5ADC-4495-84B9-45796315EE09}"/>
               </a:ext>
             </a:extLst>
           </p:cNvPr>
@@ -21479,7 +21479,7 @@
           <p:cNvPr id="10" name="per maand">
             <a:extLst xmlns:a="http://schemas.openxmlformats.org/drawingml/2006/main">
               <a:ext uri="{FF2B5EF4-FFF2-40B4-BE49-F238E27FC236}">
-                <a16:creationId xmlns:a16="http://schemas.microsoft.com/office/drawing/2014/main" id="{2BD98845-C985-4225-B08B-43D89CFCCBDC}"/>
+                <a16:creationId xmlns:a16="http://schemas.microsoft.com/office/drawing/2014/main" id="{7B11C946-0DA7-4EEA-AEFF-5C9D6B558B17}"/>
               </a:ext>
             </a:extLst>
           </p:cNvPr>
@@ -21536,7 +21536,7 @@
           <p:cNvPr id="11" name="Hoger én smaller.&#10;De oppervlakte&#10;wordt groter.">
             <a:extLst xmlns:a="http://schemas.openxmlformats.org/drawingml/2006/main">
               <a:ext uri="{FF2B5EF4-FFF2-40B4-BE49-F238E27FC236}">
-                <a16:creationId xmlns:a16="http://schemas.microsoft.com/office/drawing/2014/main" id="{0B17DDD6-DDCC-48B4-B203-6D7565FAA991}"/>
+                <a16:creationId xmlns:a16="http://schemas.microsoft.com/office/drawing/2014/main" id="{50F70F1F-1EF5-4972-8C10-1E6A2DB554C1}"/>
               </a:ext>
             </a:extLst>
           </p:cNvPr>
@@ -21637,7 +21637,7 @@
     </p:spTree>
     <p:extLst>
       <p:ext uri="{BB962C8B-B14F-4D97-AF65-F5344CB8AC3E}">
-        <p14:creationId xmlns:p14="http://schemas.microsoft.com/office/powerpoint/2010/main" val="359499696"/>
+        <p14:creationId xmlns:p14="http://schemas.microsoft.com/office/powerpoint/2010/main" val="168627242"/>
       </p:ext>
     </p:extLst>
   </p:cSld>
@@ -21668,7 +21668,7 @@
           <p:cNvPr id="10" name="De procentuele omzetverandering">
             <a:extLst xmlns:a="http://schemas.openxmlformats.org/drawingml/2006/main">
               <a:ext uri="{FF2B5EF4-FFF2-40B4-BE49-F238E27FC236}">
-                <a16:creationId xmlns:a16="http://schemas.microsoft.com/office/drawing/2014/main" id="{CF99027F-3752-4030-A52A-3F23494C8404}"/>
+                <a16:creationId xmlns:a16="http://schemas.microsoft.com/office/drawing/2014/main" id="{036F5682-076D-448A-A5B0-A507DCAE6D2C}"/>
               </a:ext>
             </a:extLst>
           </p:cNvPr>
@@ -21725,7 +21725,7 @@
           <p:cNvPr id="2" name="">
             <a:extLst xmlns:a="http://schemas.openxmlformats.org/drawingml/2006/main">
               <a:ext uri="{FF2B5EF4-FFF2-40B4-BE49-F238E27FC236}">
-                <a16:creationId xmlns:a16="http://schemas.microsoft.com/office/drawing/2014/main" id="{9579EE52-74B6-4416-B092-AE4DC48293E1}"/>
+                <a16:creationId xmlns:a16="http://schemas.microsoft.com/office/drawing/2014/main" id="{2EB8FF9C-0ACE-48D6-8024-90A1511C3A91}"/>
               </a:ext>
             </a:extLst>
           </p:cNvPr>
@@ -21754,7 +21754,7 @@
           <p:cNvPr id="3" name="Uitlegvoorbeeld — niet uit het boek">
             <a:extLst xmlns:a="http://schemas.openxmlformats.org/drawingml/2006/main">
               <a:ext uri="{FF2B5EF4-FFF2-40B4-BE49-F238E27FC236}">
-                <a16:creationId xmlns:a16="http://schemas.microsoft.com/office/drawing/2014/main" id="{D34168BC-6894-4071-AC1A-91398A330E36}"/>
+                <a16:creationId xmlns:a16="http://schemas.microsoft.com/office/drawing/2014/main" id="{5AC1D407-4770-4B0D-B8C9-454266D599A3}"/>
               </a:ext>
             </a:extLst>
           </p:cNvPr>
@@ -21811,7 +21811,7 @@
           <p:cNvPr id="4" name="6">
             <a:extLst xmlns:a="http://schemas.openxmlformats.org/drawingml/2006/main">
               <a:ext uri="{FF2B5EF4-FFF2-40B4-BE49-F238E27FC236}">
-                <a16:creationId xmlns:a16="http://schemas.microsoft.com/office/drawing/2014/main" id="{CF86E886-6870-4805-804C-939000503F92}"/>
+                <a16:creationId xmlns:a16="http://schemas.microsoft.com/office/drawing/2014/main" id="{E0E18A65-2DC4-45BB-B300-8C3DE86A76D2}"/>
               </a:ext>
             </a:extLst>
           </p:cNvPr>
@@ -21868,7 +21868,7 @@
           <p:cNvPr id="5" name="KeramiekStudio: € 4.800 naar € 5.016 per maand">
             <a:extLst xmlns:a="http://schemas.openxmlformats.org/drawingml/2006/main">
               <a:ext uri="{FF2B5EF4-FFF2-40B4-BE49-F238E27FC236}">
-                <a16:creationId xmlns:a16="http://schemas.microsoft.com/office/drawing/2014/main" id="{326C45F9-4D97-4360-A618-78A773157856}"/>
+                <a16:creationId xmlns:a16="http://schemas.microsoft.com/office/drawing/2014/main" id="{C265B642-62DE-4392-8E46-6DE0137B8106}"/>
               </a:ext>
             </a:extLst>
           </p:cNvPr>
@@ -21925,7 +21925,7 @@
           <p:cNvPr id="6" name="%ΔTO = (TO nieuw − TO oud) / TO oud × 100%">
             <a:extLst xmlns:a="http://schemas.openxmlformats.org/drawingml/2006/main">
               <a:ext uri="{FF2B5EF4-FFF2-40B4-BE49-F238E27FC236}">
-                <a16:creationId xmlns:a16="http://schemas.microsoft.com/office/drawing/2014/main" id="{867B6719-CDCB-4B86-B55C-7A576A87DA65}"/>
+                <a16:creationId xmlns:a16="http://schemas.microsoft.com/office/drawing/2014/main" id="{485E557A-674B-49C4-B61B-800C744F65AC}"/>
               </a:ext>
             </a:extLst>
           </p:cNvPr>
@@ -21982,7 +21982,7 @@
           <p:cNvPr id="7" name="= (5.016 − 4.800) / 4.800 × 100%">
             <a:extLst xmlns:a="http://schemas.openxmlformats.org/drawingml/2006/main">
               <a:ext uri="{FF2B5EF4-FFF2-40B4-BE49-F238E27FC236}">
-                <a16:creationId xmlns:a16="http://schemas.microsoft.com/office/drawing/2014/main" id="{2D9303C3-6A8D-4D20-9027-5A0217372E63}"/>
+                <a16:creationId xmlns:a16="http://schemas.microsoft.com/office/drawing/2014/main" id="{0577E1CC-9DDB-4F9C-AF72-43236CA6CD5A}"/>
               </a:ext>
             </a:extLst>
           </p:cNvPr>
@@ -22039,7 +22039,7 @@
           <p:cNvPr id="8" name="= +4,5%">
             <a:extLst xmlns:a="http://schemas.openxmlformats.org/drawingml/2006/main">
               <a:ext uri="{FF2B5EF4-FFF2-40B4-BE49-F238E27FC236}">
-                <a16:creationId xmlns:a16="http://schemas.microsoft.com/office/drawing/2014/main" id="{78E4BBE6-5379-4EA1-925A-EBF50E1016F7}"/>
+                <a16:creationId xmlns:a16="http://schemas.microsoft.com/office/drawing/2014/main" id="{21733B2E-F6AC-4BE3-9603-223C929A8ABB}"/>
               </a:ext>
             </a:extLst>
           </p:cNvPr>
@@ -22096,7 +22096,7 @@
           <p:cNvPr id="9" name="€ 216 extra omzet, vergeleken met de oude € 4.800.">
             <a:extLst xmlns:a="http://schemas.openxmlformats.org/drawingml/2006/main">
               <a:ext uri="{FF2B5EF4-FFF2-40B4-BE49-F238E27FC236}">
-                <a16:creationId xmlns:a16="http://schemas.microsoft.com/office/drawing/2014/main" id="{9381B4DC-FF21-4F0E-AECD-427FA79E882B}"/>
+                <a16:creationId xmlns:a16="http://schemas.microsoft.com/office/drawing/2014/main" id="{33AA3CD3-1C58-4120-8EA2-7A7031CD267E}"/>
               </a:ext>
             </a:extLst>
           </p:cNvPr>
@@ -22151,7 +22151,7 @@
     </p:spTree>
     <p:extLst>
       <p:ext uri="{BB962C8B-B14F-4D97-AF65-F5344CB8AC3E}">
-        <p14:creationId xmlns:p14="http://schemas.microsoft.com/office/powerpoint/2010/main" val="303760269"/>
+        <p14:creationId xmlns:p14="http://schemas.microsoft.com/office/powerpoint/2010/main" val="2043411058"/>
       </p:ext>
     </p:extLst>
   </p:cSld>
@@ -22182,7 +22182,7 @@
           <p:cNvPr id="9" name="Een relatief zwakke hoeveelheidsreactie">
             <a:extLst xmlns:a="http://schemas.openxmlformats.org/drawingml/2006/main">
               <a:ext uri="{FF2B5EF4-FFF2-40B4-BE49-F238E27FC236}">
-                <a16:creationId xmlns:a16="http://schemas.microsoft.com/office/drawing/2014/main" id="{62AEF727-2C93-49BB-98F2-7208BEAD4AE0}"/>
+                <a16:creationId xmlns:a16="http://schemas.microsoft.com/office/drawing/2014/main" id="{93BC43A6-9777-46AD-8775-83A1469C1A13}"/>
               </a:ext>
             </a:extLst>
           </p:cNvPr>
@@ -22239,7 +22239,7 @@
           <p:cNvPr id="2" name="">
             <a:extLst xmlns:a="http://schemas.openxmlformats.org/drawingml/2006/main">
               <a:ext uri="{FF2B5EF4-FFF2-40B4-BE49-F238E27FC236}">
-                <a16:creationId xmlns:a16="http://schemas.microsoft.com/office/drawing/2014/main" id="{059C5562-B218-4C4D-B83D-8790A8A67F7E}"/>
+                <a16:creationId xmlns:a16="http://schemas.microsoft.com/office/drawing/2014/main" id="{047BD704-9CE8-4DAC-9C69-A1426C6C5D4D}"/>
               </a:ext>
             </a:extLst>
           </p:cNvPr>
@@ -22268,7 +22268,7 @@
           <p:cNvPr id="3" name="Uitlegvoorbeeld — niet uit het boek">
             <a:extLst xmlns:a="http://schemas.openxmlformats.org/drawingml/2006/main">
               <a:ext uri="{FF2B5EF4-FFF2-40B4-BE49-F238E27FC236}">
-                <a16:creationId xmlns:a16="http://schemas.microsoft.com/office/drawing/2014/main" id="{F1D580CD-9A1A-4F42-B1E3-F2D9B6CE2FB4}"/>
+                <a16:creationId xmlns:a16="http://schemas.microsoft.com/office/drawing/2014/main" id="{A2A6437C-4C35-4AA7-BF04-1F6C6C22D2BE}"/>
               </a:ext>
             </a:extLst>
           </p:cNvPr>
@@ -22325,7 +22325,7 @@
           <p:cNvPr id="4" name="7">
             <a:extLst xmlns:a="http://schemas.openxmlformats.org/drawingml/2006/main">
               <a:ext uri="{FF2B5EF4-FFF2-40B4-BE49-F238E27FC236}">
-                <a16:creationId xmlns:a16="http://schemas.microsoft.com/office/drawing/2014/main" id="{F785F0CD-23A0-4653-B575-99A0FB61FFC0}"/>
+                <a16:creationId xmlns:a16="http://schemas.microsoft.com/office/drawing/2014/main" id="{0EAA8529-5A4F-42D2-95B7-869E70824353}"/>
               </a:ext>
             </a:extLst>
           </p:cNvPr>
@@ -22554,7 +22554,7 @@
           <p:cNvPr id="6" name="Ev = −5% / +10% = −0,5">
             <a:extLst xmlns:a="http://schemas.openxmlformats.org/drawingml/2006/main">
               <a:ext uri="{FF2B5EF4-FFF2-40B4-BE49-F238E27FC236}">
-                <a16:creationId xmlns:a16="http://schemas.microsoft.com/office/drawing/2014/main" id="{013F12CC-1509-42EF-BA70-9DA6CCF7EAF0}"/>
+                <a16:creationId xmlns:a16="http://schemas.microsoft.com/office/drawing/2014/main" id="{17C19073-C953-4040-9BDB-F7B1D3A563D5}"/>
               </a:ext>
             </a:extLst>
           </p:cNvPr>
@@ -22611,7 +22611,7 @@
           <p:cNvPr id="7" name="−1 &lt; −0,5 &lt; 0: prijsinelastische vraag">
             <a:extLst xmlns:a="http://schemas.openxmlformats.org/drawingml/2006/main">
               <a:ext uri="{FF2B5EF4-FFF2-40B4-BE49-F238E27FC236}">
-                <a16:creationId xmlns:a16="http://schemas.microsoft.com/office/drawing/2014/main" id="{3E657EE1-2B44-4900-B73F-B1E5CEE0CE96}"/>
+                <a16:creationId xmlns:a16="http://schemas.microsoft.com/office/drawing/2014/main" id="{29E98340-6591-46DC-9BEC-9280592A86D9}"/>
               </a:ext>
             </a:extLst>
           </p:cNvPr>
@@ -22668,7 +22668,7 @@
           <p:cNvPr id="8" name="In deze meting stijgt TO met 4,5%.">
             <a:extLst xmlns:a="http://schemas.openxmlformats.org/drawingml/2006/main">
               <a:ext uri="{FF2B5EF4-FFF2-40B4-BE49-F238E27FC236}">
-                <a16:creationId xmlns:a16="http://schemas.microsoft.com/office/drawing/2014/main" id="{19957B47-BDD7-4D9F-A87C-F1849D0D99EB}"/>
+                <a16:creationId xmlns:a16="http://schemas.microsoft.com/office/drawing/2014/main" id="{663090D3-3696-4AA8-BD38-CA3B77087A85}"/>
               </a:ext>
             </a:extLst>
           </p:cNvPr>
@@ -22723,7 +22723,7 @@
     </p:spTree>
     <p:extLst>
       <p:ext uri="{BB962C8B-B14F-4D97-AF65-F5344CB8AC3E}">
-        <p14:creationId xmlns:p14="http://schemas.microsoft.com/office/powerpoint/2010/main" val="50904072"/>
+        <p14:creationId xmlns:p14="http://schemas.microsoft.com/office/powerpoint/2010/main" val="2097547548"/>
       </p:ext>
     </p:extLst>
   </p:cSld>
@@ -22754,7 +22754,7 @@
           <p:cNvPr id="8" name="KajakStek: minder verhuringen">
             <a:extLst xmlns:a="http://schemas.openxmlformats.org/drawingml/2006/main">
               <a:ext uri="{FF2B5EF4-FFF2-40B4-BE49-F238E27FC236}">
-                <a16:creationId xmlns:a16="http://schemas.microsoft.com/office/drawing/2014/main" id="{518BD810-3AB4-4B2F-A997-8E61F487CFEB}"/>
+                <a16:creationId xmlns:a16="http://schemas.microsoft.com/office/drawing/2014/main" id="{FF731F58-19FE-40A9-810C-5D3F9B1D0F1A}"/>
               </a:ext>
             </a:extLst>
           </p:cNvPr>
@@ -22811,7 +22811,7 @@
           <p:cNvPr id="2" name="">
             <a:extLst xmlns:a="http://schemas.openxmlformats.org/drawingml/2006/main">
               <a:ext uri="{FF2B5EF4-FFF2-40B4-BE49-F238E27FC236}">
-                <a16:creationId xmlns:a16="http://schemas.microsoft.com/office/drawing/2014/main" id="{38061DF1-3100-45E6-AB0C-5EC7713330CD}"/>
+                <a16:creationId xmlns:a16="http://schemas.microsoft.com/office/drawing/2014/main" id="{E443F5C8-51D2-4315-B30F-7E2C8D8596C6}"/>
               </a:ext>
             </a:extLst>
           </p:cNvPr>
@@ -22840,7 +22840,7 @@
           <p:cNvPr id="3" name="Uitlegvoorbeeld — niet uit het boek">
             <a:extLst xmlns:a="http://schemas.openxmlformats.org/drawingml/2006/main">
               <a:ext uri="{FF2B5EF4-FFF2-40B4-BE49-F238E27FC236}">
-                <a16:creationId xmlns:a16="http://schemas.microsoft.com/office/drawing/2014/main" id="{0FDD8D01-4B6E-418A-A8C5-D1B3B71579FC}"/>
+                <a16:creationId xmlns:a16="http://schemas.microsoft.com/office/drawing/2014/main" id="{7A5479EA-27B7-4A91-AE36-D6EF02530A9F}"/>
               </a:ext>
             </a:extLst>
           </p:cNvPr>
@@ -22897,7 +22897,7 @@
           <p:cNvPr id="4" name="8">
             <a:extLst xmlns:a="http://schemas.openxmlformats.org/drawingml/2006/main">
               <a:ext uri="{FF2B5EF4-FFF2-40B4-BE49-F238E27FC236}">
-                <a16:creationId xmlns:a16="http://schemas.microsoft.com/office/drawing/2014/main" id="{649915B3-2689-4D82-9D79-A9AD291B2F2F}"/>
+                <a16:creationId xmlns:a16="http://schemas.microsoft.com/office/drawing/2014/main" id="{F0663DDD-35EE-4E6D-85E5-42D784763B76}"/>
               </a:ext>
             </a:extLst>
           </p:cNvPr>
@@ -22954,7 +22954,7 @@
           <p:cNvPr id="5" name="Alle gevraagde kajaks worden verhuurd.">
             <a:extLst xmlns:a="http://schemas.openxmlformats.org/drawingml/2006/main">
               <a:ext uri="{FF2B5EF4-FFF2-40B4-BE49-F238E27FC236}">
-                <a16:creationId xmlns:a16="http://schemas.microsoft.com/office/drawing/2014/main" id="{29015F35-E61F-4E99-B40D-5F19A102E08A}"/>
+                <a16:creationId xmlns:a16="http://schemas.microsoft.com/office/drawing/2014/main" id="{FF082D65-5233-4059-91A2-FF11588C1587}"/>
               </a:ext>
             </a:extLst>
           </p:cNvPr>
@@ -23329,7 +23329,7 @@
           <p:cNvPr id="7" name="TO daalt met € 800 per week.">
             <a:extLst xmlns:a="http://schemas.openxmlformats.org/drawingml/2006/main">
               <a:ext uri="{FF2B5EF4-FFF2-40B4-BE49-F238E27FC236}">
-                <a16:creationId xmlns:a16="http://schemas.microsoft.com/office/drawing/2014/main" id="{6A2951EA-00EA-4B80-8304-99CF071FFE19}"/>
+                <a16:creationId xmlns:a16="http://schemas.microsoft.com/office/drawing/2014/main" id="{95A19E31-8B4E-49FE-BE91-DA4B46F230B0}"/>
               </a:ext>
             </a:extLst>
           </p:cNvPr>
@@ -23384,7 +23384,7 @@
     </p:spTree>
     <p:extLst>
       <p:ext uri="{BB962C8B-B14F-4D97-AF65-F5344CB8AC3E}">
-        <p14:creationId xmlns:p14="http://schemas.microsoft.com/office/powerpoint/2010/main" val="301340417"/>
+        <p14:creationId xmlns:p14="http://schemas.microsoft.com/office/powerpoint/2010/main" val="1263211422"/>
       </p:ext>
     </p:extLst>
   </p:cSld>
@@ -23415,7 +23415,7 @@
           <p:cNvPr id="9" name="Een relatief sterke hoeveelheidsreactie">
             <a:extLst xmlns:a="http://schemas.openxmlformats.org/drawingml/2006/main">
               <a:ext uri="{FF2B5EF4-FFF2-40B4-BE49-F238E27FC236}">
-                <a16:creationId xmlns:a16="http://schemas.microsoft.com/office/drawing/2014/main" id="{F009462F-FFA8-49C2-A141-198C4DE2060B}"/>
+                <a16:creationId xmlns:a16="http://schemas.microsoft.com/office/drawing/2014/main" id="{CB59A69A-81CB-4231-8B02-D1821D001CAF}"/>
               </a:ext>
             </a:extLst>
           </p:cNvPr>
@@ -23472,7 +23472,7 @@
           <p:cNvPr id="2" name="">
             <a:extLst xmlns:a="http://schemas.openxmlformats.org/drawingml/2006/main">
               <a:ext uri="{FF2B5EF4-FFF2-40B4-BE49-F238E27FC236}">
-                <a16:creationId xmlns:a16="http://schemas.microsoft.com/office/drawing/2014/main" id="{A69734C7-7D21-4352-8B0F-8EB1FA781D4B}"/>
+                <a16:creationId xmlns:a16="http://schemas.microsoft.com/office/drawing/2014/main" id="{F612CADC-620B-4F84-ACDA-F966518B1261}"/>
               </a:ext>
             </a:extLst>
           </p:cNvPr>
@@ -23501,7 +23501,7 @@
           <p:cNvPr id="3" name="Uitlegvoorbeeld — niet uit het boek">
             <a:extLst xmlns:a="http://schemas.openxmlformats.org/drawingml/2006/main">
               <a:ext uri="{FF2B5EF4-FFF2-40B4-BE49-F238E27FC236}">
-                <a16:creationId xmlns:a16="http://schemas.microsoft.com/office/drawing/2014/main" id="{1A45C65C-C6E9-4A64-98DF-70DF0CC8632A}"/>
+                <a16:creationId xmlns:a16="http://schemas.microsoft.com/office/drawing/2014/main" id="{5E050C57-F919-4B33-BA47-F21B083AB405}"/>
               </a:ext>
             </a:extLst>
           </p:cNvPr>
@@ -23558,7 +23558,7 @@
           <p:cNvPr id="4" name="9">
             <a:extLst xmlns:a="http://schemas.openxmlformats.org/drawingml/2006/main">
               <a:ext uri="{FF2B5EF4-FFF2-40B4-BE49-F238E27FC236}">
-                <a16:creationId xmlns:a16="http://schemas.microsoft.com/office/drawing/2014/main" id="{4D525E58-FB33-4710-AC7E-0954468921B0}"/>
+                <a16:creationId xmlns:a16="http://schemas.microsoft.com/office/drawing/2014/main" id="{01235F46-45E6-4230-8F72-78BA14448A1F}"/>
               </a:ext>
             </a:extLst>
           </p:cNvPr>
@@ -23615,7 +23615,7 @@
           <p:cNvPr id="5" name="KajakStek: € 5.000 naar € 4.200 per week">
             <a:extLst xmlns:a="http://schemas.openxmlformats.org/drawingml/2006/main">
               <a:ext uri="{FF2B5EF4-FFF2-40B4-BE49-F238E27FC236}">
-                <a16:creationId xmlns:a16="http://schemas.microsoft.com/office/drawing/2014/main" id="{0C62FBF2-6296-430B-947D-5A6A214BC833}"/>
+                <a16:creationId xmlns:a16="http://schemas.microsoft.com/office/drawing/2014/main" id="{B3599561-CA05-4101-84A7-2B7F95B9E4FC}"/>
               </a:ext>
             </a:extLst>
           </p:cNvPr>
@@ -23672,7 +23672,7 @@
           <p:cNvPr id="6" name="%ΔTO = (4.200 − 5.000) / 5.000 × 100% = −16%">
             <a:extLst xmlns:a="http://schemas.openxmlformats.org/drawingml/2006/main">
               <a:ext uri="{FF2B5EF4-FFF2-40B4-BE49-F238E27FC236}">
-                <a16:creationId xmlns:a16="http://schemas.microsoft.com/office/drawing/2014/main" id="{73F67BAA-836B-46AF-A0C6-2F55D8C0A879}"/>
+                <a16:creationId xmlns:a16="http://schemas.microsoft.com/office/drawing/2014/main" id="{F8D4ECE5-B88C-41C8-825D-2255497B935C}"/>
               </a:ext>
             </a:extLst>
           </p:cNvPr>
@@ -23900,7 +23900,7 @@
           <p:cNvPr id="8" name="Ev &lt; −1: prijselastisch. TO daalt in deze meting.">
             <a:extLst xmlns:a="http://schemas.openxmlformats.org/drawingml/2006/main">
               <a:ext uri="{FF2B5EF4-FFF2-40B4-BE49-F238E27FC236}">
-                <a16:creationId xmlns:a16="http://schemas.microsoft.com/office/drawing/2014/main" id="{286F91CB-D77C-40D0-893E-9308A9A4E4E2}"/>
+                <a16:creationId xmlns:a16="http://schemas.microsoft.com/office/drawing/2014/main" id="{BD1AE401-AD06-4F3D-850A-8E6D51BD1E4F}"/>
               </a:ext>
             </a:extLst>
           </p:cNvPr>
@@ -23955,7 +23955,7 @@
     </p:spTree>
     <p:extLst>
       <p:ext uri="{BB962C8B-B14F-4D97-AF65-F5344CB8AC3E}">
-        <p14:creationId xmlns:p14="http://schemas.microsoft.com/office/powerpoint/2010/main" val="1527736211"/>
+        <p14:creationId xmlns:p14="http://schemas.microsoft.com/office/powerpoint/2010/main" val="398715458"/>
       </p:ext>
     </p:extLst>
   </p:cSld>

--- a/Boek 2 - Kosten, opbrengsten, elasticiteit en surplus/edities/chat-2026/bronnen/H2/paragrafen/2.2.2 Elasticiteit en omzet/2.2.2 Elasticiteit en omzet – presentatie.pptx
+++ b/Boek 2 - Kosten, opbrengsten, elasticiteit en surplus/edities/chat-2026/bronnen/H2/paragrafen/2.2.2 Elasticiteit en omzet/2.2.2 Elasticiteit en omzet – presentatie.pptx
@@ -2,38 +2,38 @@
 <file path=ppt/presentation.xml><?xml version="1.0" encoding="utf-8"?>
 <p:presentation xmlns:p="http://schemas.openxmlformats.org/presentationml/2006/main">
   <p:sldMasterIdLst>
-    <p:sldMasterId xmlns:r="http://schemas.openxmlformats.org/officeDocument/2006/relationships" id="2147483648" r:id="Rc3b9954930d94cef"/>
+    <p:sldMasterId xmlns:r="http://schemas.openxmlformats.org/officeDocument/2006/relationships" id="2147483648" r:id="R053e4da0002e46f3"/>
   </p:sldMasterIdLst>
   <p:notesMasterIdLst>
-    <p:notesMasterId xmlns:r="http://schemas.openxmlformats.org/officeDocument/2006/relationships" r:id="R4f8bebd0adcd4df4"/>
+    <p:notesMasterId xmlns:r="http://schemas.openxmlformats.org/officeDocument/2006/relationships" r:id="Rdb0b3da8c46e4ebe"/>
   </p:notesMasterIdLst>
   <p:sldIdLst>
-    <p:sldId xmlns:r="http://schemas.openxmlformats.org/officeDocument/2006/relationships" id="256" r:id="R27835cb9c249462f"/>
-    <p:sldId xmlns:r="http://schemas.openxmlformats.org/officeDocument/2006/relationships" id="257" r:id="R5efed051fc0a4408"/>
-    <p:sldId xmlns:r="http://schemas.openxmlformats.org/officeDocument/2006/relationships" id="258" r:id="R9df24e88fc8d4b70"/>
-    <p:sldId xmlns:r="http://schemas.openxmlformats.org/officeDocument/2006/relationships" id="259" r:id="Re011418eae9c4bc7"/>
-    <p:sldId xmlns:r="http://schemas.openxmlformats.org/officeDocument/2006/relationships" id="260" r:id="R87073b95366641b7"/>
-    <p:sldId xmlns:r="http://schemas.openxmlformats.org/officeDocument/2006/relationships" id="261" r:id="Rd83681f8d76e4719"/>
-    <p:sldId xmlns:r="http://schemas.openxmlformats.org/officeDocument/2006/relationships" id="262" r:id="Reba66603b82c45a3"/>
-    <p:sldId xmlns:r="http://schemas.openxmlformats.org/officeDocument/2006/relationships" id="263" r:id="Rebcc65d533474a07"/>
-    <p:sldId xmlns:r="http://schemas.openxmlformats.org/officeDocument/2006/relationships" id="264" r:id="R001be7961e0944e0"/>
-    <p:sldId xmlns:r="http://schemas.openxmlformats.org/officeDocument/2006/relationships" id="265" r:id="R9b40b2d910b14e9b"/>
-    <p:sldId xmlns:r="http://schemas.openxmlformats.org/officeDocument/2006/relationships" id="266" r:id="R93a76805c513400e"/>
-    <p:sldId xmlns:r="http://schemas.openxmlformats.org/officeDocument/2006/relationships" id="267" r:id="Re9f5274ad9934e1c"/>
-    <p:sldId xmlns:r="http://schemas.openxmlformats.org/officeDocument/2006/relationships" id="268" r:id="R680342cdd0c54bb1"/>
-    <p:sldId xmlns:r="http://schemas.openxmlformats.org/officeDocument/2006/relationships" id="269" r:id="R920bd6a0baf24321"/>
-    <p:sldId xmlns:r="http://schemas.openxmlformats.org/officeDocument/2006/relationships" id="270" r:id="Rd0b04d49ec524794"/>
-    <p:sldId xmlns:r="http://schemas.openxmlformats.org/officeDocument/2006/relationships" id="271" r:id="R7de546c46d5143eb"/>
-    <p:sldId xmlns:r="http://schemas.openxmlformats.org/officeDocument/2006/relationships" id="272" r:id="Rf4491695f8844b33"/>
-    <p:sldId xmlns:r="http://schemas.openxmlformats.org/officeDocument/2006/relationships" id="273" r:id="R61f4991f910b4657"/>
-    <p:sldId xmlns:r="http://schemas.openxmlformats.org/officeDocument/2006/relationships" id="274" r:id="R2d935656aa9c441d"/>
-    <p:sldId xmlns:r="http://schemas.openxmlformats.org/officeDocument/2006/relationships" id="275" r:id="R78dd05d2924349b1"/>
-    <p:sldId xmlns:r="http://schemas.openxmlformats.org/officeDocument/2006/relationships" id="276" r:id="R52d647a98422430c"/>
-    <p:sldId xmlns:r="http://schemas.openxmlformats.org/officeDocument/2006/relationships" id="277" r:id="R23500f4cbf0e4ff6"/>
-    <p:sldId xmlns:r="http://schemas.openxmlformats.org/officeDocument/2006/relationships" id="278" r:id="R10a0fff33c7b4dd3"/>
-    <p:sldId xmlns:r="http://schemas.openxmlformats.org/officeDocument/2006/relationships" id="279" r:id="R0d3c458dda534ee0"/>
-    <p:sldId xmlns:r="http://schemas.openxmlformats.org/officeDocument/2006/relationships" id="280" r:id="Rcefae6a696104af3"/>
-    <p:sldId xmlns:r="http://schemas.openxmlformats.org/officeDocument/2006/relationships" id="281" r:id="R7205a59963e547a4"/>
+    <p:sldId xmlns:r="http://schemas.openxmlformats.org/officeDocument/2006/relationships" id="256" r:id="R7d693f6e84914918"/>
+    <p:sldId xmlns:r="http://schemas.openxmlformats.org/officeDocument/2006/relationships" id="257" r:id="R36bbc43dda374650"/>
+    <p:sldId xmlns:r="http://schemas.openxmlformats.org/officeDocument/2006/relationships" id="258" r:id="R2771cc2244b243bb"/>
+    <p:sldId xmlns:r="http://schemas.openxmlformats.org/officeDocument/2006/relationships" id="259" r:id="Rd994eea90aa8480c"/>
+    <p:sldId xmlns:r="http://schemas.openxmlformats.org/officeDocument/2006/relationships" id="260" r:id="R5032a55c09b145a7"/>
+    <p:sldId xmlns:r="http://schemas.openxmlformats.org/officeDocument/2006/relationships" id="261" r:id="Ra380116470a94a3a"/>
+    <p:sldId xmlns:r="http://schemas.openxmlformats.org/officeDocument/2006/relationships" id="262" r:id="Rc0b5b2a277744fe2"/>
+    <p:sldId xmlns:r="http://schemas.openxmlformats.org/officeDocument/2006/relationships" id="263" r:id="R78f1176df8dc4ccf"/>
+    <p:sldId xmlns:r="http://schemas.openxmlformats.org/officeDocument/2006/relationships" id="264" r:id="R57ca92c5159341ad"/>
+    <p:sldId xmlns:r="http://schemas.openxmlformats.org/officeDocument/2006/relationships" id="265" r:id="R4452275db5944abc"/>
+    <p:sldId xmlns:r="http://schemas.openxmlformats.org/officeDocument/2006/relationships" id="266" r:id="R6de3eddfca884f5a"/>
+    <p:sldId xmlns:r="http://schemas.openxmlformats.org/officeDocument/2006/relationships" id="267" r:id="R8b633775642e4693"/>
+    <p:sldId xmlns:r="http://schemas.openxmlformats.org/officeDocument/2006/relationships" id="268" r:id="R2b3e8d33941f4876"/>
+    <p:sldId xmlns:r="http://schemas.openxmlformats.org/officeDocument/2006/relationships" id="269" r:id="Rc0e3ed07c463496c"/>
+    <p:sldId xmlns:r="http://schemas.openxmlformats.org/officeDocument/2006/relationships" id="270" r:id="R2402f30a6fc84765"/>
+    <p:sldId xmlns:r="http://schemas.openxmlformats.org/officeDocument/2006/relationships" id="271" r:id="R8358ba3f2a824be5"/>
+    <p:sldId xmlns:r="http://schemas.openxmlformats.org/officeDocument/2006/relationships" id="272" r:id="Rcdc49dfd69a74962"/>
+    <p:sldId xmlns:r="http://schemas.openxmlformats.org/officeDocument/2006/relationships" id="273" r:id="R83b5af6a55cc43a2"/>
+    <p:sldId xmlns:r="http://schemas.openxmlformats.org/officeDocument/2006/relationships" id="274" r:id="R31b8fc10b45e4fd2"/>
+    <p:sldId xmlns:r="http://schemas.openxmlformats.org/officeDocument/2006/relationships" id="275" r:id="R703b6587bc484bc6"/>
+    <p:sldId xmlns:r="http://schemas.openxmlformats.org/officeDocument/2006/relationships" id="276" r:id="Recafcadbe9844eb8"/>
+    <p:sldId xmlns:r="http://schemas.openxmlformats.org/officeDocument/2006/relationships" id="277" r:id="Rdd920331d34e4ca7"/>
+    <p:sldId xmlns:r="http://schemas.openxmlformats.org/officeDocument/2006/relationships" id="278" r:id="Ra438a45bfd13438d"/>
+    <p:sldId xmlns:r="http://schemas.openxmlformats.org/officeDocument/2006/relationships" id="279" r:id="R8c153fc29ef74459"/>
+    <p:sldId xmlns:r="http://schemas.openxmlformats.org/officeDocument/2006/relationships" id="280" r:id="R245e45a18f1a49fa"/>
+    <p:sldId xmlns:r="http://schemas.openxmlformats.org/officeDocument/2006/relationships" id="281" r:id="Rc8f2261afc82412b"/>
   </p:sldIdLst>
   <p:sldSz cx="15240000" cy="8572500"/>
   <p:notesSz cx="6858000" cy="9144000"/>
@@ -480,7 +480,7 @@
           <a:p xmlns:a="http://schemas.openxmlformats.org/drawingml/2006/main">
             <a:r>
               <a:rPr sz="1400"/>
-              <a:t>Uitleg: Start met opgaven 1 en 2 op pagina 48. De basis bestaat uit allebei de begeleide opgaven 3 en 4, op pagina 48–49. Daarna volgen 5 en 6 op pagina 49 en doelopgave 7 op pagina 50. Huiswerk is 3 tot en met 7 maken en nakijken. Bonus 8 en herhaling 9–10 zijn extra. Laat deze dia staan tijdens het werken. De volledige route heeft geen gemeten lesduur; laat het huiswerk de route zo nodig afmaken.</a:t>
+              <a:t>Uitleg: Start met opgaven 1 en 2 op pagina 49. De basis bestaat uit allebei de begeleide opgaven 3 en 4, op pagina 49–50. Daarna volgen 5 en 6 op pagina 50 en doelopgave 7 op pagina 51. Huiswerk is 3 tot en met 7 maken en nakijken. Bonus 8 en herhaling 9–10 zijn extra. Laat deze dia staan tijdens het werken. De volledige route heeft geen gemeten lesduur; laat het huiswerk de route zo nodig afmaken.</a:t>
             </a:r>
           </a:p>
           <a:p xmlns:a="http://schemas.openxmlformats.org/drawingml/2006/main">
@@ -492,7 +492,7 @@
           <a:p xmlns:a="http://schemas.openxmlformats.org/drawingml/2006/main">
             <a:r>
               <a:rPr sz="1400"/>
-              <a:t>Start en terugblik: Opgave 1 gebruikt TO uit §2.1.2, dia 3, en procentuele verandering met de oude waarde als basis, zoals opgehaald in §2.2.1. Opgave 2b gebruikt het onderscheid omzet/winst uit §2.1.2, dia 4. De lokale omzetregel in opgave 2a is nieuw. Zoek de uitleg en voorwaarden op p. 45 op. Opgave 2b kan het eerdere onderscheid tussen omzet en winst ophalen. Laat leerlingen bij deze verkenning aanwijzen welke uitleg zij gebruiken en hun twijfel noteren. Verwacht de nieuwe bewerking nog niet zonder steun. Bij terugkeer naar dit overzicht vóór het basiswerk: laat leerlingen opgave 2a opnieuw proberen na de uitleg, bespreek hun redenering en geef zo nodig extra steun. Dit is een verkennende start, geen toets van al beheerste nieuwe leerstof.</a:t>
+              <a:t>Start en terugblik: Opgave 1 gebruikt TO uit §2.1.2, dia 3, en procentuele verandering met de oude waarde als basis, zoals opgehaald in §2.2.1. Opgave 2b gebruikt het onderscheid omzet/winst uit §2.1.2, dia 4. De lokale omzetregel in opgave 2a is nieuw. Zoek de uitleg en voorwaarden op p. 46 op. Opgave 2b kan het eerdere onderscheid tussen omzet en winst ophalen. Laat leerlingen bij deze verkenning aanwijzen welke uitleg zij gebruiken en hun twijfel noteren. Verwacht de nieuwe bewerking nog niet zonder steun. Bij terugkeer naar dit overzicht vóór het basiswerk: laat leerlingen opgave 2a opnieuw proberen na de uitleg, bespreek hun redenering en geef zo nodig extra steun. Dit is een verkennende start, geen toets van al beheerste nieuwe leerstof.</a:t>
             </a:r>
           </a:p>
           <a:p xmlns:a="http://schemas.openxmlformats.org/drawingml/2006/main">
@@ -516,7 +516,7 @@
           <a:p xmlns:a="http://schemas.openxmlformats.org/drawingml/2006/main">
             <a:r>
               <a:rPr sz="1400"/>
-              <a:t>Overgang: Haal de eerdere kennis op, begeleid de verkenning van 2a met p. 45 en licht daarna de doelen toe.</a:t>
+              <a:t>Overgang: Haal de eerdere kennis op, begeleid de verkenning van 2a met p. 46 en licht daarna de doelen toe.</a:t>
             </a:r>
           </a:p>
           <a:p xmlns:a="http://schemas.openxmlformats.org/drawingml/2006/main">
@@ -528,7 +528,7 @@
           <a:p xmlns:a="http://schemas.openxmlformats.org/drawingml/2006/main">
             <a:r>
               <a:rPr sz="1400"/>
-              <a:t>Bron: Leerlingenboek Boek 2, chatuitgave 2026, herziene theorie 21 september 2026, gedrukte pagina 48–50. https://github.com/meijer1973/4veco-lessen/blob/f2660032cf7e4e3bbab96cf32863d06a38bd74bc/Boek%202%20-%20Kosten%2C%20opbrengsten%2C%20elasticiteit%20en%20surplus/edities/chat-2026/boek/Boek_2_Compleet.pdf</a:t>
+              <a:t>Bron: Leerlingenboek Boek 2, chatuitgave 2026, herziene theorie 1 oktober 2026, gedrukte pagina 49–51. https://github.com/meijer1973/4veco-lessen/blob/a8940a7a79e22857a3e306a91fe923c48c63e716/Boek%202%20-%20Kosten%2C%20opbrengsten%2C%20elasticiteit%20en%20surplus/edities/chat-2026/boek/Boek_2_Compleet.pdf</a:t>
             </a:r>
           </a:p>
           <a:p xmlns:a="http://schemas.openxmlformats.org/drawingml/2006/main">
@@ -653,7 +653,7 @@
           <a:p xmlns:a="http://schemas.openxmlformats.org/drawingml/2006/main">
             <a:r>
               <a:rPr sz="1400"/>
-              <a:t>Bron: Leerlingenboek Boek 2, chatuitgave 2026, herziene theorie 21 september 2026, gedrukte pagina 45. https://github.com/meijer1973/4veco-lessen/blob/f2660032cf7e4e3bbab96cf32863d06a38bd74bc/Boek%202%20-%20Kosten%2C%20opbrengsten%2C%20elasticiteit%20en%20surplus/edities/chat-2026/boek/Boek_2_Compleet.pdf</a:t>
+              <a:t>Bron: Leerlingenboek Boek 2, chatuitgave 2026, herziene theorie 1 oktober 2026, gedrukte pagina 46. https://github.com/meijer1973/4veco-lessen/blob/a8940a7a79e22857a3e306a91fe923c48c63e716/Boek%202%20-%20Kosten%2C%20opbrengsten%2C%20elasticiteit%20en%20surplus/edities/chat-2026/boek/Boek_2_Compleet.pdf</a:t>
             </a:r>
           </a:p>
           <a:p xmlns:a="http://schemas.openxmlformats.org/drawingml/2006/main">
@@ -778,7 +778,7 @@
           <a:p xmlns:a="http://schemas.openxmlformats.org/drawingml/2006/main">
             <a:r>
               <a:rPr sz="1400"/>
-              <a:t>Bron: Zelfgemaakt uitlegvoorbeeld met eigen context en gegevens, niet uit het boek. De boekpagina’s zijn uitsluitend de bron voor de methode. Leerlingenboek Boek 2, chatuitgave 2026, herziene theorie 21 september 2026, gedrukte pagina 45, 47. https://github.com/meijer1973/4veco-lessen/blob/f2660032cf7e4e3bbab96cf32863d06a38bd74bc/Boek%202%20-%20Kosten%2C%20opbrengsten%2C%20elasticiteit%20en%20surplus/edities/chat-2026/boek/Boek_2_Compleet.pdf</a:t>
+              <a:t>Bron: Zelfgemaakt uitlegvoorbeeld met eigen context en gegevens, niet uit het boek. De boekpagina’s zijn uitsluitend de bron voor de methode. Leerlingenboek Boek 2, chatuitgave 2026, herziene theorie 1 oktober 2026, gedrukte pagina 46, 48. https://github.com/meijer1973/4veco-lessen/blob/a8940a7a79e22857a3e306a91fe923c48c63e716/Boek%202%20-%20Kosten%2C%20opbrengsten%2C%20elasticiteit%20en%20surplus/edities/chat-2026/boek/Boek_2_Compleet.pdf</a:t>
             </a:r>
           </a:p>
           <a:p xmlns:a="http://schemas.openxmlformats.org/drawingml/2006/main">
@@ -903,7 +903,7 @@
           <a:p xmlns:a="http://schemas.openxmlformats.org/drawingml/2006/main">
             <a:r>
               <a:rPr sz="1400"/>
-              <a:t>Bron: Leerlingenboek Boek 2, chatuitgave 2026, herziene theorie 21 september 2026, gedrukte pagina 44–47. https://github.com/meijer1973/4veco-lessen/blob/f2660032cf7e4e3bbab96cf32863d06a38bd74bc/Boek%202%20-%20Kosten%2C%20opbrengsten%2C%20elasticiteit%20en%20surplus/edities/chat-2026/boek/Boek_2_Compleet.pdf</a:t>
+              <a:t>Bron: Leerlingenboek Boek 2, chatuitgave 2026, herziene theorie 1 oktober 2026, gedrukte pagina 45–48. https://github.com/meijer1973/4veco-lessen/blob/a8940a7a79e22857a3e306a91fe923c48c63e716/Boek%202%20-%20Kosten%2C%20opbrengsten%2C%20elasticiteit%20en%20surplus/edities/chat-2026/boek/Boek_2_Compleet.pdf</a:t>
             </a:r>
           </a:p>
           <a:p xmlns:a="http://schemas.openxmlformats.org/drawingml/2006/main">
@@ -1028,7 +1028,7 @@
           <a:p xmlns:a="http://schemas.openxmlformats.org/drawingml/2006/main">
             <a:r>
               <a:rPr sz="1400"/>
-              <a:t>Bron: Leerlingenboek Boek 2, chatuitgave 2026, herziene theorie 21 september 2026, gedrukte pagina 45. https://github.com/meijer1973/4veco-lessen/blob/f2660032cf7e4e3bbab96cf32863d06a38bd74bc/Boek%202%20-%20Kosten%2C%20opbrengsten%2C%20elasticiteit%20en%20surplus/edities/chat-2026/boek/Boek_2_Compleet.pdf</a:t>
+              <a:t>Bron: Leerlingenboek Boek 2, chatuitgave 2026, herziene theorie 1 oktober 2026, gedrukte pagina 46. https://github.com/meijer1973/4veco-lessen/blob/a8940a7a79e22857a3e306a91fe923c48c63e716/Boek%202%20-%20Kosten%2C%20opbrengsten%2C%20elasticiteit%20en%20surplus/edities/chat-2026/boek/Boek_2_Compleet.pdf</a:t>
             </a:r>
           </a:p>
           <a:p xmlns:a="http://schemas.openxmlformats.org/drawingml/2006/main">
@@ -1153,7 +1153,7 @@
           <a:p xmlns:a="http://schemas.openxmlformats.org/drawingml/2006/main">
             <a:r>
               <a:rPr sz="1400"/>
-              <a:t>Bron: Leerlingenboek Boek 2, chatuitgave 2026, herziene theorie 21 september 2026, gedrukte pagina 45. https://github.com/meijer1973/4veco-lessen/blob/f2660032cf7e4e3bbab96cf32863d06a38bd74bc/Boek%202%20-%20Kosten%2C%20opbrengsten%2C%20elasticiteit%20en%20surplus/edities/chat-2026/boek/Boek_2_Compleet.pdf</a:t>
+              <a:t>Bron: Leerlingenboek Boek 2, chatuitgave 2026, herziene theorie 1 oktober 2026, gedrukte pagina 46. https://github.com/meijer1973/4veco-lessen/blob/a8940a7a79e22857a3e306a91fe923c48c63e716/Boek%202%20-%20Kosten%2C%20opbrengsten%2C%20elasticiteit%20en%20surplus/edities/chat-2026/boek/Boek_2_Compleet.pdf</a:t>
             </a:r>
           </a:p>
           <a:p xmlns:a="http://schemas.openxmlformats.org/drawingml/2006/main">
@@ -1242,7 +1242,7 @@
           <a:p xmlns:a="http://schemas.openxmlformats.org/drawingml/2006/main">
             <a:r>
               <a:rPr sz="1400"/>
-              <a:t>Uitleg: Start met opgaven 1 en 2 op pagina 48. De basis bestaat uit allebei de begeleide opgaven 3 en 4, op pagina 48–49. Daarna volgen 5 en 6 op pagina 49 en doelopgave 7 op pagina 50. Huiswerk is 3 tot en met 7 maken en nakijken. Bonus 8 en herhaling 9–10 zijn extra. Laat deze dia staan tijdens het werken. De volledige route heeft geen gemeten lesduur; laat het huiswerk de route zo nodig afmaken.</a:t>
+              <a:t>Uitleg: Start met opgaven 1 en 2 op pagina 49. De basis bestaat uit allebei de begeleide opgaven 3 en 4, op pagina 49–50. Daarna volgen 5 en 6 op pagina 50 en doelopgave 7 op pagina 51. Huiswerk is 3 tot en met 7 maken en nakijken. Bonus 8 en herhaling 9–10 zijn extra. Laat deze dia staan tijdens het werken. De volledige route heeft geen gemeten lesduur; laat het huiswerk de route zo nodig afmaken.</a:t>
             </a:r>
           </a:p>
           <a:p xmlns:a="http://schemas.openxmlformats.org/drawingml/2006/main">
@@ -1254,7 +1254,7 @@
           <a:p xmlns:a="http://schemas.openxmlformats.org/drawingml/2006/main">
             <a:r>
               <a:rPr sz="1400"/>
-              <a:t>Start en terugblik: Opgave 1 gebruikt TO uit §2.1.2, dia 3, en procentuele verandering met de oude waarde als basis, zoals opgehaald in §2.2.1. Opgave 2b gebruikt het onderscheid omzet/winst uit §2.1.2, dia 4. De lokale omzetregel in opgave 2a is nieuw. Zoek de uitleg en voorwaarden op p. 45 op. Opgave 2b kan het eerdere onderscheid tussen omzet en winst ophalen. Laat leerlingen bij deze verkenning aanwijzen welke uitleg zij gebruiken en hun twijfel noteren. Verwacht de nieuwe bewerking nog niet zonder steun. Bij terugkeer naar dit overzicht vóór het basiswerk: laat leerlingen opgave 2a opnieuw proberen na de uitleg, bespreek hun redenering en geef zo nodig extra steun. Dit is een verkennende start, geen toets van al beheerste nieuwe leerstof.</a:t>
+              <a:t>Start en terugblik: Opgave 1 gebruikt TO uit §2.1.2, dia 3, en procentuele verandering met de oude waarde als basis, zoals opgehaald in §2.2.1. Opgave 2b gebruikt het onderscheid omzet/winst uit §2.1.2, dia 4. De lokale omzetregel in opgave 2a is nieuw. Zoek de uitleg en voorwaarden op p. 46 op. Opgave 2b kan het eerdere onderscheid tussen omzet en winst ophalen. Laat leerlingen bij deze verkenning aanwijzen welke uitleg zij gebruiken en hun twijfel noteren. Verwacht de nieuwe bewerking nog niet zonder steun. Bij terugkeer naar dit overzicht vóór het basiswerk: laat leerlingen opgave 2a opnieuw proberen na de uitleg, bespreek hun redenering en geef zo nodig extra steun. Dit is een verkennende start, geen toets van al beheerste nieuwe leerstof.</a:t>
             </a:r>
           </a:p>
           <a:p xmlns:a="http://schemas.openxmlformats.org/drawingml/2006/main">
@@ -1290,7 +1290,7 @@
           <a:p xmlns:a="http://schemas.openxmlformats.org/drawingml/2006/main">
             <a:r>
               <a:rPr sz="1400"/>
-              <a:t>Bron: Leerlingenboek Boek 2, chatuitgave 2026, herziene theorie 21 september 2026, gedrukte pagina 48–50. https://github.com/meijer1973/4veco-lessen/blob/f2660032cf7e4e3bbab96cf32863d06a38bd74bc/Boek%202%20-%20Kosten%2C%20opbrengsten%2C%20elasticiteit%20en%20surplus/edities/chat-2026/boek/Boek_2_Compleet.pdf</a:t>
+              <a:t>Bron: Leerlingenboek Boek 2, chatuitgave 2026, herziene theorie 1 oktober 2026, gedrukte pagina 49–51. https://github.com/meijer1973/4veco-lessen/blob/a8940a7a79e22857a3e306a91fe923c48c63e716/Boek%202%20-%20Kosten%2C%20opbrengsten%2C%20elasticiteit%20en%20surplus/edities/chat-2026/boek/Boek_2_Compleet.pdf</a:t>
             </a:r>
           </a:p>
           <a:p xmlns:a="http://schemas.openxmlformats.org/drawingml/2006/main">
@@ -1415,13 +1415,13 @@
           <a:p xmlns:a="http://schemas.openxmlformats.org/drawingml/2006/main">
             <a:r>
               <a:rPr sz="1400"/>
-              <a:t>Bron: Leerlingenboek Boek 2, chatuitgave 2026, herziene theorie 21 september 2026, gedrukte pagina 50. https://github.com/meijer1973/4veco-lessen/blob/f2660032cf7e4e3bbab96cf32863d06a38bd74bc/Boek%202%20-%20Kosten%2C%20opbrengsten%2C%20elasticiteit%20en%20surplus/edities/chat-2026/boek/Boek_2_Compleet.pdf</a:t>
-            </a:r>
-          </a:p>
-          <a:p xmlns:a="http://schemas.openxmlformats.org/drawingml/2006/main">
-            <a:r>
-              <a:rPr sz="1400"/>
-              <a:t>Antwoordmodel opgave 7: https://github.com/meijer1973/4veco-lessen/blob/f2660032cf7e4e3bbab96cf32863d06a38bd74bc/Boek%202%20-%20Kosten%2C%20opbrengsten%2C%20elasticiteit%20en%20surplus/edities/chat-2026/bronnen/H2/paragrafen/2.2.2%20Elasticiteit%20en%20omzet/2.2.2%20Elasticiteit%20en%20omzet%20%E2%80%93%20antwoorden.md</a:t>
+              <a:t>Bron: Leerlingenboek Boek 2, chatuitgave 2026, herziene theorie 1 oktober 2026, gedrukte pagina 51. https://github.com/meijer1973/4veco-lessen/blob/a8940a7a79e22857a3e306a91fe923c48c63e716/Boek%202%20-%20Kosten%2C%20opbrengsten%2C%20elasticiteit%20en%20surplus/edities/chat-2026/boek/Boek_2_Compleet.pdf</a:t>
+            </a:r>
+          </a:p>
+          <a:p xmlns:a="http://schemas.openxmlformats.org/drawingml/2006/main">
+            <a:r>
+              <a:rPr sz="1400"/>
+              <a:t>Antwoordmodel opgave 7: https://github.com/meijer1973/4veco-lessen/blob/a8940a7a79e22857a3e306a91fe923c48c63e716/Boek%202%20-%20Kosten%2C%20opbrengsten%2C%20elasticiteit%20en%20surplus/edities/chat-2026/bronnen/H2/paragrafen/2.2.2%20Elasticiteit%20en%20omzet/2.2.2%20Elasticiteit%20en%20omzet%20%E2%80%93%20antwoorden.md</a:t>
             </a:r>
           </a:p>
         </p:txBody>
@@ -1540,13 +1540,13 @@
           <a:p xmlns:a="http://schemas.openxmlformats.org/drawingml/2006/main">
             <a:r>
               <a:rPr sz="1400"/>
-              <a:t>Bron: Leerlingenboek Boek 2, chatuitgave 2026, herziene theorie 21 september 2026, gedrukte pagina 50. https://github.com/meijer1973/4veco-lessen/blob/f2660032cf7e4e3bbab96cf32863d06a38bd74bc/Boek%202%20-%20Kosten%2C%20opbrengsten%2C%20elasticiteit%20en%20surplus/edities/chat-2026/boek/Boek_2_Compleet.pdf</a:t>
-            </a:r>
-          </a:p>
-          <a:p xmlns:a="http://schemas.openxmlformats.org/drawingml/2006/main">
-            <a:r>
-              <a:rPr sz="1400"/>
-              <a:t>Antwoordmodel opgave 7: https://github.com/meijer1973/4veco-lessen/blob/f2660032cf7e4e3bbab96cf32863d06a38bd74bc/Boek%202%20-%20Kosten%2C%20opbrengsten%2C%20elasticiteit%20en%20surplus/edities/chat-2026/bronnen/H2/paragrafen/2.2.2%20Elasticiteit%20en%20omzet/2.2.2%20Elasticiteit%20en%20omzet%20%E2%80%93%20antwoorden.md</a:t>
+              <a:t>Bron: Leerlingenboek Boek 2, chatuitgave 2026, herziene theorie 1 oktober 2026, gedrukte pagina 51. https://github.com/meijer1973/4veco-lessen/blob/a8940a7a79e22857a3e306a91fe923c48c63e716/Boek%202%20-%20Kosten%2C%20opbrengsten%2C%20elasticiteit%20en%20surplus/edities/chat-2026/boek/Boek_2_Compleet.pdf</a:t>
+            </a:r>
+          </a:p>
+          <a:p xmlns:a="http://schemas.openxmlformats.org/drawingml/2006/main">
+            <a:r>
+              <a:rPr sz="1400"/>
+              <a:t>Antwoordmodel opgave 7: https://github.com/meijer1973/4veco-lessen/blob/a8940a7a79e22857a3e306a91fe923c48c63e716/Boek%202%20-%20Kosten%2C%20opbrengsten%2C%20elasticiteit%20en%20surplus/edities/chat-2026/bronnen/H2/paragrafen/2.2.2%20Elasticiteit%20en%20omzet/2.2.2%20Elasticiteit%20en%20omzet%20%E2%80%93%20antwoorden.md</a:t>
             </a:r>
           </a:p>
         </p:txBody>
@@ -1665,13 +1665,13 @@
           <a:p xmlns:a="http://schemas.openxmlformats.org/drawingml/2006/main">
             <a:r>
               <a:rPr sz="1400"/>
-              <a:t>Bron: Leerlingenboek Boek 2, chatuitgave 2026, herziene theorie 21 september 2026, gedrukte pagina 50. https://github.com/meijer1973/4veco-lessen/blob/f2660032cf7e4e3bbab96cf32863d06a38bd74bc/Boek%202%20-%20Kosten%2C%20opbrengsten%2C%20elasticiteit%20en%20surplus/edities/chat-2026/boek/Boek_2_Compleet.pdf</a:t>
-            </a:r>
-          </a:p>
-          <a:p xmlns:a="http://schemas.openxmlformats.org/drawingml/2006/main">
-            <a:r>
-              <a:rPr sz="1400"/>
-              <a:t>Antwoordmodel opgave 7: https://github.com/meijer1973/4veco-lessen/blob/f2660032cf7e4e3bbab96cf32863d06a38bd74bc/Boek%202%20-%20Kosten%2C%20opbrengsten%2C%20elasticiteit%20en%20surplus/edities/chat-2026/bronnen/H2/paragrafen/2.2.2%20Elasticiteit%20en%20omzet/2.2.2%20Elasticiteit%20en%20omzet%20%E2%80%93%20antwoorden.md</a:t>
+              <a:t>Bron: Leerlingenboek Boek 2, chatuitgave 2026, herziene theorie 1 oktober 2026, gedrukte pagina 51. https://github.com/meijer1973/4veco-lessen/blob/a8940a7a79e22857a3e306a91fe923c48c63e716/Boek%202%20-%20Kosten%2C%20opbrengsten%2C%20elasticiteit%20en%20surplus/edities/chat-2026/boek/Boek_2_Compleet.pdf</a:t>
+            </a:r>
+          </a:p>
+          <a:p xmlns:a="http://schemas.openxmlformats.org/drawingml/2006/main">
+            <a:r>
+              <a:rPr sz="1400"/>
+              <a:t>Antwoordmodel opgave 7: https://github.com/meijer1973/4veco-lessen/blob/a8940a7a79e22857a3e306a91fe923c48c63e716/Boek%202%20-%20Kosten%2C%20opbrengsten%2C%20elasticiteit%20en%20surplus/edities/chat-2026/bronnen/H2/paragrafen/2.2.2%20Elasticiteit%20en%20omzet/2.2.2%20Elasticiteit%20en%20omzet%20%E2%80%93%20antwoorden.md</a:t>
             </a:r>
           </a:p>
         </p:txBody>
@@ -1790,13 +1790,13 @@
           <a:p xmlns:a="http://schemas.openxmlformats.org/drawingml/2006/main">
             <a:r>
               <a:rPr sz="1400"/>
-              <a:t>Bron: Leerlingenboek Boek 2, chatuitgave 2026, herziene theorie 21 september 2026, gedrukte pagina 50. https://github.com/meijer1973/4veco-lessen/blob/f2660032cf7e4e3bbab96cf32863d06a38bd74bc/Boek%202%20-%20Kosten%2C%20opbrengsten%2C%20elasticiteit%20en%20surplus/edities/chat-2026/boek/Boek_2_Compleet.pdf</a:t>
-            </a:r>
-          </a:p>
-          <a:p xmlns:a="http://schemas.openxmlformats.org/drawingml/2006/main">
-            <a:r>
-              <a:rPr sz="1400"/>
-              <a:t>Antwoordmodel opgave 7: https://github.com/meijer1973/4veco-lessen/blob/f2660032cf7e4e3bbab96cf32863d06a38bd74bc/Boek%202%20-%20Kosten%2C%20opbrengsten%2C%20elasticiteit%20en%20surplus/edities/chat-2026/bronnen/H2/paragrafen/2.2.2%20Elasticiteit%20en%20omzet/2.2.2%20Elasticiteit%20en%20omzet%20%E2%80%93%20antwoorden.md</a:t>
+              <a:t>Bron: Leerlingenboek Boek 2, chatuitgave 2026, herziene theorie 1 oktober 2026, gedrukte pagina 51. https://github.com/meijer1973/4veco-lessen/blob/a8940a7a79e22857a3e306a91fe923c48c63e716/Boek%202%20-%20Kosten%2C%20opbrengsten%2C%20elasticiteit%20en%20surplus/edities/chat-2026/boek/Boek_2_Compleet.pdf</a:t>
+            </a:r>
+          </a:p>
+          <a:p xmlns:a="http://schemas.openxmlformats.org/drawingml/2006/main">
+            <a:r>
+              <a:rPr sz="1400"/>
+              <a:t>Antwoordmodel opgave 7: https://github.com/meijer1973/4veco-lessen/blob/a8940a7a79e22857a3e306a91fe923c48c63e716/Boek%202%20-%20Kosten%2C%20opbrengsten%2C%20elasticiteit%20en%20surplus/edities/chat-2026/bronnen/H2/paragrafen/2.2.2%20Elasticiteit%20en%20omzet/2.2.2%20Elasticiteit%20en%20omzet%20%E2%80%93%20antwoorden.md</a:t>
             </a:r>
           </a:p>
         </p:txBody>
@@ -1915,7 +1915,7 @@
           <a:p xmlns:a="http://schemas.openxmlformats.org/drawingml/2006/main">
             <a:r>
               <a:rPr sz="1400"/>
-              <a:t>Bron: Leerlingenboek Boek 2, chatuitgave 2026, herziene theorie 21 september 2026, gedrukte pagina 44–47. https://github.com/meijer1973/4veco-lessen/blob/f2660032cf7e4e3bbab96cf32863d06a38bd74bc/Boek%202%20-%20Kosten%2C%20opbrengsten%2C%20elasticiteit%20en%20surplus/edities/chat-2026/boek/Boek_2_Compleet.pdf</a:t>
+              <a:t>Bron: Leerlingenboek Boek 2, chatuitgave 2026, herziene theorie 1 oktober 2026, gedrukte pagina 45–48. https://github.com/meijer1973/4veco-lessen/blob/a8940a7a79e22857a3e306a91fe923c48c63e716/Boek%202%20-%20Kosten%2C%20opbrengsten%2C%20elasticiteit%20en%20surplus/edities/chat-2026/boek/Boek_2_Compleet.pdf</a:t>
             </a:r>
           </a:p>
           <a:p xmlns:a="http://schemas.openxmlformats.org/drawingml/2006/main">
@@ -2040,13 +2040,13 @@
           <a:p xmlns:a="http://schemas.openxmlformats.org/drawingml/2006/main">
             <a:r>
               <a:rPr sz="1400"/>
-              <a:t>Bron: Leerlingenboek Boek 2, chatuitgave 2026, herziene theorie 21 september 2026, gedrukte pagina 50. https://github.com/meijer1973/4veco-lessen/blob/f2660032cf7e4e3bbab96cf32863d06a38bd74bc/Boek%202%20-%20Kosten%2C%20opbrengsten%2C%20elasticiteit%20en%20surplus/edities/chat-2026/boek/Boek_2_Compleet.pdf</a:t>
-            </a:r>
-          </a:p>
-          <a:p xmlns:a="http://schemas.openxmlformats.org/drawingml/2006/main">
-            <a:r>
-              <a:rPr sz="1400"/>
-              <a:t>Antwoordmodel opgave 7: https://github.com/meijer1973/4veco-lessen/blob/f2660032cf7e4e3bbab96cf32863d06a38bd74bc/Boek%202%20-%20Kosten%2C%20opbrengsten%2C%20elasticiteit%20en%20surplus/edities/chat-2026/bronnen/H2/paragrafen/2.2.2%20Elasticiteit%20en%20omzet/2.2.2%20Elasticiteit%20en%20omzet%20%E2%80%93%20antwoorden.md</a:t>
+              <a:t>Bron: Leerlingenboek Boek 2, chatuitgave 2026, herziene theorie 1 oktober 2026, gedrukte pagina 51. https://github.com/meijer1973/4veco-lessen/blob/a8940a7a79e22857a3e306a91fe923c48c63e716/Boek%202%20-%20Kosten%2C%20opbrengsten%2C%20elasticiteit%20en%20surplus/edities/chat-2026/boek/Boek_2_Compleet.pdf</a:t>
+            </a:r>
+          </a:p>
+          <a:p xmlns:a="http://schemas.openxmlformats.org/drawingml/2006/main">
+            <a:r>
+              <a:rPr sz="1400"/>
+              <a:t>Antwoordmodel opgave 7: https://github.com/meijer1973/4veco-lessen/blob/a8940a7a79e22857a3e306a91fe923c48c63e716/Boek%202%20-%20Kosten%2C%20opbrengsten%2C%20elasticiteit%20en%20surplus/edities/chat-2026/bronnen/H2/paragrafen/2.2.2%20Elasticiteit%20en%20omzet/2.2.2%20Elasticiteit%20en%20omzet%20%E2%80%93%20antwoorden.md</a:t>
             </a:r>
           </a:p>
         </p:txBody>
@@ -2165,13 +2165,13 @@
           <a:p xmlns:a="http://schemas.openxmlformats.org/drawingml/2006/main">
             <a:r>
               <a:rPr sz="1400"/>
-              <a:t>Bron: Leerlingenboek Boek 2, chatuitgave 2026, herziene theorie 21 september 2026, gedrukte pagina 50. https://github.com/meijer1973/4veco-lessen/blob/f2660032cf7e4e3bbab96cf32863d06a38bd74bc/Boek%202%20-%20Kosten%2C%20opbrengsten%2C%20elasticiteit%20en%20surplus/edities/chat-2026/boek/Boek_2_Compleet.pdf</a:t>
-            </a:r>
-          </a:p>
-          <a:p xmlns:a="http://schemas.openxmlformats.org/drawingml/2006/main">
-            <a:r>
-              <a:rPr sz="1400"/>
-              <a:t>Antwoordmodel opgave 7: https://github.com/meijer1973/4veco-lessen/blob/f2660032cf7e4e3bbab96cf32863d06a38bd74bc/Boek%202%20-%20Kosten%2C%20opbrengsten%2C%20elasticiteit%20en%20surplus/edities/chat-2026/bronnen/H2/paragrafen/2.2.2%20Elasticiteit%20en%20omzet/2.2.2%20Elasticiteit%20en%20omzet%20%E2%80%93%20antwoorden.md</a:t>
+              <a:t>Bron: Leerlingenboek Boek 2, chatuitgave 2026, herziene theorie 1 oktober 2026, gedrukte pagina 51. https://github.com/meijer1973/4veco-lessen/blob/a8940a7a79e22857a3e306a91fe923c48c63e716/Boek%202%20-%20Kosten%2C%20opbrengsten%2C%20elasticiteit%20en%20surplus/edities/chat-2026/boek/Boek_2_Compleet.pdf</a:t>
+            </a:r>
+          </a:p>
+          <a:p xmlns:a="http://schemas.openxmlformats.org/drawingml/2006/main">
+            <a:r>
+              <a:rPr sz="1400"/>
+              <a:t>Antwoordmodel opgave 7: https://github.com/meijer1973/4veco-lessen/blob/a8940a7a79e22857a3e306a91fe923c48c63e716/Boek%202%20-%20Kosten%2C%20opbrengsten%2C%20elasticiteit%20en%20surplus/edities/chat-2026/bronnen/H2/paragrafen/2.2.2%20Elasticiteit%20en%20omzet/2.2.2%20Elasticiteit%20en%20omzet%20%E2%80%93%20antwoorden.md</a:t>
             </a:r>
           </a:p>
         </p:txBody>
@@ -2290,13 +2290,13 @@
           <a:p xmlns:a="http://schemas.openxmlformats.org/drawingml/2006/main">
             <a:r>
               <a:rPr sz="1400"/>
-              <a:t>Bron: Leerlingenboek Boek 2, chatuitgave 2026, herziene theorie 21 september 2026, gedrukte pagina 50. https://github.com/meijer1973/4veco-lessen/blob/f2660032cf7e4e3bbab96cf32863d06a38bd74bc/Boek%202%20-%20Kosten%2C%20opbrengsten%2C%20elasticiteit%20en%20surplus/edities/chat-2026/boek/Boek_2_Compleet.pdf</a:t>
-            </a:r>
-          </a:p>
-          <a:p xmlns:a="http://schemas.openxmlformats.org/drawingml/2006/main">
-            <a:r>
-              <a:rPr sz="1400"/>
-              <a:t>Antwoordmodel opgave 7: https://github.com/meijer1973/4veco-lessen/blob/f2660032cf7e4e3bbab96cf32863d06a38bd74bc/Boek%202%20-%20Kosten%2C%20opbrengsten%2C%20elasticiteit%20en%20surplus/edities/chat-2026/bronnen/H2/paragrafen/2.2.2%20Elasticiteit%20en%20omzet/2.2.2%20Elasticiteit%20en%20omzet%20%E2%80%93%20antwoorden.md</a:t>
+              <a:t>Bron: Leerlingenboek Boek 2, chatuitgave 2026, herziene theorie 1 oktober 2026, gedrukte pagina 51. https://github.com/meijer1973/4veco-lessen/blob/a8940a7a79e22857a3e306a91fe923c48c63e716/Boek%202%20-%20Kosten%2C%20opbrengsten%2C%20elasticiteit%20en%20surplus/edities/chat-2026/boek/Boek_2_Compleet.pdf</a:t>
+            </a:r>
+          </a:p>
+          <a:p xmlns:a="http://schemas.openxmlformats.org/drawingml/2006/main">
+            <a:r>
+              <a:rPr sz="1400"/>
+              <a:t>Antwoordmodel opgave 7: https://github.com/meijer1973/4veco-lessen/blob/a8940a7a79e22857a3e306a91fe923c48c63e716/Boek%202%20-%20Kosten%2C%20opbrengsten%2C%20elasticiteit%20en%20surplus/edities/chat-2026/bronnen/H2/paragrafen/2.2.2%20Elasticiteit%20en%20omzet/2.2.2%20Elasticiteit%20en%20omzet%20%E2%80%93%20antwoorden.md</a:t>
             </a:r>
           </a:p>
         </p:txBody>
@@ -2415,13 +2415,13 @@
           <a:p xmlns:a="http://schemas.openxmlformats.org/drawingml/2006/main">
             <a:r>
               <a:rPr sz="1400"/>
-              <a:t>Bron: Leerlingenboek Boek 2, chatuitgave 2026, herziene theorie 21 september 2026, gedrukte pagina 50. https://github.com/meijer1973/4veco-lessen/blob/f2660032cf7e4e3bbab96cf32863d06a38bd74bc/Boek%202%20-%20Kosten%2C%20opbrengsten%2C%20elasticiteit%20en%20surplus/edities/chat-2026/boek/Boek_2_Compleet.pdf</a:t>
-            </a:r>
-          </a:p>
-          <a:p xmlns:a="http://schemas.openxmlformats.org/drawingml/2006/main">
-            <a:r>
-              <a:rPr sz="1400"/>
-              <a:t>Antwoordmodel opgave 7: https://github.com/meijer1973/4veco-lessen/blob/f2660032cf7e4e3bbab96cf32863d06a38bd74bc/Boek%202%20-%20Kosten%2C%20opbrengsten%2C%20elasticiteit%20en%20surplus/edities/chat-2026/bronnen/H2/paragrafen/2.2.2%20Elasticiteit%20en%20omzet/2.2.2%20Elasticiteit%20en%20omzet%20%E2%80%93%20antwoorden.md</a:t>
+              <a:t>Bron: Leerlingenboek Boek 2, chatuitgave 2026, herziene theorie 1 oktober 2026, gedrukte pagina 51. https://github.com/meijer1973/4veco-lessen/blob/a8940a7a79e22857a3e306a91fe923c48c63e716/Boek%202%20-%20Kosten%2C%20opbrengsten%2C%20elasticiteit%20en%20surplus/edities/chat-2026/boek/Boek_2_Compleet.pdf</a:t>
+            </a:r>
+          </a:p>
+          <a:p xmlns:a="http://schemas.openxmlformats.org/drawingml/2006/main">
+            <a:r>
+              <a:rPr sz="1400"/>
+              <a:t>Antwoordmodel opgave 7: https://github.com/meijer1973/4veco-lessen/blob/a8940a7a79e22857a3e306a91fe923c48c63e716/Boek%202%20-%20Kosten%2C%20opbrengsten%2C%20elasticiteit%20en%20surplus/edities/chat-2026/bronnen/H2/paragrafen/2.2.2%20Elasticiteit%20en%20omzet/2.2.2%20Elasticiteit%20en%20omzet%20%E2%80%93%20antwoorden.md</a:t>
             </a:r>
           </a:p>
         </p:txBody>
@@ -2540,13 +2540,13 @@
           <a:p xmlns:a="http://schemas.openxmlformats.org/drawingml/2006/main">
             <a:r>
               <a:rPr sz="1400"/>
-              <a:t>Bron: Leerlingenboek Boek 2, chatuitgave 2026, herziene theorie 21 september 2026, gedrukte pagina 50. https://github.com/meijer1973/4veco-lessen/blob/f2660032cf7e4e3bbab96cf32863d06a38bd74bc/Boek%202%20-%20Kosten%2C%20opbrengsten%2C%20elasticiteit%20en%20surplus/edities/chat-2026/boek/Boek_2_Compleet.pdf</a:t>
-            </a:r>
-          </a:p>
-          <a:p xmlns:a="http://schemas.openxmlformats.org/drawingml/2006/main">
-            <a:r>
-              <a:rPr sz="1400"/>
-              <a:t>Antwoordmodel opgave 7: https://github.com/meijer1973/4veco-lessen/blob/f2660032cf7e4e3bbab96cf32863d06a38bd74bc/Boek%202%20-%20Kosten%2C%20opbrengsten%2C%20elasticiteit%20en%20surplus/edities/chat-2026/bronnen/H2/paragrafen/2.2.2%20Elasticiteit%20en%20omzet/2.2.2%20Elasticiteit%20en%20omzet%20%E2%80%93%20antwoorden.md</a:t>
+              <a:t>Bron: Leerlingenboek Boek 2, chatuitgave 2026, herziene theorie 1 oktober 2026, gedrukte pagina 51. https://github.com/meijer1973/4veco-lessen/blob/a8940a7a79e22857a3e306a91fe923c48c63e716/Boek%202%20-%20Kosten%2C%20opbrengsten%2C%20elasticiteit%20en%20surplus/edities/chat-2026/boek/Boek_2_Compleet.pdf</a:t>
+            </a:r>
+          </a:p>
+          <a:p xmlns:a="http://schemas.openxmlformats.org/drawingml/2006/main">
+            <a:r>
+              <a:rPr sz="1400"/>
+              <a:t>Antwoordmodel opgave 7: https://github.com/meijer1973/4veco-lessen/blob/a8940a7a79e22857a3e306a91fe923c48c63e716/Boek%202%20-%20Kosten%2C%20opbrengsten%2C%20elasticiteit%20en%20surplus/edities/chat-2026/bronnen/H2/paragrafen/2.2.2%20Elasticiteit%20en%20omzet/2.2.2%20Elasticiteit%20en%20omzet%20%E2%80%93%20antwoorden.md</a:t>
             </a:r>
           </a:p>
         </p:txBody>
@@ -2665,13 +2665,13 @@
           <a:p xmlns:a="http://schemas.openxmlformats.org/drawingml/2006/main">
             <a:r>
               <a:rPr sz="1400"/>
-              <a:t>Bron: Leerlingenboek Boek 2, chatuitgave 2026, herziene theorie 21 september 2026, gedrukte pagina 50. https://github.com/meijer1973/4veco-lessen/blob/f2660032cf7e4e3bbab96cf32863d06a38bd74bc/Boek%202%20-%20Kosten%2C%20opbrengsten%2C%20elasticiteit%20en%20surplus/edities/chat-2026/boek/Boek_2_Compleet.pdf</a:t>
-            </a:r>
-          </a:p>
-          <a:p xmlns:a="http://schemas.openxmlformats.org/drawingml/2006/main">
-            <a:r>
-              <a:rPr sz="1400"/>
-              <a:t>Antwoordmodel opgave 7: https://github.com/meijer1973/4veco-lessen/blob/f2660032cf7e4e3bbab96cf32863d06a38bd74bc/Boek%202%20-%20Kosten%2C%20opbrengsten%2C%20elasticiteit%20en%20surplus/edities/chat-2026/bronnen/H2/paragrafen/2.2.2%20Elasticiteit%20en%20omzet/2.2.2%20Elasticiteit%20en%20omzet%20%E2%80%93%20antwoorden.md</a:t>
+              <a:t>Bron: Leerlingenboek Boek 2, chatuitgave 2026, herziene theorie 1 oktober 2026, gedrukte pagina 51. https://github.com/meijer1973/4veco-lessen/blob/a8940a7a79e22857a3e306a91fe923c48c63e716/Boek%202%20-%20Kosten%2C%20opbrengsten%2C%20elasticiteit%20en%20surplus/edities/chat-2026/boek/Boek_2_Compleet.pdf</a:t>
+            </a:r>
+          </a:p>
+          <a:p xmlns:a="http://schemas.openxmlformats.org/drawingml/2006/main">
+            <a:r>
+              <a:rPr sz="1400"/>
+              <a:t>Antwoordmodel opgave 7: https://github.com/meijer1973/4veco-lessen/blob/a8940a7a79e22857a3e306a91fe923c48c63e716/Boek%202%20-%20Kosten%2C%20opbrengsten%2C%20elasticiteit%20en%20surplus/edities/chat-2026/bronnen/H2/paragrafen/2.2.2%20Elasticiteit%20en%20omzet/2.2.2%20Elasticiteit%20en%20omzet%20%E2%80%93%20antwoorden.md</a:t>
             </a:r>
           </a:p>
         </p:txBody>
@@ -2754,7 +2754,7 @@
           <a:p xmlns:a="http://schemas.openxmlformats.org/drawingml/2006/main">
             <a:r>
               <a:rPr sz="1400"/>
-              <a:t>Uitleg: Start met opgaven 1 en 2 op pagina 48. De basis bestaat uit allebei de begeleide opgaven 3 en 4, op pagina 48–49. Daarna volgen 5 en 6 op pagina 49 en doelopgave 7 op pagina 50. Huiswerk is 3 tot en met 7 maken en nakijken. Bonus 8 en herhaling 9–10 zijn extra. Laat deze dia staan tijdens het werken. De volledige route heeft geen gemeten lesduur; laat het huiswerk de route zo nodig afmaken.</a:t>
+              <a:t>Uitleg: Start met opgaven 1 en 2 op pagina 49. De basis bestaat uit allebei de begeleide opgaven 3 en 4, op pagina 49–50. Daarna volgen 5 en 6 op pagina 50 en doelopgave 7 op pagina 51. Huiswerk is 3 tot en met 7 maken en nakijken. Bonus 8 en herhaling 9–10 zijn extra. Laat deze dia staan tijdens het werken. De volledige route heeft geen gemeten lesduur; laat het huiswerk de route zo nodig afmaken.</a:t>
             </a:r>
           </a:p>
           <a:p xmlns:a="http://schemas.openxmlformats.org/drawingml/2006/main">
@@ -2766,7 +2766,7 @@
           <a:p xmlns:a="http://schemas.openxmlformats.org/drawingml/2006/main">
             <a:r>
               <a:rPr sz="1400"/>
-              <a:t>Start en terugblik: Opgave 1 gebruikt TO uit §2.1.2, dia 3, en procentuele verandering met de oude waarde als basis, zoals opgehaald in §2.2.1. Opgave 2b gebruikt het onderscheid omzet/winst uit §2.1.2, dia 4. De lokale omzetregel in opgave 2a is nieuw. Zoek de uitleg en voorwaarden op p. 45 op. Opgave 2b kan het eerdere onderscheid tussen omzet en winst ophalen. Laat leerlingen bij deze verkenning aanwijzen welke uitleg zij gebruiken en hun twijfel noteren. Verwacht de nieuwe bewerking nog niet zonder steun. Bij terugkeer naar dit overzicht vóór het basiswerk: laat leerlingen opgave 2a opnieuw proberen na de uitleg, bespreek hun redenering en geef zo nodig extra steun. Dit is een verkennende start, geen toets van al beheerste nieuwe leerstof.</a:t>
+              <a:t>Start en terugblik: Opgave 1 gebruikt TO uit §2.1.2, dia 3, en procentuele verandering met de oude waarde als basis, zoals opgehaald in §2.2.1. Opgave 2b gebruikt het onderscheid omzet/winst uit §2.1.2, dia 4. De lokale omzetregel in opgave 2a is nieuw. Zoek de uitleg en voorwaarden op p. 46 op. Opgave 2b kan het eerdere onderscheid tussen omzet en winst ophalen. Laat leerlingen bij deze verkenning aanwijzen welke uitleg zij gebruiken en hun twijfel noteren. Verwacht de nieuwe bewerking nog niet zonder steun. Bij terugkeer naar dit overzicht vóór het basiswerk: laat leerlingen opgave 2a opnieuw proberen na de uitleg, bespreek hun redenering en geef zo nodig extra steun. Dit is een verkennende start, geen toets van al beheerste nieuwe leerstof.</a:t>
             </a:r>
           </a:p>
           <a:p xmlns:a="http://schemas.openxmlformats.org/drawingml/2006/main">
@@ -2802,7 +2802,7 @@
           <a:p xmlns:a="http://schemas.openxmlformats.org/drawingml/2006/main">
             <a:r>
               <a:rPr sz="1400"/>
-              <a:t>Bron: Leerlingenboek Boek 2, chatuitgave 2026, herziene theorie 21 september 2026, gedrukte pagina 48–50. https://github.com/meijer1973/4veco-lessen/blob/f2660032cf7e4e3bbab96cf32863d06a38bd74bc/Boek%202%20-%20Kosten%2C%20opbrengsten%2C%20elasticiteit%20en%20surplus/edities/chat-2026/boek/Boek_2_Compleet.pdf</a:t>
+              <a:t>Bron: Leerlingenboek Boek 2, chatuitgave 2026, herziene theorie 1 oktober 2026, gedrukte pagina 49–51. https://github.com/meijer1973/4veco-lessen/blob/a8940a7a79e22857a3e306a91fe923c48c63e716/Boek%202%20-%20Kosten%2C%20opbrengsten%2C%20elasticiteit%20en%20surplus/edities/chat-2026/boek/Boek_2_Compleet.pdf</a:t>
             </a:r>
           </a:p>
           <a:p xmlns:a="http://schemas.openxmlformats.org/drawingml/2006/main">
@@ -2927,7 +2927,7 @@
           <a:p xmlns:a="http://schemas.openxmlformats.org/drawingml/2006/main">
             <a:r>
               <a:rPr sz="1400"/>
-              <a:t>Bron: Zelfgemaakt uitlegvoorbeeld met eigen context en gegevens, niet uit het boek. De boekpagina’s zijn uitsluitend de bron voor de methode. Leerlingenboek Boek 2, chatuitgave 2026, herziene theorie 21 september 2026, gedrukte pagina 44, 46. https://github.com/meijer1973/4veco-lessen/blob/f2660032cf7e4e3bbab96cf32863d06a38bd74bc/Boek%202%20-%20Kosten%2C%20opbrengsten%2C%20elasticiteit%20en%20surplus/edities/chat-2026/boek/Boek_2_Compleet.pdf</a:t>
+              <a:t>Bron: Zelfgemaakt uitlegvoorbeeld met eigen context en gegevens, niet uit het boek. De boekpagina’s zijn uitsluitend de bron voor de methode. Leerlingenboek Boek 2, chatuitgave 2026, herziene theorie 1 oktober 2026, gedrukte pagina 45, 47. https://github.com/meijer1973/4veco-lessen/blob/a8940a7a79e22857a3e306a91fe923c48c63e716/Boek%202%20-%20Kosten%2C%20opbrengsten%2C%20elasticiteit%20en%20surplus/edities/chat-2026/boek/Boek_2_Compleet.pdf</a:t>
             </a:r>
           </a:p>
           <a:p xmlns:a="http://schemas.openxmlformats.org/drawingml/2006/main">
@@ -3052,7 +3052,7 @@
           <a:p xmlns:a="http://schemas.openxmlformats.org/drawingml/2006/main">
             <a:r>
               <a:rPr sz="1400"/>
-              <a:t>Bron: Zelfgemaakt uitlegvoorbeeld met eigen context en gegevens, niet uit het boek. De boekpagina’s zijn uitsluitend de bron voor de methode. Leerlingenboek Boek 2, chatuitgave 2026, herziene theorie 21 september 2026, gedrukte pagina 44. https://github.com/meijer1973/4veco-lessen/blob/f2660032cf7e4e3bbab96cf32863d06a38bd74bc/Boek%202%20-%20Kosten%2C%20opbrengsten%2C%20elasticiteit%20en%20surplus/edities/chat-2026/boek/Boek_2_Compleet.pdf</a:t>
+              <a:t>Bron: Zelfgemaakt uitlegvoorbeeld met eigen context en gegevens, niet uit het boek. De boekpagina’s zijn uitsluitend de bron voor de methode. Leerlingenboek Boek 2, chatuitgave 2026, herziene theorie 1 oktober 2026, gedrukte pagina 45. https://github.com/meijer1973/4veco-lessen/blob/a8940a7a79e22857a3e306a91fe923c48c63e716/Boek%202%20-%20Kosten%2C%20opbrengsten%2C%20elasticiteit%20en%20surplus/edities/chat-2026/boek/Boek_2_Compleet.pdf</a:t>
             </a:r>
           </a:p>
           <a:p xmlns:a="http://schemas.openxmlformats.org/drawingml/2006/main">
@@ -3177,7 +3177,7 @@
           <a:p xmlns:a="http://schemas.openxmlformats.org/drawingml/2006/main">
             <a:r>
               <a:rPr sz="1400"/>
-              <a:t>Bron: Zelfgemaakt uitlegvoorbeeld met eigen context en gegevens, niet uit het boek. De boekpagina’s zijn uitsluitend de bron voor de methode. Leerlingenboek Boek 2, chatuitgave 2026, herziene theorie 21 september 2026, gedrukte pagina 44. https://github.com/meijer1973/4veco-lessen/blob/f2660032cf7e4e3bbab96cf32863d06a38bd74bc/Boek%202%20-%20Kosten%2C%20opbrengsten%2C%20elasticiteit%20en%20surplus/edities/chat-2026/boek/Boek_2_Compleet.pdf</a:t>
+              <a:t>Bron: Zelfgemaakt uitlegvoorbeeld met eigen context en gegevens, niet uit het boek. De boekpagina’s zijn uitsluitend de bron voor de methode. Leerlingenboek Boek 2, chatuitgave 2026, herziene theorie 1 oktober 2026, gedrukte pagina 45. https://github.com/meijer1973/4veco-lessen/blob/a8940a7a79e22857a3e306a91fe923c48c63e716/Boek%202%20-%20Kosten%2C%20opbrengsten%2C%20elasticiteit%20en%20surplus/edities/chat-2026/boek/Boek_2_Compleet.pdf</a:t>
             </a:r>
           </a:p>
           <a:p xmlns:a="http://schemas.openxmlformats.org/drawingml/2006/main">
@@ -3302,7 +3302,7 @@
           <a:p xmlns:a="http://schemas.openxmlformats.org/drawingml/2006/main">
             <a:r>
               <a:rPr sz="1400"/>
-              <a:t>Bron: Zelfgemaakt uitlegvoorbeeld met eigen context en gegevens, niet uit het boek. De boekpagina’s zijn uitsluitend de bron voor de methode. Leerlingenboek Boek 2, chatuitgave 2026, herziene theorie 21 september 2026, gedrukte pagina 46. https://github.com/meijer1973/4veco-lessen/blob/f2660032cf7e4e3bbab96cf32863d06a38bd74bc/Boek%202%20-%20Kosten%2C%20opbrengsten%2C%20elasticiteit%20en%20surplus/edities/chat-2026/boek/Boek_2_Compleet.pdf</a:t>
+              <a:t>Bron: Zelfgemaakt uitlegvoorbeeld met eigen context en gegevens, niet uit het boek. De boekpagina’s zijn uitsluitend de bron voor de methode. Leerlingenboek Boek 2, chatuitgave 2026, herziene theorie 1 oktober 2026, gedrukte pagina 47. https://github.com/meijer1973/4veco-lessen/blob/a8940a7a79e22857a3e306a91fe923c48c63e716/Boek%202%20-%20Kosten%2C%20opbrengsten%2C%20elasticiteit%20en%20surplus/edities/chat-2026/boek/Boek_2_Compleet.pdf</a:t>
             </a:r>
           </a:p>
           <a:p xmlns:a="http://schemas.openxmlformats.org/drawingml/2006/main">
@@ -3427,7 +3427,7 @@
           <a:p xmlns:a="http://schemas.openxmlformats.org/drawingml/2006/main">
             <a:r>
               <a:rPr sz="1400"/>
-              <a:t>Bron: Zelfgemaakt uitlegvoorbeeld met eigen context en gegevens, niet uit het boek. De boekpagina’s zijn uitsluitend de bron voor de methode. Leerlingenboek Boek 2, chatuitgave 2026, herziene theorie 21 september 2026, gedrukte pagina 45–46. https://github.com/meijer1973/4veco-lessen/blob/f2660032cf7e4e3bbab96cf32863d06a38bd74bc/Boek%202%20-%20Kosten%2C%20opbrengsten%2C%20elasticiteit%20en%20surplus/edities/chat-2026/boek/Boek_2_Compleet.pdf</a:t>
+              <a:t>Bron: Zelfgemaakt uitlegvoorbeeld met eigen context en gegevens, niet uit het boek. De boekpagina’s zijn uitsluitend de bron voor de methode. Leerlingenboek Boek 2, chatuitgave 2026, herziene theorie 1 oktober 2026, gedrukte pagina 46–47. https://github.com/meijer1973/4veco-lessen/blob/a8940a7a79e22857a3e306a91fe923c48c63e716/Boek%202%20-%20Kosten%2C%20opbrengsten%2C%20elasticiteit%20en%20surplus/edities/chat-2026/boek/Boek_2_Compleet.pdf</a:t>
             </a:r>
           </a:p>
           <a:p xmlns:a="http://schemas.openxmlformats.org/drawingml/2006/main">
@@ -3552,7 +3552,7 @@
           <a:p xmlns:a="http://schemas.openxmlformats.org/drawingml/2006/main">
             <a:r>
               <a:rPr sz="1400"/>
-              <a:t>Bron: Zelfgemaakt uitlegvoorbeeld met eigen context en gegevens, niet uit het boek. De boekpagina’s zijn uitsluitend de bron voor de methode. Leerlingenboek Boek 2, chatuitgave 2026, herziene theorie 21 september 2026, gedrukte pagina 44, 46–47. https://github.com/meijer1973/4veco-lessen/blob/f2660032cf7e4e3bbab96cf32863d06a38bd74bc/Boek%202%20-%20Kosten%2C%20opbrengsten%2C%20elasticiteit%20en%20surplus/edities/chat-2026/boek/Boek_2_Compleet.pdf</a:t>
+              <a:t>Bron: Zelfgemaakt uitlegvoorbeeld met eigen context en gegevens, niet uit het boek. De boekpagina’s zijn uitsluitend de bron voor de methode. Leerlingenboek Boek 2, chatuitgave 2026, herziene theorie 1 oktober 2026, gedrukte pagina 45, 47–48. https://github.com/meijer1973/4veco-lessen/blob/a8940a7a79e22857a3e306a91fe923c48c63e716/Boek%202%20-%20Kosten%2C%20opbrengsten%2C%20elasticiteit%20en%20surplus/edities/chat-2026/boek/Boek_2_Compleet.pdf</a:t>
             </a:r>
           </a:p>
           <a:p xmlns:a="http://schemas.openxmlformats.org/drawingml/2006/main">
@@ -3677,7 +3677,7 @@
           <a:p xmlns:a="http://schemas.openxmlformats.org/drawingml/2006/main">
             <a:r>
               <a:rPr sz="1400"/>
-              <a:t>Bron: Zelfgemaakt uitlegvoorbeeld met eigen context en gegevens, niet uit het boek. De boekpagina’s zijn uitsluitend de bron voor de methode. Leerlingenboek Boek 2, chatuitgave 2026, herziene theorie 21 september 2026, gedrukte pagina 45–47. https://github.com/meijer1973/4veco-lessen/blob/f2660032cf7e4e3bbab96cf32863d06a38bd74bc/Boek%202%20-%20Kosten%2C%20opbrengsten%2C%20elasticiteit%20en%20surplus/edities/chat-2026/boek/Boek_2_Compleet.pdf</a:t>
+              <a:t>Bron: Zelfgemaakt uitlegvoorbeeld met eigen context en gegevens, niet uit het boek. De boekpagina’s zijn uitsluitend de bron voor de methode. Leerlingenboek Boek 2, chatuitgave 2026, herziene theorie 1 oktober 2026, gedrukte pagina 46–48. https://github.com/meijer1973/4veco-lessen/blob/a8940a7a79e22857a3e306a91fe923c48c63e716/Boek%202%20-%20Kosten%2C%20opbrengsten%2C%20elasticiteit%20en%20surplus/edities/chat-2026/boek/Boek_2_Compleet.pdf</a:t>
             </a:r>
           </a:p>
           <a:p xmlns:a="http://schemas.openxmlformats.org/drawingml/2006/main">
@@ -3751,7 +3751,7 @@
   </p:cSld>
   <p:clrMap bg1="lt1" tx1="dk1" bg2="lt2" tx2="dk2" accent1="accent1" accent2="accent2" accent3="accent3" accent4="accent4" accent5="accent5" accent6="accent6" hlink="hlink" folHlink="folHlink"/>
   <p:sldLayoutIdLst>
-    <p:sldLayoutId xmlns:r="http://schemas.openxmlformats.org/officeDocument/2006/relationships" id="2147483649" r:id="R70587c291e254d50"/>
+    <p:sldLayoutId xmlns:r="http://schemas.openxmlformats.org/officeDocument/2006/relationships" id="2147483649" r:id="Rd927b4dced6b43cc"/>
   </p:sldLayoutIdLst>
   <p:txStyles>
     <p:titleStyle>
@@ -4926,7 +4926,7 @@
           <p:cNvPr id="29" name="Deze les: §2.2.2 Elasticiteit en omzet">
             <a:extLst xmlns:a="http://schemas.openxmlformats.org/drawingml/2006/main">
               <a:ext uri="{FF2B5EF4-FFF2-40B4-BE49-F238E27FC236}">
-                <a16:creationId xmlns:a16="http://schemas.microsoft.com/office/drawing/2014/main" id="{963CEA79-26B9-41F5-98A1-4BFC2F73AD85}"/>
+                <a16:creationId xmlns:a16="http://schemas.microsoft.com/office/drawing/2014/main" id="{B9C1101F-5BDB-4433-BC90-50868F6962A4}"/>
               </a:ext>
             </a:extLst>
           </p:cNvPr>
@@ -4983,7 +4983,7 @@
           <p:cNvPr id="2" name="">
             <a:extLst xmlns:a="http://schemas.openxmlformats.org/drawingml/2006/main">
               <a:ext uri="{FF2B5EF4-FFF2-40B4-BE49-F238E27FC236}">
-                <a16:creationId xmlns:a16="http://schemas.microsoft.com/office/drawing/2014/main" id="{EEF71EAA-3515-467B-ABC2-DA6E5F938A34}"/>
+                <a16:creationId xmlns:a16="http://schemas.microsoft.com/office/drawing/2014/main" id="{E0D77962-EC3C-4B57-B5DC-9530905BEE03}"/>
               </a:ext>
             </a:extLst>
           </p:cNvPr>
@@ -5012,7 +5012,7 @@
           <p:cNvPr id="3" name="§2.2.2 Elasticiteit en omzet">
             <a:extLst xmlns:a="http://schemas.openxmlformats.org/drawingml/2006/main">
               <a:ext uri="{FF2B5EF4-FFF2-40B4-BE49-F238E27FC236}">
-                <a16:creationId xmlns:a16="http://schemas.microsoft.com/office/drawing/2014/main" id="{01334B25-9965-4BD1-89C3-29E7CCAD6B5B}"/>
+                <a16:creationId xmlns:a16="http://schemas.microsoft.com/office/drawing/2014/main" id="{AD6ED949-0AE4-4B0E-9ED9-39F950F87A53}"/>
               </a:ext>
             </a:extLst>
           </p:cNvPr>
@@ -5069,7 +5069,7 @@
           <p:cNvPr id="4" name="1">
             <a:extLst xmlns:a="http://schemas.openxmlformats.org/drawingml/2006/main">
               <a:ext uri="{FF2B5EF4-FFF2-40B4-BE49-F238E27FC236}">
-                <a16:creationId xmlns:a16="http://schemas.microsoft.com/office/drawing/2014/main" id="{6D3D366A-AA6B-4D54-915C-A634E3115A4C}"/>
+                <a16:creationId xmlns:a16="http://schemas.microsoft.com/office/drawing/2014/main" id="{EC2455CE-404F-44EC-BD71-19715D40E156}"/>
               </a:ext>
             </a:extLst>
           </p:cNvPr>
@@ -5126,7 +5126,7 @@
           <p:cNvPr id="5" name="phase">
             <a:extLst xmlns:a="http://schemas.openxmlformats.org/drawingml/2006/main">
               <a:ext uri="{FF2B5EF4-FFF2-40B4-BE49-F238E27FC236}">
-                <a16:creationId xmlns:a16="http://schemas.microsoft.com/office/drawing/2014/main" id="{F5267D0C-9B48-45F2-AF76-2FAD0A8DFC07}"/>
+                <a16:creationId xmlns:a16="http://schemas.microsoft.com/office/drawing/2014/main" id="{07419EEA-A182-4DCD-A345-A2D30D5850C7}"/>
               </a:ext>
             </a:extLst>
           </p:cNvPr>
@@ -5183,7 +5183,7 @@
           <p:cNvPr id="6" name="Lesroute">
             <a:extLst xmlns:a="http://schemas.openxmlformats.org/drawingml/2006/main">
               <a:ext uri="{FF2B5EF4-FFF2-40B4-BE49-F238E27FC236}">
-                <a16:creationId xmlns:a16="http://schemas.microsoft.com/office/drawing/2014/main" id="{A0EC28C5-A1DD-4339-8A47-9C14E4A3CB7A}"/>
+                <a16:creationId xmlns:a16="http://schemas.microsoft.com/office/drawing/2014/main" id="{F21C9320-BB29-48DA-AC4F-F1B926646ACA}"/>
               </a:ext>
             </a:extLst>
           </p:cNvPr>
@@ -5240,7 +5240,7 @@
           <p:cNvPr id="7" name="route-number-1">
             <a:extLst xmlns:a="http://schemas.openxmlformats.org/drawingml/2006/main">
               <a:ext uri="{FF2B5EF4-FFF2-40B4-BE49-F238E27FC236}">
-                <a16:creationId xmlns:a16="http://schemas.microsoft.com/office/drawing/2014/main" id="{46BDE59F-F6E3-402D-A345-779141BC4358}"/>
+                <a16:creationId xmlns:a16="http://schemas.microsoft.com/office/drawing/2014/main" id="{1B71F080-EAB4-4861-A123-566B0EEF08AA}"/>
               </a:ext>
             </a:extLst>
           </p:cNvPr>
@@ -5297,7 +5297,7 @@
           <p:cNvPr id="8" name="route-1">
             <a:extLst xmlns:a="http://schemas.openxmlformats.org/drawingml/2006/main">
               <a:ext uri="{FF2B5EF4-FFF2-40B4-BE49-F238E27FC236}">
-                <a16:creationId xmlns:a16="http://schemas.microsoft.com/office/drawing/2014/main" id="{31638BCE-A9BD-48B0-972E-A56AE0BC6ACC}"/>
+                <a16:creationId xmlns:a16="http://schemas.microsoft.com/office/drawing/2014/main" id="{F9A004DB-9F90-4292-AA1E-AF6E042F580B}"/>
               </a:ext>
             </a:extLst>
           </p:cNvPr>
@@ -5354,7 +5354,7 @@
           <p:cNvPr id="9" name="route-number-2">
             <a:extLst xmlns:a="http://schemas.openxmlformats.org/drawingml/2006/main">
               <a:ext uri="{FF2B5EF4-FFF2-40B4-BE49-F238E27FC236}">
-                <a16:creationId xmlns:a16="http://schemas.microsoft.com/office/drawing/2014/main" id="{9B6E9CBE-4704-4915-A0AC-8AFA5C7F3E3C}"/>
+                <a16:creationId xmlns:a16="http://schemas.microsoft.com/office/drawing/2014/main" id="{6B55941F-055F-4812-9F2E-67C1FC62F740}"/>
               </a:ext>
             </a:extLst>
           </p:cNvPr>
@@ -5411,7 +5411,7 @@
           <p:cNvPr id="10" name="route-2">
             <a:extLst xmlns:a="http://schemas.openxmlformats.org/drawingml/2006/main">
               <a:ext uri="{FF2B5EF4-FFF2-40B4-BE49-F238E27FC236}">
-                <a16:creationId xmlns:a16="http://schemas.microsoft.com/office/drawing/2014/main" id="{BBA47777-F01F-451F-8268-8CACC1A846D9}"/>
+                <a16:creationId xmlns:a16="http://schemas.microsoft.com/office/drawing/2014/main" id="{5E52415A-71C6-4794-BC45-A29AB8EAC9A7}"/>
               </a:ext>
             </a:extLst>
           </p:cNvPr>
@@ -5468,7 +5468,7 @@
           <p:cNvPr id="11" name="route-number-3">
             <a:extLst xmlns:a="http://schemas.openxmlformats.org/drawingml/2006/main">
               <a:ext uri="{FF2B5EF4-FFF2-40B4-BE49-F238E27FC236}">
-                <a16:creationId xmlns:a16="http://schemas.microsoft.com/office/drawing/2014/main" id="{1CC7234B-D187-4329-BD10-F1A0C8F6C9AE}"/>
+                <a16:creationId xmlns:a16="http://schemas.microsoft.com/office/drawing/2014/main" id="{5FD6D913-B842-4123-ACE5-4E2CFFFA7AB9}"/>
               </a:ext>
             </a:extLst>
           </p:cNvPr>
@@ -5525,7 +5525,7 @@
           <p:cNvPr id="12" name="route-3">
             <a:extLst xmlns:a="http://schemas.openxmlformats.org/drawingml/2006/main">
               <a:ext uri="{FF2B5EF4-FFF2-40B4-BE49-F238E27FC236}">
-                <a16:creationId xmlns:a16="http://schemas.microsoft.com/office/drawing/2014/main" id="{BABDE710-AA79-41A4-A72D-8E741FEA1BE0}"/>
+                <a16:creationId xmlns:a16="http://schemas.microsoft.com/office/drawing/2014/main" id="{C8C9DA2E-417B-49CE-B6E6-2483368C82EF}"/>
               </a:ext>
             </a:extLst>
           </p:cNvPr>
@@ -5582,7 +5582,7 @@
           <p:cNvPr id="13" name="route-number-4">
             <a:extLst xmlns:a="http://schemas.openxmlformats.org/drawingml/2006/main">
               <a:ext uri="{FF2B5EF4-FFF2-40B4-BE49-F238E27FC236}">
-                <a16:creationId xmlns:a16="http://schemas.microsoft.com/office/drawing/2014/main" id="{C8201255-50E2-4843-A97C-9DB62DDF2854}"/>
+                <a16:creationId xmlns:a16="http://schemas.microsoft.com/office/drawing/2014/main" id="{D4985BE9-9191-4636-ABB4-995B780E54C1}"/>
               </a:ext>
             </a:extLst>
           </p:cNvPr>
@@ -5639,7 +5639,7 @@
           <p:cNvPr id="14" name="route-4">
             <a:extLst xmlns:a="http://schemas.openxmlformats.org/drawingml/2006/main">
               <a:ext uri="{FF2B5EF4-FFF2-40B4-BE49-F238E27FC236}">
-                <a16:creationId xmlns:a16="http://schemas.microsoft.com/office/drawing/2014/main" id="{E66B20F0-3126-45AA-860B-9C5C118A9B7D}"/>
+                <a16:creationId xmlns:a16="http://schemas.microsoft.com/office/drawing/2014/main" id="{F60EFC3C-F8AA-46C3-920A-D513ADA29900}"/>
               </a:ext>
             </a:extLst>
           </p:cNvPr>
@@ -5696,7 +5696,7 @@
           <p:cNvPr id="15" name="route-number-5">
             <a:extLst xmlns:a="http://schemas.openxmlformats.org/drawingml/2006/main">
               <a:ext uri="{FF2B5EF4-FFF2-40B4-BE49-F238E27FC236}">
-                <a16:creationId xmlns:a16="http://schemas.microsoft.com/office/drawing/2014/main" id="{FC3851AD-C3C5-4226-92A7-9ADFBE40052E}"/>
+                <a16:creationId xmlns:a16="http://schemas.microsoft.com/office/drawing/2014/main" id="{1926A4BE-7785-4E0E-93D7-A9E93AC0D7E3}"/>
               </a:ext>
             </a:extLst>
           </p:cNvPr>
@@ -5753,7 +5753,7 @@
           <p:cNvPr id="16" name="route-5">
             <a:extLst xmlns:a="http://schemas.openxmlformats.org/drawingml/2006/main">
               <a:ext uri="{FF2B5EF4-FFF2-40B4-BE49-F238E27FC236}">
-                <a16:creationId xmlns:a16="http://schemas.microsoft.com/office/drawing/2014/main" id="{6F89881C-2F8B-417C-B9A9-8514F7FA415F}"/>
+                <a16:creationId xmlns:a16="http://schemas.microsoft.com/office/drawing/2014/main" id="{8A2E163A-3FFE-4A16-B4FA-104EAC6B15F1}"/>
               </a:ext>
             </a:extLst>
           </p:cNvPr>
@@ -5810,7 +5810,7 @@
           <p:cNvPr id="17" name="route-number-6">
             <a:extLst xmlns:a="http://schemas.openxmlformats.org/drawingml/2006/main">
               <a:ext uri="{FF2B5EF4-FFF2-40B4-BE49-F238E27FC236}">
-                <a16:creationId xmlns:a16="http://schemas.microsoft.com/office/drawing/2014/main" id="{DA6B610B-30B3-40D7-931F-D9825E7FDA85}"/>
+                <a16:creationId xmlns:a16="http://schemas.microsoft.com/office/drawing/2014/main" id="{3EC7C0EE-FB44-4E99-8389-14FDA751B57C}"/>
               </a:ext>
             </a:extLst>
           </p:cNvPr>
@@ -5867,7 +5867,7 @@
           <p:cNvPr id="18" name="route-6">
             <a:extLst xmlns:a="http://schemas.openxmlformats.org/drawingml/2006/main">
               <a:ext uri="{FF2B5EF4-FFF2-40B4-BE49-F238E27FC236}">
-                <a16:creationId xmlns:a16="http://schemas.microsoft.com/office/drawing/2014/main" id="{87B25FF4-FC7C-433E-A721-92EDEDA604AD}"/>
+                <a16:creationId xmlns:a16="http://schemas.microsoft.com/office/drawing/2014/main" id="{64CDAB7C-BA8D-44FE-8AD8-EC9FF4D43D31}"/>
               </a:ext>
             </a:extLst>
           </p:cNvPr>
@@ -5924,7 +5924,7 @@
           <p:cNvPr id="19" name="route-number-7">
             <a:extLst xmlns:a="http://schemas.openxmlformats.org/drawingml/2006/main">
               <a:ext uri="{FF2B5EF4-FFF2-40B4-BE49-F238E27FC236}">
-                <a16:creationId xmlns:a16="http://schemas.microsoft.com/office/drawing/2014/main" id="{24B71BAB-A651-438C-A92E-C86B72F1A0E7}"/>
+                <a16:creationId xmlns:a16="http://schemas.microsoft.com/office/drawing/2014/main" id="{1B3916BA-7230-432A-BECE-6675193C0317}"/>
               </a:ext>
             </a:extLst>
           </p:cNvPr>
@@ -5981,7 +5981,7 @@
           <p:cNvPr id="20" name="route-7">
             <a:extLst xmlns:a="http://schemas.openxmlformats.org/drawingml/2006/main">
               <a:ext uri="{FF2B5EF4-FFF2-40B4-BE49-F238E27FC236}">
-                <a16:creationId xmlns:a16="http://schemas.microsoft.com/office/drawing/2014/main" id="{9D191B9B-95A8-4091-9C33-E1952C52705D}"/>
+                <a16:creationId xmlns:a16="http://schemas.microsoft.com/office/drawing/2014/main" id="{A1E91269-8AA0-49CA-A1F3-FEE22C226345}"/>
               </a:ext>
             </a:extLst>
           </p:cNvPr>
@@ -6038,7 +6038,7 @@
           <p:cNvPr id="21" name="Lesdoelen">
             <a:extLst xmlns:a="http://schemas.openxmlformats.org/drawingml/2006/main">
               <a:ext uri="{FF2B5EF4-FFF2-40B4-BE49-F238E27FC236}">
-                <a16:creationId xmlns:a16="http://schemas.microsoft.com/office/drawing/2014/main" id="{D5F6BBC2-D3A0-4A39-861E-6EB759AAC14A}"/>
+                <a16:creationId xmlns:a16="http://schemas.microsoft.com/office/drawing/2014/main" id="{58024B2C-B9DF-43FC-BDF0-120429B8C22E}"/>
               </a:ext>
             </a:extLst>
           </p:cNvPr>
@@ -6095,7 +6095,7 @@
           <p:cNvPr id="22" name="overview-goals">
             <a:extLst xmlns:a="http://schemas.openxmlformats.org/drawingml/2006/main">
               <a:ext uri="{FF2B5EF4-FFF2-40B4-BE49-F238E27FC236}">
-                <a16:creationId xmlns:a16="http://schemas.microsoft.com/office/drawing/2014/main" id="{2A7FF8F1-D813-4206-B3EF-A44C46EA7BD8}"/>
+                <a16:creationId xmlns:a16="http://schemas.microsoft.com/office/drawing/2014/main" id="{9590E36D-F509-422B-B7F8-E3731B47B640}"/>
               </a:ext>
             </a:extLst>
           </p:cNvPr>
@@ -6198,7 +6198,7 @@
           <p:cNvPr id="23" name="">
             <a:extLst xmlns:a="http://schemas.openxmlformats.org/drawingml/2006/main">
               <a:ext uri="{FF2B5EF4-FFF2-40B4-BE49-F238E27FC236}">
-                <a16:creationId xmlns:a16="http://schemas.microsoft.com/office/drawing/2014/main" id="{6AD81FC1-9BDC-4BB5-86FC-0E453B50A5E7}"/>
+                <a16:creationId xmlns:a16="http://schemas.microsoft.com/office/drawing/2014/main" id="{ED9EE545-BE11-46FB-A7AF-DDCF4652CD18}"/>
               </a:ext>
             </a:extLst>
           </p:cNvPr>
@@ -6227,7 +6227,7 @@
           <p:cNvPr id="24" name="Startopdracht">
             <a:extLst xmlns:a="http://schemas.openxmlformats.org/drawingml/2006/main">
               <a:ext uri="{FF2B5EF4-FFF2-40B4-BE49-F238E27FC236}">
-                <a16:creationId xmlns:a16="http://schemas.microsoft.com/office/drawing/2014/main" id="{4811CCF4-D14D-49EF-B765-C44D5F7225A3}"/>
+                <a16:creationId xmlns:a16="http://schemas.microsoft.com/office/drawing/2014/main" id="{551C59A1-D108-42F4-8999-F83710447DC8}"/>
               </a:ext>
             </a:extLst>
           </p:cNvPr>
@@ -6284,7 +6284,7 @@
           <p:cNvPr id="25" name="overview-start">
             <a:extLst xmlns:a="http://schemas.openxmlformats.org/drawingml/2006/main">
               <a:ext uri="{FF2B5EF4-FFF2-40B4-BE49-F238E27FC236}">
-                <a16:creationId xmlns:a16="http://schemas.microsoft.com/office/drawing/2014/main" id="{029A47FB-69EF-47C1-B2FC-D4AAE2A7C31F}"/>
+                <a16:creationId xmlns:a16="http://schemas.microsoft.com/office/drawing/2014/main" id="{8C0ED64A-CEEB-4612-BC3F-E797AC7A29BF}"/>
               </a:ext>
             </a:extLst>
           </p:cNvPr>
@@ -6331,7 +6331,7 @@
                 <a:ea typeface="Arial"/>
                 <a:cs typeface="Arial"/>
               </a:rPr>
-              <a:t>Pagina 48 · Opgaven 1 en 2</a:t>
+              <a:t>Pagina 49 · Opgaven 1 en 2</a:t>
             </a:r>
           </a:p>
           <a:p xmlns:a="http://schemas.openxmlformats.org/drawingml/2006/main">
@@ -6354,7 +6354,7 @@
                 <a:ea typeface="Arial"/>
                 <a:cs typeface="Arial"/>
               </a:rPr>
-              <a:t>2a: verkennen, theorie p. 45</a:t>
+              <a:t>2a: verkennen, theorie p. 46</a:t>
             </a:r>
           </a:p>
         </p:txBody>
@@ -6364,7 +6364,7 @@
           <p:cNvPr id="26" name="">
             <a:extLst xmlns:a="http://schemas.openxmlformats.org/drawingml/2006/main">
               <a:ext uri="{FF2B5EF4-FFF2-40B4-BE49-F238E27FC236}">
-                <a16:creationId xmlns:a16="http://schemas.microsoft.com/office/drawing/2014/main" id="{E0F728BA-65CE-46A4-8897-D585FAE9ADB2}"/>
+                <a16:creationId xmlns:a16="http://schemas.microsoft.com/office/drawing/2014/main" id="{3DD84C53-7148-4D7B-98F0-52DE9E280B8A}"/>
               </a:ext>
             </a:extLst>
           </p:cNvPr>
@@ -6393,7 +6393,7 @@
           <p:cNvPr id="27" name="Huiswerk">
             <a:extLst xmlns:a="http://schemas.openxmlformats.org/drawingml/2006/main">
               <a:ext uri="{FF2B5EF4-FFF2-40B4-BE49-F238E27FC236}">
-                <a16:creationId xmlns:a16="http://schemas.microsoft.com/office/drawing/2014/main" id="{3593F68E-361F-411B-9CC4-7AA382410009}"/>
+                <a16:creationId xmlns:a16="http://schemas.microsoft.com/office/drawing/2014/main" id="{25941530-CB2B-464B-8F86-22B9472F02FF}"/>
               </a:ext>
             </a:extLst>
           </p:cNvPr>
@@ -6450,7 +6450,7 @@
           <p:cNvPr id="28" name="overview-homework">
             <a:extLst xmlns:a="http://schemas.openxmlformats.org/drawingml/2006/main">
               <a:ext uri="{FF2B5EF4-FFF2-40B4-BE49-F238E27FC236}">
-                <a16:creationId xmlns:a16="http://schemas.microsoft.com/office/drawing/2014/main" id="{45F0A596-C86D-4DA5-9885-95D6DDA8E66F}"/>
+                <a16:creationId xmlns:a16="http://schemas.microsoft.com/office/drawing/2014/main" id="{293234C2-DEC1-49E5-A03B-E928F5706214}"/>
               </a:ext>
             </a:extLst>
           </p:cNvPr>
@@ -6597,7 +6597,7 @@
     </p:spTree>
     <p:extLst>
       <p:ext uri="{BB962C8B-B14F-4D97-AF65-F5344CB8AC3E}">
-        <p14:creationId xmlns:p14="http://schemas.microsoft.com/office/powerpoint/2010/main" val="33659835"/>
+        <p14:creationId xmlns:p14="http://schemas.microsoft.com/office/powerpoint/2010/main" val="1620853492"/>
       </p:ext>
     </p:extLst>
   </p:cSld>
@@ -6628,7 +6628,7 @@
           <p:cNvPr id="8" name="De lokale omzetregel">
             <a:extLst xmlns:a="http://schemas.openxmlformats.org/drawingml/2006/main">
               <a:ext uri="{FF2B5EF4-FFF2-40B4-BE49-F238E27FC236}">
-                <a16:creationId xmlns:a16="http://schemas.microsoft.com/office/drawing/2014/main" id="{F006D42E-7A81-42D4-BDA0-28AA29D99D3B}"/>
+                <a16:creationId xmlns:a16="http://schemas.microsoft.com/office/drawing/2014/main" id="{C32F4F00-8DFD-4D23-88FA-8A80742CD60B}"/>
               </a:ext>
             </a:extLst>
           </p:cNvPr>
@@ -6685,7 +6685,7 @@
           <p:cNvPr id="2" name="">
             <a:extLst xmlns:a="http://schemas.openxmlformats.org/drawingml/2006/main">
               <a:ext uri="{FF2B5EF4-FFF2-40B4-BE49-F238E27FC236}">
-                <a16:creationId xmlns:a16="http://schemas.microsoft.com/office/drawing/2014/main" id="{19DF8714-5596-42F4-83CA-C422695992C6}"/>
+                <a16:creationId xmlns:a16="http://schemas.microsoft.com/office/drawing/2014/main" id="{78D94FAE-2FA7-42F2-BEBA-F3B151AD3976}"/>
               </a:ext>
             </a:extLst>
           </p:cNvPr>
@@ -6714,7 +6714,7 @@
           <p:cNvPr id="3" name="§2.2.2 Elasticiteit en omzet">
             <a:extLst xmlns:a="http://schemas.openxmlformats.org/drawingml/2006/main">
               <a:ext uri="{FF2B5EF4-FFF2-40B4-BE49-F238E27FC236}">
-                <a16:creationId xmlns:a16="http://schemas.microsoft.com/office/drawing/2014/main" id="{E389D0F7-441A-47EA-9B7C-6FFFD6F6BF27}"/>
+                <a16:creationId xmlns:a16="http://schemas.microsoft.com/office/drawing/2014/main" id="{5ECAD0CC-BE70-4A6E-8C2F-40F5453766D1}"/>
               </a:ext>
             </a:extLst>
           </p:cNvPr>
@@ -6771,7 +6771,7 @@
           <p:cNvPr id="4" name="10">
             <a:extLst xmlns:a="http://schemas.openxmlformats.org/drawingml/2006/main">
               <a:ext uri="{FF2B5EF4-FFF2-40B4-BE49-F238E27FC236}">
-                <a16:creationId xmlns:a16="http://schemas.microsoft.com/office/drawing/2014/main" id="{DC41B385-E903-44D1-B471-CEA96C2B8578}"/>
+                <a16:creationId xmlns:a16="http://schemas.microsoft.com/office/drawing/2014/main" id="{19951E2E-6A06-49CB-AD57-4672179EDBFD}"/>
               </a:ext>
             </a:extLst>
           </p:cNvPr>
@@ -6828,7 +6828,7 @@
           <p:cNvPr id="5" name="Bij een kleine prijsverandering rond de huidige si">
             <a:extLst xmlns:a="http://schemas.openxmlformats.org/drawingml/2006/main">
               <a:ext uri="{FF2B5EF4-FFF2-40B4-BE49-F238E27FC236}">
-                <a16:creationId xmlns:a16="http://schemas.microsoft.com/office/drawing/2014/main" id="{BE076DEE-3138-43AD-AE92-BAA488330F40}"/>
+                <a16:creationId xmlns:a16="http://schemas.microsoft.com/office/drawing/2014/main" id="{2227F4DC-4906-4DE9-993D-7BDBE9B7D2DD}"/>
               </a:ext>
             </a:extLst>
           </p:cNvPr>
@@ -7269,7 +7269,7 @@
           <p:cNvPr id="7" name="Bij gegeven oude en nieuwe waarden: TO altijd nare">
             <a:extLst xmlns:a="http://schemas.openxmlformats.org/drawingml/2006/main">
               <a:ext uri="{FF2B5EF4-FFF2-40B4-BE49-F238E27FC236}">
-                <a16:creationId xmlns:a16="http://schemas.microsoft.com/office/drawing/2014/main" id="{2FDA0B0D-4E78-47DD-A203-7E8E922FD4B2}"/>
+                <a16:creationId xmlns:a16="http://schemas.microsoft.com/office/drawing/2014/main" id="{984F6388-E2E5-444F-9765-332C3FD92D74}"/>
               </a:ext>
             </a:extLst>
           </p:cNvPr>
@@ -7324,7 +7324,7 @@
     </p:spTree>
     <p:extLst>
       <p:ext uri="{BB962C8B-B14F-4D97-AF65-F5344CB8AC3E}">
-        <p14:creationId xmlns:p14="http://schemas.microsoft.com/office/powerpoint/2010/main" val="967525577"/>
+        <p14:creationId xmlns:p14="http://schemas.microsoft.com/office/powerpoint/2010/main" val="2018014866"/>
       </p:ext>
     </p:extLst>
   </p:cSld>
@@ -7355,7 +7355,7 @@
           <p:cNvPr id="10" name="Prijs en afzet zijn twee factoren">
             <a:extLst xmlns:a="http://schemas.openxmlformats.org/drawingml/2006/main">
               <a:ext uri="{FF2B5EF4-FFF2-40B4-BE49-F238E27FC236}">
-                <a16:creationId xmlns:a16="http://schemas.microsoft.com/office/drawing/2014/main" id="{B856D1DD-5D34-4A7A-AD5A-51136CC44062}"/>
+                <a16:creationId xmlns:a16="http://schemas.microsoft.com/office/drawing/2014/main" id="{2C237DA1-A6BE-4555-8EC8-A1BFAE4B038E}"/>
               </a:ext>
             </a:extLst>
           </p:cNvPr>
@@ -7412,7 +7412,7 @@
           <p:cNvPr id="2" name="">
             <a:extLst xmlns:a="http://schemas.openxmlformats.org/drawingml/2006/main">
               <a:ext uri="{FF2B5EF4-FFF2-40B4-BE49-F238E27FC236}">
-                <a16:creationId xmlns:a16="http://schemas.microsoft.com/office/drawing/2014/main" id="{DC983B9D-89F3-4506-BE4F-76B6F35B7A0A}"/>
+                <a16:creationId xmlns:a16="http://schemas.microsoft.com/office/drawing/2014/main" id="{CFD064D0-51B3-4873-BDBF-5F84E39A351F}"/>
               </a:ext>
             </a:extLst>
           </p:cNvPr>
@@ -7441,7 +7441,7 @@
           <p:cNvPr id="3" name="Uitlegvoorbeeld — niet uit het boek">
             <a:extLst xmlns:a="http://schemas.openxmlformats.org/drawingml/2006/main">
               <a:ext uri="{FF2B5EF4-FFF2-40B4-BE49-F238E27FC236}">
-                <a16:creationId xmlns:a16="http://schemas.microsoft.com/office/drawing/2014/main" id="{19B736DE-DA51-4340-AB40-912E2E0241AA}"/>
+                <a16:creationId xmlns:a16="http://schemas.microsoft.com/office/drawing/2014/main" id="{ACEB3DC9-962A-46A2-A220-A5993BD06793}"/>
               </a:ext>
             </a:extLst>
           </p:cNvPr>
@@ -7498,7 +7498,7 @@
           <p:cNvPr id="4" name="11">
             <a:extLst xmlns:a="http://schemas.openxmlformats.org/drawingml/2006/main">
               <a:ext uri="{FF2B5EF4-FFF2-40B4-BE49-F238E27FC236}">
-                <a16:creationId xmlns:a16="http://schemas.microsoft.com/office/drawing/2014/main" id="{C9A7702D-05C9-4D0F-9310-DFDB1BA13400}"/>
+                <a16:creationId xmlns:a16="http://schemas.microsoft.com/office/drawing/2014/main" id="{7A1FD772-E712-4270-91B3-E38F120C9884}"/>
               </a:ext>
             </a:extLst>
           </p:cNvPr>
@@ -7555,7 +7555,7 @@
           <p:cNvPr id="5" name="KajakStek: P +20%, Q −30%">
             <a:extLst xmlns:a="http://schemas.openxmlformats.org/drawingml/2006/main">
               <a:ext uri="{FF2B5EF4-FFF2-40B4-BE49-F238E27FC236}">
-                <a16:creationId xmlns:a16="http://schemas.microsoft.com/office/drawing/2014/main" id="{6F265554-D1BE-4955-AE34-43C43F544145}"/>
+                <a16:creationId xmlns:a16="http://schemas.microsoft.com/office/drawing/2014/main" id="{D97AABB5-73AA-4F9A-8C85-56930F56AC68}"/>
               </a:ext>
             </a:extLst>
           </p:cNvPr>
@@ -7612,7 +7612,7 @@
           <p:cNvPr id="6" name="TO nieuw / TO oud = (P nieuw / P oud) × (Q nieuw /">
             <a:extLst xmlns:a="http://schemas.openxmlformats.org/drawingml/2006/main">
               <a:ext uri="{FF2B5EF4-FFF2-40B4-BE49-F238E27FC236}">
-                <a16:creationId xmlns:a16="http://schemas.microsoft.com/office/drawing/2014/main" id="{001A645C-0E2F-4919-9E76-C2A132048D4C}"/>
+                <a16:creationId xmlns:a16="http://schemas.microsoft.com/office/drawing/2014/main" id="{9CFBE885-AB5B-4295-9B9D-2DA4AAECE9FD}"/>
               </a:ext>
             </a:extLst>
           </p:cNvPr>
@@ -7669,7 +7669,7 @@
           <p:cNvPr id="7" name="= 1,20 × 0,70 = 0,84">
             <a:extLst xmlns:a="http://schemas.openxmlformats.org/drawingml/2006/main">
               <a:ext uri="{FF2B5EF4-FFF2-40B4-BE49-F238E27FC236}">
-                <a16:creationId xmlns:a16="http://schemas.microsoft.com/office/drawing/2014/main" id="{A97E4398-72FE-4E22-BB02-41082E50513D}"/>
+                <a16:creationId xmlns:a16="http://schemas.microsoft.com/office/drawing/2014/main" id="{9929D436-F6C7-4D3B-9F68-0ABB95A4B80D}"/>
               </a:ext>
             </a:extLst>
           </p:cNvPr>
@@ -7726,7 +7726,7 @@
           <p:cNvPr id="8" name="84% van de oude omzet: een daling van 16%.">
             <a:extLst xmlns:a="http://schemas.openxmlformats.org/drawingml/2006/main">
               <a:ext uri="{FF2B5EF4-FFF2-40B4-BE49-F238E27FC236}">
-                <a16:creationId xmlns:a16="http://schemas.microsoft.com/office/drawing/2014/main" id="{A0A3CD11-662A-41DC-BEFB-A3BEBB308E57}"/>
+                <a16:creationId xmlns:a16="http://schemas.microsoft.com/office/drawing/2014/main" id="{CCA36E14-1A57-4CBD-AC84-DD7F20CC9600}"/>
               </a:ext>
             </a:extLst>
           </p:cNvPr>
@@ -7783,7 +7783,7 @@
           <p:cNvPr id="9" name="Optellen van +20% en −30% zou −10% geven.">
             <a:extLst xmlns:a="http://schemas.openxmlformats.org/drawingml/2006/main">
               <a:ext uri="{FF2B5EF4-FFF2-40B4-BE49-F238E27FC236}">
-                <a16:creationId xmlns:a16="http://schemas.microsoft.com/office/drawing/2014/main" id="{55099539-24D3-4F27-A75B-72DE8A88CF74}"/>
+                <a16:creationId xmlns:a16="http://schemas.microsoft.com/office/drawing/2014/main" id="{E3BF1899-DAC1-495D-B4BD-6CF1A085B136}"/>
               </a:ext>
             </a:extLst>
           </p:cNvPr>
@@ -7838,7 +7838,7 @@
     </p:spTree>
     <p:extLst>
       <p:ext uri="{BB962C8B-B14F-4D97-AF65-F5344CB8AC3E}">
-        <p14:creationId xmlns:p14="http://schemas.microsoft.com/office/powerpoint/2010/main" val="132269395"/>
+        <p14:creationId xmlns:p14="http://schemas.microsoft.com/office/powerpoint/2010/main" val="1578432389"/>
       </p:ext>
     </p:extLst>
   </p:cSld>
@@ -7869,7 +7869,7 @@
           <p:cNvPr id="8" name="Omzet en winst">
             <a:extLst xmlns:a="http://schemas.openxmlformats.org/drawingml/2006/main">
               <a:ext uri="{FF2B5EF4-FFF2-40B4-BE49-F238E27FC236}">
-                <a16:creationId xmlns:a16="http://schemas.microsoft.com/office/drawing/2014/main" id="{1CBA8493-B8EF-4AE4-99D3-044162B1CD38}"/>
+                <a16:creationId xmlns:a16="http://schemas.microsoft.com/office/drawing/2014/main" id="{C84B3FDE-5F68-4861-925F-4CF1FB375FEA}"/>
               </a:ext>
             </a:extLst>
           </p:cNvPr>
@@ -7926,7 +7926,7 @@
           <p:cNvPr id="2" name="">
             <a:extLst xmlns:a="http://schemas.openxmlformats.org/drawingml/2006/main">
               <a:ext uri="{FF2B5EF4-FFF2-40B4-BE49-F238E27FC236}">
-                <a16:creationId xmlns:a16="http://schemas.microsoft.com/office/drawing/2014/main" id="{499B87B6-A506-4E15-98F6-4025FABD9B8B}"/>
+                <a16:creationId xmlns:a16="http://schemas.microsoft.com/office/drawing/2014/main" id="{583A4039-77B2-4868-A1FD-155173C0CADF}"/>
               </a:ext>
             </a:extLst>
           </p:cNvPr>
@@ -7955,7 +7955,7 @@
           <p:cNvPr id="3" name="§2.2.2 Elasticiteit en omzet">
             <a:extLst xmlns:a="http://schemas.openxmlformats.org/drawingml/2006/main">
               <a:ext uri="{FF2B5EF4-FFF2-40B4-BE49-F238E27FC236}">
-                <a16:creationId xmlns:a16="http://schemas.microsoft.com/office/drawing/2014/main" id="{24796468-F673-4371-B4AD-82792503B62B}"/>
+                <a16:creationId xmlns:a16="http://schemas.microsoft.com/office/drawing/2014/main" id="{7E4108EE-C0E0-414B-9579-D11891A2AE6D}"/>
               </a:ext>
             </a:extLst>
           </p:cNvPr>
@@ -8012,7 +8012,7 @@
           <p:cNvPr id="4" name="12">
             <a:extLst xmlns:a="http://schemas.openxmlformats.org/drawingml/2006/main">
               <a:ext uri="{FF2B5EF4-FFF2-40B4-BE49-F238E27FC236}">
-                <a16:creationId xmlns:a16="http://schemas.microsoft.com/office/drawing/2014/main" id="{8A1F9A56-92EC-44B6-86A0-A8A341CBB045}"/>
+                <a16:creationId xmlns:a16="http://schemas.microsoft.com/office/drawing/2014/main" id="{BEE17258-C50E-495A-BDBD-BB8E68F24586}"/>
               </a:ext>
             </a:extLst>
           </p:cNvPr>
@@ -8069,7 +8069,7 @@
           <p:cNvPr id="5" name="Winst = TO − TK">
             <a:extLst xmlns:a="http://schemas.openxmlformats.org/drawingml/2006/main">
               <a:ext uri="{FF2B5EF4-FFF2-40B4-BE49-F238E27FC236}">
-                <a16:creationId xmlns:a16="http://schemas.microsoft.com/office/drawing/2014/main" id="{420FB235-1FAB-4529-8CF1-5AE940E38E49}"/>
+                <a16:creationId xmlns:a16="http://schemas.microsoft.com/office/drawing/2014/main" id="{94B22813-8AC7-4C78-B5D5-538DDDF6C117}"/>
               </a:ext>
             </a:extLst>
           </p:cNvPr>
@@ -8371,7 +8371,7 @@
           <p:cNvPr id="7" name="Een omzetverandering geeft nog geen zekere winstri">
             <a:extLst xmlns:a="http://schemas.openxmlformats.org/drawingml/2006/main">
               <a:ext uri="{FF2B5EF4-FFF2-40B4-BE49-F238E27FC236}">
-                <a16:creationId xmlns:a16="http://schemas.microsoft.com/office/drawing/2014/main" id="{F1DCCD13-E51F-4E0B-B94E-54100858D81F}"/>
+                <a16:creationId xmlns:a16="http://schemas.microsoft.com/office/drawing/2014/main" id="{0827725E-4967-45F1-A225-645BB965EA36}"/>
               </a:ext>
             </a:extLst>
           </p:cNvPr>
@@ -8426,7 +8426,7 @@
     </p:spTree>
     <p:extLst>
       <p:ext uri="{BB962C8B-B14F-4D97-AF65-F5344CB8AC3E}">
-        <p14:creationId xmlns:p14="http://schemas.microsoft.com/office/powerpoint/2010/main" val="1779586727"/>
+        <p14:creationId xmlns:p14="http://schemas.microsoft.com/office/powerpoint/2010/main" val="860866601"/>
       </p:ext>
     </p:extLst>
   </p:cSld>
@@ -8457,7 +8457,7 @@
           <p:cNvPr id="9" name="Korte controle">
             <a:extLst xmlns:a="http://schemas.openxmlformats.org/drawingml/2006/main">
               <a:ext uri="{FF2B5EF4-FFF2-40B4-BE49-F238E27FC236}">
-                <a16:creationId xmlns:a16="http://schemas.microsoft.com/office/drawing/2014/main" id="{CB2D7A8E-4818-47F7-9EE4-5238C7592D40}"/>
+                <a16:creationId xmlns:a16="http://schemas.microsoft.com/office/drawing/2014/main" id="{CB59D636-B3DC-4D2F-AA63-A1A2D30745D4}"/>
               </a:ext>
             </a:extLst>
           </p:cNvPr>
@@ -8514,7 +8514,7 @@
           <p:cNvPr id="2" name="">
             <a:extLst xmlns:a="http://schemas.openxmlformats.org/drawingml/2006/main">
               <a:ext uri="{FF2B5EF4-FFF2-40B4-BE49-F238E27FC236}">
-                <a16:creationId xmlns:a16="http://schemas.microsoft.com/office/drawing/2014/main" id="{16D513D4-2A41-44C6-8922-61DE36113B5E}"/>
+                <a16:creationId xmlns:a16="http://schemas.microsoft.com/office/drawing/2014/main" id="{C223150E-18F0-4E23-813F-BC58FEEAA921}"/>
               </a:ext>
             </a:extLst>
           </p:cNvPr>
@@ -8543,7 +8543,7 @@
           <p:cNvPr id="3" name="§2.2.2 Elasticiteit en omzet">
             <a:extLst xmlns:a="http://schemas.openxmlformats.org/drawingml/2006/main">
               <a:ext uri="{FF2B5EF4-FFF2-40B4-BE49-F238E27FC236}">
-                <a16:creationId xmlns:a16="http://schemas.microsoft.com/office/drawing/2014/main" id="{16068297-B078-4556-8B47-3A6352970B06}"/>
+                <a16:creationId xmlns:a16="http://schemas.microsoft.com/office/drawing/2014/main" id="{C0884437-FE27-4C66-A4F6-C0AE997738B7}"/>
               </a:ext>
             </a:extLst>
           </p:cNvPr>
@@ -8600,7 +8600,7 @@
           <p:cNvPr id="4" name="13">
             <a:extLst xmlns:a="http://schemas.openxmlformats.org/drawingml/2006/main">
               <a:ext uri="{FF2B5EF4-FFF2-40B4-BE49-F238E27FC236}">
-                <a16:creationId xmlns:a16="http://schemas.microsoft.com/office/drawing/2014/main" id="{3BD27029-907A-4AAC-8B9C-92B4B76B96C6}"/>
+                <a16:creationId xmlns:a16="http://schemas.microsoft.com/office/drawing/2014/main" id="{91F41343-E1A0-4C52-B6C6-B9E1B0D89FD9}"/>
               </a:ext>
             </a:extLst>
           </p:cNvPr>
@@ -8657,7 +8657,7 @@
           <p:cNvPr id="5" name="Een aanbieder verlaagt de prijs een klein beetje.">
             <a:extLst xmlns:a="http://schemas.openxmlformats.org/drawingml/2006/main">
               <a:ext uri="{FF2B5EF4-FFF2-40B4-BE49-F238E27FC236}">
-                <a16:creationId xmlns:a16="http://schemas.microsoft.com/office/drawing/2014/main" id="{FB69B124-9390-4F9F-9C6C-626E01A5248D}"/>
+                <a16:creationId xmlns:a16="http://schemas.microsoft.com/office/drawing/2014/main" id="{D1A2D160-B730-462F-8428-BEE65BBD464C}"/>
               </a:ext>
             </a:extLst>
           </p:cNvPr>
@@ -8714,7 +8714,7 @@
           <p:cNvPr id="6" name="De lokale Ev is −0,5.">
             <a:extLst xmlns:a="http://schemas.openxmlformats.org/drawingml/2006/main">
               <a:ext uri="{FF2B5EF4-FFF2-40B4-BE49-F238E27FC236}">
-                <a16:creationId xmlns:a16="http://schemas.microsoft.com/office/drawing/2014/main" id="{4E63F469-BA98-4581-BF35-84DFB7584C16}"/>
+                <a16:creationId xmlns:a16="http://schemas.microsoft.com/office/drawing/2014/main" id="{D0A15E5B-D392-4C42-B229-0FA3BD199DCC}"/>
               </a:ext>
             </a:extLst>
           </p:cNvPr>
@@ -8771,7 +8771,7 @@
           <p:cNvPr id="7" name="Wat verwacht je voor TO? Leg uit.">
             <a:extLst xmlns:a="http://schemas.openxmlformats.org/drawingml/2006/main">
               <a:ext uri="{FF2B5EF4-FFF2-40B4-BE49-F238E27FC236}">
-                <a16:creationId xmlns:a16="http://schemas.microsoft.com/office/drawing/2014/main" id="{E3264DA9-2300-411C-94C7-20F49365709A}"/>
+                <a16:creationId xmlns:a16="http://schemas.microsoft.com/office/drawing/2014/main" id="{7BD98E43-5014-4E3F-B94F-A134022EEB81}"/>
               </a:ext>
             </a:extLst>
           </p:cNvPr>
@@ -8828,7 +8828,7 @@
           <p:cNvPr id="8" name="Kun je ook de richting van de winst voorspellen?">
             <a:extLst xmlns:a="http://schemas.openxmlformats.org/drawingml/2006/main">
               <a:ext uri="{FF2B5EF4-FFF2-40B4-BE49-F238E27FC236}">
-                <a16:creationId xmlns:a16="http://schemas.microsoft.com/office/drawing/2014/main" id="{38BD22D9-6427-40F9-8DAF-FE62F6D0281D}"/>
+                <a16:creationId xmlns:a16="http://schemas.microsoft.com/office/drawing/2014/main" id="{F7876963-76BE-4392-AAD2-4149F979560F}"/>
               </a:ext>
             </a:extLst>
           </p:cNvPr>
@@ -8883,7 +8883,7 @@
     </p:spTree>
     <p:extLst>
       <p:ext uri="{BB962C8B-B14F-4D97-AF65-F5344CB8AC3E}">
-        <p14:creationId xmlns:p14="http://schemas.microsoft.com/office/powerpoint/2010/main" val="1463467380"/>
+        <p14:creationId xmlns:p14="http://schemas.microsoft.com/office/powerpoint/2010/main" val="57316060"/>
       </p:ext>
     </p:extLst>
   </p:cSld>
@@ -8914,7 +8914,7 @@
           <p:cNvPr id="9" name="Korte controle: de redenering">
             <a:extLst xmlns:a="http://schemas.openxmlformats.org/drawingml/2006/main">
               <a:ext uri="{FF2B5EF4-FFF2-40B4-BE49-F238E27FC236}">
-                <a16:creationId xmlns:a16="http://schemas.microsoft.com/office/drawing/2014/main" id="{62707CD6-447B-43B5-A8C8-AD313F850108}"/>
+                <a16:creationId xmlns:a16="http://schemas.microsoft.com/office/drawing/2014/main" id="{000A51CF-16BA-4061-995C-C06D32248AAC}"/>
               </a:ext>
             </a:extLst>
           </p:cNvPr>
@@ -8971,7 +8971,7 @@
           <p:cNvPr id="2" name="">
             <a:extLst xmlns:a="http://schemas.openxmlformats.org/drawingml/2006/main">
               <a:ext uri="{FF2B5EF4-FFF2-40B4-BE49-F238E27FC236}">
-                <a16:creationId xmlns:a16="http://schemas.microsoft.com/office/drawing/2014/main" id="{1623C33E-E57C-41C6-82C4-E12B75EBC16D}"/>
+                <a16:creationId xmlns:a16="http://schemas.microsoft.com/office/drawing/2014/main" id="{B99F6CBD-79E3-4486-8B27-8FAAB252B447}"/>
               </a:ext>
             </a:extLst>
           </p:cNvPr>
@@ -9000,7 +9000,7 @@
           <p:cNvPr id="3" name="§2.2.2 Elasticiteit en omzet">
             <a:extLst xmlns:a="http://schemas.openxmlformats.org/drawingml/2006/main">
               <a:ext uri="{FF2B5EF4-FFF2-40B4-BE49-F238E27FC236}">
-                <a16:creationId xmlns:a16="http://schemas.microsoft.com/office/drawing/2014/main" id="{A17525BC-8162-4706-9C4A-9DFE4AAB1DB0}"/>
+                <a16:creationId xmlns:a16="http://schemas.microsoft.com/office/drawing/2014/main" id="{E73B87E0-9AA0-4EC1-883F-3F49809603A5}"/>
               </a:ext>
             </a:extLst>
           </p:cNvPr>
@@ -9057,7 +9057,7 @@
           <p:cNvPr id="4" name="14">
             <a:extLst xmlns:a="http://schemas.openxmlformats.org/drawingml/2006/main">
               <a:ext uri="{FF2B5EF4-FFF2-40B4-BE49-F238E27FC236}">
-                <a16:creationId xmlns:a16="http://schemas.microsoft.com/office/drawing/2014/main" id="{9D2C18DE-4804-491B-A377-8BB2CE33EB81}"/>
+                <a16:creationId xmlns:a16="http://schemas.microsoft.com/office/drawing/2014/main" id="{907CC58B-3C45-496A-95AC-37ED0077FC81}"/>
               </a:ext>
             </a:extLst>
           </p:cNvPr>
@@ -9114,7 +9114,7 @@
           <p:cNvPr id="5" name="Een aanbieder verlaagt de prijs een klein beetje.">
             <a:extLst xmlns:a="http://schemas.openxmlformats.org/drawingml/2006/main">
               <a:ext uri="{FF2B5EF4-FFF2-40B4-BE49-F238E27FC236}">
-                <a16:creationId xmlns:a16="http://schemas.microsoft.com/office/drawing/2014/main" id="{D141E7DE-1097-4015-AEF7-0AADF2BCBD0F}"/>
+                <a16:creationId xmlns:a16="http://schemas.microsoft.com/office/drawing/2014/main" id="{5742F299-2AEE-4AF3-B769-FC22C06F3F88}"/>
               </a:ext>
             </a:extLst>
           </p:cNvPr>
@@ -9171,7 +9171,7 @@
           <p:cNvPr id="6" name="De lokale Ev is −0,5.">
             <a:extLst xmlns:a="http://schemas.openxmlformats.org/drawingml/2006/main">
               <a:ext uri="{FF2B5EF4-FFF2-40B4-BE49-F238E27FC236}">
-                <a16:creationId xmlns:a16="http://schemas.microsoft.com/office/drawing/2014/main" id="{5B2E131A-FC70-4F54-99E2-A37E2744C39A}"/>
+                <a16:creationId xmlns:a16="http://schemas.microsoft.com/office/drawing/2014/main" id="{DA140A80-0797-414C-B523-2B26EADB4ADA}"/>
               </a:ext>
             </a:extLst>
           </p:cNvPr>
@@ -9228,7 +9228,7 @@
           <p:cNvPr id="7" name="Prijsinelastisch: de omzet daalt volgens de lokale">
             <a:extLst xmlns:a="http://schemas.openxmlformats.org/drawingml/2006/main">
               <a:ext uri="{FF2B5EF4-FFF2-40B4-BE49-F238E27FC236}">
-                <a16:creationId xmlns:a16="http://schemas.microsoft.com/office/drawing/2014/main" id="{3370FF60-BF3A-4BD0-A66B-C97C16330BAE}"/>
+                <a16:creationId xmlns:a16="http://schemas.microsoft.com/office/drawing/2014/main" id="{90E7BAE1-C5E0-4BA4-91A6-E907E8BFC98E}"/>
               </a:ext>
             </a:extLst>
           </p:cNvPr>
@@ -9285,7 +9285,7 @@
           <p:cNvPr id="8" name="De winstrichting blijft onbekend zonder de kosten.">
             <a:extLst xmlns:a="http://schemas.openxmlformats.org/drawingml/2006/main">
               <a:ext uri="{FF2B5EF4-FFF2-40B4-BE49-F238E27FC236}">
-                <a16:creationId xmlns:a16="http://schemas.microsoft.com/office/drawing/2014/main" id="{856DDED2-E345-4954-BB5F-35525D6EF90C}"/>
+                <a16:creationId xmlns:a16="http://schemas.microsoft.com/office/drawing/2014/main" id="{291EA488-1762-4B14-920B-EA77BE815259}"/>
               </a:ext>
             </a:extLst>
           </p:cNvPr>
@@ -9340,7 +9340,7 @@
     </p:spTree>
     <p:extLst>
       <p:ext uri="{BB962C8B-B14F-4D97-AF65-F5344CB8AC3E}">
-        <p14:creationId xmlns:p14="http://schemas.microsoft.com/office/powerpoint/2010/main" val="1792517551"/>
+        <p14:creationId xmlns:p14="http://schemas.microsoft.com/office/powerpoint/2010/main" val="65620071"/>
       </p:ext>
     </p:extLst>
   </p:cSld>
@@ -9371,7 +9371,7 @@
           <p:cNvPr id="29" name="Deze les: §2.2.2 Elasticiteit en omzet">
             <a:extLst xmlns:a="http://schemas.openxmlformats.org/drawingml/2006/main">
               <a:ext uri="{FF2B5EF4-FFF2-40B4-BE49-F238E27FC236}">
-                <a16:creationId xmlns:a16="http://schemas.microsoft.com/office/drawing/2014/main" id="{D67A8439-70B1-442B-AF38-169358EDAFD7}"/>
+                <a16:creationId xmlns:a16="http://schemas.microsoft.com/office/drawing/2014/main" id="{E7FC025C-193C-4BC1-888B-E99C678DCBA9}"/>
               </a:ext>
             </a:extLst>
           </p:cNvPr>
@@ -9428,7 +9428,7 @@
           <p:cNvPr id="2" name="">
             <a:extLst xmlns:a="http://schemas.openxmlformats.org/drawingml/2006/main">
               <a:ext uri="{FF2B5EF4-FFF2-40B4-BE49-F238E27FC236}">
-                <a16:creationId xmlns:a16="http://schemas.microsoft.com/office/drawing/2014/main" id="{6C114411-DE61-4F28-9B72-2D7F9E70C87F}"/>
+                <a16:creationId xmlns:a16="http://schemas.microsoft.com/office/drawing/2014/main" id="{6391EA7E-9DBC-4692-9594-E955325C7B91}"/>
               </a:ext>
             </a:extLst>
           </p:cNvPr>
@@ -9457,7 +9457,7 @@
           <p:cNvPr id="3" name="§2.2.2 Elasticiteit en omzet">
             <a:extLst xmlns:a="http://schemas.openxmlformats.org/drawingml/2006/main">
               <a:ext uri="{FF2B5EF4-FFF2-40B4-BE49-F238E27FC236}">
-                <a16:creationId xmlns:a16="http://schemas.microsoft.com/office/drawing/2014/main" id="{CD05109C-136E-4FEE-B754-70770064D886}"/>
+                <a16:creationId xmlns:a16="http://schemas.microsoft.com/office/drawing/2014/main" id="{E4EF0D80-B3D2-433E-A696-6865FC268C53}"/>
               </a:ext>
             </a:extLst>
           </p:cNvPr>
@@ -9514,7 +9514,7 @@
           <p:cNvPr id="4" name="15">
             <a:extLst xmlns:a="http://schemas.openxmlformats.org/drawingml/2006/main">
               <a:ext uri="{FF2B5EF4-FFF2-40B4-BE49-F238E27FC236}">
-                <a16:creationId xmlns:a16="http://schemas.microsoft.com/office/drawing/2014/main" id="{B306C56B-3F27-4CDA-865B-4574EDE7610E}"/>
+                <a16:creationId xmlns:a16="http://schemas.microsoft.com/office/drawing/2014/main" id="{720CC346-D6BB-4D54-B6B4-587EDB809DE6}"/>
               </a:ext>
             </a:extLst>
           </p:cNvPr>
@@ -9571,7 +9571,7 @@
           <p:cNvPr id="5" name="phase">
             <a:extLst xmlns:a="http://schemas.openxmlformats.org/drawingml/2006/main">
               <a:ext uri="{FF2B5EF4-FFF2-40B4-BE49-F238E27FC236}">
-                <a16:creationId xmlns:a16="http://schemas.microsoft.com/office/drawing/2014/main" id="{3851D327-AFA4-462B-BB5E-F51EF206AAE9}"/>
+                <a16:creationId xmlns:a16="http://schemas.microsoft.com/office/drawing/2014/main" id="{2EBA786B-D633-4BAA-90D7-9FE088CC574B}"/>
               </a:ext>
             </a:extLst>
           </p:cNvPr>
@@ -9628,7 +9628,7 @@
           <p:cNvPr id="6" name="Lesroute">
             <a:extLst xmlns:a="http://schemas.openxmlformats.org/drawingml/2006/main">
               <a:ext uri="{FF2B5EF4-FFF2-40B4-BE49-F238E27FC236}">
-                <a16:creationId xmlns:a16="http://schemas.microsoft.com/office/drawing/2014/main" id="{3EC19FE4-9943-4A24-BDAF-A0FF32B6069A}"/>
+                <a16:creationId xmlns:a16="http://schemas.microsoft.com/office/drawing/2014/main" id="{3F412986-A7EE-44E3-94DB-DBFBE93BE3F2}"/>
               </a:ext>
             </a:extLst>
           </p:cNvPr>
@@ -9685,7 +9685,7 @@
           <p:cNvPr id="7" name="route-number-1">
             <a:extLst xmlns:a="http://schemas.openxmlformats.org/drawingml/2006/main">
               <a:ext uri="{FF2B5EF4-FFF2-40B4-BE49-F238E27FC236}">
-                <a16:creationId xmlns:a16="http://schemas.microsoft.com/office/drawing/2014/main" id="{2328905B-41A8-44D6-BD56-816799614E35}"/>
+                <a16:creationId xmlns:a16="http://schemas.microsoft.com/office/drawing/2014/main" id="{2792FA2D-C3C8-4E92-B550-EF4F59B9A157}"/>
               </a:ext>
             </a:extLst>
           </p:cNvPr>
@@ -9742,7 +9742,7 @@
           <p:cNvPr id="8" name="route-1">
             <a:extLst xmlns:a="http://schemas.openxmlformats.org/drawingml/2006/main">
               <a:ext uri="{FF2B5EF4-FFF2-40B4-BE49-F238E27FC236}">
-                <a16:creationId xmlns:a16="http://schemas.microsoft.com/office/drawing/2014/main" id="{C5D484BD-34D5-42F4-8DB9-241D796D57EF}"/>
+                <a16:creationId xmlns:a16="http://schemas.microsoft.com/office/drawing/2014/main" id="{4C059320-BE0E-4824-9BB8-E3EADA9D8E76}"/>
               </a:ext>
             </a:extLst>
           </p:cNvPr>
@@ -9799,7 +9799,7 @@
           <p:cNvPr id="9" name="route-number-2">
             <a:extLst xmlns:a="http://schemas.openxmlformats.org/drawingml/2006/main">
               <a:ext uri="{FF2B5EF4-FFF2-40B4-BE49-F238E27FC236}">
-                <a16:creationId xmlns:a16="http://schemas.microsoft.com/office/drawing/2014/main" id="{749DEA59-4468-4AE7-B462-A89FE5C68B8D}"/>
+                <a16:creationId xmlns:a16="http://schemas.microsoft.com/office/drawing/2014/main" id="{2A466DC5-F2DB-45D7-966F-35CFC32EC102}"/>
               </a:ext>
             </a:extLst>
           </p:cNvPr>
@@ -9856,7 +9856,7 @@
           <p:cNvPr id="10" name="route-2">
             <a:extLst xmlns:a="http://schemas.openxmlformats.org/drawingml/2006/main">
               <a:ext uri="{FF2B5EF4-FFF2-40B4-BE49-F238E27FC236}">
-                <a16:creationId xmlns:a16="http://schemas.microsoft.com/office/drawing/2014/main" id="{CBA164C2-22F4-49BE-A26A-122280615A01}"/>
+                <a16:creationId xmlns:a16="http://schemas.microsoft.com/office/drawing/2014/main" id="{D9157048-B6C7-47DC-8A7E-3BEE716FAC7A}"/>
               </a:ext>
             </a:extLst>
           </p:cNvPr>
@@ -9913,7 +9913,7 @@
           <p:cNvPr id="11" name="route-number-3">
             <a:extLst xmlns:a="http://schemas.openxmlformats.org/drawingml/2006/main">
               <a:ext uri="{FF2B5EF4-FFF2-40B4-BE49-F238E27FC236}">
-                <a16:creationId xmlns:a16="http://schemas.microsoft.com/office/drawing/2014/main" id="{80A635F3-49C5-47C7-8487-62989E346F99}"/>
+                <a16:creationId xmlns:a16="http://schemas.microsoft.com/office/drawing/2014/main" id="{1D93E8C4-A5FC-4C80-979C-60DFD9157DC8}"/>
               </a:ext>
             </a:extLst>
           </p:cNvPr>
@@ -9970,7 +9970,7 @@
           <p:cNvPr id="12" name="route-3">
             <a:extLst xmlns:a="http://schemas.openxmlformats.org/drawingml/2006/main">
               <a:ext uri="{FF2B5EF4-FFF2-40B4-BE49-F238E27FC236}">
-                <a16:creationId xmlns:a16="http://schemas.microsoft.com/office/drawing/2014/main" id="{4BC5AF8F-160F-4D23-8234-C7B18EED683A}"/>
+                <a16:creationId xmlns:a16="http://schemas.microsoft.com/office/drawing/2014/main" id="{754A2762-C680-461E-B77C-04830803C7F9}"/>
               </a:ext>
             </a:extLst>
           </p:cNvPr>
@@ -10027,7 +10027,7 @@
           <p:cNvPr id="13" name="route-number-4">
             <a:extLst xmlns:a="http://schemas.openxmlformats.org/drawingml/2006/main">
               <a:ext uri="{FF2B5EF4-FFF2-40B4-BE49-F238E27FC236}">
-                <a16:creationId xmlns:a16="http://schemas.microsoft.com/office/drawing/2014/main" id="{27078EB8-3002-4F16-90CC-DD8295F836A4}"/>
+                <a16:creationId xmlns:a16="http://schemas.microsoft.com/office/drawing/2014/main" id="{62874E12-7F6F-48C7-8226-E25DD28F8A35}"/>
               </a:ext>
             </a:extLst>
           </p:cNvPr>
@@ -10084,7 +10084,7 @@
           <p:cNvPr id="14" name="route-4">
             <a:extLst xmlns:a="http://schemas.openxmlformats.org/drawingml/2006/main">
               <a:ext uri="{FF2B5EF4-FFF2-40B4-BE49-F238E27FC236}">
-                <a16:creationId xmlns:a16="http://schemas.microsoft.com/office/drawing/2014/main" id="{B9CE6CFB-D50F-4B79-A21E-3F32AEBA7B62}"/>
+                <a16:creationId xmlns:a16="http://schemas.microsoft.com/office/drawing/2014/main" id="{B05487D2-8013-4250-9A6E-377B3F19FEE1}"/>
               </a:ext>
             </a:extLst>
           </p:cNvPr>
@@ -10141,7 +10141,7 @@
           <p:cNvPr id="15" name="route-number-5">
             <a:extLst xmlns:a="http://schemas.openxmlformats.org/drawingml/2006/main">
               <a:ext uri="{FF2B5EF4-FFF2-40B4-BE49-F238E27FC236}">
-                <a16:creationId xmlns:a16="http://schemas.microsoft.com/office/drawing/2014/main" id="{9008DE85-5384-473F-A9DB-49480FA2EB88}"/>
+                <a16:creationId xmlns:a16="http://schemas.microsoft.com/office/drawing/2014/main" id="{BCAFD449-A652-42F0-86D6-1F50452147C9}"/>
               </a:ext>
             </a:extLst>
           </p:cNvPr>
@@ -10198,7 +10198,7 @@
           <p:cNvPr id="16" name="route-5">
             <a:extLst xmlns:a="http://schemas.openxmlformats.org/drawingml/2006/main">
               <a:ext uri="{FF2B5EF4-FFF2-40B4-BE49-F238E27FC236}">
-                <a16:creationId xmlns:a16="http://schemas.microsoft.com/office/drawing/2014/main" id="{FB824D6B-376F-4D54-9C47-53BA1F3D837D}"/>
+                <a16:creationId xmlns:a16="http://schemas.microsoft.com/office/drawing/2014/main" id="{11266C03-A5F3-4C36-9198-A1BDB6E9991F}"/>
               </a:ext>
             </a:extLst>
           </p:cNvPr>
@@ -10255,7 +10255,7 @@
           <p:cNvPr id="17" name="route-number-6">
             <a:extLst xmlns:a="http://schemas.openxmlformats.org/drawingml/2006/main">
               <a:ext uri="{FF2B5EF4-FFF2-40B4-BE49-F238E27FC236}">
-                <a16:creationId xmlns:a16="http://schemas.microsoft.com/office/drawing/2014/main" id="{04715E32-BE9F-4952-B144-9AF8EBB8A84A}"/>
+                <a16:creationId xmlns:a16="http://schemas.microsoft.com/office/drawing/2014/main" id="{961F0CF7-3D31-41FB-B1B8-658E7B8E37BE}"/>
               </a:ext>
             </a:extLst>
           </p:cNvPr>
@@ -10312,7 +10312,7 @@
           <p:cNvPr id="18" name="route-6">
             <a:extLst xmlns:a="http://schemas.openxmlformats.org/drawingml/2006/main">
               <a:ext uri="{FF2B5EF4-FFF2-40B4-BE49-F238E27FC236}">
-                <a16:creationId xmlns:a16="http://schemas.microsoft.com/office/drawing/2014/main" id="{81B69D2E-30AA-4835-A687-FBE46B3D0E03}"/>
+                <a16:creationId xmlns:a16="http://schemas.microsoft.com/office/drawing/2014/main" id="{09F3A109-5000-48DC-9A91-680A3B45BFCE}"/>
               </a:ext>
             </a:extLst>
           </p:cNvPr>
@@ -10369,7 +10369,7 @@
           <p:cNvPr id="19" name="route-number-7">
             <a:extLst xmlns:a="http://schemas.openxmlformats.org/drawingml/2006/main">
               <a:ext uri="{FF2B5EF4-FFF2-40B4-BE49-F238E27FC236}">
-                <a16:creationId xmlns:a16="http://schemas.microsoft.com/office/drawing/2014/main" id="{4F6787F5-0FEF-42BA-AB4A-C56AA9CCAD35}"/>
+                <a16:creationId xmlns:a16="http://schemas.microsoft.com/office/drawing/2014/main" id="{45138562-4D53-4873-9DFB-28D469B51E07}"/>
               </a:ext>
             </a:extLst>
           </p:cNvPr>
@@ -10426,7 +10426,7 @@
           <p:cNvPr id="20" name="route-7">
             <a:extLst xmlns:a="http://schemas.openxmlformats.org/drawingml/2006/main">
               <a:ext uri="{FF2B5EF4-FFF2-40B4-BE49-F238E27FC236}">
-                <a16:creationId xmlns:a16="http://schemas.microsoft.com/office/drawing/2014/main" id="{8AEBE07F-E38E-42F1-ACF0-AE6ABAD1AA29}"/>
+                <a16:creationId xmlns:a16="http://schemas.microsoft.com/office/drawing/2014/main" id="{987146E3-547A-4B71-A9A9-329096667278}"/>
               </a:ext>
             </a:extLst>
           </p:cNvPr>
@@ -10483,7 +10483,7 @@
           <p:cNvPr id="21" name="Lesdoelen">
             <a:extLst xmlns:a="http://schemas.openxmlformats.org/drawingml/2006/main">
               <a:ext uri="{FF2B5EF4-FFF2-40B4-BE49-F238E27FC236}">
-                <a16:creationId xmlns:a16="http://schemas.microsoft.com/office/drawing/2014/main" id="{4A0A4837-AD8E-4030-8923-0D1404558B4F}"/>
+                <a16:creationId xmlns:a16="http://schemas.microsoft.com/office/drawing/2014/main" id="{85CF2A63-9AB2-44F3-8545-6C19C4311931}"/>
               </a:ext>
             </a:extLst>
           </p:cNvPr>
@@ -10540,7 +10540,7 @@
           <p:cNvPr id="22" name="overview-goals">
             <a:extLst xmlns:a="http://schemas.openxmlformats.org/drawingml/2006/main">
               <a:ext uri="{FF2B5EF4-FFF2-40B4-BE49-F238E27FC236}">
-                <a16:creationId xmlns:a16="http://schemas.microsoft.com/office/drawing/2014/main" id="{8AF6EA2B-225B-4D66-9E50-6A9B8B620D57}"/>
+                <a16:creationId xmlns:a16="http://schemas.microsoft.com/office/drawing/2014/main" id="{B30EB184-9946-40EF-B0FB-16F85B7A8D81}"/>
               </a:ext>
             </a:extLst>
           </p:cNvPr>
@@ -10643,7 +10643,7 @@
           <p:cNvPr id="23" name="">
             <a:extLst xmlns:a="http://schemas.openxmlformats.org/drawingml/2006/main">
               <a:ext uri="{FF2B5EF4-FFF2-40B4-BE49-F238E27FC236}">
-                <a16:creationId xmlns:a16="http://schemas.microsoft.com/office/drawing/2014/main" id="{1962D68A-E157-427D-A06A-33C0DA9B8A90}"/>
+                <a16:creationId xmlns:a16="http://schemas.microsoft.com/office/drawing/2014/main" id="{21A35C80-F469-4A01-9673-3D5A79756C66}"/>
               </a:ext>
             </a:extLst>
           </p:cNvPr>
@@ -10672,7 +10672,7 @@
           <p:cNvPr id="24" name="Startopdracht">
             <a:extLst xmlns:a="http://schemas.openxmlformats.org/drawingml/2006/main">
               <a:ext uri="{FF2B5EF4-FFF2-40B4-BE49-F238E27FC236}">
-                <a16:creationId xmlns:a16="http://schemas.microsoft.com/office/drawing/2014/main" id="{E4C4278D-4CF6-4E43-B0D3-07A20DB98A14}"/>
+                <a16:creationId xmlns:a16="http://schemas.microsoft.com/office/drawing/2014/main" id="{E3CA54EC-62AA-418E-BF74-603581A7B546}"/>
               </a:ext>
             </a:extLst>
           </p:cNvPr>
@@ -10729,7 +10729,7 @@
           <p:cNvPr id="25" name="overview-start">
             <a:extLst xmlns:a="http://schemas.openxmlformats.org/drawingml/2006/main">
               <a:ext uri="{FF2B5EF4-FFF2-40B4-BE49-F238E27FC236}">
-                <a16:creationId xmlns:a16="http://schemas.microsoft.com/office/drawing/2014/main" id="{4E05A524-71FA-4DC5-82CE-3C77399CCF9C}"/>
+                <a16:creationId xmlns:a16="http://schemas.microsoft.com/office/drawing/2014/main" id="{2B41CF75-BCBF-4B47-B509-DC81CDEE37B1}"/>
               </a:ext>
             </a:extLst>
           </p:cNvPr>
@@ -10776,7 +10776,7 @@
                 <a:ea typeface="Arial"/>
                 <a:cs typeface="Arial"/>
               </a:rPr>
-              <a:t>Pagina 48 · Opgaven 1 en 2</a:t>
+              <a:t>Pagina 49 · Opgaven 1 en 2</a:t>
             </a:r>
           </a:p>
           <a:p xmlns:a="http://schemas.openxmlformats.org/drawingml/2006/main">
@@ -10799,7 +10799,7 @@
                 <a:ea typeface="Arial"/>
                 <a:cs typeface="Arial"/>
               </a:rPr>
-              <a:t>2a: verkennen, theorie p. 45</a:t>
+              <a:t>2a: verkennen, theorie p. 46</a:t>
             </a:r>
           </a:p>
         </p:txBody>
@@ -10809,7 +10809,7 @@
           <p:cNvPr id="26" name="">
             <a:extLst xmlns:a="http://schemas.openxmlformats.org/drawingml/2006/main">
               <a:ext uri="{FF2B5EF4-FFF2-40B4-BE49-F238E27FC236}">
-                <a16:creationId xmlns:a16="http://schemas.microsoft.com/office/drawing/2014/main" id="{DDDEEB92-0B2B-4F1D-96B3-A9C7AE94C692}"/>
+                <a16:creationId xmlns:a16="http://schemas.microsoft.com/office/drawing/2014/main" id="{CFAD69BA-BEA4-4C41-B47E-8C590DAE808E}"/>
               </a:ext>
             </a:extLst>
           </p:cNvPr>
@@ -10838,7 +10838,7 @@
           <p:cNvPr id="27" name="Huiswerk">
             <a:extLst xmlns:a="http://schemas.openxmlformats.org/drawingml/2006/main">
               <a:ext uri="{FF2B5EF4-FFF2-40B4-BE49-F238E27FC236}">
-                <a16:creationId xmlns:a16="http://schemas.microsoft.com/office/drawing/2014/main" id="{B0AFA19A-D647-49EF-9FDE-09488C89FB75}"/>
+                <a16:creationId xmlns:a16="http://schemas.microsoft.com/office/drawing/2014/main" id="{60C5D95F-1754-4BB5-AEFE-7C58C0D49498}"/>
               </a:ext>
             </a:extLst>
           </p:cNvPr>
@@ -10895,7 +10895,7 @@
           <p:cNvPr id="28" name="overview-homework">
             <a:extLst xmlns:a="http://schemas.openxmlformats.org/drawingml/2006/main">
               <a:ext uri="{FF2B5EF4-FFF2-40B4-BE49-F238E27FC236}">
-                <a16:creationId xmlns:a16="http://schemas.microsoft.com/office/drawing/2014/main" id="{2EE3CD6F-1A40-455B-8738-7D991D843935}"/>
+                <a16:creationId xmlns:a16="http://schemas.microsoft.com/office/drawing/2014/main" id="{A7835839-7C89-452D-9FBF-5813903CB8E5}"/>
               </a:ext>
             </a:extLst>
           </p:cNvPr>
@@ -11042,7 +11042,7 @@
     </p:spTree>
     <p:extLst>
       <p:ext uri="{BB962C8B-B14F-4D97-AF65-F5344CB8AC3E}">
-        <p14:creationId xmlns:p14="http://schemas.microsoft.com/office/powerpoint/2010/main" val="2020906890"/>
+        <p14:creationId xmlns:p14="http://schemas.microsoft.com/office/powerpoint/2010/main" val="259177503"/>
       </p:ext>
     </p:extLst>
   </p:cSld>
@@ -11073,7 +11073,7 @@
           <p:cNvPr id="8" name="Opgave 7: Bioscoop Nova en StreamNow">
             <a:extLst xmlns:a="http://schemas.openxmlformats.org/drawingml/2006/main">
               <a:ext uri="{FF2B5EF4-FFF2-40B4-BE49-F238E27FC236}">
-                <a16:creationId xmlns:a16="http://schemas.microsoft.com/office/drawing/2014/main" id="{5E9150F4-FA77-4A91-A42C-5E75C27A3207}"/>
+                <a16:creationId xmlns:a16="http://schemas.microsoft.com/office/drawing/2014/main" id="{9AAD3266-6ADD-4D17-B10B-CFFF0FB47E58}"/>
               </a:ext>
             </a:extLst>
           </p:cNvPr>
@@ -11130,7 +11130,7 @@
           <p:cNvPr id="2" name="">
             <a:extLst xmlns:a="http://schemas.openxmlformats.org/drawingml/2006/main">
               <a:ext uri="{FF2B5EF4-FFF2-40B4-BE49-F238E27FC236}">
-                <a16:creationId xmlns:a16="http://schemas.microsoft.com/office/drawing/2014/main" id="{8432AEAC-1019-4F1C-8C2A-7A1AA7EDCEA1}"/>
+                <a16:creationId xmlns:a16="http://schemas.microsoft.com/office/drawing/2014/main" id="{1A616C3A-F4DE-45D8-9488-D215AF8C22F2}"/>
               </a:ext>
             </a:extLst>
           </p:cNvPr>
@@ -11159,7 +11159,7 @@
           <p:cNvPr id="3" name="§2.2.2 Elasticiteit en omzet · Opgave 7 · Boekpagi">
             <a:extLst xmlns:a="http://schemas.openxmlformats.org/drawingml/2006/main">
               <a:ext uri="{FF2B5EF4-FFF2-40B4-BE49-F238E27FC236}">
-                <a16:creationId xmlns:a16="http://schemas.microsoft.com/office/drawing/2014/main" id="{C88D2674-6E3B-4755-B427-DD1011ADCA2C}"/>
+                <a16:creationId xmlns:a16="http://schemas.microsoft.com/office/drawing/2014/main" id="{7C35F59C-06D2-42A7-BFE5-0816545E1746}"/>
               </a:ext>
             </a:extLst>
           </p:cNvPr>
@@ -11206,7 +11206,7 @@
                 <a:ea typeface="Arial"/>
                 <a:cs typeface="Arial"/>
               </a:rPr>
-              <a:t>§2.2.2 Elasticiteit en omzet · Opgave 7 · Boekpagina 50</a:t>
+              <a:t>§2.2.2 Elasticiteit en omzet · Opgave 7 · Boekpagina 51</a:t>
             </a:r>
           </a:p>
         </p:txBody>
@@ -11216,7 +11216,7 @@
           <p:cNvPr id="4" name="16">
             <a:extLst xmlns:a="http://schemas.openxmlformats.org/drawingml/2006/main">
               <a:ext uri="{FF2B5EF4-FFF2-40B4-BE49-F238E27FC236}">
-                <a16:creationId xmlns:a16="http://schemas.microsoft.com/office/drawing/2014/main" id="{58CDACAE-4D44-4B15-A880-B84BC9968884}"/>
+                <a16:creationId xmlns:a16="http://schemas.microsoft.com/office/drawing/2014/main" id="{8C2B68F7-22C9-4AD7-8281-2BFBAC4A1CAA}"/>
               </a:ext>
             </a:extLst>
           </p:cNvPr>
@@ -11273,7 +11273,7 @@
           <p:cNvPr id="5" name="Gebruik TO = P × Q. Alle gegevens die je nodig heb">
             <a:extLst xmlns:a="http://schemas.openxmlformats.org/drawingml/2006/main">
               <a:ext uri="{FF2B5EF4-FFF2-40B4-BE49-F238E27FC236}">
-                <a16:creationId xmlns:a16="http://schemas.microsoft.com/office/drawing/2014/main" id="{B20453F3-A34C-413D-BE87-74652B364E71}"/>
+                <a16:creationId xmlns:a16="http://schemas.microsoft.com/office/drawing/2014/main" id="{81BC36F7-175C-4B1B-B48C-D2BB8815770C}"/>
               </a:ext>
             </a:extLst>
           </p:cNvPr>
@@ -11820,7 +11820,7 @@
           <p:cNvPr id="7" name="Bij beide aanbieders stijgt P en daalt Q.">
             <a:extLst xmlns:a="http://schemas.openxmlformats.org/drawingml/2006/main">
               <a:ext uri="{FF2B5EF4-FFF2-40B4-BE49-F238E27FC236}">
-                <a16:creationId xmlns:a16="http://schemas.microsoft.com/office/drawing/2014/main" id="{B40A155E-3203-4371-AC57-E26927137B65}"/>
+                <a16:creationId xmlns:a16="http://schemas.microsoft.com/office/drawing/2014/main" id="{5C56E840-47D0-4EEB-AE14-6ACF55BD3819}"/>
               </a:ext>
             </a:extLst>
           </p:cNvPr>
@@ -11875,7 +11875,7 @@
     </p:spTree>
     <p:extLst>
       <p:ext uri="{BB962C8B-B14F-4D97-AF65-F5344CB8AC3E}">
-        <p14:creationId xmlns:p14="http://schemas.microsoft.com/office/powerpoint/2010/main" val="1933517971"/>
+        <p14:creationId xmlns:p14="http://schemas.microsoft.com/office/powerpoint/2010/main" val="1453167715"/>
       </p:ext>
     </p:extLst>
   </p:cSld>
@@ -11906,7 +11906,7 @@
           <p:cNvPr id="13" name="Opgave 7: vragen a tot en met d">
             <a:extLst xmlns:a="http://schemas.openxmlformats.org/drawingml/2006/main">
               <a:ext uri="{FF2B5EF4-FFF2-40B4-BE49-F238E27FC236}">
-                <a16:creationId xmlns:a16="http://schemas.microsoft.com/office/drawing/2014/main" id="{972C4902-0BAC-4A52-8FCB-25F91143ACE8}"/>
+                <a16:creationId xmlns:a16="http://schemas.microsoft.com/office/drawing/2014/main" id="{7B0BDC85-D578-4998-B963-A795EE4269DB}"/>
               </a:ext>
             </a:extLst>
           </p:cNvPr>
@@ -11963,7 +11963,7 @@
           <p:cNvPr id="2" name="">
             <a:extLst xmlns:a="http://schemas.openxmlformats.org/drawingml/2006/main">
               <a:ext uri="{FF2B5EF4-FFF2-40B4-BE49-F238E27FC236}">
-                <a16:creationId xmlns:a16="http://schemas.microsoft.com/office/drawing/2014/main" id="{1D3C9F45-399A-44B5-A19A-9A09B506FACC}"/>
+                <a16:creationId xmlns:a16="http://schemas.microsoft.com/office/drawing/2014/main" id="{F7B45553-31B8-4E42-86C8-1EAFE934DF52}"/>
               </a:ext>
             </a:extLst>
           </p:cNvPr>
@@ -11992,7 +11992,7 @@
           <p:cNvPr id="3" name="§2.2.2 Elasticiteit en omzet · Opgave 7 · Boekpagi">
             <a:extLst xmlns:a="http://schemas.openxmlformats.org/drawingml/2006/main">
               <a:ext uri="{FF2B5EF4-FFF2-40B4-BE49-F238E27FC236}">
-                <a16:creationId xmlns:a16="http://schemas.microsoft.com/office/drawing/2014/main" id="{5DF0BCC5-CBB6-4163-A7D6-BC8E54B173FA}"/>
+                <a16:creationId xmlns:a16="http://schemas.microsoft.com/office/drawing/2014/main" id="{7BA965E8-7935-423D-B082-84681498D307}"/>
               </a:ext>
             </a:extLst>
           </p:cNvPr>
@@ -12039,7 +12039,7 @@
                 <a:ea typeface="Arial"/>
                 <a:cs typeface="Arial"/>
               </a:rPr>
-              <a:t>§2.2.2 Elasticiteit en omzet · Opgave 7 · Boekpagina 50</a:t>
+              <a:t>§2.2.2 Elasticiteit en omzet · Opgave 7 · Boekpagina 51</a:t>
             </a:r>
           </a:p>
         </p:txBody>
@@ -12049,7 +12049,7 @@
           <p:cNvPr id="4" name="17">
             <a:extLst xmlns:a="http://schemas.openxmlformats.org/drawingml/2006/main">
               <a:ext uri="{FF2B5EF4-FFF2-40B4-BE49-F238E27FC236}">
-                <a16:creationId xmlns:a16="http://schemas.microsoft.com/office/drawing/2014/main" id="{F74F656B-8F47-40FF-94B2-2C945AA10124}"/>
+                <a16:creationId xmlns:a16="http://schemas.microsoft.com/office/drawing/2014/main" id="{05ED709B-6BA8-4AB9-83D6-AE52601032D9}"/>
               </a:ext>
             </a:extLst>
           </p:cNvPr>
@@ -12106,7 +12106,7 @@
           <p:cNvPr id="5" name="a)">
             <a:extLst xmlns:a="http://schemas.openxmlformats.org/drawingml/2006/main">
               <a:ext uri="{FF2B5EF4-FFF2-40B4-BE49-F238E27FC236}">
-                <a16:creationId xmlns:a16="http://schemas.microsoft.com/office/drawing/2014/main" id="{6545FFA0-4A4E-4B71-AF83-11CD65DDEB47}"/>
+                <a16:creationId xmlns:a16="http://schemas.microsoft.com/office/drawing/2014/main" id="{57AEE61C-E5B3-4DE9-9A77-83AC6B1E1C3A}"/>
               </a:ext>
             </a:extLst>
           </p:cNvPr>
@@ -12163,7 +12163,7 @@
           <p:cNvPr id="6" name="Bereken voor Bioscoop Nova TO vóór en na de prijsv">
             <a:extLst xmlns:a="http://schemas.openxmlformats.org/drawingml/2006/main">
               <a:ext uri="{FF2B5EF4-FFF2-40B4-BE49-F238E27FC236}">
-                <a16:creationId xmlns:a16="http://schemas.microsoft.com/office/drawing/2014/main" id="{8ADC828A-A67C-4C66-9386-0FD851827CB8}"/>
+                <a16:creationId xmlns:a16="http://schemas.microsoft.com/office/drawing/2014/main" id="{27CC88FF-9CE1-48B4-B5BF-4E12E60B69BA}"/>
               </a:ext>
             </a:extLst>
           </p:cNvPr>
@@ -12220,7 +12220,7 @@
           <p:cNvPr id="7" name="b)">
             <a:extLst xmlns:a="http://schemas.openxmlformats.org/drawingml/2006/main">
               <a:ext uri="{FF2B5EF4-FFF2-40B4-BE49-F238E27FC236}">
-                <a16:creationId xmlns:a16="http://schemas.microsoft.com/office/drawing/2014/main" id="{C2FA5194-52B0-4B33-AC2D-455298CC21FC}"/>
+                <a16:creationId xmlns:a16="http://schemas.microsoft.com/office/drawing/2014/main" id="{DEB6E525-0A7E-4C61-9EFA-0EBBEAC1F06D}"/>
               </a:ext>
             </a:extLst>
           </p:cNvPr>
@@ -12277,7 +12277,7 @@
           <p:cNvPr id="8" name="Bereken de procentuele verandering van TO bij Bios">
             <a:extLst xmlns:a="http://schemas.openxmlformats.org/drawingml/2006/main">
               <a:ext uri="{FF2B5EF4-FFF2-40B4-BE49-F238E27FC236}">
-                <a16:creationId xmlns:a16="http://schemas.microsoft.com/office/drawing/2014/main" id="{3F4A78D6-38DB-4E39-BA3A-C5737528A792}"/>
+                <a16:creationId xmlns:a16="http://schemas.microsoft.com/office/drawing/2014/main" id="{E94ED24D-DB4C-4B7A-BB97-C77584C9BCE0}"/>
               </a:ext>
             </a:extLst>
           </p:cNvPr>
@@ -12334,7 +12334,7 @@
           <p:cNvPr id="9" name="c)">
             <a:extLst xmlns:a="http://schemas.openxmlformats.org/drawingml/2006/main">
               <a:ext uri="{FF2B5EF4-FFF2-40B4-BE49-F238E27FC236}">
-                <a16:creationId xmlns:a16="http://schemas.microsoft.com/office/drawing/2014/main" id="{2034F4F5-8CD0-4477-B9AA-5AC8E39CA129}"/>
+                <a16:creationId xmlns:a16="http://schemas.microsoft.com/office/drawing/2014/main" id="{D2064563-C6DC-4D8D-8E1F-08BF38A68D76}"/>
               </a:ext>
             </a:extLst>
           </p:cNvPr>
@@ -12391,7 +12391,7 @@
           <p:cNvPr id="10" name="Bereken voor StreamNow TO vóór en na de prijsverho">
             <a:extLst xmlns:a="http://schemas.openxmlformats.org/drawingml/2006/main">
               <a:ext uri="{FF2B5EF4-FFF2-40B4-BE49-F238E27FC236}">
-                <a16:creationId xmlns:a16="http://schemas.microsoft.com/office/drawing/2014/main" id="{505634F7-BE1C-4D6A-8A46-B50AACE3D5A9}"/>
+                <a16:creationId xmlns:a16="http://schemas.microsoft.com/office/drawing/2014/main" id="{7574965B-9C6F-4F62-9134-B7AF3A3F077D}"/>
               </a:ext>
             </a:extLst>
           </p:cNvPr>
@@ -12448,7 +12448,7 @@
           <p:cNvPr id="11" name="d)">
             <a:extLst xmlns:a="http://schemas.openxmlformats.org/drawingml/2006/main">
               <a:ext uri="{FF2B5EF4-FFF2-40B4-BE49-F238E27FC236}">
-                <a16:creationId xmlns:a16="http://schemas.microsoft.com/office/drawing/2014/main" id="{C41D9991-8877-4233-9F6B-E280F8A85DDC}"/>
+                <a16:creationId xmlns:a16="http://schemas.microsoft.com/office/drawing/2014/main" id="{FEAEC714-C888-4A7B-83CD-66B5DA7EDC7C}"/>
               </a:ext>
             </a:extLst>
           </p:cNvPr>
@@ -12505,7 +12505,7 @@
           <p:cNvPr id="12" name="Bereken de procentuele verandering van TO bij Stre">
             <a:extLst xmlns:a="http://schemas.openxmlformats.org/drawingml/2006/main">
               <a:ext uri="{FF2B5EF4-FFF2-40B4-BE49-F238E27FC236}">
-                <a16:creationId xmlns:a16="http://schemas.microsoft.com/office/drawing/2014/main" id="{6EFF12C4-27C9-4004-BE50-F85F922E26F4}"/>
+                <a16:creationId xmlns:a16="http://schemas.microsoft.com/office/drawing/2014/main" id="{632D2158-978D-409B-A0AE-600426FA8095}"/>
               </a:ext>
             </a:extLst>
           </p:cNvPr>
@@ -12560,7 +12560,7 @@
     </p:spTree>
     <p:extLst>
       <p:ext uri="{BB962C8B-B14F-4D97-AF65-F5344CB8AC3E}">
-        <p14:creationId xmlns:p14="http://schemas.microsoft.com/office/powerpoint/2010/main" val="332500987"/>
+        <p14:creationId xmlns:p14="http://schemas.microsoft.com/office/powerpoint/2010/main" val="311005072"/>
       </p:ext>
     </p:extLst>
   </p:cSld>
@@ -12591,7 +12591,7 @@
           <p:cNvPr id="9" name="Opgave 7: vragen e en f">
             <a:extLst xmlns:a="http://schemas.openxmlformats.org/drawingml/2006/main">
               <a:ext uri="{FF2B5EF4-FFF2-40B4-BE49-F238E27FC236}">
-                <a16:creationId xmlns:a16="http://schemas.microsoft.com/office/drawing/2014/main" id="{4491F400-74F4-4F08-BF5A-736F08B0AB43}"/>
+                <a16:creationId xmlns:a16="http://schemas.microsoft.com/office/drawing/2014/main" id="{680DEBB1-4880-4F25-96F2-D0C3B4C850B5}"/>
               </a:ext>
             </a:extLst>
           </p:cNvPr>
@@ -12648,7 +12648,7 @@
           <p:cNvPr id="2" name="">
             <a:extLst xmlns:a="http://schemas.openxmlformats.org/drawingml/2006/main">
               <a:ext uri="{FF2B5EF4-FFF2-40B4-BE49-F238E27FC236}">
-                <a16:creationId xmlns:a16="http://schemas.microsoft.com/office/drawing/2014/main" id="{7D27AEEF-53A9-4FA5-A498-B70BA34C979F}"/>
+                <a16:creationId xmlns:a16="http://schemas.microsoft.com/office/drawing/2014/main" id="{2A2FEA49-D714-4F82-96FA-63C0C9A8F9B8}"/>
               </a:ext>
             </a:extLst>
           </p:cNvPr>
@@ -12677,7 +12677,7 @@
           <p:cNvPr id="3" name="§2.2.2 Elasticiteit en omzet · Opgave 7 · Boekpagi">
             <a:extLst xmlns:a="http://schemas.openxmlformats.org/drawingml/2006/main">
               <a:ext uri="{FF2B5EF4-FFF2-40B4-BE49-F238E27FC236}">
-                <a16:creationId xmlns:a16="http://schemas.microsoft.com/office/drawing/2014/main" id="{CB567251-FEAA-46A8-A99A-3B7222C2B6D9}"/>
+                <a16:creationId xmlns:a16="http://schemas.microsoft.com/office/drawing/2014/main" id="{76B84216-8F09-4A55-B489-85D8588DD776}"/>
               </a:ext>
             </a:extLst>
           </p:cNvPr>
@@ -12724,7 +12724,7 @@
                 <a:ea typeface="Arial"/>
                 <a:cs typeface="Arial"/>
               </a:rPr>
-              <a:t>§2.2.2 Elasticiteit en omzet · Opgave 7 · Boekpagina 50</a:t>
+              <a:t>§2.2.2 Elasticiteit en omzet · Opgave 7 · Boekpagina 51</a:t>
             </a:r>
           </a:p>
         </p:txBody>
@@ -12734,7 +12734,7 @@
           <p:cNvPr id="4" name="18">
             <a:extLst xmlns:a="http://schemas.openxmlformats.org/drawingml/2006/main">
               <a:ext uri="{FF2B5EF4-FFF2-40B4-BE49-F238E27FC236}">
-                <a16:creationId xmlns:a16="http://schemas.microsoft.com/office/drawing/2014/main" id="{BFE2C251-CBAD-46B1-ABBA-04FE90799DDE}"/>
+                <a16:creationId xmlns:a16="http://schemas.microsoft.com/office/drawing/2014/main" id="{3ED8D17D-13BF-49A0-8154-254A087A6F62}"/>
               </a:ext>
             </a:extLst>
           </p:cNvPr>
@@ -12791,7 +12791,7 @@
           <p:cNvPr id="5" name="e)">
             <a:extLst xmlns:a="http://schemas.openxmlformats.org/drawingml/2006/main">
               <a:ext uri="{FF2B5EF4-FFF2-40B4-BE49-F238E27FC236}">
-                <a16:creationId xmlns:a16="http://schemas.microsoft.com/office/drawing/2014/main" id="{9F50624F-ADC4-47CF-9B58-3A2C82C4CF67}"/>
+                <a16:creationId xmlns:a16="http://schemas.microsoft.com/office/drawing/2014/main" id="{8076A975-91F9-4615-9243-67BCDB289689}"/>
               </a:ext>
             </a:extLst>
           </p:cNvPr>
@@ -12848,7 +12848,7 @@
           <p:cNvPr id="6" name="Formuleer de lokale omzetregel voor een kleine pri">
             <a:extLst xmlns:a="http://schemas.openxmlformats.org/drawingml/2006/main">
               <a:ext uri="{FF2B5EF4-FFF2-40B4-BE49-F238E27FC236}">
-                <a16:creationId xmlns:a16="http://schemas.microsoft.com/office/drawing/2014/main" id="{310E55A6-1594-4F1C-BE2B-C7BE7EFCCD86}"/>
+                <a16:creationId xmlns:a16="http://schemas.microsoft.com/office/drawing/2014/main" id="{3F13E270-BA1A-4304-9EED-3C20963B9BC9}"/>
               </a:ext>
             </a:extLst>
           </p:cNvPr>
@@ -12951,7 +12951,7 @@
           <p:cNvPr id="7" name="f)">
             <a:extLst xmlns:a="http://schemas.openxmlformats.org/drawingml/2006/main">
               <a:ext uri="{FF2B5EF4-FFF2-40B4-BE49-F238E27FC236}">
-                <a16:creationId xmlns:a16="http://schemas.microsoft.com/office/drawing/2014/main" id="{895CA476-B366-4CB8-8E54-C7BE59701575}"/>
+                <a16:creationId xmlns:a16="http://schemas.microsoft.com/office/drawing/2014/main" id="{87DF0D2F-F4F0-46DB-BE63-B74C9897EC0B}"/>
               </a:ext>
             </a:extLst>
           </p:cNvPr>
@@ -13008,7 +13008,7 @@
           <p:cNvPr id="8" name="Leg uit waarom uit deze omzetgegevens niet volgt d">
             <a:extLst xmlns:a="http://schemas.openxmlformats.org/drawingml/2006/main">
               <a:ext uri="{FF2B5EF4-FFF2-40B4-BE49-F238E27FC236}">
-                <a16:creationId xmlns:a16="http://schemas.microsoft.com/office/drawing/2014/main" id="{B5A364DC-B184-4612-B8FD-86EFC1670092}"/>
+                <a16:creationId xmlns:a16="http://schemas.microsoft.com/office/drawing/2014/main" id="{35377931-BEDB-4CC6-A115-6B0526DB4A5B}"/>
               </a:ext>
             </a:extLst>
           </p:cNvPr>
@@ -13063,7 +13063,7 @@
     </p:spTree>
     <p:extLst>
       <p:ext uri="{BB962C8B-B14F-4D97-AF65-F5344CB8AC3E}">
-        <p14:creationId xmlns:p14="http://schemas.microsoft.com/office/powerpoint/2010/main" val="727046039"/>
+        <p14:creationId xmlns:p14="http://schemas.microsoft.com/office/powerpoint/2010/main" val="615579329"/>
       </p:ext>
     </p:extLst>
   </p:cSld>
@@ -13094,7 +13094,7 @@
           <p:cNvPr id="8" name="Opgave 7a: Nova, omzet vóór en na">
             <a:extLst xmlns:a="http://schemas.openxmlformats.org/drawingml/2006/main">
               <a:ext uri="{FF2B5EF4-FFF2-40B4-BE49-F238E27FC236}">
-                <a16:creationId xmlns:a16="http://schemas.microsoft.com/office/drawing/2014/main" id="{DCFAF647-F086-4EA0-8045-7A26ACAB502B}"/>
+                <a16:creationId xmlns:a16="http://schemas.microsoft.com/office/drawing/2014/main" id="{212FD23B-3ECC-4EE4-A2C0-70C3367C6F70}"/>
               </a:ext>
             </a:extLst>
           </p:cNvPr>
@@ -13151,7 +13151,7 @@
           <p:cNvPr id="2" name="">
             <a:extLst xmlns:a="http://schemas.openxmlformats.org/drawingml/2006/main">
               <a:ext uri="{FF2B5EF4-FFF2-40B4-BE49-F238E27FC236}">
-                <a16:creationId xmlns:a16="http://schemas.microsoft.com/office/drawing/2014/main" id="{314FD209-1AEF-4EBA-AC99-17332E7CA764}"/>
+                <a16:creationId xmlns:a16="http://schemas.microsoft.com/office/drawing/2014/main" id="{0F28FF4D-CC04-49F1-9707-96AF746287E1}"/>
               </a:ext>
             </a:extLst>
           </p:cNvPr>
@@ -13180,7 +13180,7 @@
           <p:cNvPr id="3" name="§2.2.2 Elasticiteit en omzet · Opgave 7 · Boekpagi">
             <a:extLst xmlns:a="http://schemas.openxmlformats.org/drawingml/2006/main">
               <a:ext uri="{FF2B5EF4-FFF2-40B4-BE49-F238E27FC236}">
-                <a16:creationId xmlns:a16="http://schemas.microsoft.com/office/drawing/2014/main" id="{4870B6CD-246B-4A2A-80BC-3142A4FCC6EA}"/>
+                <a16:creationId xmlns:a16="http://schemas.microsoft.com/office/drawing/2014/main" id="{552A94EC-1E30-4816-BD67-2370AB6AAEE5}"/>
               </a:ext>
             </a:extLst>
           </p:cNvPr>
@@ -13227,7 +13227,7 @@
                 <a:ea typeface="Arial"/>
                 <a:cs typeface="Arial"/>
               </a:rPr>
-              <a:t>§2.2.2 Elasticiteit en omzet · Opgave 7 · Boekpagina 50</a:t>
+              <a:t>§2.2.2 Elasticiteit en omzet · Opgave 7 · Boekpagina 51</a:t>
             </a:r>
           </a:p>
         </p:txBody>
@@ -13237,7 +13237,7 @@
           <p:cNvPr id="4" name="19">
             <a:extLst xmlns:a="http://schemas.openxmlformats.org/drawingml/2006/main">
               <a:ext uri="{FF2B5EF4-FFF2-40B4-BE49-F238E27FC236}">
-                <a16:creationId xmlns:a16="http://schemas.microsoft.com/office/drawing/2014/main" id="{88A37F4E-BE18-47C6-8CEA-C150D4A22B0A}"/>
+                <a16:creationId xmlns:a16="http://schemas.microsoft.com/office/drawing/2014/main" id="{43471FD9-37F8-4520-8C7C-B7E41E6A54B3}"/>
               </a:ext>
             </a:extLst>
           </p:cNvPr>
@@ -13294,7 +13294,7 @@
           <p:cNvPr id="5" name="TO = P × Q">
             <a:extLst xmlns:a="http://schemas.openxmlformats.org/drawingml/2006/main">
               <a:ext uri="{FF2B5EF4-FFF2-40B4-BE49-F238E27FC236}">
-                <a16:creationId xmlns:a16="http://schemas.microsoft.com/office/drawing/2014/main" id="{14AC059B-0096-423D-8F04-0A2BFC6E8B1D}"/>
+                <a16:creationId xmlns:a16="http://schemas.microsoft.com/office/drawing/2014/main" id="{2F22DD2F-5B4F-4278-BC38-B508A6E8E029}"/>
               </a:ext>
             </a:extLst>
           </p:cNvPr>
@@ -13596,7 +13596,7 @@
           <p:cNvPr id="7" name="Controle: € 40 meer omzet per week.">
             <a:extLst xmlns:a="http://schemas.openxmlformats.org/drawingml/2006/main">
               <a:ext uri="{FF2B5EF4-FFF2-40B4-BE49-F238E27FC236}">
-                <a16:creationId xmlns:a16="http://schemas.microsoft.com/office/drawing/2014/main" id="{066C4918-767F-4384-8D9C-03158ABDFAE7}"/>
+                <a16:creationId xmlns:a16="http://schemas.microsoft.com/office/drawing/2014/main" id="{1C7EB9D2-6767-4B57-B2F7-BF0AC3AD3F22}"/>
               </a:ext>
             </a:extLst>
           </p:cNvPr>
@@ -13651,7 +13651,7 @@
     </p:spTree>
     <p:extLst>
       <p:ext uri="{BB962C8B-B14F-4D97-AF65-F5344CB8AC3E}">
-        <p14:creationId xmlns:p14="http://schemas.microsoft.com/office/powerpoint/2010/main" val="1292650218"/>
+        <p14:creationId xmlns:p14="http://schemas.microsoft.com/office/powerpoint/2010/main" val="1960331908"/>
       </p:ext>
     </p:extLst>
   </p:cSld>
@@ -13682,7 +13682,7 @@
           <p:cNvPr id="16" name="Lesdoelen">
             <a:extLst xmlns:a="http://schemas.openxmlformats.org/drawingml/2006/main">
               <a:ext uri="{FF2B5EF4-FFF2-40B4-BE49-F238E27FC236}">
-                <a16:creationId xmlns:a16="http://schemas.microsoft.com/office/drawing/2014/main" id="{D08D229E-E63B-41D8-84FA-3575F143DE68}"/>
+                <a16:creationId xmlns:a16="http://schemas.microsoft.com/office/drawing/2014/main" id="{D0DFE679-B835-4AB0-AF13-5C905650D9AE}"/>
               </a:ext>
             </a:extLst>
           </p:cNvPr>
@@ -13739,7 +13739,7 @@
           <p:cNvPr id="2" name="">
             <a:extLst xmlns:a="http://schemas.openxmlformats.org/drawingml/2006/main">
               <a:ext uri="{FF2B5EF4-FFF2-40B4-BE49-F238E27FC236}">
-                <a16:creationId xmlns:a16="http://schemas.microsoft.com/office/drawing/2014/main" id="{81072DD3-C0E7-47BF-A11F-4AA099FEC358}"/>
+                <a16:creationId xmlns:a16="http://schemas.microsoft.com/office/drawing/2014/main" id="{6DF59CC8-93B7-4D4A-B867-7459650E833C}"/>
               </a:ext>
             </a:extLst>
           </p:cNvPr>
@@ -13768,7 +13768,7 @@
           <p:cNvPr id="3" name="§2.2.2 Elasticiteit en omzet">
             <a:extLst xmlns:a="http://schemas.openxmlformats.org/drawingml/2006/main">
               <a:ext uri="{FF2B5EF4-FFF2-40B4-BE49-F238E27FC236}">
-                <a16:creationId xmlns:a16="http://schemas.microsoft.com/office/drawing/2014/main" id="{A583EA2E-E1DD-4D67-AE85-59E735F6F1AF}"/>
+                <a16:creationId xmlns:a16="http://schemas.microsoft.com/office/drawing/2014/main" id="{97F16A6A-96CE-41F2-8DF3-3C87431B65CD}"/>
               </a:ext>
             </a:extLst>
           </p:cNvPr>
@@ -13825,7 +13825,7 @@
           <p:cNvPr id="4" name="2">
             <a:extLst xmlns:a="http://schemas.openxmlformats.org/drawingml/2006/main">
               <a:ext uri="{FF2B5EF4-FFF2-40B4-BE49-F238E27FC236}">
-                <a16:creationId xmlns:a16="http://schemas.microsoft.com/office/drawing/2014/main" id="{BEBBA3CB-7FDD-4539-8AE4-34EF4B3F0C31}"/>
+                <a16:creationId xmlns:a16="http://schemas.microsoft.com/office/drawing/2014/main" id="{DACCA4EC-6ACF-4E8E-96AC-9E871DC06EB5}"/>
               </a:ext>
             </a:extLst>
           </p:cNvPr>
@@ -13882,7 +13882,7 @@
           <p:cNvPr id="5" name="Omzet vergelijken">
             <a:extLst xmlns:a="http://schemas.openxmlformats.org/drawingml/2006/main">
               <a:ext uri="{FF2B5EF4-FFF2-40B4-BE49-F238E27FC236}">
-                <a16:creationId xmlns:a16="http://schemas.microsoft.com/office/drawing/2014/main" id="{605AB555-19F5-4A6C-AD0E-0A8B3A386ABB}"/>
+                <a16:creationId xmlns:a16="http://schemas.microsoft.com/office/drawing/2014/main" id="{75A36E12-125F-46EA-976C-1339016DB2B6}"/>
               </a:ext>
             </a:extLst>
           </p:cNvPr>
@@ -13939,7 +13939,7 @@
           <p:cNvPr id="6" name="Je berekent TO vóór en na de prijswijziging.">
             <a:extLst xmlns:a="http://schemas.openxmlformats.org/drawingml/2006/main">
               <a:ext uri="{FF2B5EF4-FFF2-40B4-BE49-F238E27FC236}">
-                <a16:creationId xmlns:a16="http://schemas.microsoft.com/office/drawing/2014/main" id="{854D7925-5F4D-48F9-BEB6-25061FC37C44}"/>
+                <a16:creationId xmlns:a16="http://schemas.microsoft.com/office/drawing/2014/main" id="{890611CD-785B-40F6-B8FB-A731FC1B8CE1}"/>
               </a:ext>
             </a:extLst>
           </p:cNvPr>
@@ -13996,7 +13996,7 @@
           <p:cNvPr id="7" name="">
             <a:extLst xmlns:a="http://schemas.openxmlformats.org/drawingml/2006/main">
               <a:ext uri="{FF2B5EF4-FFF2-40B4-BE49-F238E27FC236}">
-                <a16:creationId xmlns:a16="http://schemas.microsoft.com/office/drawing/2014/main" id="{D1E95137-7296-4048-990A-4E88F083D231}"/>
+                <a16:creationId xmlns:a16="http://schemas.microsoft.com/office/drawing/2014/main" id="{DF20A4CC-5BC9-4080-A320-F6CD6A9D841A}"/>
               </a:ext>
             </a:extLst>
           </p:cNvPr>
@@ -14025,7 +14025,7 @@
           <p:cNvPr id="8" name="Een verandering in procenten">
             <a:extLst xmlns:a="http://schemas.openxmlformats.org/drawingml/2006/main">
               <a:ext uri="{FF2B5EF4-FFF2-40B4-BE49-F238E27FC236}">
-                <a16:creationId xmlns:a16="http://schemas.microsoft.com/office/drawing/2014/main" id="{C11C02B7-BB0E-47EC-989F-E3F11FBE923D}"/>
+                <a16:creationId xmlns:a16="http://schemas.microsoft.com/office/drawing/2014/main" id="{8733AFDC-1302-4A8B-BB90-F60CA8A6DDFD}"/>
               </a:ext>
             </a:extLst>
           </p:cNvPr>
@@ -14082,7 +14082,7 @@
           <p:cNvPr id="9" name="Je vergelijkt het verschil met de oude omzet.">
             <a:extLst xmlns:a="http://schemas.openxmlformats.org/drawingml/2006/main">
               <a:ext uri="{FF2B5EF4-FFF2-40B4-BE49-F238E27FC236}">
-                <a16:creationId xmlns:a16="http://schemas.microsoft.com/office/drawing/2014/main" id="{AC648390-333F-483B-8891-1EBC207FB0B1}"/>
+                <a16:creationId xmlns:a16="http://schemas.microsoft.com/office/drawing/2014/main" id="{81D1BB12-E3BF-4FB9-BD89-43366ACCCAAD}"/>
               </a:ext>
             </a:extLst>
           </p:cNvPr>
@@ -14139,7 +14139,7 @@
           <p:cNvPr id="10" name="">
             <a:extLst xmlns:a="http://schemas.openxmlformats.org/drawingml/2006/main">
               <a:ext uri="{FF2B5EF4-FFF2-40B4-BE49-F238E27FC236}">
-                <a16:creationId xmlns:a16="http://schemas.microsoft.com/office/drawing/2014/main" id="{640BC6F2-02BA-44E8-9861-135907C61320}"/>
+                <a16:creationId xmlns:a16="http://schemas.microsoft.com/office/drawing/2014/main" id="{B4F7672F-F7C7-439B-9A88-EC26F3805A57}"/>
               </a:ext>
             </a:extLst>
           </p:cNvPr>
@@ -14168,7 +14168,7 @@
           <p:cNvPr id="11" name="Elasticiteit gebruiken">
             <a:extLst xmlns:a="http://schemas.openxmlformats.org/drawingml/2006/main">
               <a:ext uri="{FF2B5EF4-FFF2-40B4-BE49-F238E27FC236}">
-                <a16:creationId xmlns:a16="http://schemas.microsoft.com/office/drawing/2014/main" id="{71FF02E7-C876-4430-94B1-63A7497F43AF}"/>
+                <a16:creationId xmlns:a16="http://schemas.microsoft.com/office/drawing/2014/main" id="{6E704FA0-B842-45F2-8D10-AE86501C3D36}"/>
               </a:ext>
             </a:extLst>
           </p:cNvPr>
@@ -14225,7 +14225,7 @@
           <p:cNvPr id="12" name="Je verklaart de uitkomst en de grens van de lokale">
             <a:extLst xmlns:a="http://schemas.openxmlformats.org/drawingml/2006/main">
               <a:ext uri="{FF2B5EF4-FFF2-40B4-BE49-F238E27FC236}">
-                <a16:creationId xmlns:a16="http://schemas.microsoft.com/office/drawing/2014/main" id="{AE7BD8A2-5A7C-45B1-8732-31F15450622A}"/>
+                <a16:creationId xmlns:a16="http://schemas.microsoft.com/office/drawing/2014/main" id="{B7B3F95A-17DC-4A70-B190-B450C853713A}"/>
               </a:ext>
             </a:extLst>
           </p:cNvPr>
@@ -14282,7 +14282,7 @@
           <p:cNvPr id="13" name="">
             <a:extLst xmlns:a="http://schemas.openxmlformats.org/drawingml/2006/main">
               <a:ext uri="{FF2B5EF4-FFF2-40B4-BE49-F238E27FC236}">
-                <a16:creationId xmlns:a16="http://schemas.microsoft.com/office/drawing/2014/main" id="{065768E1-9785-4231-996A-73115EE57A2D}"/>
+                <a16:creationId xmlns:a16="http://schemas.microsoft.com/office/drawing/2014/main" id="{8B0E6FA2-B8AD-4715-96F2-5EA0DA0AD146}"/>
               </a:ext>
             </a:extLst>
           </p:cNvPr>
@@ -14311,7 +14311,7 @@
           <p:cNvPr id="14" name="Winst onderscheiden">
             <a:extLst xmlns:a="http://schemas.openxmlformats.org/drawingml/2006/main">
               <a:ext uri="{FF2B5EF4-FFF2-40B4-BE49-F238E27FC236}">
-                <a16:creationId xmlns:a16="http://schemas.microsoft.com/office/drawing/2014/main" id="{DF389EA6-02CF-46DA-B05D-C56C135A0158}"/>
+                <a16:creationId xmlns:a16="http://schemas.microsoft.com/office/drawing/2014/main" id="{46DAC537-4DFC-434D-8E83-0092903FA7CA}"/>
               </a:ext>
             </a:extLst>
           </p:cNvPr>
@@ -14368,7 +14368,7 @@
           <p:cNvPr id="15" name="Je benoemt welke kostengegevens nog ontbreken.">
             <a:extLst xmlns:a="http://schemas.openxmlformats.org/drawingml/2006/main">
               <a:ext uri="{FF2B5EF4-FFF2-40B4-BE49-F238E27FC236}">
-                <a16:creationId xmlns:a16="http://schemas.microsoft.com/office/drawing/2014/main" id="{E81F7CD3-3B23-40E1-AFE5-F9C857672ABC}"/>
+                <a16:creationId xmlns:a16="http://schemas.microsoft.com/office/drawing/2014/main" id="{1C8BEC64-A513-457D-988E-2F3C2CA63675}"/>
               </a:ext>
             </a:extLst>
           </p:cNvPr>
@@ -14423,7 +14423,7 @@
     </p:spTree>
     <p:extLst>
       <p:ext uri="{BB962C8B-B14F-4D97-AF65-F5344CB8AC3E}">
-        <p14:creationId xmlns:p14="http://schemas.microsoft.com/office/powerpoint/2010/main" val="1315515778"/>
+        <p14:creationId xmlns:p14="http://schemas.microsoft.com/office/powerpoint/2010/main" val="1015942751"/>
       </p:ext>
     </p:extLst>
   </p:cSld>
@@ -14454,7 +14454,7 @@
           <p:cNvPr id="10" name="Opgave 7b: Nova, verandering en Ev">
             <a:extLst xmlns:a="http://schemas.openxmlformats.org/drawingml/2006/main">
               <a:ext uri="{FF2B5EF4-FFF2-40B4-BE49-F238E27FC236}">
-                <a16:creationId xmlns:a16="http://schemas.microsoft.com/office/drawing/2014/main" id="{632B916F-6DEA-48DE-AAE5-94EEF9FE7ACC}"/>
+                <a16:creationId xmlns:a16="http://schemas.microsoft.com/office/drawing/2014/main" id="{18C7B11E-D79D-495D-8CF0-E1E5BBBD80DD}"/>
               </a:ext>
             </a:extLst>
           </p:cNvPr>
@@ -14511,7 +14511,7 @@
           <p:cNvPr id="2" name="">
             <a:extLst xmlns:a="http://schemas.openxmlformats.org/drawingml/2006/main">
               <a:ext uri="{FF2B5EF4-FFF2-40B4-BE49-F238E27FC236}">
-                <a16:creationId xmlns:a16="http://schemas.microsoft.com/office/drawing/2014/main" id="{276BE89E-6A52-4371-A3AA-9D416BBBC09E}"/>
+                <a16:creationId xmlns:a16="http://schemas.microsoft.com/office/drawing/2014/main" id="{151C037E-0F36-41E5-BD4E-C1E226432482}"/>
               </a:ext>
             </a:extLst>
           </p:cNvPr>
@@ -14540,7 +14540,7 @@
           <p:cNvPr id="3" name="§2.2.2 Elasticiteit en omzet · Opgave 7 · Boekpagi">
             <a:extLst xmlns:a="http://schemas.openxmlformats.org/drawingml/2006/main">
               <a:ext uri="{FF2B5EF4-FFF2-40B4-BE49-F238E27FC236}">
-                <a16:creationId xmlns:a16="http://schemas.microsoft.com/office/drawing/2014/main" id="{CE9A38E5-35FA-423B-AFBA-C250D15BABB4}"/>
+                <a16:creationId xmlns:a16="http://schemas.microsoft.com/office/drawing/2014/main" id="{67790AEB-082C-450A-968D-EC8AFF2411E3}"/>
               </a:ext>
             </a:extLst>
           </p:cNvPr>
@@ -14587,7 +14587,7 @@
                 <a:ea typeface="Arial"/>
                 <a:cs typeface="Arial"/>
               </a:rPr>
-              <a:t>§2.2.2 Elasticiteit en omzet · Opgave 7 · Boekpagina 50</a:t>
+              <a:t>§2.2.2 Elasticiteit en omzet · Opgave 7 · Boekpagina 51</a:t>
             </a:r>
           </a:p>
         </p:txBody>
@@ -14597,7 +14597,7 @@
           <p:cNvPr id="4" name="20">
             <a:extLst xmlns:a="http://schemas.openxmlformats.org/drawingml/2006/main">
               <a:ext uri="{FF2B5EF4-FFF2-40B4-BE49-F238E27FC236}">
-                <a16:creationId xmlns:a16="http://schemas.microsoft.com/office/drawing/2014/main" id="{A951797A-1565-4C18-BE39-09EB0A3E3D3B}"/>
+                <a16:creationId xmlns:a16="http://schemas.microsoft.com/office/drawing/2014/main" id="{B57BB4F8-031C-4218-BAED-C81914244B81}"/>
               </a:ext>
             </a:extLst>
           </p:cNvPr>
@@ -14654,7 +14654,7 @@
           <p:cNvPr id="5" name="%ΔTO = (TO nieuw − TO oud) / TO oud × 100%">
             <a:extLst xmlns:a="http://schemas.openxmlformats.org/drawingml/2006/main">
               <a:ext uri="{FF2B5EF4-FFF2-40B4-BE49-F238E27FC236}">
-                <a16:creationId xmlns:a16="http://schemas.microsoft.com/office/drawing/2014/main" id="{E41D2C04-3920-49EB-A5A7-5FBF4F22DD74}"/>
+                <a16:creationId xmlns:a16="http://schemas.microsoft.com/office/drawing/2014/main" id="{69C0F414-CE8A-43A4-9506-42FA4483B388}"/>
               </a:ext>
             </a:extLst>
           </p:cNvPr>
@@ -14711,7 +14711,7 @@
           <p:cNvPr id="6" name="= (5.040 − 5.000) / 5.000 × 100% = +0,8%">
             <a:extLst xmlns:a="http://schemas.openxmlformats.org/drawingml/2006/main">
               <a:ext uri="{FF2B5EF4-FFF2-40B4-BE49-F238E27FC236}">
-                <a16:creationId xmlns:a16="http://schemas.microsoft.com/office/drawing/2014/main" id="{11734A3A-3E15-4FD6-87E4-B8E02C83C337}"/>
+                <a16:creationId xmlns:a16="http://schemas.microsoft.com/office/drawing/2014/main" id="{C6127592-70A9-4F6C-AFE2-2C0A22010D0C}"/>
               </a:ext>
             </a:extLst>
           </p:cNvPr>
@@ -14939,7 +14939,7 @@
           <p:cNvPr id="8" name="Prijsinelastisch: −1 &lt; −0,8 &lt; 0.">
             <a:extLst xmlns:a="http://schemas.openxmlformats.org/drawingml/2006/main">
               <a:ext uri="{FF2B5EF4-FFF2-40B4-BE49-F238E27FC236}">
-                <a16:creationId xmlns:a16="http://schemas.microsoft.com/office/drawing/2014/main" id="{442F1A82-7E20-4D7A-8D42-2330C8F7AB9A}"/>
+                <a16:creationId xmlns:a16="http://schemas.microsoft.com/office/drawing/2014/main" id="{DB6A82CD-E927-4916-B8B5-348230099D43}"/>
               </a:ext>
             </a:extLst>
           </p:cNvPr>
@@ -14996,7 +14996,7 @@
           <p:cNvPr id="9" name="De relatief zwakke afzetdaling past hier bij de om">
             <a:extLst xmlns:a="http://schemas.openxmlformats.org/drawingml/2006/main">
               <a:ext uri="{FF2B5EF4-FFF2-40B4-BE49-F238E27FC236}">
-                <a16:creationId xmlns:a16="http://schemas.microsoft.com/office/drawing/2014/main" id="{B09CFECD-3278-4D5F-AE31-D08072C5803D}"/>
+                <a16:creationId xmlns:a16="http://schemas.microsoft.com/office/drawing/2014/main" id="{4195417D-FEF6-4448-8342-463EC4519D78}"/>
               </a:ext>
             </a:extLst>
           </p:cNvPr>
@@ -15051,7 +15051,7 @@
     </p:spTree>
     <p:extLst>
       <p:ext uri="{BB962C8B-B14F-4D97-AF65-F5344CB8AC3E}">
-        <p14:creationId xmlns:p14="http://schemas.microsoft.com/office/powerpoint/2010/main" val="1979151398"/>
+        <p14:creationId xmlns:p14="http://schemas.microsoft.com/office/powerpoint/2010/main" val="230771131"/>
       </p:ext>
     </p:extLst>
   </p:cSld>
@@ -15082,7 +15082,7 @@
           <p:cNvPr id="8" name="Opgave 7c: StreamNow, omzet vóór en na">
             <a:extLst xmlns:a="http://schemas.openxmlformats.org/drawingml/2006/main">
               <a:ext uri="{FF2B5EF4-FFF2-40B4-BE49-F238E27FC236}">
-                <a16:creationId xmlns:a16="http://schemas.microsoft.com/office/drawing/2014/main" id="{975E15A7-B6CA-4E25-8BF1-52C72F31F6BF}"/>
+                <a16:creationId xmlns:a16="http://schemas.microsoft.com/office/drawing/2014/main" id="{E694AF27-2D16-419B-9CD2-2C955731D785}"/>
               </a:ext>
             </a:extLst>
           </p:cNvPr>
@@ -15139,7 +15139,7 @@
           <p:cNvPr id="2" name="">
             <a:extLst xmlns:a="http://schemas.openxmlformats.org/drawingml/2006/main">
               <a:ext uri="{FF2B5EF4-FFF2-40B4-BE49-F238E27FC236}">
-                <a16:creationId xmlns:a16="http://schemas.microsoft.com/office/drawing/2014/main" id="{8E82F8CD-0D09-4960-AC9E-3CFD46686C60}"/>
+                <a16:creationId xmlns:a16="http://schemas.microsoft.com/office/drawing/2014/main" id="{8CE87A35-2C5F-4003-95F4-BAB8AB4A1A06}"/>
               </a:ext>
             </a:extLst>
           </p:cNvPr>
@@ -15168,7 +15168,7 @@
           <p:cNvPr id="3" name="§2.2.2 Elasticiteit en omzet · Opgave 7 · Boekpagi">
             <a:extLst xmlns:a="http://schemas.openxmlformats.org/drawingml/2006/main">
               <a:ext uri="{FF2B5EF4-FFF2-40B4-BE49-F238E27FC236}">
-                <a16:creationId xmlns:a16="http://schemas.microsoft.com/office/drawing/2014/main" id="{58ACC6B2-4AAA-46F1-A97C-CF510E0F5FD7}"/>
+                <a16:creationId xmlns:a16="http://schemas.microsoft.com/office/drawing/2014/main" id="{6642A1E0-653D-44F2-9159-AAF80570D8AC}"/>
               </a:ext>
             </a:extLst>
           </p:cNvPr>
@@ -15215,7 +15215,7 @@
                 <a:ea typeface="Arial"/>
                 <a:cs typeface="Arial"/>
               </a:rPr>
-              <a:t>§2.2.2 Elasticiteit en omzet · Opgave 7 · Boekpagina 50</a:t>
+              <a:t>§2.2.2 Elasticiteit en omzet · Opgave 7 · Boekpagina 51</a:t>
             </a:r>
           </a:p>
         </p:txBody>
@@ -15225,7 +15225,7 @@
           <p:cNvPr id="4" name="21">
             <a:extLst xmlns:a="http://schemas.openxmlformats.org/drawingml/2006/main">
               <a:ext uri="{FF2B5EF4-FFF2-40B4-BE49-F238E27FC236}">
-                <a16:creationId xmlns:a16="http://schemas.microsoft.com/office/drawing/2014/main" id="{50CE3644-59DC-46A8-A95D-35CE0CE8CFEE}"/>
+                <a16:creationId xmlns:a16="http://schemas.microsoft.com/office/drawing/2014/main" id="{78F99D5F-9D71-40D4-9E77-29A69F67AA21}"/>
               </a:ext>
             </a:extLst>
           </p:cNvPr>
@@ -15282,7 +15282,7 @@
           <p:cNvPr id="5" name="TO = P × Q">
             <a:extLst xmlns:a="http://schemas.openxmlformats.org/drawingml/2006/main">
               <a:ext uri="{FF2B5EF4-FFF2-40B4-BE49-F238E27FC236}">
-                <a16:creationId xmlns:a16="http://schemas.microsoft.com/office/drawing/2014/main" id="{F8164E0E-DA65-482B-99FF-5DF543FF1B25}"/>
+                <a16:creationId xmlns:a16="http://schemas.microsoft.com/office/drawing/2014/main" id="{9EC17B27-F2A9-49F3-9AD9-2EFED82B68B0}"/>
               </a:ext>
             </a:extLst>
           </p:cNvPr>
@@ -15584,7 +15584,7 @@
           <p:cNvPr id="7" name="Controle: € 2.400 minder omzet per maand.">
             <a:extLst xmlns:a="http://schemas.openxmlformats.org/drawingml/2006/main">
               <a:ext uri="{FF2B5EF4-FFF2-40B4-BE49-F238E27FC236}">
-                <a16:creationId xmlns:a16="http://schemas.microsoft.com/office/drawing/2014/main" id="{9EDEED80-77FE-436D-9510-9C733279574D}"/>
+                <a16:creationId xmlns:a16="http://schemas.microsoft.com/office/drawing/2014/main" id="{CF2B3EE0-18CD-4F15-A825-5F2FD580E712}"/>
               </a:ext>
             </a:extLst>
           </p:cNvPr>
@@ -15639,7 +15639,7 @@
     </p:spTree>
     <p:extLst>
       <p:ext uri="{BB962C8B-B14F-4D97-AF65-F5344CB8AC3E}">
-        <p14:creationId xmlns:p14="http://schemas.microsoft.com/office/powerpoint/2010/main" val="1842970537"/>
+        <p14:creationId xmlns:p14="http://schemas.microsoft.com/office/powerpoint/2010/main" val="512405454"/>
       </p:ext>
     </p:extLst>
   </p:cSld>
@@ -15670,7 +15670,7 @@
           <p:cNvPr id="10" name="Opgave 7d: StreamNow, verandering en Ev">
             <a:extLst xmlns:a="http://schemas.openxmlformats.org/drawingml/2006/main">
               <a:ext uri="{FF2B5EF4-FFF2-40B4-BE49-F238E27FC236}">
-                <a16:creationId xmlns:a16="http://schemas.microsoft.com/office/drawing/2014/main" id="{D98C205C-D141-4D2F-8E63-15189B9D4153}"/>
+                <a16:creationId xmlns:a16="http://schemas.microsoft.com/office/drawing/2014/main" id="{D06C0E9E-437A-49CC-99F7-4A5163844239}"/>
               </a:ext>
             </a:extLst>
           </p:cNvPr>
@@ -15727,7 +15727,7 @@
           <p:cNvPr id="2" name="">
             <a:extLst xmlns:a="http://schemas.openxmlformats.org/drawingml/2006/main">
               <a:ext uri="{FF2B5EF4-FFF2-40B4-BE49-F238E27FC236}">
-                <a16:creationId xmlns:a16="http://schemas.microsoft.com/office/drawing/2014/main" id="{657C3253-B8C3-4B3C-AF6B-DFCCB1B1CBED}"/>
+                <a16:creationId xmlns:a16="http://schemas.microsoft.com/office/drawing/2014/main" id="{CA97846D-78CA-44F8-83E8-CC118A3BC465}"/>
               </a:ext>
             </a:extLst>
           </p:cNvPr>
@@ -15756,7 +15756,7 @@
           <p:cNvPr id="3" name="§2.2.2 Elasticiteit en omzet · Opgave 7 · Boekpagi">
             <a:extLst xmlns:a="http://schemas.openxmlformats.org/drawingml/2006/main">
               <a:ext uri="{FF2B5EF4-FFF2-40B4-BE49-F238E27FC236}">
-                <a16:creationId xmlns:a16="http://schemas.microsoft.com/office/drawing/2014/main" id="{110610DC-EE67-4C13-8393-B44AF4495408}"/>
+                <a16:creationId xmlns:a16="http://schemas.microsoft.com/office/drawing/2014/main" id="{02C9C8CC-6113-4B59-92C9-97347D88A222}"/>
               </a:ext>
             </a:extLst>
           </p:cNvPr>
@@ -15803,7 +15803,7 @@
                 <a:ea typeface="Arial"/>
                 <a:cs typeface="Arial"/>
               </a:rPr>
-              <a:t>§2.2.2 Elasticiteit en omzet · Opgave 7 · Boekpagina 50</a:t>
+              <a:t>§2.2.2 Elasticiteit en omzet · Opgave 7 · Boekpagina 51</a:t>
             </a:r>
           </a:p>
         </p:txBody>
@@ -15813,7 +15813,7 @@
           <p:cNvPr id="4" name="22">
             <a:extLst xmlns:a="http://schemas.openxmlformats.org/drawingml/2006/main">
               <a:ext uri="{FF2B5EF4-FFF2-40B4-BE49-F238E27FC236}">
-                <a16:creationId xmlns:a16="http://schemas.microsoft.com/office/drawing/2014/main" id="{A17BA661-C99F-4095-88D9-41A4851C6DEF}"/>
+                <a16:creationId xmlns:a16="http://schemas.microsoft.com/office/drawing/2014/main" id="{355241B0-7CF4-4783-8606-32C2B30957FC}"/>
               </a:ext>
             </a:extLst>
           </p:cNvPr>
@@ -15870,7 +15870,7 @@
           <p:cNvPr id="5" name="%ΔTO = (TO nieuw − TO oud) / TO oud × 100%">
             <a:extLst xmlns:a="http://schemas.openxmlformats.org/drawingml/2006/main">
               <a:ext uri="{FF2B5EF4-FFF2-40B4-BE49-F238E27FC236}">
-                <a16:creationId xmlns:a16="http://schemas.microsoft.com/office/drawing/2014/main" id="{F2E263C4-6A48-451F-817A-C9EC8A2F84B2}"/>
+                <a16:creationId xmlns:a16="http://schemas.microsoft.com/office/drawing/2014/main" id="{C2E10F64-6E26-481F-987E-D64237F425AE}"/>
               </a:ext>
             </a:extLst>
           </p:cNvPr>
@@ -15927,7 +15927,7 @@
           <p:cNvPr id="6" name="= (17.600 − 20.000) / 20.000 × 100% = −12%">
             <a:extLst xmlns:a="http://schemas.openxmlformats.org/drawingml/2006/main">
               <a:ext uri="{FF2B5EF4-FFF2-40B4-BE49-F238E27FC236}">
-                <a16:creationId xmlns:a16="http://schemas.microsoft.com/office/drawing/2014/main" id="{A46F0C73-E957-4DF2-B686-475A1A707EAE}"/>
+                <a16:creationId xmlns:a16="http://schemas.microsoft.com/office/drawing/2014/main" id="{497F93BF-3CFE-4E6E-AA49-27220B21BD85}"/>
               </a:ext>
             </a:extLst>
           </p:cNvPr>
@@ -16155,7 +16155,7 @@
           <p:cNvPr id="8" name="Prijselastisch: Ev &lt; −1.">
             <a:extLst xmlns:a="http://schemas.openxmlformats.org/drawingml/2006/main">
               <a:ext uri="{FF2B5EF4-FFF2-40B4-BE49-F238E27FC236}">
-                <a16:creationId xmlns:a16="http://schemas.microsoft.com/office/drawing/2014/main" id="{3A5451D5-5345-4DED-AE7F-57CCE0E5EAAB}"/>
+                <a16:creationId xmlns:a16="http://schemas.microsoft.com/office/drawing/2014/main" id="{57D9D9A1-0F1B-4488-9E5A-82FE4A89DACA}"/>
               </a:ext>
             </a:extLst>
           </p:cNvPr>
@@ -16212,7 +16212,7 @@
           <p:cNvPr id="9" name="De relatief sterke afzetdaling past hier bij de om">
             <a:extLst xmlns:a="http://schemas.openxmlformats.org/drawingml/2006/main">
               <a:ext uri="{FF2B5EF4-FFF2-40B4-BE49-F238E27FC236}">
-                <a16:creationId xmlns:a16="http://schemas.microsoft.com/office/drawing/2014/main" id="{C51E7F8B-50D3-4864-86D1-13EE91B1B3CB}"/>
+                <a16:creationId xmlns:a16="http://schemas.microsoft.com/office/drawing/2014/main" id="{BF207571-475C-4220-8FBD-36C1263F5522}"/>
               </a:ext>
             </a:extLst>
           </p:cNvPr>
@@ -16267,7 +16267,7 @@
     </p:spTree>
     <p:extLst>
       <p:ext uri="{BB962C8B-B14F-4D97-AF65-F5344CB8AC3E}">
-        <p14:creationId xmlns:p14="http://schemas.microsoft.com/office/powerpoint/2010/main" val="1049325388"/>
+        <p14:creationId xmlns:p14="http://schemas.microsoft.com/office/powerpoint/2010/main" val="351046159"/>
       </p:ext>
     </p:extLst>
   </p:cSld>
@@ -16298,7 +16298,7 @@
           <p:cNvPr id="8" name="Opgave 7e: de lokale omzetregel">
             <a:extLst xmlns:a="http://schemas.openxmlformats.org/drawingml/2006/main">
               <a:ext uri="{FF2B5EF4-FFF2-40B4-BE49-F238E27FC236}">
-                <a16:creationId xmlns:a16="http://schemas.microsoft.com/office/drawing/2014/main" id="{3BB3BD37-8152-45E7-9BE0-7912F0D376DB}"/>
+                <a16:creationId xmlns:a16="http://schemas.microsoft.com/office/drawing/2014/main" id="{553FCA5C-3A3F-4E86-97A8-2BD251A329D4}"/>
               </a:ext>
             </a:extLst>
           </p:cNvPr>
@@ -16355,7 +16355,7 @@
           <p:cNvPr id="2" name="">
             <a:extLst xmlns:a="http://schemas.openxmlformats.org/drawingml/2006/main">
               <a:ext uri="{FF2B5EF4-FFF2-40B4-BE49-F238E27FC236}">
-                <a16:creationId xmlns:a16="http://schemas.microsoft.com/office/drawing/2014/main" id="{EE478F8B-2585-4F6C-BE18-36BA7D9597C6}"/>
+                <a16:creationId xmlns:a16="http://schemas.microsoft.com/office/drawing/2014/main" id="{2CABF2DB-E192-433F-9010-72E7E742CD27}"/>
               </a:ext>
             </a:extLst>
           </p:cNvPr>
@@ -16384,7 +16384,7 @@
           <p:cNvPr id="3" name="§2.2.2 Elasticiteit en omzet · Opgave 7 · Boekpagi">
             <a:extLst xmlns:a="http://schemas.openxmlformats.org/drawingml/2006/main">
               <a:ext uri="{FF2B5EF4-FFF2-40B4-BE49-F238E27FC236}">
-                <a16:creationId xmlns:a16="http://schemas.microsoft.com/office/drawing/2014/main" id="{3EBA53AE-7F35-4882-93FC-27864C5A567F}"/>
+                <a16:creationId xmlns:a16="http://schemas.microsoft.com/office/drawing/2014/main" id="{4FC7D8CC-3E7B-44A5-9544-509A9C0E671E}"/>
               </a:ext>
             </a:extLst>
           </p:cNvPr>
@@ -16431,7 +16431,7 @@
                 <a:ea typeface="Arial"/>
                 <a:cs typeface="Arial"/>
               </a:rPr>
-              <a:t>§2.2.2 Elasticiteit en omzet · Opgave 7 · Boekpagina 50</a:t>
+              <a:t>§2.2.2 Elasticiteit en omzet · Opgave 7 · Boekpagina 51</a:t>
             </a:r>
           </a:p>
         </p:txBody>
@@ -16441,7 +16441,7 @@
           <p:cNvPr id="4" name="23">
             <a:extLst xmlns:a="http://schemas.openxmlformats.org/drawingml/2006/main">
               <a:ext uri="{FF2B5EF4-FFF2-40B4-BE49-F238E27FC236}">
-                <a16:creationId xmlns:a16="http://schemas.microsoft.com/office/drawing/2014/main" id="{FCDA4A5F-9F6E-4DD5-8BB3-F19CC6221DDD}"/>
+                <a16:creationId xmlns:a16="http://schemas.microsoft.com/office/drawing/2014/main" id="{71F7B381-ABD4-47D5-8C88-A6944E06117C}"/>
               </a:ext>
             </a:extLst>
           </p:cNvPr>
@@ -16498,7 +16498,7 @@
           <p:cNvPr id="5" name="Bij een kleine prijsverandering rond de huidige si">
             <a:extLst xmlns:a="http://schemas.openxmlformats.org/drawingml/2006/main">
               <a:ext uri="{FF2B5EF4-FFF2-40B4-BE49-F238E27FC236}">
-                <a16:creationId xmlns:a16="http://schemas.microsoft.com/office/drawing/2014/main" id="{26D5C6A0-8EFC-4392-9FFF-A47D435D7D84}"/>
+                <a16:creationId xmlns:a16="http://schemas.microsoft.com/office/drawing/2014/main" id="{B5AB5967-8479-4156-9D88-441AAFB176CD}"/>
               </a:ext>
             </a:extLst>
           </p:cNvPr>
@@ -16939,7 +16939,7 @@
           <p:cNvPr id="7" name="Bij gegeven oude en nieuwe waarden: TO altijd nare">
             <a:extLst xmlns:a="http://schemas.openxmlformats.org/drawingml/2006/main">
               <a:ext uri="{FF2B5EF4-FFF2-40B4-BE49-F238E27FC236}">
-                <a16:creationId xmlns:a16="http://schemas.microsoft.com/office/drawing/2014/main" id="{55CC8F77-26A8-46EE-B1FF-FC02C40D052D}"/>
+                <a16:creationId xmlns:a16="http://schemas.microsoft.com/office/drawing/2014/main" id="{9E17D8D1-FBFC-4B2F-AC6D-1D7C6BD8BC03}"/>
               </a:ext>
             </a:extLst>
           </p:cNvPr>
@@ -16994,7 +16994,7 @@
     </p:spTree>
     <p:extLst>
       <p:ext uri="{BB962C8B-B14F-4D97-AF65-F5344CB8AC3E}">
-        <p14:creationId xmlns:p14="http://schemas.microsoft.com/office/powerpoint/2010/main" val="1413315854"/>
+        <p14:creationId xmlns:p14="http://schemas.microsoft.com/office/powerpoint/2010/main" val="1249835391"/>
       </p:ext>
     </p:extLst>
   </p:cSld>
@@ -17025,7 +17025,7 @@
           <p:cNvPr id="8" name="Opgave 7e: een grote, eindige verandering">
             <a:extLst xmlns:a="http://schemas.openxmlformats.org/drawingml/2006/main">
               <a:ext uri="{FF2B5EF4-FFF2-40B4-BE49-F238E27FC236}">
-                <a16:creationId xmlns:a16="http://schemas.microsoft.com/office/drawing/2014/main" id="{12C14A04-B3FA-4E19-968C-8074821B3626}"/>
+                <a16:creationId xmlns:a16="http://schemas.microsoft.com/office/drawing/2014/main" id="{4DCFEAA5-B22E-40CE-9FCD-77CC409F73DD}"/>
               </a:ext>
             </a:extLst>
           </p:cNvPr>
@@ -17082,7 +17082,7 @@
           <p:cNvPr id="2" name="">
             <a:extLst xmlns:a="http://schemas.openxmlformats.org/drawingml/2006/main">
               <a:ext uri="{FF2B5EF4-FFF2-40B4-BE49-F238E27FC236}">
-                <a16:creationId xmlns:a16="http://schemas.microsoft.com/office/drawing/2014/main" id="{4DD55092-4B77-4C1C-BE81-6B9227C4C57E}"/>
+                <a16:creationId xmlns:a16="http://schemas.microsoft.com/office/drawing/2014/main" id="{3DEE5995-1151-4813-8A0D-544FF9625414}"/>
               </a:ext>
             </a:extLst>
           </p:cNvPr>
@@ -17111,7 +17111,7 @@
           <p:cNvPr id="3" name="§2.2.2 Elasticiteit en omzet · Opgave 7 · Boekpagi">
             <a:extLst xmlns:a="http://schemas.openxmlformats.org/drawingml/2006/main">
               <a:ext uri="{FF2B5EF4-FFF2-40B4-BE49-F238E27FC236}">
-                <a16:creationId xmlns:a16="http://schemas.microsoft.com/office/drawing/2014/main" id="{ACEABBA4-D631-46F2-B293-6520CCE3E129}"/>
+                <a16:creationId xmlns:a16="http://schemas.microsoft.com/office/drawing/2014/main" id="{2949C7D7-7E7D-4934-A01C-6A6DA21D18F7}"/>
               </a:ext>
             </a:extLst>
           </p:cNvPr>
@@ -17158,7 +17158,7 @@
                 <a:ea typeface="Arial"/>
                 <a:cs typeface="Arial"/>
               </a:rPr>
-              <a:t>§2.2.2 Elasticiteit en omzet · Opgave 7 · Boekpagina 50</a:t>
+              <a:t>§2.2.2 Elasticiteit en omzet · Opgave 7 · Boekpagina 51</a:t>
             </a:r>
           </a:p>
         </p:txBody>
@@ -17168,7 +17168,7 @@
           <p:cNvPr id="4" name="24">
             <a:extLst xmlns:a="http://schemas.openxmlformats.org/drawingml/2006/main">
               <a:ext uri="{FF2B5EF4-FFF2-40B4-BE49-F238E27FC236}">
-                <a16:creationId xmlns:a16="http://schemas.microsoft.com/office/drawing/2014/main" id="{6524DDA8-49E2-40AE-AA0F-5253F21136EC}"/>
+                <a16:creationId xmlns:a16="http://schemas.microsoft.com/office/drawing/2014/main" id="{DA5ADD92-8654-4BDE-9697-A37D4B09E4D9}"/>
               </a:ext>
             </a:extLst>
           </p:cNvPr>
@@ -17225,7 +17225,7 @@
           <p:cNvPr id="5" name="Een gemeten Ev geldt niet automatisch bij elke pri">
             <a:extLst xmlns:a="http://schemas.openxmlformats.org/drawingml/2006/main">
               <a:ext uri="{FF2B5EF4-FFF2-40B4-BE49-F238E27FC236}">
-                <a16:creationId xmlns:a16="http://schemas.microsoft.com/office/drawing/2014/main" id="{3A205429-EEF6-4FAA-8D9F-59AF6A78D2D4}"/>
+                <a16:creationId xmlns:a16="http://schemas.microsoft.com/office/drawing/2014/main" id="{C44C3A54-7E2D-4264-9F62-9B994182F8F1}"/>
               </a:ext>
             </a:extLst>
           </p:cNvPr>
@@ -17282,7 +17282,7 @@
           <p:cNvPr id="6" name="De omzetfactor is de prijsfactor × de hoeveelheids">
             <a:extLst xmlns:a="http://schemas.openxmlformats.org/drawingml/2006/main">
               <a:ext uri="{FF2B5EF4-FFF2-40B4-BE49-F238E27FC236}">
-                <a16:creationId xmlns:a16="http://schemas.microsoft.com/office/drawing/2014/main" id="{FBF3E9DA-3023-4E4C-B216-6263EC807988}"/>
+                <a16:creationId xmlns:a16="http://schemas.microsoft.com/office/drawing/2014/main" id="{8F4E3499-FB52-4B84-81F5-14E6DAE7F205}"/>
               </a:ext>
             </a:extLst>
           </p:cNvPr>
@@ -17582,7 +17582,7 @@
     </p:spTree>
     <p:extLst>
       <p:ext uri="{BB962C8B-B14F-4D97-AF65-F5344CB8AC3E}">
-        <p14:creationId xmlns:p14="http://schemas.microsoft.com/office/powerpoint/2010/main" val="1277945676"/>
+        <p14:creationId xmlns:p14="http://schemas.microsoft.com/office/powerpoint/2010/main" val="1655548535"/>
       </p:ext>
     </p:extLst>
   </p:cSld>
@@ -17613,7 +17613,7 @@
           <p:cNvPr id="8" name="Opgave 7f: de winst is nog onbekend">
             <a:extLst xmlns:a="http://schemas.openxmlformats.org/drawingml/2006/main">
               <a:ext uri="{FF2B5EF4-FFF2-40B4-BE49-F238E27FC236}">
-                <a16:creationId xmlns:a16="http://schemas.microsoft.com/office/drawing/2014/main" id="{EB7B44DC-8F4F-4DB1-B239-CF92663A2294}"/>
+                <a16:creationId xmlns:a16="http://schemas.microsoft.com/office/drawing/2014/main" id="{623B6CFB-B259-458A-933D-DE97644EF529}"/>
               </a:ext>
             </a:extLst>
           </p:cNvPr>
@@ -17670,7 +17670,7 @@
           <p:cNvPr id="2" name="">
             <a:extLst xmlns:a="http://schemas.openxmlformats.org/drawingml/2006/main">
               <a:ext uri="{FF2B5EF4-FFF2-40B4-BE49-F238E27FC236}">
-                <a16:creationId xmlns:a16="http://schemas.microsoft.com/office/drawing/2014/main" id="{F52E9347-E6CF-4C58-8CF1-F6CC50FD0486}"/>
+                <a16:creationId xmlns:a16="http://schemas.microsoft.com/office/drawing/2014/main" id="{5160A345-1336-4482-A8CA-FDA0BBFE0503}"/>
               </a:ext>
             </a:extLst>
           </p:cNvPr>
@@ -17699,7 +17699,7 @@
           <p:cNvPr id="3" name="§2.2.2 Elasticiteit en omzet · Opgave 7 · Boekpagi">
             <a:extLst xmlns:a="http://schemas.openxmlformats.org/drawingml/2006/main">
               <a:ext uri="{FF2B5EF4-FFF2-40B4-BE49-F238E27FC236}">
-                <a16:creationId xmlns:a16="http://schemas.microsoft.com/office/drawing/2014/main" id="{62D0C084-AB6C-4A8A-BEAC-8125F7CA6015}"/>
+                <a16:creationId xmlns:a16="http://schemas.microsoft.com/office/drawing/2014/main" id="{7DD0DD96-E269-4099-B1E6-3C8D674FABA0}"/>
               </a:ext>
             </a:extLst>
           </p:cNvPr>
@@ -17746,7 +17746,7 @@
                 <a:ea typeface="Arial"/>
                 <a:cs typeface="Arial"/>
               </a:rPr>
-              <a:t>§2.2.2 Elasticiteit en omzet · Opgave 7 · Boekpagina 50</a:t>
+              <a:t>§2.2.2 Elasticiteit en omzet · Opgave 7 · Boekpagina 51</a:t>
             </a:r>
           </a:p>
         </p:txBody>
@@ -17756,7 +17756,7 @@
           <p:cNvPr id="4" name="25">
             <a:extLst xmlns:a="http://schemas.openxmlformats.org/drawingml/2006/main">
               <a:ext uri="{FF2B5EF4-FFF2-40B4-BE49-F238E27FC236}">
-                <a16:creationId xmlns:a16="http://schemas.microsoft.com/office/drawing/2014/main" id="{820E8025-A236-4AE9-AAD5-91375BA85A95}"/>
+                <a16:creationId xmlns:a16="http://schemas.microsoft.com/office/drawing/2014/main" id="{242DE183-912E-4206-906C-95A7DF3ACC59}"/>
               </a:ext>
             </a:extLst>
           </p:cNvPr>
@@ -17813,7 +17813,7 @@
           <p:cNvPr id="5" name="Winst = TO − TK">
             <a:extLst xmlns:a="http://schemas.openxmlformats.org/drawingml/2006/main">
               <a:ext uri="{FF2B5EF4-FFF2-40B4-BE49-F238E27FC236}">
-                <a16:creationId xmlns:a16="http://schemas.microsoft.com/office/drawing/2014/main" id="{DF1BFD97-A039-4046-BCA0-060415A60E1A}"/>
+                <a16:creationId xmlns:a16="http://schemas.microsoft.com/office/drawing/2014/main" id="{86522404-FD51-4DC4-8C86-D9AB983F8C32}"/>
               </a:ext>
             </a:extLst>
           </p:cNvPr>
@@ -17992,7 +17992,7 @@
           <p:cNvPr id="7" name="Zonder kosten vóór en na volgt geen zekere winstve">
             <a:extLst xmlns:a="http://schemas.openxmlformats.org/drawingml/2006/main">
               <a:ext uri="{FF2B5EF4-FFF2-40B4-BE49-F238E27FC236}">
-                <a16:creationId xmlns:a16="http://schemas.microsoft.com/office/drawing/2014/main" id="{58BBE287-5405-483D-9107-24A20DDF96DF}"/>
+                <a16:creationId xmlns:a16="http://schemas.microsoft.com/office/drawing/2014/main" id="{7D4660C4-E65E-402E-AD89-CCE391315746}"/>
               </a:ext>
             </a:extLst>
           </p:cNvPr>
@@ -18047,7 +18047,7 @@
     </p:spTree>
     <p:extLst>
       <p:ext uri="{BB962C8B-B14F-4D97-AF65-F5344CB8AC3E}">
-        <p14:creationId xmlns:p14="http://schemas.microsoft.com/office/powerpoint/2010/main" val="845289556"/>
+        <p14:creationId xmlns:p14="http://schemas.microsoft.com/office/powerpoint/2010/main" val="239656781"/>
       </p:ext>
     </p:extLst>
   </p:cSld>
@@ -18078,7 +18078,7 @@
           <p:cNvPr id="29" name="Deze les: §2.2.2 Elasticiteit en omzet">
             <a:extLst xmlns:a="http://schemas.openxmlformats.org/drawingml/2006/main">
               <a:ext uri="{FF2B5EF4-FFF2-40B4-BE49-F238E27FC236}">
-                <a16:creationId xmlns:a16="http://schemas.microsoft.com/office/drawing/2014/main" id="{F216D3D7-3684-4F21-818C-754DD250C520}"/>
+                <a16:creationId xmlns:a16="http://schemas.microsoft.com/office/drawing/2014/main" id="{B1397BD0-8803-48C6-B45D-D0F72EA654E1}"/>
               </a:ext>
             </a:extLst>
           </p:cNvPr>
@@ -18135,7 +18135,7 @@
           <p:cNvPr id="2" name="">
             <a:extLst xmlns:a="http://schemas.openxmlformats.org/drawingml/2006/main">
               <a:ext uri="{FF2B5EF4-FFF2-40B4-BE49-F238E27FC236}">
-                <a16:creationId xmlns:a16="http://schemas.microsoft.com/office/drawing/2014/main" id="{3F98F72C-6DEF-4EB2-AAFE-C59C9BBA601B}"/>
+                <a16:creationId xmlns:a16="http://schemas.microsoft.com/office/drawing/2014/main" id="{939CA09D-F4C8-4867-99E3-2DDB8D94A754}"/>
               </a:ext>
             </a:extLst>
           </p:cNvPr>
@@ -18164,7 +18164,7 @@
           <p:cNvPr id="3" name="§2.2.2 Elasticiteit en omzet">
             <a:extLst xmlns:a="http://schemas.openxmlformats.org/drawingml/2006/main">
               <a:ext uri="{FF2B5EF4-FFF2-40B4-BE49-F238E27FC236}">
-                <a16:creationId xmlns:a16="http://schemas.microsoft.com/office/drawing/2014/main" id="{DA1BBA5F-65F7-493E-8055-29AB1BC8846E}"/>
+                <a16:creationId xmlns:a16="http://schemas.microsoft.com/office/drawing/2014/main" id="{63D2470D-E669-42C9-AE38-B703DA8B38A9}"/>
               </a:ext>
             </a:extLst>
           </p:cNvPr>
@@ -18221,7 +18221,7 @@
           <p:cNvPr id="4" name="26">
             <a:extLst xmlns:a="http://schemas.openxmlformats.org/drawingml/2006/main">
               <a:ext uri="{FF2B5EF4-FFF2-40B4-BE49-F238E27FC236}">
-                <a16:creationId xmlns:a16="http://schemas.microsoft.com/office/drawing/2014/main" id="{071D2F9F-9398-4D89-B22D-5400708D44DF}"/>
+                <a16:creationId xmlns:a16="http://schemas.microsoft.com/office/drawing/2014/main" id="{90C8D42F-6669-48B8-989F-2E96D46A9A17}"/>
               </a:ext>
             </a:extLst>
           </p:cNvPr>
@@ -18278,7 +18278,7 @@
           <p:cNvPr id="5" name="phase">
             <a:extLst xmlns:a="http://schemas.openxmlformats.org/drawingml/2006/main">
               <a:ext uri="{FF2B5EF4-FFF2-40B4-BE49-F238E27FC236}">
-                <a16:creationId xmlns:a16="http://schemas.microsoft.com/office/drawing/2014/main" id="{52F882D9-F01E-44FB-A767-5767C652822E}"/>
+                <a16:creationId xmlns:a16="http://schemas.microsoft.com/office/drawing/2014/main" id="{57A41B88-7CCC-45E0-8FCD-B713B88CD4BE}"/>
               </a:ext>
             </a:extLst>
           </p:cNvPr>
@@ -18335,7 +18335,7 @@
           <p:cNvPr id="6" name="Lesroute">
             <a:extLst xmlns:a="http://schemas.openxmlformats.org/drawingml/2006/main">
               <a:ext uri="{FF2B5EF4-FFF2-40B4-BE49-F238E27FC236}">
-                <a16:creationId xmlns:a16="http://schemas.microsoft.com/office/drawing/2014/main" id="{2FB38364-7D4B-44B3-AA3C-3DBDB7B0B9A6}"/>
+                <a16:creationId xmlns:a16="http://schemas.microsoft.com/office/drawing/2014/main" id="{198BEC0E-7930-4EF2-AA83-0B54F67EAB4F}"/>
               </a:ext>
             </a:extLst>
           </p:cNvPr>
@@ -18392,7 +18392,7 @@
           <p:cNvPr id="7" name="route-number-1">
             <a:extLst xmlns:a="http://schemas.openxmlformats.org/drawingml/2006/main">
               <a:ext uri="{FF2B5EF4-FFF2-40B4-BE49-F238E27FC236}">
-                <a16:creationId xmlns:a16="http://schemas.microsoft.com/office/drawing/2014/main" id="{C80165BA-1461-40C2-9E69-4913248707F6}"/>
+                <a16:creationId xmlns:a16="http://schemas.microsoft.com/office/drawing/2014/main" id="{38B54940-221E-4CFF-B25B-8EFFF2C050DF}"/>
               </a:ext>
             </a:extLst>
           </p:cNvPr>
@@ -18449,7 +18449,7 @@
           <p:cNvPr id="8" name="route-1">
             <a:extLst xmlns:a="http://schemas.openxmlformats.org/drawingml/2006/main">
               <a:ext uri="{FF2B5EF4-FFF2-40B4-BE49-F238E27FC236}">
-                <a16:creationId xmlns:a16="http://schemas.microsoft.com/office/drawing/2014/main" id="{A6AD676D-57DC-47F6-A18C-0E1ADC17D42A}"/>
+                <a16:creationId xmlns:a16="http://schemas.microsoft.com/office/drawing/2014/main" id="{2D5C53CC-309F-430C-8047-A6D3C1D43BAB}"/>
               </a:ext>
             </a:extLst>
           </p:cNvPr>
@@ -18506,7 +18506,7 @@
           <p:cNvPr id="9" name="route-number-2">
             <a:extLst xmlns:a="http://schemas.openxmlformats.org/drawingml/2006/main">
               <a:ext uri="{FF2B5EF4-FFF2-40B4-BE49-F238E27FC236}">
-                <a16:creationId xmlns:a16="http://schemas.microsoft.com/office/drawing/2014/main" id="{00857CAD-8927-400C-85A9-19019E469AAB}"/>
+                <a16:creationId xmlns:a16="http://schemas.microsoft.com/office/drawing/2014/main" id="{4D202550-11F8-4A33-B7EA-7ECF7194DFAF}"/>
               </a:ext>
             </a:extLst>
           </p:cNvPr>
@@ -18563,7 +18563,7 @@
           <p:cNvPr id="10" name="route-2">
             <a:extLst xmlns:a="http://schemas.openxmlformats.org/drawingml/2006/main">
               <a:ext uri="{FF2B5EF4-FFF2-40B4-BE49-F238E27FC236}">
-                <a16:creationId xmlns:a16="http://schemas.microsoft.com/office/drawing/2014/main" id="{BCA28784-C6FA-4488-8E85-554129828E35}"/>
+                <a16:creationId xmlns:a16="http://schemas.microsoft.com/office/drawing/2014/main" id="{E00E2BCC-A32E-4B21-BFD5-B1CD8D74DAC6}"/>
               </a:ext>
             </a:extLst>
           </p:cNvPr>
@@ -18620,7 +18620,7 @@
           <p:cNvPr id="11" name="route-number-3">
             <a:extLst xmlns:a="http://schemas.openxmlformats.org/drawingml/2006/main">
               <a:ext uri="{FF2B5EF4-FFF2-40B4-BE49-F238E27FC236}">
-                <a16:creationId xmlns:a16="http://schemas.microsoft.com/office/drawing/2014/main" id="{DDE1BBC7-02A6-4877-9A42-58C802918E7D}"/>
+                <a16:creationId xmlns:a16="http://schemas.microsoft.com/office/drawing/2014/main" id="{1C1EC734-FF03-41CC-B728-1BC660CE43E1}"/>
               </a:ext>
             </a:extLst>
           </p:cNvPr>
@@ -18677,7 +18677,7 @@
           <p:cNvPr id="12" name="route-3">
             <a:extLst xmlns:a="http://schemas.openxmlformats.org/drawingml/2006/main">
               <a:ext uri="{FF2B5EF4-FFF2-40B4-BE49-F238E27FC236}">
-                <a16:creationId xmlns:a16="http://schemas.microsoft.com/office/drawing/2014/main" id="{B22EA197-C64C-42AA-819B-502496E42934}"/>
+                <a16:creationId xmlns:a16="http://schemas.microsoft.com/office/drawing/2014/main" id="{40CD793B-6E11-49B2-826D-E74044AFC262}"/>
               </a:ext>
             </a:extLst>
           </p:cNvPr>
@@ -18734,7 +18734,7 @@
           <p:cNvPr id="13" name="route-number-4">
             <a:extLst xmlns:a="http://schemas.openxmlformats.org/drawingml/2006/main">
               <a:ext uri="{FF2B5EF4-FFF2-40B4-BE49-F238E27FC236}">
-                <a16:creationId xmlns:a16="http://schemas.microsoft.com/office/drawing/2014/main" id="{35C7A43E-9CF2-43E7-9FBA-827EA0AFBB5B}"/>
+                <a16:creationId xmlns:a16="http://schemas.microsoft.com/office/drawing/2014/main" id="{1953AE7A-A013-476C-A05C-B1402666D525}"/>
               </a:ext>
             </a:extLst>
           </p:cNvPr>
@@ -18791,7 +18791,7 @@
           <p:cNvPr id="14" name="route-4">
             <a:extLst xmlns:a="http://schemas.openxmlformats.org/drawingml/2006/main">
               <a:ext uri="{FF2B5EF4-FFF2-40B4-BE49-F238E27FC236}">
-                <a16:creationId xmlns:a16="http://schemas.microsoft.com/office/drawing/2014/main" id="{905C3B65-4C5A-4AD5-B74C-5E767F9ABC01}"/>
+                <a16:creationId xmlns:a16="http://schemas.microsoft.com/office/drawing/2014/main" id="{B3EC7ECB-AD9C-4D91-A05B-82F0DED18EB3}"/>
               </a:ext>
             </a:extLst>
           </p:cNvPr>
@@ -18848,7 +18848,7 @@
           <p:cNvPr id="15" name="route-number-5">
             <a:extLst xmlns:a="http://schemas.openxmlformats.org/drawingml/2006/main">
               <a:ext uri="{FF2B5EF4-FFF2-40B4-BE49-F238E27FC236}">
-                <a16:creationId xmlns:a16="http://schemas.microsoft.com/office/drawing/2014/main" id="{3239D9B9-C7B8-46B7-A4DF-CFA24075CA90}"/>
+                <a16:creationId xmlns:a16="http://schemas.microsoft.com/office/drawing/2014/main" id="{018C4B6B-9D10-41D7-A443-96CB52EAE9BC}"/>
               </a:ext>
             </a:extLst>
           </p:cNvPr>
@@ -18905,7 +18905,7 @@
           <p:cNvPr id="16" name="route-5">
             <a:extLst xmlns:a="http://schemas.openxmlformats.org/drawingml/2006/main">
               <a:ext uri="{FF2B5EF4-FFF2-40B4-BE49-F238E27FC236}">
-                <a16:creationId xmlns:a16="http://schemas.microsoft.com/office/drawing/2014/main" id="{C69EE50F-5485-4FBD-AE06-D2AF969462F0}"/>
+                <a16:creationId xmlns:a16="http://schemas.microsoft.com/office/drawing/2014/main" id="{41403617-6C56-4954-904A-C65B844D7ECA}"/>
               </a:ext>
             </a:extLst>
           </p:cNvPr>
@@ -18962,7 +18962,7 @@
           <p:cNvPr id="17" name="route-number-6">
             <a:extLst xmlns:a="http://schemas.openxmlformats.org/drawingml/2006/main">
               <a:ext uri="{FF2B5EF4-FFF2-40B4-BE49-F238E27FC236}">
-                <a16:creationId xmlns:a16="http://schemas.microsoft.com/office/drawing/2014/main" id="{9DA1D119-7990-49A9-9EEC-371B02A403BD}"/>
+                <a16:creationId xmlns:a16="http://schemas.microsoft.com/office/drawing/2014/main" id="{EAFE4271-8B80-466E-A13E-F14401AE01F9}"/>
               </a:ext>
             </a:extLst>
           </p:cNvPr>
@@ -19019,7 +19019,7 @@
           <p:cNvPr id="18" name="route-6">
             <a:extLst xmlns:a="http://schemas.openxmlformats.org/drawingml/2006/main">
               <a:ext uri="{FF2B5EF4-FFF2-40B4-BE49-F238E27FC236}">
-                <a16:creationId xmlns:a16="http://schemas.microsoft.com/office/drawing/2014/main" id="{5C1F649B-A700-4B2A-B309-AD99D14D90E6}"/>
+                <a16:creationId xmlns:a16="http://schemas.microsoft.com/office/drawing/2014/main" id="{BC03F76A-8987-4378-A791-093085C5DDA5}"/>
               </a:ext>
             </a:extLst>
           </p:cNvPr>
@@ -19076,7 +19076,7 @@
           <p:cNvPr id="19" name="route-number-7">
             <a:extLst xmlns:a="http://schemas.openxmlformats.org/drawingml/2006/main">
               <a:ext uri="{FF2B5EF4-FFF2-40B4-BE49-F238E27FC236}">
-                <a16:creationId xmlns:a16="http://schemas.microsoft.com/office/drawing/2014/main" id="{7C22F6D7-43DD-4961-8371-32C46BB04854}"/>
+                <a16:creationId xmlns:a16="http://schemas.microsoft.com/office/drawing/2014/main" id="{6E35429D-A6F7-4986-A415-145DC251EF8E}"/>
               </a:ext>
             </a:extLst>
           </p:cNvPr>
@@ -19133,7 +19133,7 @@
           <p:cNvPr id="20" name="route-7">
             <a:extLst xmlns:a="http://schemas.openxmlformats.org/drawingml/2006/main">
               <a:ext uri="{FF2B5EF4-FFF2-40B4-BE49-F238E27FC236}">
-                <a16:creationId xmlns:a16="http://schemas.microsoft.com/office/drawing/2014/main" id="{627492DC-744C-492C-9822-D5C4A68BD92C}"/>
+                <a16:creationId xmlns:a16="http://schemas.microsoft.com/office/drawing/2014/main" id="{5EB68488-3378-4BB3-845E-7FBAE905A3C6}"/>
               </a:ext>
             </a:extLst>
           </p:cNvPr>
@@ -19190,7 +19190,7 @@
           <p:cNvPr id="21" name="Lesdoelen">
             <a:extLst xmlns:a="http://schemas.openxmlformats.org/drawingml/2006/main">
               <a:ext uri="{FF2B5EF4-FFF2-40B4-BE49-F238E27FC236}">
-                <a16:creationId xmlns:a16="http://schemas.microsoft.com/office/drawing/2014/main" id="{BD3EB903-B863-4802-B1E2-F68973CEFF6D}"/>
+                <a16:creationId xmlns:a16="http://schemas.microsoft.com/office/drawing/2014/main" id="{7C6C74CA-1500-49E9-9792-D06B2F4478EA}"/>
               </a:ext>
             </a:extLst>
           </p:cNvPr>
@@ -19247,7 +19247,7 @@
           <p:cNvPr id="22" name="overview-goals">
             <a:extLst xmlns:a="http://schemas.openxmlformats.org/drawingml/2006/main">
               <a:ext uri="{FF2B5EF4-FFF2-40B4-BE49-F238E27FC236}">
-                <a16:creationId xmlns:a16="http://schemas.microsoft.com/office/drawing/2014/main" id="{7D5E1864-B838-4C21-841C-5DD03543953F}"/>
+                <a16:creationId xmlns:a16="http://schemas.microsoft.com/office/drawing/2014/main" id="{12C00949-6EE9-4F08-9660-79239ACDFD00}"/>
               </a:ext>
             </a:extLst>
           </p:cNvPr>
@@ -19350,7 +19350,7 @@
           <p:cNvPr id="23" name="">
             <a:extLst xmlns:a="http://schemas.openxmlformats.org/drawingml/2006/main">
               <a:ext uri="{FF2B5EF4-FFF2-40B4-BE49-F238E27FC236}">
-                <a16:creationId xmlns:a16="http://schemas.microsoft.com/office/drawing/2014/main" id="{948CDEAD-2AA3-4312-ABB6-DB1F59C96AC7}"/>
+                <a16:creationId xmlns:a16="http://schemas.microsoft.com/office/drawing/2014/main" id="{B7E91ED4-E52E-4BE7-A3DC-EA42475642E8}"/>
               </a:ext>
             </a:extLst>
           </p:cNvPr>
@@ -19379,7 +19379,7 @@
           <p:cNvPr id="24" name="Startopdracht">
             <a:extLst xmlns:a="http://schemas.openxmlformats.org/drawingml/2006/main">
               <a:ext uri="{FF2B5EF4-FFF2-40B4-BE49-F238E27FC236}">
-                <a16:creationId xmlns:a16="http://schemas.microsoft.com/office/drawing/2014/main" id="{6D6CE06C-ED0B-45A8-98D8-0D26C9B0867B}"/>
+                <a16:creationId xmlns:a16="http://schemas.microsoft.com/office/drawing/2014/main" id="{624DCE81-60B3-4EB5-B7FC-13B5BE71342E}"/>
               </a:ext>
             </a:extLst>
           </p:cNvPr>
@@ -19436,7 +19436,7 @@
           <p:cNvPr id="25" name="overview-start">
             <a:extLst xmlns:a="http://schemas.openxmlformats.org/drawingml/2006/main">
               <a:ext uri="{FF2B5EF4-FFF2-40B4-BE49-F238E27FC236}">
-                <a16:creationId xmlns:a16="http://schemas.microsoft.com/office/drawing/2014/main" id="{9C8B962A-6DB0-4AEA-B198-03051AC2506C}"/>
+                <a16:creationId xmlns:a16="http://schemas.microsoft.com/office/drawing/2014/main" id="{F9FF02A7-87FF-4191-9D05-B858C0C8BCFB}"/>
               </a:ext>
             </a:extLst>
           </p:cNvPr>
@@ -19483,7 +19483,7 @@
                 <a:ea typeface="Arial"/>
                 <a:cs typeface="Arial"/>
               </a:rPr>
-              <a:t>Pagina 48 · Opgaven 1 en 2</a:t>
+              <a:t>Pagina 49 · Opgaven 1 en 2</a:t>
             </a:r>
           </a:p>
           <a:p xmlns:a="http://schemas.openxmlformats.org/drawingml/2006/main">
@@ -19506,7 +19506,7 @@
                 <a:ea typeface="Arial"/>
                 <a:cs typeface="Arial"/>
               </a:rPr>
-              <a:t>2a: verkennen, theorie p. 45</a:t>
+              <a:t>2a: verkennen, theorie p. 46</a:t>
             </a:r>
           </a:p>
         </p:txBody>
@@ -19516,7 +19516,7 @@
           <p:cNvPr id="26" name="">
             <a:extLst xmlns:a="http://schemas.openxmlformats.org/drawingml/2006/main">
               <a:ext uri="{FF2B5EF4-FFF2-40B4-BE49-F238E27FC236}">
-                <a16:creationId xmlns:a16="http://schemas.microsoft.com/office/drawing/2014/main" id="{AEC3C1F9-FC72-484E-9847-65533A8A3FC3}"/>
+                <a16:creationId xmlns:a16="http://schemas.microsoft.com/office/drawing/2014/main" id="{88BCBF2C-DE7D-4E83-A829-385F92895601}"/>
               </a:ext>
             </a:extLst>
           </p:cNvPr>
@@ -19545,7 +19545,7 @@
           <p:cNvPr id="27" name="Huiswerk">
             <a:extLst xmlns:a="http://schemas.openxmlformats.org/drawingml/2006/main">
               <a:ext uri="{FF2B5EF4-FFF2-40B4-BE49-F238E27FC236}">
-                <a16:creationId xmlns:a16="http://schemas.microsoft.com/office/drawing/2014/main" id="{AA4AB2E1-E1F7-4581-9127-CFB24CDBB37C}"/>
+                <a16:creationId xmlns:a16="http://schemas.microsoft.com/office/drawing/2014/main" id="{9D2C8F57-4749-4CF7-BCF9-A05968687868}"/>
               </a:ext>
             </a:extLst>
           </p:cNvPr>
@@ -19602,7 +19602,7 @@
           <p:cNvPr id="28" name="overview-homework">
             <a:extLst xmlns:a="http://schemas.openxmlformats.org/drawingml/2006/main">
               <a:ext uri="{FF2B5EF4-FFF2-40B4-BE49-F238E27FC236}">
-                <a16:creationId xmlns:a16="http://schemas.microsoft.com/office/drawing/2014/main" id="{7AAF804B-53D9-4936-B841-B7FE3D0A1A47}"/>
+                <a16:creationId xmlns:a16="http://schemas.microsoft.com/office/drawing/2014/main" id="{3F790D88-EF77-4562-A635-C00DE3045FD1}"/>
               </a:ext>
             </a:extLst>
           </p:cNvPr>
@@ -19749,7 +19749,7 @@
     </p:spTree>
     <p:extLst>
       <p:ext uri="{BB962C8B-B14F-4D97-AF65-F5344CB8AC3E}">
-        <p14:creationId xmlns:p14="http://schemas.microsoft.com/office/powerpoint/2010/main" val="1902993693"/>
+        <p14:creationId xmlns:p14="http://schemas.microsoft.com/office/powerpoint/2010/main" val="16967643"/>
       </p:ext>
     </p:extLst>
   </p:cSld>
@@ -19780,7 +19780,7 @@
           <p:cNvPr id="9" name="KeramiekStudio: prijs en afzet">
             <a:extLst xmlns:a="http://schemas.openxmlformats.org/drawingml/2006/main">
               <a:ext uri="{FF2B5EF4-FFF2-40B4-BE49-F238E27FC236}">
-                <a16:creationId xmlns:a16="http://schemas.microsoft.com/office/drawing/2014/main" id="{2BC804DF-9C4E-4788-9857-1D48DBC9D537}"/>
+                <a16:creationId xmlns:a16="http://schemas.microsoft.com/office/drawing/2014/main" id="{5AC40A0E-420D-4006-A3A3-40CBEED619A3}"/>
               </a:ext>
             </a:extLst>
           </p:cNvPr>
@@ -19837,7 +19837,7 @@
           <p:cNvPr id="2" name="">
             <a:extLst xmlns:a="http://schemas.openxmlformats.org/drawingml/2006/main">
               <a:ext uri="{FF2B5EF4-FFF2-40B4-BE49-F238E27FC236}">
-                <a16:creationId xmlns:a16="http://schemas.microsoft.com/office/drawing/2014/main" id="{B047BD96-ED58-4A93-9679-EEB2D6E6E530}"/>
+                <a16:creationId xmlns:a16="http://schemas.microsoft.com/office/drawing/2014/main" id="{28AB12EE-3498-44FF-B207-1FEA1D1FD22D}"/>
               </a:ext>
             </a:extLst>
           </p:cNvPr>
@@ -19866,7 +19866,7 @@
           <p:cNvPr id="3" name="Uitlegvoorbeeld — niet uit het boek">
             <a:extLst xmlns:a="http://schemas.openxmlformats.org/drawingml/2006/main">
               <a:ext uri="{FF2B5EF4-FFF2-40B4-BE49-F238E27FC236}">
-                <a16:creationId xmlns:a16="http://schemas.microsoft.com/office/drawing/2014/main" id="{EB82C71D-8C8E-4D0F-B766-C9F9C94C88F0}"/>
+                <a16:creationId xmlns:a16="http://schemas.microsoft.com/office/drawing/2014/main" id="{9E16B1AF-FA63-4CC4-8EE1-0FF3D14B0DDE}"/>
               </a:ext>
             </a:extLst>
           </p:cNvPr>
@@ -19923,7 +19923,7 @@
           <p:cNvPr id="4" name="3">
             <a:extLst xmlns:a="http://schemas.openxmlformats.org/drawingml/2006/main">
               <a:ext uri="{FF2B5EF4-FFF2-40B4-BE49-F238E27FC236}">
-                <a16:creationId xmlns:a16="http://schemas.microsoft.com/office/drawing/2014/main" id="{C3B2C2AC-BA20-41EC-B8AE-F18522067813}"/>
+                <a16:creationId xmlns:a16="http://schemas.microsoft.com/office/drawing/2014/main" id="{C4C5A3CC-8E0F-4625-9735-036AD46AFF15}"/>
               </a:ext>
             </a:extLst>
           </p:cNvPr>
@@ -19980,7 +19980,7 @@
           <p:cNvPr id="5" name="Verkochte workshopplaatsen per maand">
             <a:extLst xmlns:a="http://schemas.openxmlformats.org/drawingml/2006/main">
               <a:ext uri="{FF2B5EF4-FFF2-40B4-BE49-F238E27FC236}">
-                <a16:creationId xmlns:a16="http://schemas.microsoft.com/office/drawing/2014/main" id="{541E0621-1039-4EA0-BCE9-EB29041E08B6}"/>
+                <a16:creationId xmlns:a16="http://schemas.microsoft.com/office/drawing/2014/main" id="{F90BBF8D-78E8-4B05-8F04-D57191CB59E4}"/>
               </a:ext>
             </a:extLst>
           </p:cNvPr>
@@ -20282,7 +20282,7 @@
           <p:cNvPr id="7" name="TO = P × Q">
             <a:extLst xmlns:a="http://schemas.openxmlformats.org/drawingml/2006/main">
               <a:ext uri="{FF2B5EF4-FFF2-40B4-BE49-F238E27FC236}">
-                <a16:creationId xmlns:a16="http://schemas.microsoft.com/office/drawing/2014/main" id="{7F605E18-DCF9-4CDA-A359-0496F6C8E2E8}"/>
+                <a16:creationId xmlns:a16="http://schemas.microsoft.com/office/drawing/2014/main" id="{88D1716A-74E7-4682-9994-FB0BBFF29CC8}"/>
               </a:ext>
             </a:extLst>
           </p:cNvPr>
@@ -20339,7 +20339,7 @@
           <p:cNvPr id="8" name="Alle gevraagde plaatsen worden verkocht: Q = Qv.">
             <a:extLst xmlns:a="http://schemas.openxmlformats.org/drawingml/2006/main">
               <a:ext uri="{FF2B5EF4-FFF2-40B4-BE49-F238E27FC236}">
-                <a16:creationId xmlns:a16="http://schemas.microsoft.com/office/drawing/2014/main" id="{36CC5232-CD00-4AD2-9379-403F7377703E}"/>
+                <a16:creationId xmlns:a16="http://schemas.microsoft.com/office/drawing/2014/main" id="{25D9FB64-5079-461C-8229-667DB99CB4EB}"/>
               </a:ext>
             </a:extLst>
           </p:cNvPr>
@@ -20394,7 +20394,7 @@
     </p:spTree>
     <p:extLst>
       <p:ext uri="{BB962C8B-B14F-4D97-AF65-F5344CB8AC3E}">
-        <p14:creationId xmlns:p14="http://schemas.microsoft.com/office/powerpoint/2010/main" val="1426629938"/>
+        <p14:creationId xmlns:p14="http://schemas.microsoft.com/office/powerpoint/2010/main" val="650684917"/>
       </p:ext>
     </p:extLst>
   </p:cSld>
@@ -20425,7 +20425,7 @@
           <p:cNvPr id="12" name="Omzet als oppervlakte">
             <a:extLst xmlns:a="http://schemas.openxmlformats.org/drawingml/2006/main">
               <a:ext uri="{FF2B5EF4-FFF2-40B4-BE49-F238E27FC236}">
-                <a16:creationId xmlns:a16="http://schemas.microsoft.com/office/drawing/2014/main" id="{D6F0F6BD-A786-4662-B976-05CCAFEEAE1F}"/>
+                <a16:creationId xmlns:a16="http://schemas.microsoft.com/office/drawing/2014/main" id="{C703BCEB-8F6E-4876-842F-F9A8388C7183}"/>
               </a:ext>
             </a:extLst>
           </p:cNvPr>
@@ -20482,7 +20482,7 @@
           <p:cNvPr id="2" name="">
             <a:extLst xmlns:a="http://schemas.openxmlformats.org/drawingml/2006/main">
               <a:ext uri="{FF2B5EF4-FFF2-40B4-BE49-F238E27FC236}">
-                <a16:creationId xmlns:a16="http://schemas.microsoft.com/office/drawing/2014/main" id="{2C707924-1F0A-4746-88FA-85E706273C49}"/>
+                <a16:creationId xmlns:a16="http://schemas.microsoft.com/office/drawing/2014/main" id="{659A8A37-8A9A-429D-9FA9-8291D57B2180}"/>
               </a:ext>
             </a:extLst>
           </p:cNvPr>
@@ -20511,7 +20511,7 @@
           <p:cNvPr id="3" name="Uitlegvoorbeeld — niet uit het boek">
             <a:extLst xmlns:a="http://schemas.openxmlformats.org/drawingml/2006/main">
               <a:ext uri="{FF2B5EF4-FFF2-40B4-BE49-F238E27FC236}">
-                <a16:creationId xmlns:a16="http://schemas.microsoft.com/office/drawing/2014/main" id="{77590571-E815-480D-AE70-CC6495162C4C}"/>
+                <a16:creationId xmlns:a16="http://schemas.microsoft.com/office/drawing/2014/main" id="{AB3900F8-80FE-4230-8904-9693CCC9362F}"/>
               </a:ext>
             </a:extLst>
           </p:cNvPr>
@@ -20568,7 +20568,7 @@
           <p:cNvPr id="4" name="4">
             <a:extLst xmlns:a="http://schemas.openxmlformats.org/drawingml/2006/main">
               <a:ext uri="{FF2B5EF4-FFF2-40B4-BE49-F238E27FC236}">
-                <a16:creationId xmlns:a16="http://schemas.microsoft.com/office/drawing/2014/main" id="{D1440AF4-0735-413D-B3BA-789F84105EBE}"/>
+                <a16:creationId xmlns:a16="http://schemas.microsoft.com/office/drawing/2014/main" id="{48A726C8-DCD9-4F55-816A-8C24D4296C82}"/>
               </a:ext>
             </a:extLst>
           </p:cNvPr>
@@ -20625,7 +20625,7 @@
           <p:cNvPr id="5" name="KeramiekStudio: oud P = € 30, Q = 160">
             <a:extLst xmlns:a="http://schemas.openxmlformats.org/drawingml/2006/main">
               <a:ext uri="{FF2B5EF4-FFF2-40B4-BE49-F238E27FC236}">
-                <a16:creationId xmlns:a16="http://schemas.microsoft.com/office/drawing/2014/main" id="{9BCAB47B-AC87-4B69-9B14-42E51E4FB13F}"/>
+                <a16:creationId xmlns:a16="http://schemas.microsoft.com/office/drawing/2014/main" id="{C7C2C2A4-2A77-47CB-9081-E00B2CD8A779}"/>
               </a:ext>
             </a:extLst>
           </p:cNvPr>
@@ -20689,7 +20689,7 @@
         </p:xfrm>
         <a:graphic xmlns:a="http://schemas.openxmlformats.org/drawingml/2006/main">
           <a:graphicData uri="http://schemas.openxmlformats.org/drawingml/2006/chart">
-            <c:chart xmlns:r="http://schemas.openxmlformats.org/officeDocument/2006/relationships" xmlns:c="http://schemas.openxmlformats.org/drawingml/2006/chart" r:id="R3ee3fa3e50a44cf8"/>
+            <c:chart xmlns:r="http://schemas.openxmlformats.org/officeDocument/2006/relationships" xmlns:c="http://schemas.openxmlformats.org/drawingml/2006/chart" r:id="Rb8e4062f770a48fc"/>
           </a:graphicData>
         </a:graphic>
       </p:graphicFrame>
@@ -20698,7 +20698,7 @@
           <p:cNvPr id="7" name="TO oud">
             <a:extLst xmlns:a="http://schemas.openxmlformats.org/drawingml/2006/main">
               <a:ext uri="{FF2B5EF4-FFF2-40B4-BE49-F238E27FC236}">
-                <a16:creationId xmlns:a16="http://schemas.microsoft.com/office/drawing/2014/main" id="{3AFCA4DC-0060-45B8-A600-DEE93B4548A0}"/>
+                <a16:creationId xmlns:a16="http://schemas.microsoft.com/office/drawing/2014/main" id="{CF78E1AC-1B26-4EB2-BD1A-A6D25B0B9DAE}"/>
               </a:ext>
             </a:extLst>
           </p:cNvPr>
@@ -20755,7 +20755,7 @@
           <p:cNvPr id="8" name="30 × 160">
             <a:extLst xmlns:a="http://schemas.openxmlformats.org/drawingml/2006/main">
               <a:ext uri="{FF2B5EF4-FFF2-40B4-BE49-F238E27FC236}">
-                <a16:creationId xmlns:a16="http://schemas.microsoft.com/office/drawing/2014/main" id="{20D523E3-1F43-4886-954B-B419F73446DB}"/>
+                <a16:creationId xmlns:a16="http://schemas.microsoft.com/office/drawing/2014/main" id="{57E31909-F57C-440E-9562-8EF77D3A6974}"/>
               </a:ext>
             </a:extLst>
           </p:cNvPr>
@@ -20812,7 +20812,7 @@
           <p:cNvPr id="9" name="= € 4.800">
             <a:extLst xmlns:a="http://schemas.openxmlformats.org/drawingml/2006/main">
               <a:ext uri="{FF2B5EF4-FFF2-40B4-BE49-F238E27FC236}">
-                <a16:creationId xmlns:a16="http://schemas.microsoft.com/office/drawing/2014/main" id="{771ABDFF-FFE8-4284-9E84-08622933B6BF}"/>
+                <a16:creationId xmlns:a16="http://schemas.microsoft.com/office/drawing/2014/main" id="{52068290-EE3D-4415-AF7A-217C9A2BB1BB}"/>
               </a:ext>
             </a:extLst>
           </p:cNvPr>
@@ -20869,7 +20869,7 @@
           <p:cNvPr id="10" name="per maand">
             <a:extLst xmlns:a="http://schemas.openxmlformats.org/drawingml/2006/main">
               <a:ext uri="{FF2B5EF4-FFF2-40B4-BE49-F238E27FC236}">
-                <a16:creationId xmlns:a16="http://schemas.microsoft.com/office/drawing/2014/main" id="{CC521BA3-D81E-4C2F-9ED3-6C6C63AB3707}"/>
+                <a16:creationId xmlns:a16="http://schemas.microsoft.com/office/drawing/2014/main" id="{CC760A20-55AC-47CA-9FAE-578BE5FA90C5}"/>
               </a:ext>
             </a:extLst>
           </p:cNvPr>
@@ -20926,7 +20926,7 @@
           <p:cNvPr id="11" name="Breedte × hoogte&#10;geeft de omzet.">
             <a:extLst xmlns:a="http://schemas.openxmlformats.org/drawingml/2006/main">
               <a:ext uri="{FF2B5EF4-FFF2-40B4-BE49-F238E27FC236}">
-                <a16:creationId xmlns:a16="http://schemas.microsoft.com/office/drawing/2014/main" id="{E08CAD02-7F0C-43D8-B2F7-F343FCF0434A}"/>
+                <a16:creationId xmlns:a16="http://schemas.microsoft.com/office/drawing/2014/main" id="{AF8FD3F1-2C4C-4BE4-ADB8-727CB227F520}"/>
               </a:ext>
             </a:extLst>
           </p:cNvPr>
@@ -21004,7 +21004,7 @@
     </p:spTree>
     <p:extLst>
       <p:ext uri="{BB962C8B-B14F-4D97-AF65-F5344CB8AC3E}">
-        <p14:creationId xmlns:p14="http://schemas.microsoft.com/office/powerpoint/2010/main" val="1242478242"/>
+        <p14:creationId xmlns:p14="http://schemas.microsoft.com/office/powerpoint/2010/main" val="1195083194"/>
       </p:ext>
     </p:extLst>
   </p:cSld>
@@ -21035,7 +21035,7 @@
           <p:cNvPr id="12" name="De nieuwe omzetrechthoek">
             <a:extLst xmlns:a="http://schemas.openxmlformats.org/drawingml/2006/main">
               <a:ext uri="{FF2B5EF4-FFF2-40B4-BE49-F238E27FC236}">
-                <a16:creationId xmlns:a16="http://schemas.microsoft.com/office/drawing/2014/main" id="{71BFB8C7-A873-4A9B-A948-00B9BF5DD783}"/>
+                <a16:creationId xmlns:a16="http://schemas.microsoft.com/office/drawing/2014/main" id="{20754814-7F62-438D-9DF2-16BD69215E45}"/>
               </a:ext>
             </a:extLst>
           </p:cNvPr>
@@ -21092,7 +21092,7 @@
           <p:cNvPr id="2" name="">
             <a:extLst xmlns:a="http://schemas.openxmlformats.org/drawingml/2006/main">
               <a:ext uri="{FF2B5EF4-FFF2-40B4-BE49-F238E27FC236}">
-                <a16:creationId xmlns:a16="http://schemas.microsoft.com/office/drawing/2014/main" id="{212090A3-1379-4718-BF97-983F6A9D7603}"/>
+                <a16:creationId xmlns:a16="http://schemas.microsoft.com/office/drawing/2014/main" id="{F80454AA-A9DB-46BA-9C5D-FC4FEA17FA76}"/>
               </a:ext>
             </a:extLst>
           </p:cNvPr>
@@ -21121,7 +21121,7 @@
           <p:cNvPr id="3" name="Uitlegvoorbeeld — niet uit het boek">
             <a:extLst xmlns:a="http://schemas.openxmlformats.org/drawingml/2006/main">
               <a:ext uri="{FF2B5EF4-FFF2-40B4-BE49-F238E27FC236}">
-                <a16:creationId xmlns:a16="http://schemas.microsoft.com/office/drawing/2014/main" id="{F7CA6CAB-A1FA-44CF-9CE5-06C18B3F201A}"/>
+                <a16:creationId xmlns:a16="http://schemas.microsoft.com/office/drawing/2014/main" id="{4F2846B3-2C4D-4192-86C5-B4E710DE4963}"/>
               </a:ext>
             </a:extLst>
           </p:cNvPr>
@@ -21178,7 +21178,7 @@
           <p:cNvPr id="4" name="5">
             <a:extLst xmlns:a="http://schemas.openxmlformats.org/drawingml/2006/main">
               <a:ext uri="{FF2B5EF4-FFF2-40B4-BE49-F238E27FC236}">
-                <a16:creationId xmlns:a16="http://schemas.microsoft.com/office/drawing/2014/main" id="{D5851D74-86A9-4101-BFEA-912D2E107573}"/>
+                <a16:creationId xmlns:a16="http://schemas.microsoft.com/office/drawing/2014/main" id="{536A37E9-456D-4E67-AEA2-E755F46E0452}"/>
               </a:ext>
             </a:extLst>
           </p:cNvPr>
@@ -21235,7 +21235,7 @@
           <p:cNvPr id="5" name="KeramiekStudio: oud gestreept, nieuw groen">
             <a:extLst xmlns:a="http://schemas.openxmlformats.org/drawingml/2006/main">
               <a:ext uri="{FF2B5EF4-FFF2-40B4-BE49-F238E27FC236}">
-                <a16:creationId xmlns:a16="http://schemas.microsoft.com/office/drawing/2014/main" id="{6D460271-2C5C-407E-8C12-672C22CBA833}"/>
+                <a16:creationId xmlns:a16="http://schemas.microsoft.com/office/drawing/2014/main" id="{9A195664-9F00-4AA3-9711-A32B2E947560}"/>
               </a:ext>
             </a:extLst>
           </p:cNvPr>
@@ -21299,7 +21299,7 @@
         </p:xfrm>
         <a:graphic xmlns:a="http://schemas.openxmlformats.org/drawingml/2006/main">
           <a:graphicData uri="http://schemas.openxmlformats.org/drawingml/2006/chart">
-            <c:chart xmlns:r="http://schemas.openxmlformats.org/officeDocument/2006/relationships" xmlns:c="http://schemas.openxmlformats.org/drawingml/2006/chart" r:id="R0d5c9a88d43d4299"/>
+            <c:chart xmlns:r="http://schemas.openxmlformats.org/officeDocument/2006/relationships" xmlns:c="http://schemas.openxmlformats.org/drawingml/2006/chart" r:id="Rda1072be304d4653"/>
           </a:graphicData>
         </a:graphic>
       </p:graphicFrame>
@@ -21308,7 +21308,7 @@
           <p:cNvPr id="7" name="TO nieuw">
             <a:extLst xmlns:a="http://schemas.openxmlformats.org/drawingml/2006/main">
               <a:ext uri="{FF2B5EF4-FFF2-40B4-BE49-F238E27FC236}">
-                <a16:creationId xmlns:a16="http://schemas.microsoft.com/office/drawing/2014/main" id="{960AFA3F-211F-4EBA-8C79-FB3AF55B17D0}"/>
+                <a16:creationId xmlns:a16="http://schemas.microsoft.com/office/drawing/2014/main" id="{D351F3FD-6B5B-4EA2-B6B2-0B65F9718109}"/>
               </a:ext>
             </a:extLst>
           </p:cNvPr>
@@ -21365,7 +21365,7 @@
           <p:cNvPr id="8" name="33 × 152">
             <a:extLst xmlns:a="http://schemas.openxmlformats.org/drawingml/2006/main">
               <a:ext uri="{FF2B5EF4-FFF2-40B4-BE49-F238E27FC236}">
-                <a16:creationId xmlns:a16="http://schemas.microsoft.com/office/drawing/2014/main" id="{7FC76874-6DAA-4B16-9303-C07FEA2F5115}"/>
+                <a16:creationId xmlns:a16="http://schemas.microsoft.com/office/drawing/2014/main" id="{DA4F5B70-4281-43FD-BEC0-B0E3A9B48ED3}"/>
               </a:ext>
             </a:extLst>
           </p:cNvPr>
@@ -21422,7 +21422,7 @@
           <p:cNvPr id="9" name="= € 5.016">
             <a:extLst xmlns:a="http://schemas.openxmlformats.org/drawingml/2006/main">
               <a:ext uri="{FF2B5EF4-FFF2-40B4-BE49-F238E27FC236}">
-                <a16:creationId xmlns:a16="http://schemas.microsoft.com/office/drawing/2014/main" id="{D5EB734D-5ADC-4495-84B9-45796315EE09}"/>
+                <a16:creationId xmlns:a16="http://schemas.microsoft.com/office/drawing/2014/main" id="{69E9A173-89F4-46F7-B5FD-BE9F373073FF}"/>
               </a:ext>
             </a:extLst>
           </p:cNvPr>
@@ -21479,7 +21479,7 @@
           <p:cNvPr id="10" name="per maand">
             <a:extLst xmlns:a="http://schemas.openxmlformats.org/drawingml/2006/main">
               <a:ext uri="{FF2B5EF4-FFF2-40B4-BE49-F238E27FC236}">
-                <a16:creationId xmlns:a16="http://schemas.microsoft.com/office/drawing/2014/main" id="{7B11C946-0DA7-4EEA-AEFF-5C9D6B558B17}"/>
+                <a16:creationId xmlns:a16="http://schemas.microsoft.com/office/drawing/2014/main" id="{3472FBD3-BA5A-4407-B63F-B6C139BB0D62}"/>
               </a:ext>
             </a:extLst>
           </p:cNvPr>
@@ -21536,7 +21536,7 @@
           <p:cNvPr id="11" name="Hoger én smaller.&#10;De oppervlakte&#10;wordt groter.">
             <a:extLst xmlns:a="http://schemas.openxmlformats.org/drawingml/2006/main">
               <a:ext uri="{FF2B5EF4-FFF2-40B4-BE49-F238E27FC236}">
-                <a16:creationId xmlns:a16="http://schemas.microsoft.com/office/drawing/2014/main" id="{50F70F1F-1EF5-4972-8C10-1E6A2DB554C1}"/>
+                <a16:creationId xmlns:a16="http://schemas.microsoft.com/office/drawing/2014/main" id="{D5F39A27-339D-49CD-8589-9BBB5066B01A}"/>
               </a:ext>
             </a:extLst>
           </p:cNvPr>
@@ -21637,7 +21637,7 @@
     </p:spTree>
     <p:extLst>
       <p:ext uri="{BB962C8B-B14F-4D97-AF65-F5344CB8AC3E}">
-        <p14:creationId xmlns:p14="http://schemas.microsoft.com/office/powerpoint/2010/main" val="168627242"/>
+        <p14:creationId xmlns:p14="http://schemas.microsoft.com/office/powerpoint/2010/main" val="972030383"/>
       </p:ext>
     </p:extLst>
   </p:cSld>
@@ -21668,7 +21668,7 @@
           <p:cNvPr id="10" name="De procentuele omzetverandering">
             <a:extLst xmlns:a="http://schemas.openxmlformats.org/drawingml/2006/main">
               <a:ext uri="{FF2B5EF4-FFF2-40B4-BE49-F238E27FC236}">
-                <a16:creationId xmlns:a16="http://schemas.microsoft.com/office/drawing/2014/main" id="{036F5682-076D-448A-A5B0-A507DCAE6D2C}"/>
+                <a16:creationId xmlns:a16="http://schemas.microsoft.com/office/drawing/2014/main" id="{1344C4CE-F563-452E-98E4-306B632755B3}"/>
               </a:ext>
             </a:extLst>
           </p:cNvPr>
@@ -21725,7 +21725,7 @@
           <p:cNvPr id="2" name="">
             <a:extLst xmlns:a="http://schemas.openxmlformats.org/drawingml/2006/main">
               <a:ext uri="{FF2B5EF4-FFF2-40B4-BE49-F238E27FC236}">
-                <a16:creationId xmlns:a16="http://schemas.microsoft.com/office/drawing/2014/main" id="{2EB8FF9C-0ACE-48D6-8024-90A1511C3A91}"/>
+                <a16:creationId xmlns:a16="http://schemas.microsoft.com/office/drawing/2014/main" id="{AD2EDF24-A9E3-459D-8E7C-2E557EED3E8C}"/>
               </a:ext>
             </a:extLst>
           </p:cNvPr>
@@ -21754,7 +21754,7 @@
           <p:cNvPr id="3" name="Uitlegvoorbeeld — niet uit het boek">
             <a:extLst xmlns:a="http://schemas.openxmlformats.org/drawingml/2006/main">
               <a:ext uri="{FF2B5EF4-FFF2-40B4-BE49-F238E27FC236}">
-                <a16:creationId xmlns:a16="http://schemas.microsoft.com/office/drawing/2014/main" id="{5AC1D407-4770-4B0D-B8C9-454266D599A3}"/>
+                <a16:creationId xmlns:a16="http://schemas.microsoft.com/office/drawing/2014/main" id="{71B9A547-BF55-418E-8E5B-6C8E43130154}"/>
               </a:ext>
             </a:extLst>
           </p:cNvPr>
@@ -21811,7 +21811,7 @@
           <p:cNvPr id="4" name="6">
             <a:extLst xmlns:a="http://schemas.openxmlformats.org/drawingml/2006/main">
               <a:ext uri="{FF2B5EF4-FFF2-40B4-BE49-F238E27FC236}">
-                <a16:creationId xmlns:a16="http://schemas.microsoft.com/office/drawing/2014/main" id="{E0E18A65-2DC4-45BB-B300-8C3DE86A76D2}"/>
+                <a16:creationId xmlns:a16="http://schemas.microsoft.com/office/drawing/2014/main" id="{D940952E-8B41-428B-A220-FEFA1E858DC6}"/>
               </a:ext>
             </a:extLst>
           </p:cNvPr>
@@ -21868,7 +21868,7 @@
           <p:cNvPr id="5" name="KeramiekStudio: € 4.800 naar € 5.016 per maand">
             <a:extLst xmlns:a="http://schemas.openxmlformats.org/drawingml/2006/main">
               <a:ext uri="{FF2B5EF4-FFF2-40B4-BE49-F238E27FC236}">
-                <a16:creationId xmlns:a16="http://schemas.microsoft.com/office/drawing/2014/main" id="{C265B642-62DE-4392-8E46-6DE0137B8106}"/>
+                <a16:creationId xmlns:a16="http://schemas.microsoft.com/office/drawing/2014/main" id="{200116A8-E287-4BBC-A50E-AE08EE1372D1}"/>
               </a:ext>
             </a:extLst>
           </p:cNvPr>
@@ -21925,7 +21925,7 @@
           <p:cNvPr id="6" name="%ΔTO = (TO nieuw − TO oud) / TO oud × 100%">
             <a:extLst xmlns:a="http://schemas.openxmlformats.org/drawingml/2006/main">
               <a:ext uri="{FF2B5EF4-FFF2-40B4-BE49-F238E27FC236}">
-                <a16:creationId xmlns:a16="http://schemas.microsoft.com/office/drawing/2014/main" id="{485E557A-674B-49C4-B61B-800C744F65AC}"/>
+                <a16:creationId xmlns:a16="http://schemas.microsoft.com/office/drawing/2014/main" id="{6A7348CF-1102-41A1-97E3-AEB44BB773FD}"/>
               </a:ext>
             </a:extLst>
           </p:cNvPr>
@@ -21982,7 +21982,7 @@
           <p:cNvPr id="7" name="= (5.016 − 4.800) / 4.800 × 100%">
             <a:extLst xmlns:a="http://schemas.openxmlformats.org/drawingml/2006/main">
               <a:ext uri="{FF2B5EF4-FFF2-40B4-BE49-F238E27FC236}">
-                <a16:creationId xmlns:a16="http://schemas.microsoft.com/office/drawing/2014/main" id="{0577E1CC-9DDB-4F9C-AF72-43236CA6CD5A}"/>
+                <a16:creationId xmlns:a16="http://schemas.microsoft.com/office/drawing/2014/main" id="{E8359603-7FB8-4A1E-A0BC-A87630090AF0}"/>
               </a:ext>
             </a:extLst>
           </p:cNvPr>
@@ -22039,7 +22039,7 @@
           <p:cNvPr id="8" name="= +4,5%">
             <a:extLst xmlns:a="http://schemas.openxmlformats.org/drawingml/2006/main">
               <a:ext uri="{FF2B5EF4-FFF2-40B4-BE49-F238E27FC236}">
-                <a16:creationId xmlns:a16="http://schemas.microsoft.com/office/drawing/2014/main" id="{21733B2E-F6AC-4BE3-9603-223C929A8ABB}"/>
+                <a16:creationId xmlns:a16="http://schemas.microsoft.com/office/drawing/2014/main" id="{793021E9-009A-4BA3-BFE4-6DC47CFFD9DC}"/>
               </a:ext>
             </a:extLst>
           </p:cNvPr>
@@ -22096,7 +22096,7 @@
           <p:cNvPr id="9" name="€ 216 extra omzet, vergeleken met de oude € 4.800.">
             <a:extLst xmlns:a="http://schemas.openxmlformats.org/drawingml/2006/main">
               <a:ext uri="{FF2B5EF4-FFF2-40B4-BE49-F238E27FC236}">
-                <a16:creationId xmlns:a16="http://schemas.microsoft.com/office/drawing/2014/main" id="{33AA3CD3-1C58-4120-8EA2-7A7031CD267E}"/>
+                <a16:creationId xmlns:a16="http://schemas.microsoft.com/office/drawing/2014/main" id="{7FF105F5-6062-4911-90E0-03B7EB1589E8}"/>
               </a:ext>
             </a:extLst>
           </p:cNvPr>
@@ -22151,7 +22151,7 @@
     </p:spTree>
     <p:extLst>
       <p:ext uri="{BB962C8B-B14F-4D97-AF65-F5344CB8AC3E}">
-        <p14:creationId xmlns:p14="http://schemas.microsoft.com/office/powerpoint/2010/main" val="2043411058"/>
+        <p14:creationId xmlns:p14="http://schemas.microsoft.com/office/powerpoint/2010/main" val="2009026833"/>
       </p:ext>
     </p:extLst>
   </p:cSld>
@@ -22182,7 +22182,7 @@
           <p:cNvPr id="9" name="Een relatief zwakke hoeveelheidsreactie">
             <a:extLst xmlns:a="http://schemas.openxmlformats.org/drawingml/2006/main">
               <a:ext uri="{FF2B5EF4-FFF2-40B4-BE49-F238E27FC236}">
-                <a16:creationId xmlns:a16="http://schemas.microsoft.com/office/drawing/2014/main" id="{93BC43A6-9777-46AD-8775-83A1469C1A13}"/>
+                <a16:creationId xmlns:a16="http://schemas.microsoft.com/office/drawing/2014/main" id="{DA96961E-760A-46A2-8C0D-A748FD614556}"/>
               </a:ext>
             </a:extLst>
           </p:cNvPr>
@@ -22239,7 +22239,7 @@
           <p:cNvPr id="2" name="">
             <a:extLst xmlns:a="http://schemas.openxmlformats.org/drawingml/2006/main">
               <a:ext uri="{FF2B5EF4-FFF2-40B4-BE49-F238E27FC236}">
-                <a16:creationId xmlns:a16="http://schemas.microsoft.com/office/drawing/2014/main" id="{047BD704-9CE8-4DAC-9C69-A1426C6C5D4D}"/>
+                <a16:creationId xmlns:a16="http://schemas.microsoft.com/office/drawing/2014/main" id="{37DB7E53-3FC2-484F-8D50-3ABBE592E2B1}"/>
               </a:ext>
             </a:extLst>
           </p:cNvPr>
@@ -22268,7 +22268,7 @@
           <p:cNvPr id="3" name="Uitlegvoorbeeld — niet uit het boek">
             <a:extLst xmlns:a="http://schemas.openxmlformats.org/drawingml/2006/main">
               <a:ext uri="{FF2B5EF4-FFF2-40B4-BE49-F238E27FC236}">
-                <a16:creationId xmlns:a16="http://schemas.microsoft.com/office/drawing/2014/main" id="{A2A6437C-4C35-4AA7-BF04-1F6C6C22D2BE}"/>
+                <a16:creationId xmlns:a16="http://schemas.microsoft.com/office/drawing/2014/main" id="{2DC48681-7DCA-4028-9C70-BFB28499C4E1}"/>
               </a:ext>
             </a:extLst>
           </p:cNvPr>
@@ -22325,7 +22325,7 @@
           <p:cNvPr id="4" name="7">
             <a:extLst xmlns:a="http://schemas.openxmlformats.org/drawingml/2006/main">
               <a:ext uri="{FF2B5EF4-FFF2-40B4-BE49-F238E27FC236}">
-                <a16:creationId xmlns:a16="http://schemas.microsoft.com/office/drawing/2014/main" id="{0EAA8529-5A4F-42D2-95B7-869E70824353}"/>
+                <a16:creationId xmlns:a16="http://schemas.microsoft.com/office/drawing/2014/main" id="{27DD77D7-E47C-4BD8-96B4-62E154361D28}"/>
               </a:ext>
             </a:extLst>
           </p:cNvPr>
@@ -22554,7 +22554,7 @@
           <p:cNvPr id="6" name="Ev = −5% / +10% = −0,5">
             <a:extLst xmlns:a="http://schemas.openxmlformats.org/drawingml/2006/main">
               <a:ext uri="{FF2B5EF4-FFF2-40B4-BE49-F238E27FC236}">
-                <a16:creationId xmlns:a16="http://schemas.microsoft.com/office/drawing/2014/main" id="{17C19073-C953-4040-9BDB-F7B1D3A563D5}"/>
+                <a16:creationId xmlns:a16="http://schemas.microsoft.com/office/drawing/2014/main" id="{2DD7DB2D-0A61-4636-A4A4-684027C93CCC}"/>
               </a:ext>
             </a:extLst>
           </p:cNvPr>
@@ -22611,7 +22611,7 @@
           <p:cNvPr id="7" name="−1 &lt; −0,5 &lt; 0: prijsinelastische vraag">
             <a:extLst xmlns:a="http://schemas.openxmlformats.org/drawingml/2006/main">
               <a:ext uri="{FF2B5EF4-FFF2-40B4-BE49-F238E27FC236}">
-                <a16:creationId xmlns:a16="http://schemas.microsoft.com/office/drawing/2014/main" id="{29E98340-6591-46DC-9BEC-9280592A86D9}"/>
+                <a16:creationId xmlns:a16="http://schemas.microsoft.com/office/drawing/2014/main" id="{B08325BA-29A9-40FB-BE44-131E77D82150}"/>
               </a:ext>
             </a:extLst>
           </p:cNvPr>
@@ -22668,7 +22668,7 @@
           <p:cNvPr id="8" name="In deze meting stijgt TO met 4,5%.">
             <a:extLst xmlns:a="http://schemas.openxmlformats.org/drawingml/2006/main">
               <a:ext uri="{FF2B5EF4-FFF2-40B4-BE49-F238E27FC236}">
-                <a16:creationId xmlns:a16="http://schemas.microsoft.com/office/drawing/2014/main" id="{663090D3-3696-4AA8-BD38-CA3B77087A85}"/>
+                <a16:creationId xmlns:a16="http://schemas.microsoft.com/office/drawing/2014/main" id="{D03C04B4-8CBB-4E1F-9D05-BB2C6105F240}"/>
               </a:ext>
             </a:extLst>
           </p:cNvPr>
@@ -22723,7 +22723,7 @@
     </p:spTree>
     <p:extLst>
       <p:ext uri="{BB962C8B-B14F-4D97-AF65-F5344CB8AC3E}">
-        <p14:creationId xmlns:p14="http://schemas.microsoft.com/office/powerpoint/2010/main" val="2097547548"/>
+        <p14:creationId xmlns:p14="http://schemas.microsoft.com/office/powerpoint/2010/main" val="907832560"/>
       </p:ext>
     </p:extLst>
   </p:cSld>
@@ -22754,7 +22754,7 @@
           <p:cNvPr id="8" name="KajakStek: minder verhuringen">
             <a:extLst xmlns:a="http://schemas.openxmlformats.org/drawingml/2006/main">
               <a:ext uri="{FF2B5EF4-FFF2-40B4-BE49-F238E27FC236}">
-                <a16:creationId xmlns:a16="http://schemas.microsoft.com/office/drawing/2014/main" id="{FF731F58-19FE-40A9-810C-5D3F9B1D0F1A}"/>
+                <a16:creationId xmlns:a16="http://schemas.microsoft.com/office/drawing/2014/main" id="{853F468E-765B-4046-BA68-4EC7C5BB599A}"/>
               </a:ext>
             </a:extLst>
           </p:cNvPr>
@@ -22811,7 +22811,7 @@
           <p:cNvPr id="2" name="">
             <a:extLst xmlns:a="http://schemas.openxmlformats.org/drawingml/2006/main">
               <a:ext uri="{FF2B5EF4-FFF2-40B4-BE49-F238E27FC236}">
-                <a16:creationId xmlns:a16="http://schemas.microsoft.com/office/drawing/2014/main" id="{E443F5C8-51D2-4315-B30F-7E2C8D8596C6}"/>
+                <a16:creationId xmlns:a16="http://schemas.microsoft.com/office/drawing/2014/main" id="{2920B234-D486-4012-B1B8-28E810BDD7F7}"/>
               </a:ext>
             </a:extLst>
           </p:cNvPr>
@@ -22840,7 +22840,7 @@
           <p:cNvPr id="3" name="Uitlegvoorbeeld — niet uit het boek">
             <a:extLst xmlns:a="http://schemas.openxmlformats.org/drawingml/2006/main">
               <a:ext uri="{FF2B5EF4-FFF2-40B4-BE49-F238E27FC236}">
-                <a16:creationId xmlns:a16="http://schemas.microsoft.com/office/drawing/2014/main" id="{7A5479EA-27B7-4A91-AE36-D6EF02530A9F}"/>
+                <a16:creationId xmlns:a16="http://schemas.microsoft.com/office/drawing/2014/main" id="{64E9F3E7-994E-4760-8BAB-894F6341ADBB}"/>
               </a:ext>
             </a:extLst>
           </p:cNvPr>
@@ -22897,7 +22897,7 @@
           <p:cNvPr id="4" name="8">
             <a:extLst xmlns:a="http://schemas.openxmlformats.org/drawingml/2006/main">
               <a:ext uri="{FF2B5EF4-FFF2-40B4-BE49-F238E27FC236}">
-                <a16:creationId xmlns:a16="http://schemas.microsoft.com/office/drawing/2014/main" id="{F0663DDD-35EE-4E6D-85E5-42D784763B76}"/>
+                <a16:creationId xmlns:a16="http://schemas.microsoft.com/office/drawing/2014/main" id="{5E65898F-75EC-4682-850C-9A59EAAD49F9}"/>
               </a:ext>
             </a:extLst>
           </p:cNvPr>
@@ -22954,7 +22954,7 @@
           <p:cNvPr id="5" name="Alle gevraagde kajaks worden verhuurd.">
             <a:extLst xmlns:a="http://schemas.openxmlformats.org/drawingml/2006/main">
               <a:ext uri="{FF2B5EF4-FFF2-40B4-BE49-F238E27FC236}">
-                <a16:creationId xmlns:a16="http://schemas.microsoft.com/office/drawing/2014/main" id="{FF082D65-5233-4059-91A2-FF11588C1587}"/>
+                <a16:creationId xmlns:a16="http://schemas.microsoft.com/office/drawing/2014/main" id="{03E1EE3E-33F3-42C4-ACA9-9151000B42B8}"/>
               </a:ext>
             </a:extLst>
           </p:cNvPr>
@@ -23329,7 +23329,7 @@
           <p:cNvPr id="7" name="TO daalt met € 800 per week.">
             <a:extLst xmlns:a="http://schemas.openxmlformats.org/drawingml/2006/main">
               <a:ext uri="{FF2B5EF4-FFF2-40B4-BE49-F238E27FC236}">
-                <a16:creationId xmlns:a16="http://schemas.microsoft.com/office/drawing/2014/main" id="{95A19E31-8B4E-49FE-BE91-DA4B46F230B0}"/>
+                <a16:creationId xmlns:a16="http://schemas.microsoft.com/office/drawing/2014/main" id="{702C56A2-03EF-4316-A926-7B52F14B2CCB}"/>
               </a:ext>
             </a:extLst>
           </p:cNvPr>
@@ -23384,7 +23384,7 @@
     </p:spTree>
     <p:extLst>
       <p:ext uri="{BB962C8B-B14F-4D97-AF65-F5344CB8AC3E}">
-        <p14:creationId xmlns:p14="http://schemas.microsoft.com/office/powerpoint/2010/main" val="1263211422"/>
+        <p14:creationId xmlns:p14="http://schemas.microsoft.com/office/powerpoint/2010/main" val="1418882601"/>
       </p:ext>
     </p:extLst>
   </p:cSld>
@@ -23415,7 +23415,7 @@
           <p:cNvPr id="9" name="Een relatief sterke hoeveelheidsreactie">
             <a:extLst xmlns:a="http://schemas.openxmlformats.org/drawingml/2006/main">
               <a:ext uri="{FF2B5EF4-FFF2-40B4-BE49-F238E27FC236}">
-                <a16:creationId xmlns:a16="http://schemas.microsoft.com/office/drawing/2014/main" id="{CB59A69A-81CB-4231-8B02-D1821D001CAF}"/>
+                <a16:creationId xmlns:a16="http://schemas.microsoft.com/office/drawing/2014/main" id="{93361E06-AE78-4B43-9124-B0E4FB351E1F}"/>
               </a:ext>
             </a:extLst>
           </p:cNvPr>
@@ -23472,7 +23472,7 @@
           <p:cNvPr id="2" name="">
             <a:extLst xmlns:a="http://schemas.openxmlformats.org/drawingml/2006/main">
               <a:ext uri="{FF2B5EF4-FFF2-40B4-BE49-F238E27FC236}">
-                <a16:creationId xmlns:a16="http://schemas.microsoft.com/office/drawing/2014/main" id="{F612CADC-620B-4F84-ACDA-F966518B1261}"/>
+                <a16:creationId xmlns:a16="http://schemas.microsoft.com/office/drawing/2014/main" id="{4C72838A-E043-4A2B-BFA0-76B89F77E858}"/>
               </a:ext>
             </a:extLst>
           </p:cNvPr>
@@ -23501,7 +23501,7 @@
           <p:cNvPr id="3" name="Uitlegvoorbeeld — niet uit het boek">
             <a:extLst xmlns:a="http://schemas.openxmlformats.org/drawingml/2006/main">
               <a:ext uri="{FF2B5EF4-FFF2-40B4-BE49-F238E27FC236}">
-                <a16:creationId xmlns:a16="http://schemas.microsoft.com/office/drawing/2014/main" id="{5E050C57-F919-4B33-BA47-F21B083AB405}"/>
+                <a16:creationId xmlns:a16="http://schemas.microsoft.com/office/drawing/2014/main" id="{680A3D7D-CBBE-42AA-8DBE-3960F3E23F83}"/>
               </a:ext>
             </a:extLst>
           </p:cNvPr>
@@ -23558,7 +23558,7 @@
           <p:cNvPr id="4" name="9">
             <a:extLst xmlns:a="http://schemas.openxmlformats.org/drawingml/2006/main">
               <a:ext uri="{FF2B5EF4-FFF2-40B4-BE49-F238E27FC236}">
-                <a16:creationId xmlns:a16="http://schemas.microsoft.com/office/drawing/2014/main" id="{01235F46-45E6-4230-8F72-78BA14448A1F}"/>
+                <a16:creationId xmlns:a16="http://schemas.microsoft.com/office/drawing/2014/main" id="{8FD304C7-6A46-4E63-888F-7D9907CD4ABE}"/>
               </a:ext>
             </a:extLst>
           </p:cNvPr>
@@ -23615,7 +23615,7 @@
           <p:cNvPr id="5" name="KajakStek: € 5.000 naar € 4.200 per week">
             <a:extLst xmlns:a="http://schemas.openxmlformats.org/drawingml/2006/main">
               <a:ext uri="{FF2B5EF4-FFF2-40B4-BE49-F238E27FC236}">
-                <a16:creationId xmlns:a16="http://schemas.microsoft.com/office/drawing/2014/main" id="{B3599561-CA05-4101-84A7-2B7F95B9E4FC}"/>
+                <a16:creationId xmlns:a16="http://schemas.microsoft.com/office/drawing/2014/main" id="{15C0640A-2C69-4D4E-9C62-31B1BF177C68}"/>
               </a:ext>
             </a:extLst>
           </p:cNvPr>
@@ -23672,7 +23672,7 @@
           <p:cNvPr id="6" name="%ΔTO = (4.200 − 5.000) / 5.000 × 100% = −16%">
             <a:extLst xmlns:a="http://schemas.openxmlformats.org/drawingml/2006/main">
               <a:ext uri="{FF2B5EF4-FFF2-40B4-BE49-F238E27FC236}">
-                <a16:creationId xmlns:a16="http://schemas.microsoft.com/office/drawing/2014/main" id="{F8D4ECE5-B88C-41C8-825D-2255497B935C}"/>
+                <a16:creationId xmlns:a16="http://schemas.microsoft.com/office/drawing/2014/main" id="{8BA823CA-8BC3-4393-A217-3E93D2B171E1}"/>
               </a:ext>
             </a:extLst>
           </p:cNvPr>
@@ -23900,7 +23900,7 @@
           <p:cNvPr id="8" name="Ev &lt; −1: prijselastisch. TO daalt in deze meting.">
             <a:extLst xmlns:a="http://schemas.openxmlformats.org/drawingml/2006/main">
               <a:ext uri="{FF2B5EF4-FFF2-40B4-BE49-F238E27FC236}">
-                <a16:creationId xmlns:a16="http://schemas.microsoft.com/office/drawing/2014/main" id="{BD1AE401-AD06-4F3D-850A-8E6D51BD1E4F}"/>
+                <a16:creationId xmlns:a16="http://schemas.microsoft.com/office/drawing/2014/main" id="{D83E977F-0F29-4478-9007-1CD1C204A08A}"/>
               </a:ext>
             </a:extLst>
           </p:cNvPr>
@@ -23955,7 +23955,7 @@
     </p:spTree>
     <p:extLst>
       <p:ext uri="{BB962C8B-B14F-4D97-AF65-F5344CB8AC3E}">
-        <p14:creationId xmlns:p14="http://schemas.microsoft.com/office/powerpoint/2010/main" val="398715458"/>
+        <p14:creationId xmlns:p14="http://schemas.microsoft.com/office/powerpoint/2010/main" val="1702466575"/>
       </p:ext>
     </p:extLst>
   </p:cSld>
